--- a/PPTs/Ch5_ARM_Load_Store_Exercises_ANS.pptx
+++ b/PPTs/Ch5_ARM_Load_Store_Exercises_ANS.pptx
@@ -5,10 +5,10 @@
     <p:sldMasterId id="2147483686" r:id="rId1"/>
   </p:sldMasterIdLst>
   <p:notesMasterIdLst>
-    <p:notesMasterId r:id="rId32"/>
+    <p:notesMasterId r:id="rId33"/>
   </p:notesMasterIdLst>
   <p:handoutMasterIdLst>
-    <p:handoutMasterId r:id="rId33"/>
+    <p:handoutMasterId r:id="rId34"/>
   </p:handoutMasterIdLst>
   <p:sldIdLst>
     <p:sldId id="385" r:id="rId2"/>
@@ -41,6 +41,7 @@
     <p:sldId id="803" r:id="rId29"/>
     <p:sldId id="805" r:id="rId30"/>
     <p:sldId id="806" r:id="rId31"/>
+    <p:sldId id="815" r:id="rId32"/>
   </p:sldIdLst>
   <p:sldSz cx="9144000" cy="6858000" type="screen4x3"/>
   <p:notesSz cx="9296400" cy="7010400"/>
@@ -225,7 +226,7 @@
 <file path=ppt/revisionInfo.xml><?xml version="1.0" encoding="utf-8"?>
 <p1510:revInfo xmlns:a="http://schemas.openxmlformats.org/drawingml/2006/main" xmlns:r="http://schemas.openxmlformats.org/officeDocument/2006/relationships" xmlns:p1510="http://schemas.microsoft.com/office/powerpoint/2015/10/main">
   <p1510:revLst>
-    <p1510:client id="{95D25279-C3AD-4B13-92A2-4AC656D27A67}" v="254" dt="2025-10-08T02:01:36.758"/>
+    <p1510:client id="{95D25279-C3AD-4B13-92A2-4AC656D27A67}" v="288" dt="2025-10-16T21:43:40.608"/>
   </p1510:revLst>
 </p1510:revInfo>
 </file>
@@ -235,7 +236,7 @@
   <pc:docChgLst>
     <pc:chgData name="Zonghua Gu" userId="9a7e1853e1951ef5" providerId="LiveId" clId="{CF1FAA12-072C-4ED5-BA76-0FFFAEFDB88A}"/>
     <pc:docChg chg="undo custSel addSld delSld modSld sldOrd modNotesMaster modHandout">
-      <pc:chgData name="Zonghua Gu" userId="9a7e1853e1951ef5" providerId="LiveId" clId="{CF1FAA12-072C-4ED5-BA76-0FFFAEFDB88A}" dt="2025-10-08T02:01:37.956" v="1673" actId="47"/>
+      <pc:chgData name="Zonghua Gu" userId="9a7e1853e1951ef5" providerId="LiveId" clId="{CF1FAA12-072C-4ED5-BA76-0FFFAEFDB88A}" dt="2025-10-16T21:52:38.531" v="2111" actId="47"/>
       <pc:docMkLst>
         <pc:docMk/>
       </pc:docMkLst>
@@ -1646,14 +1647,6 @@
           <pc:docMk/>
           <pc:sldMk cId="1650360982" sldId="808"/>
         </pc:sldMkLst>
-        <pc:graphicFrameChg chg="del mod modGraphic">
-          <ac:chgData name="Zonghua Gu" userId="9a7e1853e1951ef5" providerId="LiveId" clId="{CF1FAA12-072C-4ED5-BA76-0FFFAEFDB88A}" dt="2025-10-08T01:29:45.447" v="1329" actId="21"/>
-          <ac:graphicFrameMkLst>
-            <pc:docMk/>
-            <pc:sldMk cId="1650360982" sldId="808"/>
-            <ac:graphicFrameMk id="9" creationId="{5554C0A1-0F3B-350F-2860-7587D1FBD6B7}"/>
-          </ac:graphicFrameMkLst>
-        </pc:graphicFrameChg>
       </pc:sldChg>
       <pc:sldChg chg="addSp delSp modSp new mod">
         <pc:chgData name="Zonghua Gu" userId="9a7e1853e1951ef5" providerId="LiveId" clId="{CF1FAA12-072C-4ED5-BA76-0FFFAEFDB88A}" dt="2025-10-08T01:55:27.618" v="1658" actId="27636"/>
@@ -1677,46 +1670,6 @@
             <ac:spMk id="4" creationId="{820F721C-49AF-4791-CFC3-7A5BCF18A263}"/>
           </ac:spMkLst>
         </pc:spChg>
-        <pc:spChg chg="add del">
-          <ac:chgData name="Zonghua Gu" userId="9a7e1853e1951ef5" providerId="LiveId" clId="{CF1FAA12-072C-4ED5-BA76-0FFFAEFDB88A}" dt="2025-10-08T01:34:48.586" v="1401" actId="22"/>
-          <ac:spMkLst>
-            <pc:docMk/>
-            <pc:sldMk cId="2284923932" sldId="809"/>
-            <ac:spMk id="6" creationId="{54BE49A4-E550-9E56-F301-E46CFC67AD46}"/>
-          </ac:spMkLst>
-        </pc:spChg>
-        <pc:graphicFrameChg chg="add">
-          <ac:chgData name="Zonghua Gu" userId="9a7e1853e1951ef5" providerId="LiveId" clId="{CF1FAA12-072C-4ED5-BA76-0FFFAEFDB88A}" dt="2025-10-08T01:35:02.561" v="1407"/>
-          <ac:graphicFrameMkLst>
-            <pc:docMk/>
-            <pc:sldMk cId="2284923932" sldId="809"/>
-            <ac:graphicFrameMk id="7" creationId="{ABD5A995-9B1B-8414-1062-6CE36CC5B9D2}"/>
-          </ac:graphicFrameMkLst>
-        </pc:graphicFrameChg>
-        <pc:graphicFrameChg chg="add del mod modGraphic">
-          <ac:chgData name="Zonghua Gu" userId="9a7e1853e1951ef5" providerId="LiveId" clId="{CF1FAA12-072C-4ED5-BA76-0FFFAEFDB88A}" dt="2025-10-08T01:43:28.659" v="1569" actId="478"/>
-          <ac:graphicFrameMkLst>
-            <pc:docMk/>
-            <pc:sldMk cId="2284923932" sldId="809"/>
-            <ac:graphicFrameMk id="8" creationId="{800CC9F0-7A08-F737-5F43-CB276A0076A6}"/>
-          </ac:graphicFrameMkLst>
-        </pc:graphicFrameChg>
-        <pc:graphicFrameChg chg="add del mod">
-          <ac:chgData name="Zonghua Gu" userId="9a7e1853e1951ef5" providerId="LiveId" clId="{CF1FAA12-072C-4ED5-BA76-0FFFAEFDB88A}" dt="2025-10-08T01:39:10.469" v="1489" actId="478"/>
-          <ac:graphicFrameMkLst>
-            <pc:docMk/>
-            <pc:sldMk cId="2284923932" sldId="809"/>
-            <ac:graphicFrameMk id="9" creationId="{5554C0A1-0F3B-350F-2860-7587D1FBD6B7}"/>
-          </ac:graphicFrameMkLst>
-        </pc:graphicFrameChg>
-        <pc:graphicFrameChg chg="add del mod">
-          <ac:chgData name="Zonghua Gu" userId="9a7e1853e1951ef5" providerId="LiveId" clId="{CF1FAA12-072C-4ED5-BA76-0FFFAEFDB88A}" dt="2025-10-08T01:41:39.671" v="1530" actId="478"/>
-          <ac:graphicFrameMkLst>
-            <pc:docMk/>
-            <pc:sldMk cId="2284923932" sldId="809"/>
-            <ac:graphicFrameMk id="10" creationId="{3692BE18-B380-481B-DC05-BC486F377452}"/>
-          </ac:graphicFrameMkLst>
-        </pc:graphicFrameChg>
         <pc:graphicFrameChg chg="add mod">
           <ac:chgData name="Zonghua Gu" userId="9a7e1853e1951ef5" providerId="LiveId" clId="{CF1FAA12-072C-4ED5-BA76-0FFFAEFDB88A}" dt="2025-10-08T01:53:58.840" v="1644"/>
           <ac:graphicFrameMkLst>
@@ -1740,38 +1693,6 @@
           <pc:docMk/>
           <pc:sldMk cId="2952063245" sldId="810"/>
         </pc:sldMkLst>
-        <pc:spChg chg="mod">
-          <ac:chgData name="Zonghua Gu" userId="9a7e1853e1951ef5" providerId="LiveId" clId="{CF1FAA12-072C-4ED5-BA76-0FFFAEFDB88A}" dt="2025-10-08T01:33:49.774" v="1360" actId="20577"/>
-          <ac:spMkLst>
-            <pc:docMk/>
-            <pc:sldMk cId="2952063245" sldId="810"/>
-            <ac:spMk id="2" creationId="{BED84595-D472-6F68-DE47-3C22C5AAF578}"/>
-          </ac:spMkLst>
-        </pc:spChg>
-        <pc:spChg chg="mod">
-          <ac:chgData name="Zonghua Gu" userId="9a7e1853e1951ef5" providerId="LiveId" clId="{CF1FAA12-072C-4ED5-BA76-0FFFAEFDB88A}" dt="2025-10-08T01:37:41.758" v="1464" actId="14100"/>
-          <ac:spMkLst>
-            <pc:docMk/>
-            <pc:sldMk cId="2952063245" sldId="810"/>
-            <ac:spMk id="4" creationId="{2E30BEB6-14A6-7DA1-64FA-D0E05B682530}"/>
-          </ac:spMkLst>
-        </pc:spChg>
-        <pc:graphicFrameChg chg="add del mod modGraphic">
-          <ac:chgData name="Zonghua Gu" userId="9a7e1853e1951ef5" providerId="LiveId" clId="{CF1FAA12-072C-4ED5-BA76-0FFFAEFDB88A}" dt="2025-10-08T01:36:08.350" v="1422" actId="478"/>
-          <ac:graphicFrameMkLst>
-            <pc:docMk/>
-            <pc:sldMk cId="2952063245" sldId="810"/>
-            <ac:graphicFrameMk id="5" creationId="{D0404371-D9CE-BABE-EC59-F11788F5AFFE}"/>
-          </ac:graphicFrameMkLst>
-        </pc:graphicFrameChg>
-        <pc:graphicFrameChg chg="mod modGraphic">
-          <ac:chgData name="Zonghua Gu" userId="9a7e1853e1951ef5" providerId="LiveId" clId="{CF1FAA12-072C-4ED5-BA76-0FFFAEFDB88A}" dt="2025-10-08T01:41:33.550" v="1529" actId="14100"/>
-          <ac:graphicFrameMkLst>
-            <pc:docMk/>
-            <pc:sldMk cId="2952063245" sldId="810"/>
-            <ac:graphicFrameMk id="9" creationId="{CDC85F25-15D6-DAB9-23EA-EF1BBDC222C1}"/>
-          </ac:graphicFrameMkLst>
-        </pc:graphicFrameChg>
       </pc:sldChg>
       <pc:sldChg chg="addSp delSp modSp add mod">
         <pc:chgData name="Zonghua Gu" userId="9a7e1853e1951ef5" providerId="LiveId" clId="{CF1FAA12-072C-4ED5-BA76-0FFFAEFDB88A}" dt="2025-10-08T01:55:37.750" v="1664" actId="20577"/>
@@ -1793,46 +1714,6 @@
             <pc:docMk/>
             <pc:sldMk cId="2957949268" sldId="811"/>
             <ac:graphicFrameMk id="5" creationId="{DCFF20E1-6306-C5B2-B89F-50622B752DF5}"/>
-          </ac:graphicFrameMkLst>
-        </pc:graphicFrameChg>
-        <pc:graphicFrameChg chg="add mod">
-          <ac:chgData name="Zonghua Gu" userId="9a7e1853e1951ef5" providerId="LiveId" clId="{CF1FAA12-072C-4ED5-BA76-0FFFAEFDB88A}" dt="2025-10-08T01:39:23.050" v="1494"/>
-          <ac:graphicFrameMkLst>
-            <pc:docMk/>
-            <pc:sldMk cId="2957949268" sldId="811"/>
-            <ac:graphicFrameMk id="6" creationId="{C4991A3B-B20A-BB6B-61E3-69CAC09046D0}"/>
-          </ac:graphicFrameMkLst>
-        </pc:graphicFrameChg>
-        <pc:graphicFrameChg chg="add del mod">
-          <ac:chgData name="Zonghua Gu" userId="9a7e1853e1951ef5" providerId="LiveId" clId="{CF1FAA12-072C-4ED5-BA76-0FFFAEFDB88A}" dt="2025-10-08T01:40:12.520" v="1500" actId="478"/>
-          <ac:graphicFrameMkLst>
-            <pc:docMk/>
-            <pc:sldMk cId="2957949268" sldId="811"/>
-            <ac:graphicFrameMk id="7" creationId="{77ABF547-81E6-3352-01BB-6C792C4E647A}"/>
-          </ac:graphicFrameMkLst>
-        </pc:graphicFrameChg>
-        <pc:graphicFrameChg chg="del mod">
-          <ac:chgData name="Zonghua Gu" userId="9a7e1853e1951ef5" providerId="LiveId" clId="{CF1FAA12-072C-4ED5-BA76-0FFFAEFDB88A}" dt="2025-10-08T01:39:13.955" v="1491" actId="478"/>
-          <ac:graphicFrameMkLst>
-            <pc:docMk/>
-            <pc:sldMk cId="2957949268" sldId="811"/>
-            <ac:graphicFrameMk id="8" creationId="{A634EA63-8989-5400-840B-5A96F784726D}"/>
-          </ac:graphicFrameMkLst>
-        </pc:graphicFrameChg>
-        <pc:graphicFrameChg chg="del mod">
-          <ac:chgData name="Zonghua Gu" userId="9a7e1853e1951ef5" providerId="LiveId" clId="{CF1FAA12-072C-4ED5-BA76-0FFFAEFDB88A}" dt="2025-10-08T01:39:02.421" v="1487" actId="478"/>
-          <ac:graphicFrameMkLst>
-            <pc:docMk/>
-            <pc:sldMk cId="2957949268" sldId="811"/>
-            <ac:graphicFrameMk id="9" creationId="{9F1A0666-8E04-9DBC-99E6-0E7E8F54B3A8}"/>
-          </ac:graphicFrameMkLst>
-        </pc:graphicFrameChg>
-        <pc:graphicFrameChg chg="add del mod modGraphic">
-          <ac:chgData name="Zonghua Gu" userId="9a7e1853e1951ef5" providerId="LiveId" clId="{CF1FAA12-072C-4ED5-BA76-0FFFAEFDB88A}" dt="2025-10-08T01:43:19.181" v="1568" actId="478"/>
-          <ac:graphicFrameMkLst>
-            <pc:docMk/>
-            <pc:sldMk cId="2957949268" sldId="811"/>
-            <ac:graphicFrameMk id="10" creationId="{71BCAFC4-9CF3-60C0-F1F5-EB22CFE2F04A}"/>
           </ac:graphicFrameMkLst>
         </pc:graphicFrameChg>
         <pc:graphicFrameChg chg="add mod modGraphic">
@@ -1858,22 +1739,6 @@
             <ac:spMk id="4" creationId="{BA095994-96A1-3342-AF91-E5C6E48F1321}"/>
           </ac:spMkLst>
         </pc:spChg>
-        <pc:picChg chg="add">
-          <ac:chgData name="Zonghua Gu" userId="9a7e1853e1951ef5" providerId="LiveId" clId="{CF1FAA12-072C-4ED5-BA76-0FFFAEFDB88A}" dt="2025-10-08T01:44:37.998" v="1590"/>
-          <ac:picMkLst>
-            <pc:docMk/>
-            <pc:sldMk cId="195030017" sldId="812"/>
-            <ac:picMk id="6" creationId="{074D1A33-64F0-6C66-4FE3-0B4ACBD9C069}"/>
-          </ac:picMkLst>
-        </pc:picChg>
-        <pc:picChg chg="add del mod">
-          <ac:chgData name="Zonghua Gu" userId="9a7e1853e1951ef5" providerId="LiveId" clId="{CF1FAA12-072C-4ED5-BA76-0FFFAEFDB88A}" dt="2025-10-08T01:51:01.962" v="1599" actId="478"/>
-          <ac:picMkLst>
-            <pc:docMk/>
-            <pc:sldMk cId="195030017" sldId="812"/>
-            <ac:picMk id="8" creationId="{3664DD1A-9421-BDF5-33F8-A97D2B488D4E}"/>
-          </ac:picMkLst>
-        </pc:picChg>
       </pc:sldChg>
       <pc:sldChg chg="new del">
         <pc:chgData name="Zonghua Gu" userId="9a7e1853e1951ef5" providerId="LiveId" clId="{CF1FAA12-072C-4ED5-BA76-0FFFAEFDB88A}" dt="2025-10-08T01:55:03.006" v="1649" actId="47"/>
@@ -1894,6 +1759,393 @@
         <pc:sldMkLst>
           <pc:docMk/>
           <pc:sldMk cId="3100707031" sldId="813"/>
+        </pc:sldMkLst>
+      </pc:sldChg>
+      <pc:sldChg chg="addSp delSp modSp new del mod">
+        <pc:chgData name="Zonghua Gu" userId="9a7e1853e1951ef5" providerId="LiveId" clId="{CF1FAA12-072C-4ED5-BA76-0FFFAEFDB88A}" dt="2025-10-16T21:52:35.912" v="2109" actId="47"/>
+        <pc:sldMkLst>
+          <pc:docMk/>
+          <pc:sldMk cId="4236406998" sldId="814"/>
+        </pc:sldMkLst>
+        <pc:spChg chg="del">
+          <ac:chgData name="Zonghua Gu" userId="9a7e1853e1951ef5" providerId="LiveId" clId="{CF1FAA12-072C-4ED5-BA76-0FFFAEFDB88A}" dt="2025-10-16T21:27:51.701" v="1682" actId="3680"/>
+          <ac:spMkLst>
+            <pc:docMk/>
+            <pc:sldMk cId="4236406998" sldId="814"/>
+            <ac:spMk id="4" creationId="{B642F049-A0F1-A62B-2828-AA3FC19F53EB}"/>
+          </ac:spMkLst>
+        </pc:spChg>
+        <pc:spChg chg="add del mod">
+          <ac:chgData name="Zonghua Gu" userId="9a7e1853e1951ef5" providerId="LiveId" clId="{CF1FAA12-072C-4ED5-BA76-0FFFAEFDB88A}" dt="2025-10-16T21:35:45.745" v="1846" actId="478"/>
+          <ac:spMkLst>
+            <pc:docMk/>
+            <pc:sldMk cId="4236406998" sldId="814"/>
+            <ac:spMk id="8" creationId="{0FEF459A-89BD-D92F-5EB8-90E39AB67087}"/>
+          </ac:spMkLst>
+        </pc:spChg>
+        <pc:spChg chg="add del mod">
+          <ac:chgData name="Zonghua Gu" userId="9a7e1853e1951ef5" providerId="LiveId" clId="{CF1FAA12-072C-4ED5-BA76-0FFFAEFDB88A}" dt="2025-10-16T21:35:45.745" v="1846" actId="478"/>
+          <ac:spMkLst>
+            <pc:docMk/>
+            <pc:sldMk cId="4236406998" sldId="814"/>
+            <ac:spMk id="9" creationId="{CCBCC066-2BBE-A469-E8B3-CB2CC477CE23}"/>
+          </ac:spMkLst>
+        </pc:spChg>
+        <pc:spChg chg="add del">
+          <ac:chgData name="Zonghua Gu" userId="9a7e1853e1951ef5" providerId="LiveId" clId="{CF1FAA12-072C-4ED5-BA76-0FFFAEFDB88A}" dt="2025-10-16T21:31:51.977" v="1778" actId="22"/>
+          <ac:spMkLst>
+            <pc:docMk/>
+            <pc:sldMk cId="4236406998" sldId="814"/>
+            <ac:spMk id="14" creationId="{DBCFB7D2-3B06-9AAE-64BE-F9FEC5548D45}"/>
+          </ac:spMkLst>
+        </pc:spChg>
+        <pc:spChg chg="add del mod">
+          <ac:chgData name="Zonghua Gu" userId="9a7e1853e1951ef5" providerId="LiveId" clId="{CF1FAA12-072C-4ED5-BA76-0FFFAEFDB88A}" dt="2025-10-16T21:35:53.605" v="1847" actId="21"/>
+          <ac:spMkLst>
+            <pc:docMk/>
+            <pc:sldMk cId="4236406998" sldId="814"/>
+            <ac:spMk id="16" creationId="{D8691280-3701-7284-8180-9F8BD7E6732F}"/>
+          </ac:spMkLst>
+        </pc:spChg>
+        <pc:spChg chg="add del mod">
+          <ac:chgData name="Zonghua Gu" userId="9a7e1853e1951ef5" providerId="LiveId" clId="{CF1FAA12-072C-4ED5-BA76-0FFFAEFDB88A}" dt="2025-10-16T21:35:53.605" v="1847" actId="21"/>
+          <ac:spMkLst>
+            <pc:docMk/>
+            <pc:sldMk cId="4236406998" sldId="814"/>
+            <ac:spMk id="17" creationId="{54DAF454-D38A-E54A-0A83-F3163F2194FD}"/>
+          </ac:spMkLst>
+        </pc:spChg>
+        <pc:spChg chg="add del mod">
+          <ac:chgData name="Zonghua Gu" userId="9a7e1853e1951ef5" providerId="LiveId" clId="{CF1FAA12-072C-4ED5-BA76-0FFFAEFDB88A}" dt="2025-10-16T21:35:53.605" v="1847" actId="21"/>
+          <ac:spMkLst>
+            <pc:docMk/>
+            <pc:sldMk cId="4236406998" sldId="814"/>
+            <ac:spMk id="18" creationId="{7E2E3134-A567-7018-92F0-D86F35E570CB}"/>
+          </ac:spMkLst>
+        </pc:spChg>
+        <pc:spChg chg="add del mod">
+          <ac:chgData name="Zonghua Gu" userId="9a7e1853e1951ef5" providerId="LiveId" clId="{CF1FAA12-072C-4ED5-BA76-0FFFAEFDB88A}" dt="2025-10-16T21:35:53.605" v="1847" actId="21"/>
+          <ac:spMkLst>
+            <pc:docMk/>
+            <pc:sldMk cId="4236406998" sldId="814"/>
+            <ac:spMk id="19" creationId="{57E19796-203A-5975-9E7E-A51D96722A9D}"/>
+          </ac:spMkLst>
+        </pc:spChg>
+        <pc:spChg chg="add del mod">
+          <ac:chgData name="Zonghua Gu" userId="9a7e1853e1951ef5" providerId="LiveId" clId="{CF1FAA12-072C-4ED5-BA76-0FFFAEFDB88A}" dt="2025-10-16T21:35:53.605" v="1847" actId="21"/>
+          <ac:spMkLst>
+            <pc:docMk/>
+            <pc:sldMk cId="4236406998" sldId="814"/>
+            <ac:spMk id="20" creationId="{4246B73D-93B0-BE96-6E77-F5047B876FB4}"/>
+          </ac:spMkLst>
+        </pc:spChg>
+        <pc:spChg chg="add del mod">
+          <ac:chgData name="Zonghua Gu" userId="9a7e1853e1951ef5" providerId="LiveId" clId="{CF1FAA12-072C-4ED5-BA76-0FFFAEFDB88A}" dt="2025-10-16T21:35:53.605" v="1847" actId="21"/>
+          <ac:spMkLst>
+            <pc:docMk/>
+            <pc:sldMk cId="4236406998" sldId="814"/>
+            <ac:spMk id="21" creationId="{2D08279E-530F-10AE-C181-2446B85EE3E6}"/>
+          </ac:spMkLst>
+        </pc:spChg>
+        <pc:spChg chg="add mod">
+          <ac:chgData name="Zonghua Gu" userId="9a7e1853e1951ef5" providerId="LiveId" clId="{CF1FAA12-072C-4ED5-BA76-0FFFAEFDB88A}" dt="2025-10-16T21:35:53.605" v="1847" actId="21"/>
+          <ac:spMkLst>
+            <pc:docMk/>
+            <pc:sldMk cId="4236406998" sldId="814"/>
+            <ac:spMk id="23" creationId="{634BCF34-7D98-65FA-6FE2-1DE1C12449A4}"/>
+          </ac:spMkLst>
+        </pc:spChg>
+        <pc:graphicFrameChg chg="add del mod">
+          <ac:chgData name="Zonghua Gu" userId="9a7e1853e1951ef5" providerId="LiveId" clId="{CF1FAA12-072C-4ED5-BA76-0FFFAEFDB88A}" dt="2025-10-16T21:33:00.653" v="1798" actId="478"/>
+          <ac:graphicFrameMkLst>
+            <pc:docMk/>
+            <pc:sldMk cId="4236406998" sldId="814"/>
+            <ac:graphicFrameMk id="7" creationId="{9F1C3AA7-5DD6-693A-D0A1-407CA72BDE52}"/>
+          </ac:graphicFrameMkLst>
+        </pc:graphicFrameChg>
+        <pc:graphicFrameChg chg="add del mod ord modGraphic">
+          <ac:chgData name="Zonghua Gu" userId="9a7e1853e1951ef5" providerId="LiveId" clId="{CF1FAA12-072C-4ED5-BA76-0FFFAEFDB88A}" dt="2025-10-16T21:35:53.605" v="1847" actId="21"/>
+          <ac:graphicFrameMkLst>
+            <pc:docMk/>
+            <pc:sldMk cId="4236406998" sldId="814"/>
+            <ac:graphicFrameMk id="10" creationId="{C66D22D6-5FBA-4885-A9F9-CB0B7935CCAF}"/>
+          </ac:graphicFrameMkLst>
+        </pc:graphicFrameChg>
+        <pc:graphicFrameChg chg="add del mod modGraphic">
+          <ac:chgData name="Zonghua Gu" userId="9a7e1853e1951ef5" providerId="LiveId" clId="{CF1FAA12-072C-4ED5-BA76-0FFFAEFDB88A}" dt="2025-10-16T21:35:53.605" v="1847" actId="21"/>
+          <ac:graphicFrameMkLst>
+            <pc:docMk/>
+            <pc:sldMk cId="4236406998" sldId="814"/>
+            <ac:graphicFrameMk id="11" creationId="{77A79F3C-0AA4-B3F6-0754-9C4A0DBE1DEF}"/>
+          </ac:graphicFrameMkLst>
+        </pc:graphicFrameChg>
+        <pc:graphicFrameChg chg="add del mod modGraphic">
+          <ac:chgData name="Zonghua Gu" userId="9a7e1853e1951ef5" providerId="LiveId" clId="{CF1FAA12-072C-4ED5-BA76-0FFFAEFDB88A}" dt="2025-10-16T21:35:53.605" v="1847" actId="21"/>
+          <ac:graphicFrameMkLst>
+            <pc:docMk/>
+            <pc:sldMk cId="4236406998" sldId="814"/>
+            <ac:graphicFrameMk id="12" creationId="{8E0D479D-BD41-9749-78E1-AE7DB7FEF62B}"/>
+          </ac:graphicFrameMkLst>
+        </pc:graphicFrameChg>
+        <pc:picChg chg="add del mod">
+          <ac:chgData name="Zonghua Gu" userId="9a7e1853e1951ef5" providerId="LiveId" clId="{CF1FAA12-072C-4ED5-BA76-0FFFAEFDB88A}" dt="2025-10-16T21:50:54.862" v="2107" actId="21"/>
+          <ac:picMkLst>
+            <pc:docMk/>
+            <pc:sldMk cId="4236406998" sldId="814"/>
+            <ac:picMk id="6" creationId="{D374FE4F-BAF0-185A-8D81-2830C4A8CAE9}"/>
+          </ac:picMkLst>
+        </pc:picChg>
+      </pc:sldChg>
+      <pc:sldChg chg="addSp delSp modSp new mod">
+        <pc:chgData name="Zonghua Gu" userId="9a7e1853e1951ef5" providerId="LiveId" clId="{CF1FAA12-072C-4ED5-BA76-0FFFAEFDB88A}" dt="2025-10-16T21:42:27.494" v="2031" actId="20577"/>
+        <pc:sldMkLst>
+          <pc:docMk/>
+          <pc:sldMk cId="754608230" sldId="815"/>
+        </pc:sldMkLst>
+        <pc:spChg chg="mod">
+          <ac:chgData name="Zonghua Gu" userId="9a7e1853e1951ef5" providerId="LiveId" clId="{CF1FAA12-072C-4ED5-BA76-0FFFAEFDB88A}" dt="2025-10-16T21:42:27.494" v="2031" actId="20577"/>
+          <ac:spMkLst>
+            <pc:docMk/>
+            <pc:sldMk cId="754608230" sldId="815"/>
+            <ac:spMk id="2" creationId="{F578278E-4A38-6767-6648-B9C79941AF43}"/>
+          </ac:spMkLst>
+        </pc:spChg>
+        <pc:spChg chg="mod">
+          <ac:chgData name="Zonghua Gu" userId="9a7e1853e1951ef5" providerId="LiveId" clId="{CF1FAA12-072C-4ED5-BA76-0FFFAEFDB88A}" dt="2025-10-16T21:36:46.674" v="1869" actId="1076"/>
+          <ac:spMkLst>
+            <pc:docMk/>
+            <pc:sldMk cId="754608230" sldId="815"/>
+            <ac:spMk id="3" creationId="{475BC598-EF55-AB51-D906-12E17238C9A8}"/>
+          </ac:spMkLst>
+        </pc:spChg>
+        <pc:spChg chg="del">
+          <ac:chgData name="Zonghua Gu" userId="9a7e1853e1951ef5" providerId="LiveId" clId="{CF1FAA12-072C-4ED5-BA76-0FFFAEFDB88A}" dt="2025-10-16T21:37:19.387" v="1871" actId="3680"/>
+          <ac:spMkLst>
+            <pc:docMk/>
+            <pc:sldMk cId="754608230" sldId="815"/>
+            <ac:spMk id="4" creationId="{EB958EFC-D654-F23F-75A1-1FD81E9F3437}"/>
+          </ac:spMkLst>
+        </pc:spChg>
+        <pc:spChg chg="add mod">
+          <ac:chgData name="Zonghua Gu" userId="9a7e1853e1951ef5" providerId="LiveId" clId="{CF1FAA12-072C-4ED5-BA76-0FFFAEFDB88A}" dt="2025-10-16T21:42:01.388" v="2019" actId="1076"/>
+          <ac:spMkLst>
+            <pc:docMk/>
+            <pc:sldMk cId="754608230" sldId="815"/>
+            <ac:spMk id="6" creationId="{57F96825-B097-324D-C2F7-FAFF800F7FC6}"/>
+          </ac:spMkLst>
+        </pc:spChg>
+        <pc:spChg chg="add mod">
+          <ac:chgData name="Zonghua Gu" userId="9a7e1853e1951ef5" providerId="LiveId" clId="{CF1FAA12-072C-4ED5-BA76-0FFFAEFDB88A}" dt="2025-10-16T21:36:46.674" v="1869" actId="1076"/>
+          <ac:spMkLst>
+            <pc:docMk/>
+            <pc:sldMk cId="754608230" sldId="815"/>
+            <ac:spMk id="16" creationId="{D8691280-3701-7284-8180-9F8BD7E6732F}"/>
+          </ac:spMkLst>
+        </pc:spChg>
+        <pc:spChg chg="add mod">
+          <ac:chgData name="Zonghua Gu" userId="9a7e1853e1951ef5" providerId="LiveId" clId="{CF1FAA12-072C-4ED5-BA76-0FFFAEFDB88A}" dt="2025-10-16T21:36:46.674" v="1869" actId="1076"/>
+          <ac:spMkLst>
+            <pc:docMk/>
+            <pc:sldMk cId="754608230" sldId="815"/>
+            <ac:spMk id="17" creationId="{54DAF454-D38A-E54A-0A83-F3163F2194FD}"/>
+          </ac:spMkLst>
+        </pc:spChg>
+        <pc:spChg chg="add mod">
+          <ac:chgData name="Zonghua Gu" userId="9a7e1853e1951ef5" providerId="LiveId" clId="{CF1FAA12-072C-4ED5-BA76-0FFFAEFDB88A}" dt="2025-10-16T21:41:30.100" v="2002" actId="1037"/>
+          <ac:spMkLst>
+            <pc:docMk/>
+            <pc:sldMk cId="754608230" sldId="815"/>
+            <ac:spMk id="18" creationId="{7E2E3134-A567-7018-92F0-D86F35E570CB}"/>
+          </ac:spMkLst>
+        </pc:spChg>
+        <pc:spChg chg="add mod">
+          <ac:chgData name="Zonghua Gu" userId="9a7e1853e1951ef5" providerId="LiveId" clId="{CF1FAA12-072C-4ED5-BA76-0FFFAEFDB88A}" dt="2025-10-16T21:41:37.126" v="2009" actId="1038"/>
+          <ac:spMkLst>
+            <pc:docMk/>
+            <pc:sldMk cId="754608230" sldId="815"/>
+            <ac:spMk id="19" creationId="{57E19796-203A-5975-9E7E-A51D96722A9D}"/>
+          </ac:spMkLst>
+        </pc:spChg>
+        <pc:spChg chg="add mod">
+          <ac:chgData name="Zonghua Gu" userId="9a7e1853e1951ef5" providerId="LiveId" clId="{CF1FAA12-072C-4ED5-BA76-0FFFAEFDB88A}" dt="2025-10-16T21:41:30.100" v="2002" actId="1037"/>
+          <ac:spMkLst>
+            <pc:docMk/>
+            <pc:sldMk cId="754608230" sldId="815"/>
+            <ac:spMk id="20" creationId="{4246B73D-93B0-BE96-6E77-F5047B876FB4}"/>
+          </ac:spMkLst>
+        </pc:spChg>
+        <pc:spChg chg="add mod">
+          <ac:chgData name="Zonghua Gu" userId="9a7e1853e1951ef5" providerId="LiveId" clId="{CF1FAA12-072C-4ED5-BA76-0FFFAEFDB88A}" dt="2025-10-16T21:41:37.126" v="2009" actId="1038"/>
+          <ac:spMkLst>
+            <pc:docMk/>
+            <pc:sldMk cId="754608230" sldId="815"/>
+            <ac:spMk id="21" creationId="{2D08279E-530F-10AE-C181-2446B85EE3E6}"/>
+          </ac:spMkLst>
+        </pc:spChg>
+        <pc:graphicFrameChg chg="add mod ord modGraphic">
+          <ac:chgData name="Zonghua Gu" userId="9a7e1853e1951ef5" providerId="LiveId" clId="{CF1FAA12-072C-4ED5-BA76-0FFFAEFDB88A}" dt="2025-10-16T21:40:06.384" v="1924" actId="1076"/>
+          <ac:graphicFrameMkLst>
+            <pc:docMk/>
+            <pc:sldMk cId="754608230" sldId="815"/>
+            <ac:graphicFrameMk id="5" creationId="{291244C1-EEA0-B959-8AAA-2875319F934B}"/>
+          </ac:graphicFrameMkLst>
+        </pc:graphicFrameChg>
+        <pc:graphicFrameChg chg="add mod">
+          <ac:chgData name="Zonghua Gu" userId="9a7e1853e1951ef5" providerId="LiveId" clId="{CF1FAA12-072C-4ED5-BA76-0FFFAEFDB88A}" dt="2025-10-16T21:36:46.674" v="1869" actId="1076"/>
+          <ac:graphicFrameMkLst>
+            <pc:docMk/>
+            <pc:sldMk cId="754608230" sldId="815"/>
+            <ac:graphicFrameMk id="10" creationId="{C66D22D6-5FBA-4885-A9F9-CB0B7935CCAF}"/>
+          </ac:graphicFrameMkLst>
+        </pc:graphicFrameChg>
+        <pc:graphicFrameChg chg="add mod">
+          <ac:chgData name="Zonghua Gu" userId="9a7e1853e1951ef5" providerId="LiveId" clId="{CF1FAA12-072C-4ED5-BA76-0FFFAEFDB88A}" dt="2025-10-16T21:41:30.100" v="2002" actId="1037"/>
+          <ac:graphicFrameMkLst>
+            <pc:docMk/>
+            <pc:sldMk cId="754608230" sldId="815"/>
+            <ac:graphicFrameMk id="11" creationId="{77A79F3C-0AA4-B3F6-0754-9C4A0DBE1DEF}"/>
+          </ac:graphicFrameMkLst>
+        </pc:graphicFrameChg>
+        <pc:graphicFrameChg chg="add mod">
+          <ac:chgData name="Zonghua Gu" userId="9a7e1853e1951ef5" providerId="LiveId" clId="{CF1FAA12-072C-4ED5-BA76-0FFFAEFDB88A}" dt="2025-10-16T21:41:37.126" v="2009" actId="1038"/>
+          <ac:graphicFrameMkLst>
+            <pc:docMk/>
+            <pc:sldMk cId="754608230" sldId="815"/>
+            <ac:graphicFrameMk id="12" creationId="{8E0D479D-BD41-9749-78E1-AE7DB7FEF62B}"/>
+          </ac:graphicFrameMkLst>
+        </pc:graphicFrameChg>
+      </pc:sldChg>
+      <pc:sldChg chg="modSp new del mod">
+        <pc:chgData name="Zonghua Gu" userId="9a7e1853e1951ef5" providerId="LiveId" clId="{CF1FAA12-072C-4ED5-BA76-0FFFAEFDB88A}" dt="2025-10-16T21:52:38.531" v="2111" actId="47"/>
+        <pc:sldMkLst>
+          <pc:docMk/>
+          <pc:sldMk cId="103640008" sldId="816"/>
+        </pc:sldMkLst>
+        <pc:spChg chg="mod">
+          <ac:chgData name="Zonghua Gu" userId="9a7e1853e1951ef5" providerId="LiveId" clId="{CF1FAA12-072C-4ED5-BA76-0FFFAEFDB88A}" dt="2025-10-16T21:40:12.666" v="1927" actId="14100"/>
+          <ac:spMkLst>
+            <pc:docMk/>
+            <pc:sldMk cId="103640008" sldId="816"/>
+            <ac:spMk id="4" creationId="{A85B43D4-75BC-0B95-EE60-2A2CD5219897}"/>
+          </ac:spMkLst>
+        </pc:spChg>
+      </pc:sldChg>
+      <pc:sldChg chg="addSp delSp modSp add del mod">
+        <pc:chgData name="Zonghua Gu" userId="9a7e1853e1951ef5" providerId="LiveId" clId="{CF1FAA12-072C-4ED5-BA76-0FFFAEFDB88A}" dt="2025-10-16T21:52:21.702" v="2108" actId="2696"/>
+        <pc:sldMkLst>
+          <pc:docMk/>
+          <pc:sldMk cId="198520922" sldId="817"/>
+        </pc:sldMkLst>
+        <pc:spChg chg="mod">
+          <ac:chgData name="Zonghua Gu" userId="9a7e1853e1951ef5" providerId="LiveId" clId="{CF1FAA12-072C-4ED5-BA76-0FFFAEFDB88A}" dt="2025-10-16T21:41:47.009" v="2016" actId="20577"/>
+          <ac:spMkLst>
+            <pc:docMk/>
+            <pc:sldMk cId="198520922" sldId="817"/>
+            <ac:spMk id="2" creationId="{F76C7F84-6A8B-84A3-3E05-6733722B1417}"/>
+          </ac:spMkLst>
+        </pc:spChg>
+        <pc:spChg chg="del">
+          <ac:chgData name="Zonghua Gu" userId="9a7e1853e1951ef5" providerId="LiveId" clId="{CF1FAA12-072C-4ED5-BA76-0FFFAEFDB88A}" dt="2025-10-16T21:41:54.104" v="2017" actId="478"/>
+          <ac:spMkLst>
+            <pc:docMk/>
+            <pc:sldMk cId="198520922" sldId="817"/>
+            <ac:spMk id="3" creationId="{FBAC7460-E781-55DA-85A1-AB08F794EFFC}"/>
+          </ac:spMkLst>
+        </pc:spChg>
+        <pc:spChg chg="mod">
+          <ac:chgData name="Zonghua Gu" userId="9a7e1853e1951ef5" providerId="LiveId" clId="{CF1FAA12-072C-4ED5-BA76-0FFFAEFDB88A}" dt="2025-10-16T21:44:16.401" v="2105" actId="20577"/>
+          <ac:spMkLst>
+            <pc:docMk/>
+            <pc:sldMk cId="198520922" sldId="817"/>
+            <ac:spMk id="6" creationId="{7BC58CE3-4E28-D8D1-7114-E660652810B5}"/>
+          </ac:spMkLst>
+        </pc:spChg>
+        <pc:spChg chg="del">
+          <ac:chgData name="Zonghua Gu" userId="9a7e1853e1951ef5" providerId="LiveId" clId="{CF1FAA12-072C-4ED5-BA76-0FFFAEFDB88A}" dt="2025-10-16T21:41:54.104" v="2017" actId="478"/>
+          <ac:spMkLst>
+            <pc:docMk/>
+            <pc:sldMk cId="198520922" sldId="817"/>
+            <ac:spMk id="16" creationId="{13CA0427-59F9-DDD4-2A30-05351EB0B291}"/>
+          </ac:spMkLst>
+        </pc:spChg>
+        <pc:spChg chg="del">
+          <ac:chgData name="Zonghua Gu" userId="9a7e1853e1951ef5" providerId="LiveId" clId="{CF1FAA12-072C-4ED5-BA76-0FFFAEFDB88A}" dt="2025-10-16T21:41:54.104" v="2017" actId="478"/>
+          <ac:spMkLst>
+            <pc:docMk/>
+            <pc:sldMk cId="198520922" sldId="817"/>
+            <ac:spMk id="17" creationId="{96089B47-F721-8985-D032-9AA788694745}"/>
+          </ac:spMkLst>
+        </pc:spChg>
+        <pc:spChg chg="del">
+          <ac:chgData name="Zonghua Gu" userId="9a7e1853e1951ef5" providerId="LiveId" clId="{CF1FAA12-072C-4ED5-BA76-0FFFAEFDB88A}" dt="2025-10-16T21:41:54.104" v="2017" actId="478"/>
+          <ac:spMkLst>
+            <pc:docMk/>
+            <pc:sldMk cId="198520922" sldId="817"/>
+            <ac:spMk id="18" creationId="{A58C5C06-58F0-756D-872A-0D1336A850D5}"/>
+          </ac:spMkLst>
+        </pc:spChg>
+        <pc:spChg chg="del">
+          <ac:chgData name="Zonghua Gu" userId="9a7e1853e1951ef5" providerId="LiveId" clId="{CF1FAA12-072C-4ED5-BA76-0FFFAEFDB88A}" dt="2025-10-16T21:41:54.104" v="2017" actId="478"/>
+          <ac:spMkLst>
+            <pc:docMk/>
+            <pc:sldMk cId="198520922" sldId="817"/>
+            <ac:spMk id="19" creationId="{20E1A7F4-FF7E-54E3-7B42-ED326876E739}"/>
+          </ac:spMkLst>
+        </pc:spChg>
+        <pc:spChg chg="del">
+          <ac:chgData name="Zonghua Gu" userId="9a7e1853e1951ef5" providerId="LiveId" clId="{CF1FAA12-072C-4ED5-BA76-0FFFAEFDB88A}" dt="2025-10-16T21:41:54.104" v="2017" actId="478"/>
+          <ac:spMkLst>
+            <pc:docMk/>
+            <pc:sldMk cId="198520922" sldId="817"/>
+            <ac:spMk id="20" creationId="{A790C07D-B0A8-2FB2-2C48-5EDC645F5F20}"/>
+          </ac:spMkLst>
+        </pc:spChg>
+        <pc:spChg chg="del">
+          <ac:chgData name="Zonghua Gu" userId="9a7e1853e1951ef5" providerId="LiveId" clId="{CF1FAA12-072C-4ED5-BA76-0FFFAEFDB88A}" dt="2025-10-16T21:41:54.104" v="2017" actId="478"/>
+          <ac:spMkLst>
+            <pc:docMk/>
+            <pc:sldMk cId="198520922" sldId="817"/>
+            <ac:spMk id="21" creationId="{ACFC4A4C-6160-7CB3-583E-9504ED09F691}"/>
+          </ac:spMkLst>
+        </pc:spChg>
+        <pc:graphicFrameChg chg="del">
+          <ac:chgData name="Zonghua Gu" userId="9a7e1853e1951ef5" providerId="LiveId" clId="{CF1FAA12-072C-4ED5-BA76-0FFFAEFDB88A}" dt="2025-10-16T21:41:54.104" v="2017" actId="478"/>
+          <ac:graphicFrameMkLst>
+            <pc:docMk/>
+            <pc:sldMk cId="198520922" sldId="817"/>
+            <ac:graphicFrameMk id="10" creationId="{C5D7E2B7-7D0B-28B7-E4EC-360E54A87CEF}"/>
+          </ac:graphicFrameMkLst>
+        </pc:graphicFrameChg>
+        <pc:graphicFrameChg chg="del">
+          <ac:chgData name="Zonghua Gu" userId="9a7e1853e1951ef5" providerId="LiveId" clId="{CF1FAA12-072C-4ED5-BA76-0FFFAEFDB88A}" dt="2025-10-16T21:41:54.104" v="2017" actId="478"/>
+          <ac:graphicFrameMkLst>
+            <pc:docMk/>
+            <pc:sldMk cId="198520922" sldId="817"/>
+            <ac:graphicFrameMk id="11" creationId="{E6C87AFA-EBEC-FDAD-4411-52D5DD60AFF4}"/>
+          </ac:graphicFrameMkLst>
+        </pc:graphicFrameChg>
+        <pc:graphicFrameChg chg="del">
+          <ac:chgData name="Zonghua Gu" userId="9a7e1853e1951ef5" providerId="LiveId" clId="{CF1FAA12-072C-4ED5-BA76-0FFFAEFDB88A}" dt="2025-10-16T21:41:54.104" v="2017" actId="478"/>
+          <ac:graphicFrameMkLst>
+            <pc:docMk/>
+            <pc:sldMk cId="198520922" sldId="817"/>
+            <ac:graphicFrameMk id="12" creationId="{818D4D10-F14E-7AF6-FC0C-5C36C2D8332A}"/>
+          </ac:graphicFrameMkLst>
+        </pc:graphicFrameChg>
+        <pc:picChg chg="add mod">
+          <ac:chgData name="Zonghua Gu" userId="9a7e1853e1951ef5" providerId="LiveId" clId="{CF1FAA12-072C-4ED5-BA76-0FFFAEFDB88A}" dt="2025-10-16T21:42:49.162" v="2045" actId="1076"/>
+          <ac:picMkLst>
+            <pc:docMk/>
+            <pc:sldMk cId="198520922" sldId="817"/>
+            <ac:picMk id="7" creationId="{B6302855-AFD2-17F8-3CF5-50D052C3F637}"/>
+          </ac:picMkLst>
+        </pc:picChg>
+      </pc:sldChg>
+      <pc:sldChg chg="new del">
+        <pc:chgData name="Zonghua Gu" userId="9a7e1853e1951ef5" providerId="LiveId" clId="{CF1FAA12-072C-4ED5-BA76-0FFFAEFDB88A}" dt="2025-10-16T21:52:37.773" v="2110" actId="47"/>
+        <pc:sldMkLst>
+          <pc:docMk/>
+          <pc:sldMk cId="3168730078" sldId="818"/>
         </pc:sldMkLst>
       </pc:sldChg>
     </pc:docChg>
@@ -3891,6 +4143,184 @@
 </p:notes>
 </file>
 
+<file path=ppt/notesSlides/notesSlide17.xml><?xml version="1.0" encoding="utf-8"?>
+<p:notes xmlns:a="http://schemas.openxmlformats.org/drawingml/2006/main" xmlns:r="http://schemas.openxmlformats.org/officeDocument/2006/relationships" xmlns:p="http://schemas.openxmlformats.org/presentationml/2006/main">
+  <p:cSld>
+    <p:spTree>
+      <p:nvGrpSpPr>
+        <p:cNvPr id="1" name=""/>
+        <p:cNvGrpSpPr/>
+        <p:nvPr/>
+      </p:nvGrpSpPr>
+      <p:grpSpPr>
+        <a:xfrm>
+          <a:off x="0" y="0"/>
+          <a:ext cx="0" cy="0"/>
+          <a:chOff x="0" y="0"/>
+          <a:chExt cx="0" cy="0"/>
+        </a:xfrm>
+      </p:grpSpPr>
+      <p:sp>
+        <p:nvSpPr>
+          <p:cNvPr id="2" name="Slide Image Placeholder 1"/>
+          <p:cNvSpPr>
+            <a:spLocks noGrp="1" noRot="1" noChangeAspect="1"/>
+          </p:cNvSpPr>
+          <p:nvPr>
+            <p:ph type="sldImg"/>
+          </p:nvPr>
+        </p:nvSpPr>
+        <p:spPr/>
+      </p:sp>
+      <p:sp>
+        <p:nvSpPr>
+          <p:cNvPr id="3" name="Notes Placeholder 2"/>
+          <p:cNvSpPr>
+            <a:spLocks noGrp="1"/>
+          </p:cNvSpPr>
+          <p:nvPr>
+            <p:ph type="body" idx="1"/>
+          </p:nvPr>
+        </p:nvSpPr>
+        <p:spPr/>
+        <p:txBody>
+          <a:bodyPr/>
+          <a:lstStyle/>
+          <a:p>
+            <a:r>
+              <a:rPr lang="pt-BR" sz="1200" b="0" i="0" kern="1200" dirty="0">
+                <a:solidFill>
+                  <a:schemeClr val="tx1"/>
+                </a:solidFill>
+                <a:effectLst/>
+                <a:latin typeface="Times New Roman" pitchFamily="18" charset="0"/>
+                <a:ea typeface="+mn-ea"/>
+                <a:cs typeface="+mn-cs"/>
+              </a:rPr>
+              <a:t>R0 | 0x00000000</a:t>
+            </a:r>
+            <a:br>
+              <a:rPr lang="pt-BR" dirty="0"/>
+            </a:br>
+            <a:r>
+              <a:rPr lang="pt-BR" sz="1200" b="0" i="0" kern="1200" dirty="0">
+                <a:solidFill>
+                  <a:schemeClr val="tx1"/>
+                </a:solidFill>
+                <a:effectLst/>
+                <a:latin typeface="Times New Roman" pitchFamily="18" charset="0"/>
+                <a:ea typeface="+mn-ea"/>
+                <a:cs typeface="+mn-cs"/>
+              </a:rPr>
+              <a:t>R1 | 0x10000200</a:t>
+            </a:r>
+            <a:br>
+              <a:rPr lang="pt-BR" dirty="0"/>
+            </a:br>
+            <a:r>
+              <a:rPr lang="pt-BR" sz="1200" b="0" i="0" kern="1200" dirty="0">
+                <a:solidFill>
+                  <a:schemeClr val="tx1"/>
+                </a:solidFill>
+                <a:effectLst/>
+                <a:latin typeface="Times New Roman" pitchFamily="18" charset="0"/>
+                <a:ea typeface="+mn-ea"/>
+                <a:cs typeface="+mn-cs"/>
+              </a:rPr>
+              <a:t>R2 | 0x0000FFFF</a:t>
+            </a:r>
+            <a:br>
+              <a:rPr lang="pt-BR" dirty="0"/>
+            </a:br>
+            <a:r>
+              <a:rPr lang="pt-BR" sz="1200" b="0" i="0" kern="1200" dirty="0">
+                <a:solidFill>
+                  <a:schemeClr val="tx1"/>
+                </a:solidFill>
+                <a:effectLst/>
+                <a:latin typeface="Times New Roman" pitchFamily="18" charset="0"/>
+                <a:ea typeface="+mn-ea"/>
+                <a:cs typeface="+mn-cs"/>
+              </a:rPr>
+              <a:t>R3 | 0x18675309</a:t>
+            </a:r>
+            <a:br>
+              <a:rPr lang="pt-BR" dirty="0"/>
+            </a:br>
+            <a:r>
+              <a:rPr lang="pt-BR" sz="1200" b="0" i="0" kern="1200" dirty="0">
+                <a:solidFill>
+                  <a:schemeClr val="tx1"/>
+                </a:solidFill>
+                <a:effectLst/>
+                <a:latin typeface="Times New Roman" pitchFamily="18" charset="0"/>
+                <a:ea typeface="+mn-ea"/>
+                <a:cs typeface="+mn-cs"/>
+              </a:rPr>
+              <a:t>R4 | 0x00000000</a:t>
+            </a:r>
+            <a:br>
+              <a:rPr lang="pt-BR" dirty="0"/>
+            </a:br>
+            <a:r>
+              <a:rPr lang="pt-BR" sz="1200" b="0" i="0" kern="1200" dirty="0">
+                <a:solidFill>
+                  <a:schemeClr val="tx1"/>
+                </a:solidFill>
+                <a:effectLst/>
+                <a:latin typeface="Times New Roman" pitchFamily="18" charset="0"/>
+                <a:ea typeface="+mn-ea"/>
+                <a:cs typeface="+mn-cs"/>
+              </a:rPr>
+              <a:t>R5 | 0x00000000</a:t>
+            </a:r>
+            <a:br>
+              <a:rPr lang="pt-BR" dirty="0"/>
+            </a:br>
+            <a:r>
+              <a:rPr lang="pt-BR" sz="1200" b="0" i="0" kern="1200" dirty="0">
+                <a:solidFill>
+                  <a:schemeClr val="tx1"/>
+                </a:solidFill>
+                <a:effectLst/>
+                <a:latin typeface="Times New Roman" pitchFamily="18" charset="0"/>
+                <a:ea typeface="+mn-ea"/>
+                <a:cs typeface="+mn-cs"/>
+              </a:rPr>
+              <a:t>...</a:t>
+            </a:r>
+            <a:br>
+              <a:rPr lang="pt-BR" dirty="0"/>
+            </a:br>
+            <a:r>
+              <a:rPr lang="pt-BR" sz="1200" b="0" i="0" kern="1200" dirty="0">
+                <a:solidFill>
+                  <a:schemeClr val="tx1"/>
+                </a:solidFill>
+                <a:effectLst/>
+                <a:latin typeface="Times New Roman" pitchFamily="18" charset="0"/>
+                <a:ea typeface="+mn-ea"/>
+                <a:cs typeface="+mn-cs"/>
+              </a:rPr>
+              <a:t>R13 | 0x10000200</a:t>
+            </a:r>
+            <a:endParaRPr lang="en-US" dirty="0"/>
+          </a:p>
+        </p:txBody>
+      </p:sp>
+    </p:spTree>
+    <p:extLst>
+      <p:ext uri="{BB962C8B-B14F-4D97-AF65-F5344CB8AC3E}">
+        <p14:creationId xmlns:p14="http://schemas.microsoft.com/office/powerpoint/2010/main" val="2351661810"/>
+      </p:ext>
+    </p:extLst>
+  </p:cSld>
+  <p:clrMapOvr>
+    <a:masterClrMapping/>
+  </p:clrMapOvr>
+</p:notes>
+</file>
+
 <file path=ppt/notesSlides/notesSlide2.xml><?xml version="1.0" encoding="utf-8"?>
 <p:notes xmlns:a="http://schemas.openxmlformats.org/drawingml/2006/main" xmlns:r="http://schemas.openxmlformats.org/officeDocument/2006/relationships" xmlns:p="http://schemas.openxmlformats.org/presentationml/2006/main">
   <p:cSld>
@@ -4736,7 +5166,7 @@
             <a:fld id="{BA00D299-558C-468E-A8B3-0F5C3BFA45F9}" type="datetime1">
               <a:rPr lang="en-US" smtClean="0"/>
               <a:pPr/>
-              <a:t>10/7/2025</a:t>
+              <a:t>10/16/2025</a:t>
             </a:fld>
             <a:endParaRPr lang="en-US"/>
           </a:p>
@@ -5100,7 +5530,7 @@
             <a:fld id="{8B22D175-8905-42BE-8088-EB39001CF9E2}" type="datetime1">
               <a:rPr lang="en-US" smtClean="0"/>
               <a:pPr/>
-              <a:t>10/7/2025</a:t>
+              <a:t>10/16/2025</a:t>
             </a:fld>
             <a:endParaRPr lang="en-US"/>
           </a:p>
@@ -5279,7 +5709,7 @@
             <a:fld id="{E62AA8DD-1B66-47DA-8A31-5DCDA0DEF224}" type="datetime1">
               <a:rPr lang="en-US" smtClean="0"/>
               <a:pPr/>
-              <a:t>10/7/2025</a:t>
+              <a:t>10/16/2025</a:t>
             </a:fld>
             <a:endParaRPr lang="en-US"/>
           </a:p>
@@ -5518,7 +5948,7 @@
             <a:fld id="{D3A8BFB9-75E0-4A72-9D54-3C687B559A4D}" type="datetime1">
               <a:rPr lang="en-US" smtClean="0"/>
               <a:pPr/>
-              <a:t>10/7/2025</a:t>
+              <a:t>10/16/2025</a:t>
             </a:fld>
             <a:endParaRPr lang="en-US"/>
           </a:p>
@@ -5791,7 +6221,7 @@
             <a:fld id="{E470CD76-7AB7-4744-8178-DC5367B833CD}" type="datetime1">
               <a:rPr lang="en-US" smtClean="0"/>
               <a:pPr/>
-              <a:t>10/7/2025</a:t>
+              <a:t>10/16/2025</a:t>
             </a:fld>
             <a:endParaRPr lang="en-US"/>
           </a:p>
@@ -6015,7 +6445,7 @@
             <a:fld id="{A5E3FC63-82A8-4ACC-B2CB-6D46E8B59216}" type="datetime1">
               <a:rPr lang="en-US" smtClean="0"/>
               <a:pPr/>
-              <a:t>10/7/2025</a:t>
+              <a:t>10/16/2025</a:t>
             </a:fld>
             <a:endParaRPr lang="en-US"/>
           </a:p>
@@ -6371,7 +6801,7 @@
             <a:fld id="{D3A9B8A6-94F4-4AF6-98DE-0FFC617E1C31}" type="datetime1">
               <a:rPr lang="en-US" smtClean="0"/>
               <a:pPr/>
-              <a:t>10/7/2025</a:t>
+              <a:t>10/16/2025</a:t>
             </a:fld>
             <a:endParaRPr lang="en-US"/>
           </a:p>
@@ -6607,7 +7037,7 @@
             <a:fld id="{573CF4FC-8D0E-4C14-A02E-A429C4519FEF}" type="datetime1">
               <a:rPr lang="en-US" smtClean="0"/>
               <a:pPr/>
-              <a:t>10/7/2025</a:t>
+              <a:t>10/16/2025</a:t>
             </a:fld>
             <a:endParaRPr lang="en-US"/>
           </a:p>
@@ -6752,7 +7182,7 @@
             <a:fld id="{06BDC487-A287-485A-B215-4EC98DD3E443}" type="datetime1">
               <a:rPr lang="en-US" smtClean="0"/>
               <a:pPr/>
-              <a:t>10/7/2025</a:t>
+              <a:t>10/16/2025</a:t>
             </a:fld>
             <a:endParaRPr lang="en-US"/>
           </a:p>
@@ -7033,7 +7463,7 @@
             <a:fld id="{46049AC6-4AC4-4D5F-9A1B-0E1C0FF133F9}" type="datetime1">
               <a:rPr lang="en-US" smtClean="0"/>
               <a:pPr/>
-              <a:t>10/7/2025</a:t>
+              <a:t>10/16/2025</a:t>
             </a:fld>
             <a:endParaRPr lang="en-US"/>
           </a:p>
@@ -7444,7 +7874,7 @@
             <a:fld id="{83AF4EF9-9AC8-4842-AFC3-C27337CCABE8}" type="datetime1">
               <a:rPr lang="en-US" smtClean="0"/>
               <a:pPr/>
-              <a:t>10/7/2025</a:t>
+              <a:t>10/16/2025</a:t>
             </a:fld>
             <a:endParaRPr lang="en-US"/>
           </a:p>
@@ -7785,7 +8215,7 @@
             <a:fld id="{8DF0DD18-6EB7-49F7-A70C-A012EDB48BDB}" type="datetime1">
               <a:rPr lang="en-US" smtClean="0"/>
               <a:pPr/>
-              <a:t>10/7/2025</a:t>
+              <a:t>10/16/2025</a:t>
             </a:fld>
             <a:endParaRPr lang="en-US"/>
           </a:p>
@@ -32607,6 +33037,2272 @@
 </p:sld>
 </file>
 
+<file path=ppt/slides/slide31.xml><?xml version="1.0" encoding="utf-8"?>
+<p:sld xmlns:a="http://schemas.openxmlformats.org/drawingml/2006/main" xmlns:r="http://schemas.openxmlformats.org/officeDocument/2006/relationships" xmlns:p="http://schemas.openxmlformats.org/presentationml/2006/main">
+  <p:cSld>
+    <p:spTree>
+      <p:nvGrpSpPr>
+        <p:cNvPr id="1" name=""/>
+        <p:cNvGrpSpPr/>
+        <p:nvPr/>
+      </p:nvGrpSpPr>
+      <p:grpSpPr>
+        <a:xfrm>
+          <a:off x="0" y="0"/>
+          <a:ext cx="0" cy="0"/>
+          <a:chOff x="0" y="0"/>
+          <a:chExt cx="0" cy="0"/>
+        </a:xfrm>
+      </p:grpSpPr>
+      <p:sp>
+        <p:nvSpPr>
+          <p:cNvPr id="2" name="Title 1">
+            <a:extLst>
+              <a:ext uri="{FF2B5EF4-FFF2-40B4-BE49-F238E27FC236}">
+                <a16:creationId xmlns:a16="http://schemas.microsoft.com/office/drawing/2014/main" id="{F578278E-4A38-6767-6648-B9C79941AF43}"/>
+              </a:ext>
+            </a:extLst>
+          </p:cNvPr>
+          <p:cNvSpPr>
+            <a:spLocks noGrp="1"/>
+          </p:cNvSpPr>
+          <p:nvPr>
+            <p:ph type="title"/>
+          </p:nvPr>
+        </p:nvSpPr>
+        <p:spPr>
+          <a:xfrm>
+            <a:off x="4464040" y="243245"/>
+            <a:ext cx="4676172" cy="990600"/>
+          </a:xfrm>
+        </p:spPr>
+        <p:txBody>
+          <a:bodyPr>
+            <a:normAutofit fontScale="90000"/>
+          </a:bodyPr>
+          <a:lstStyle/>
+          <a:p>
+            <a:r>
+              <a:rPr lang="en-US" dirty="0"/>
+              <a:t>Compute register and memory values at each step of this program</a:t>
+            </a:r>
+          </a:p>
+        </p:txBody>
+      </p:sp>
+      <p:sp>
+        <p:nvSpPr>
+          <p:cNvPr id="3" name="Slide Number Placeholder 2">
+            <a:extLst>
+              <a:ext uri="{FF2B5EF4-FFF2-40B4-BE49-F238E27FC236}">
+                <a16:creationId xmlns:a16="http://schemas.microsoft.com/office/drawing/2014/main" id="{475BC598-EF55-AB51-D906-12E17238C9A8}"/>
+              </a:ext>
+            </a:extLst>
+          </p:cNvPr>
+          <p:cNvSpPr>
+            <a:spLocks noGrp="1"/>
+          </p:cNvSpPr>
+          <p:nvPr>
+            <p:ph type="sldNum" sz="quarter" idx="12"/>
+          </p:nvPr>
+        </p:nvSpPr>
+        <p:spPr>
+          <a:xfrm>
+            <a:off x="724422" y="6277253"/>
+            <a:ext cx="1981200" cy="365760"/>
+          </a:xfrm>
+        </p:spPr>
+        <p:txBody>
+          <a:bodyPr/>
+          <a:lstStyle/>
+          <a:p>
+            <a:fld id="{AEE14D4A-FE32-40AF-B06D-E9622816B101}" type="slidenum">
+              <a:rPr lang="en-US" smtClean="0"/>
+              <a:pPr/>
+              <a:t>31</a:t>
+            </a:fld>
+            <a:endParaRPr lang="en-US"/>
+          </a:p>
+        </p:txBody>
+      </p:sp>
+      <p:graphicFrame>
+        <p:nvGraphicFramePr>
+          <p:cNvPr id="5" name="Content Placeholder 4">
+            <a:extLst>
+              <a:ext uri="{FF2B5EF4-FFF2-40B4-BE49-F238E27FC236}">
+                <a16:creationId xmlns:a16="http://schemas.microsoft.com/office/drawing/2014/main" id="{291244C1-EEA0-B959-8AAA-2875319F934B}"/>
+              </a:ext>
+            </a:extLst>
+          </p:cNvPr>
+          <p:cNvGraphicFramePr>
+            <a:graphicFrameLocks noGrp="1"/>
+          </p:cNvGraphicFramePr>
+          <p:nvPr>
+            <p:ph sz="quarter" idx="1"/>
+            <p:extLst>
+              <p:ext uri="{D42A27DB-BD31-4B8C-83A1-F6EECF244321}">
+                <p14:modId xmlns:p14="http://schemas.microsoft.com/office/powerpoint/2010/main" val="1952280423"/>
+              </p:ext>
+            </p:extLst>
+          </p:nvPr>
+        </p:nvGraphicFramePr>
+        <p:xfrm>
+          <a:off x="6802126" y="3426241"/>
+          <a:ext cx="2219325" cy="2966720"/>
+        </p:xfrm>
+        <a:graphic>
+          <a:graphicData uri="http://schemas.openxmlformats.org/drawingml/2006/table">
+            <a:tbl>
+              <a:tblPr firstRow="1" bandRow="1">
+                <a:tableStyleId>{5940675A-B579-460E-94D1-54222C63F5DA}</a:tableStyleId>
+              </a:tblPr>
+              <a:tblGrid>
+                <a:gridCol w="537012">
+                  <a:extLst>
+                    <a:ext uri="{9D8B030D-6E8A-4147-A177-3AD203B41FA5}">
+                      <a16:colId xmlns:a16="http://schemas.microsoft.com/office/drawing/2014/main" val="3133599075"/>
+                    </a:ext>
+                  </a:extLst>
+                </a:gridCol>
+                <a:gridCol w="1682313">
+                  <a:extLst>
+                    <a:ext uri="{9D8B030D-6E8A-4147-A177-3AD203B41FA5}">
+                      <a16:colId xmlns:a16="http://schemas.microsoft.com/office/drawing/2014/main" val="1327154262"/>
+                    </a:ext>
+                  </a:extLst>
+                </a:gridCol>
+              </a:tblGrid>
+              <a:tr h="370840">
+                <a:tc>
+                  <a:txBody>
+                    <a:bodyPr/>
+                    <a:lstStyle/>
+                    <a:p>
+                      <a:pPr marL="0" algn="ctr" rtl="0" eaLnBrk="1" latinLnBrk="0" hangingPunct="1"/>
+                      <a:r>
+                        <a:rPr kumimoji="0" lang="en-US" kern="1200" dirty="0">
+                          <a:solidFill>
+                            <a:schemeClr val="tx1"/>
+                          </a:solidFill>
+                          <a:latin typeface="+mn-lt"/>
+                          <a:ea typeface="+mn-ea"/>
+                          <a:cs typeface="+mn-cs"/>
+                        </a:rPr>
+                        <a:t>R0</a:t>
+                      </a:r>
+                    </a:p>
+                  </a:txBody>
+                  <a:tcPr/>
+                </a:tc>
+                <a:tc>
+                  <a:txBody>
+                    <a:bodyPr/>
+                    <a:lstStyle/>
+                    <a:p>
+                      <a:pPr marL="0" algn="ctr" rtl="0" eaLnBrk="1" latinLnBrk="0" hangingPunct="1"/>
+                      <a:r>
+                        <a:rPr kumimoji="0" lang="pt-BR" kern="1200" dirty="0">
+                          <a:solidFill>
+                            <a:schemeClr val="tx1"/>
+                          </a:solidFill>
+                          <a:latin typeface="+mn-lt"/>
+                          <a:ea typeface="+mn-ea"/>
+                          <a:cs typeface="+mn-cs"/>
+                        </a:rPr>
+                        <a:t>0x00000000</a:t>
+                      </a:r>
+                      <a:endParaRPr kumimoji="0" lang="en-US" kern="1200" dirty="0">
+                        <a:solidFill>
+                          <a:schemeClr val="tx1"/>
+                        </a:solidFill>
+                        <a:latin typeface="+mn-lt"/>
+                        <a:ea typeface="+mn-ea"/>
+                        <a:cs typeface="+mn-cs"/>
+                      </a:endParaRPr>
+                    </a:p>
+                  </a:txBody>
+                  <a:tcPr/>
+                </a:tc>
+                <a:extLst>
+                  <a:ext uri="{0D108BD9-81ED-4DB2-BD59-A6C34878D82A}">
+                    <a16:rowId xmlns:a16="http://schemas.microsoft.com/office/drawing/2014/main" val="1814596732"/>
+                  </a:ext>
+                </a:extLst>
+              </a:tr>
+              <a:tr h="370840">
+                <a:tc>
+                  <a:txBody>
+                    <a:bodyPr/>
+                    <a:lstStyle/>
+                    <a:p>
+                      <a:pPr marL="0" algn="ctr" rtl="0" eaLnBrk="1" latinLnBrk="0" hangingPunct="1"/>
+                      <a:r>
+                        <a:rPr kumimoji="0" lang="en-US" kern="1200" dirty="0">
+                          <a:solidFill>
+                            <a:schemeClr val="tx1"/>
+                          </a:solidFill>
+                          <a:latin typeface="+mn-lt"/>
+                          <a:ea typeface="+mn-ea"/>
+                          <a:cs typeface="+mn-cs"/>
+                        </a:rPr>
+                        <a:t>R1</a:t>
+                      </a:r>
+                    </a:p>
+                  </a:txBody>
+                  <a:tcPr/>
+                </a:tc>
+                <a:tc>
+                  <a:txBody>
+                    <a:bodyPr/>
+                    <a:lstStyle/>
+                    <a:p>
+                      <a:pPr marL="0" algn="ctr" rtl="0" eaLnBrk="1" latinLnBrk="0" hangingPunct="1"/>
+                      <a:r>
+                        <a:rPr lang="pt-BR" sz="1800" b="0" i="0" kern="1200" dirty="0">
+                          <a:solidFill>
+                            <a:schemeClr val="tx1"/>
+                          </a:solidFill>
+                          <a:effectLst/>
+                          <a:latin typeface="Times New Roman" pitchFamily="18" charset="0"/>
+                          <a:ea typeface="+mn-ea"/>
+                          <a:cs typeface="+mn-cs"/>
+                        </a:rPr>
+                        <a:t>0x10000200</a:t>
+                      </a:r>
+                      <a:endParaRPr kumimoji="0" lang="en-US" kern="1200" dirty="0">
+                        <a:solidFill>
+                          <a:schemeClr val="tx1"/>
+                        </a:solidFill>
+                        <a:latin typeface="+mn-lt"/>
+                        <a:ea typeface="+mn-ea"/>
+                        <a:cs typeface="+mn-cs"/>
+                      </a:endParaRPr>
+                    </a:p>
+                  </a:txBody>
+                  <a:tcPr/>
+                </a:tc>
+                <a:extLst>
+                  <a:ext uri="{0D108BD9-81ED-4DB2-BD59-A6C34878D82A}">
+                    <a16:rowId xmlns:a16="http://schemas.microsoft.com/office/drawing/2014/main" val="481549779"/>
+                  </a:ext>
+                </a:extLst>
+              </a:tr>
+              <a:tr h="370840">
+                <a:tc>
+                  <a:txBody>
+                    <a:bodyPr/>
+                    <a:lstStyle/>
+                    <a:p>
+                      <a:pPr marL="0" algn="ctr" rtl="0" eaLnBrk="1" latinLnBrk="0" hangingPunct="1"/>
+                      <a:r>
+                        <a:rPr kumimoji="0" lang="en-US" kern="1200" dirty="0">
+                          <a:solidFill>
+                            <a:schemeClr val="tx1"/>
+                          </a:solidFill>
+                          <a:latin typeface="+mn-lt"/>
+                          <a:ea typeface="+mn-ea"/>
+                          <a:cs typeface="+mn-cs"/>
+                        </a:rPr>
+                        <a:t>R2</a:t>
+                      </a:r>
+                    </a:p>
+                  </a:txBody>
+                  <a:tcPr/>
+                </a:tc>
+                <a:tc>
+                  <a:txBody>
+                    <a:bodyPr/>
+                    <a:lstStyle/>
+                    <a:p>
+                      <a:pPr marL="0" algn="ctr" rtl="0" eaLnBrk="1" latinLnBrk="0" hangingPunct="1"/>
+                      <a:r>
+                        <a:rPr lang="pt-BR" sz="1800" b="0" i="0" kern="1200" dirty="0">
+                          <a:solidFill>
+                            <a:schemeClr val="tx1"/>
+                          </a:solidFill>
+                          <a:effectLst/>
+                          <a:latin typeface="Times New Roman" pitchFamily="18" charset="0"/>
+                          <a:ea typeface="+mn-ea"/>
+                          <a:cs typeface="+mn-cs"/>
+                        </a:rPr>
+                        <a:t>0x0000FFFF</a:t>
+                      </a:r>
+                      <a:endParaRPr kumimoji="0" lang="en-US" kern="1200" dirty="0">
+                        <a:solidFill>
+                          <a:schemeClr val="tx1"/>
+                        </a:solidFill>
+                        <a:latin typeface="+mn-lt"/>
+                        <a:ea typeface="+mn-ea"/>
+                        <a:cs typeface="+mn-cs"/>
+                      </a:endParaRPr>
+                    </a:p>
+                  </a:txBody>
+                  <a:tcPr/>
+                </a:tc>
+                <a:extLst>
+                  <a:ext uri="{0D108BD9-81ED-4DB2-BD59-A6C34878D82A}">
+                    <a16:rowId xmlns:a16="http://schemas.microsoft.com/office/drawing/2014/main" val="1337800547"/>
+                  </a:ext>
+                </a:extLst>
+              </a:tr>
+              <a:tr h="370840">
+                <a:tc>
+                  <a:txBody>
+                    <a:bodyPr/>
+                    <a:lstStyle/>
+                    <a:p>
+                      <a:pPr marL="0" algn="ctr" rtl="0" eaLnBrk="1" latinLnBrk="0" hangingPunct="1"/>
+                      <a:r>
+                        <a:rPr kumimoji="0" lang="en-US" kern="1200" dirty="0">
+                          <a:solidFill>
+                            <a:schemeClr val="tx1"/>
+                          </a:solidFill>
+                          <a:latin typeface="+mn-lt"/>
+                          <a:ea typeface="+mn-ea"/>
+                          <a:cs typeface="+mn-cs"/>
+                        </a:rPr>
+                        <a:t>R3</a:t>
+                      </a:r>
+                    </a:p>
+                  </a:txBody>
+                  <a:tcPr/>
+                </a:tc>
+                <a:tc>
+                  <a:txBody>
+                    <a:bodyPr/>
+                    <a:lstStyle/>
+                    <a:p>
+                      <a:pPr marL="0" algn="ctr" rtl="0" eaLnBrk="1" latinLnBrk="0" hangingPunct="1"/>
+                      <a:r>
+                        <a:rPr lang="pt-BR" sz="1800" b="0" i="0" kern="1200" dirty="0">
+                          <a:solidFill>
+                            <a:schemeClr val="tx1"/>
+                          </a:solidFill>
+                          <a:effectLst/>
+                          <a:latin typeface="Times New Roman" pitchFamily="18" charset="0"/>
+                          <a:ea typeface="+mn-ea"/>
+                          <a:cs typeface="+mn-cs"/>
+                        </a:rPr>
+                        <a:t>0x18675309</a:t>
+                      </a:r>
+                      <a:endParaRPr kumimoji="0" lang="en-US" kern="1200" dirty="0">
+                        <a:solidFill>
+                          <a:schemeClr val="tx1"/>
+                        </a:solidFill>
+                        <a:latin typeface="+mn-lt"/>
+                        <a:ea typeface="+mn-ea"/>
+                        <a:cs typeface="+mn-cs"/>
+                      </a:endParaRPr>
+                    </a:p>
+                  </a:txBody>
+                  <a:tcPr/>
+                </a:tc>
+                <a:extLst>
+                  <a:ext uri="{0D108BD9-81ED-4DB2-BD59-A6C34878D82A}">
+                    <a16:rowId xmlns:a16="http://schemas.microsoft.com/office/drawing/2014/main" val="365453190"/>
+                  </a:ext>
+                </a:extLst>
+              </a:tr>
+              <a:tr h="370840">
+                <a:tc>
+                  <a:txBody>
+                    <a:bodyPr/>
+                    <a:lstStyle/>
+                    <a:p>
+                      <a:pPr marL="0" algn="ctr" rtl="0" eaLnBrk="1" latinLnBrk="0" hangingPunct="1"/>
+                      <a:r>
+                        <a:rPr kumimoji="0" lang="en-US" kern="1200" dirty="0">
+                          <a:solidFill>
+                            <a:schemeClr val="tx1"/>
+                          </a:solidFill>
+                          <a:latin typeface="+mn-lt"/>
+                          <a:ea typeface="+mn-ea"/>
+                          <a:cs typeface="+mn-cs"/>
+                        </a:rPr>
+                        <a:t>R4</a:t>
+                      </a:r>
+                    </a:p>
+                  </a:txBody>
+                  <a:tcPr/>
+                </a:tc>
+                <a:tc>
+                  <a:txBody>
+                    <a:bodyPr/>
+                    <a:lstStyle/>
+                    <a:p>
+                      <a:pPr marL="0" algn="ctr" rtl="0" eaLnBrk="1" latinLnBrk="0" hangingPunct="1"/>
+                      <a:r>
+                        <a:rPr lang="pt-BR" sz="1800" b="0" i="0" kern="1200" dirty="0">
+                          <a:solidFill>
+                            <a:schemeClr val="tx1"/>
+                          </a:solidFill>
+                          <a:effectLst/>
+                          <a:latin typeface="Times New Roman" pitchFamily="18" charset="0"/>
+                          <a:ea typeface="+mn-ea"/>
+                          <a:cs typeface="+mn-cs"/>
+                        </a:rPr>
+                        <a:t>0x00000000</a:t>
+                      </a:r>
+                      <a:endParaRPr kumimoji="0" lang="en-US" kern="1200" dirty="0">
+                        <a:solidFill>
+                          <a:schemeClr val="tx1"/>
+                        </a:solidFill>
+                        <a:latin typeface="+mn-lt"/>
+                        <a:ea typeface="+mn-ea"/>
+                        <a:cs typeface="+mn-cs"/>
+                      </a:endParaRPr>
+                    </a:p>
+                  </a:txBody>
+                  <a:tcPr/>
+                </a:tc>
+                <a:extLst>
+                  <a:ext uri="{0D108BD9-81ED-4DB2-BD59-A6C34878D82A}">
+                    <a16:rowId xmlns:a16="http://schemas.microsoft.com/office/drawing/2014/main" val="2217285831"/>
+                  </a:ext>
+                </a:extLst>
+              </a:tr>
+              <a:tr h="370840">
+                <a:tc>
+                  <a:txBody>
+                    <a:bodyPr/>
+                    <a:lstStyle/>
+                    <a:p>
+                      <a:pPr marL="0" algn="ctr" rtl="0" eaLnBrk="1" latinLnBrk="0" hangingPunct="1"/>
+                      <a:r>
+                        <a:rPr kumimoji="0" lang="en-US" kern="1200" dirty="0">
+                          <a:solidFill>
+                            <a:schemeClr val="tx1"/>
+                          </a:solidFill>
+                          <a:latin typeface="+mn-lt"/>
+                          <a:ea typeface="+mn-ea"/>
+                          <a:cs typeface="+mn-cs"/>
+                        </a:rPr>
+                        <a:t>R5</a:t>
+                      </a:r>
+                    </a:p>
+                  </a:txBody>
+                  <a:tcPr/>
+                </a:tc>
+                <a:tc>
+                  <a:txBody>
+                    <a:bodyPr/>
+                    <a:lstStyle/>
+                    <a:p>
+                      <a:pPr marL="0" algn="ctr" rtl="0" eaLnBrk="1" latinLnBrk="0" hangingPunct="1"/>
+                      <a:r>
+                        <a:rPr lang="pt-BR" sz="1800" b="0" i="0" kern="1200" dirty="0">
+                          <a:solidFill>
+                            <a:schemeClr val="tx1"/>
+                          </a:solidFill>
+                          <a:effectLst/>
+                          <a:latin typeface="Times New Roman" pitchFamily="18" charset="0"/>
+                          <a:ea typeface="+mn-ea"/>
+                          <a:cs typeface="+mn-cs"/>
+                        </a:rPr>
+                        <a:t>0x00000000</a:t>
+                      </a:r>
+                      <a:endParaRPr kumimoji="0" lang="en-US" kern="1200" dirty="0">
+                        <a:solidFill>
+                          <a:schemeClr val="tx1"/>
+                        </a:solidFill>
+                        <a:latin typeface="+mn-lt"/>
+                        <a:ea typeface="+mn-ea"/>
+                        <a:cs typeface="+mn-cs"/>
+                      </a:endParaRPr>
+                    </a:p>
+                  </a:txBody>
+                  <a:tcPr/>
+                </a:tc>
+                <a:extLst>
+                  <a:ext uri="{0D108BD9-81ED-4DB2-BD59-A6C34878D82A}">
+                    <a16:rowId xmlns:a16="http://schemas.microsoft.com/office/drawing/2014/main" val="4012525772"/>
+                  </a:ext>
+                </a:extLst>
+              </a:tr>
+              <a:tr h="370840">
+                <a:tc>
+                  <a:txBody>
+                    <a:bodyPr/>
+                    <a:lstStyle/>
+                    <a:p>
+                      <a:pPr marL="0" algn="ctr" rtl="0" eaLnBrk="1" latinLnBrk="0" hangingPunct="1"/>
+                      <a:r>
+                        <a:rPr kumimoji="0" lang="en-US" kern="1200" dirty="0">
+                          <a:solidFill>
+                            <a:schemeClr val="tx1"/>
+                          </a:solidFill>
+                          <a:latin typeface="+mn-lt"/>
+                          <a:ea typeface="+mn-ea"/>
+                          <a:cs typeface="+mn-cs"/>
+                        </a:rPr>
+                        <a:t>…</a:t>
+                      </a:r>
+                    </a:p>
+                  </a:txBody>
+                  <a:tcPr/>
+                </a:tc>
+                <a:tc>
+                  <a:txBody>
+                    <a:bodyPr/>
+                    <a:lstStyle/>
+                    <a:p>
+                      <a:pPr marL="0" algn="ctr" rtl="0" eaLnBrk="1" latinLnBrk="0" hangingPunct="1"/>
+                      <a:endParaRPr kumimoji="0" lang="en-US" kern="1200" dirty="0">
+                        <a:solidFill>
+                          <a:schemeClr val="tx1"/>
+                        </a:solidFill>
+                        <a:latin typeface="+mn-lt"/>
+                        <a:ea typeface="+mn-ea"/>
+                        <a:cs typeface="+mn-cs"/>
+                      </a:endParaRPr>
+                    </a:p>
+                  </a:txBody>
+                  <a:tcPr/>
+                </a:tc>
+                <a:extLst>
+                  <a:ext uri="{0D108BD9-81ED-4DB2-BD59-A6C34878D82A}">
+                    <a16:rowId xmlns:a16="http://schemas.microsoft.com/office/drawing/2014/main" val="1767889990"/>
+                  </a:ext>
+                </a:extLst>
+              </a:tr>
+              <a:tr h="370840">
+                <a:tc>
+                  <a:txBody>
+                    <a:bodyPr/>
+                    <a:lstStyle/>
+                    <a:p>
+                      <a:pPr marL="0" algn="ctr" rtl="0" eaLnBrk="1" latinLnBrk="0" hangingPunct="1"/>
+                      <a:r>
+                        <a:rPr kumimoji="0" lang="en-US" sz="1600" kern="1200" dirty="0">
+                          <a:solidFill>
+                            <a:schemeClr val="tx1"/>
+                          </a:solidFill>
+                          <a:latin typeface="+mn-lt"/>
+                          <a:ea typeface="+mn-ea"/>
+                          <a:cs typeface="+mn-cs"/>
+                        </a:rPr>
+                        <a:t>R13</a:t>
+                      </a:r>
+                    </a:p>
+                  </a:txBody>
+                  <a:tcPr/>
+                </a:tc>
+                <a:tc>
+                  <a:txBody>
+                    <a:bodyPr/>
+                    <a:lstStyle/>
+                    <a:p>
+                      <a:pPr marL="0" algn="ctr" rtl="0" eaLnBrk="1" latinLnBrk="0" hangingPunct="1"/>
+                      <a:r>
+                        <a:rPr lang="pt-BR" sz="1800" b="0" i="0" kern="1200" dirty="0">
+                          <a:solidFill>
+                            <a:schemeClr val="tx1"/>
+                          </a:solidFill>
+                          <a:effectLst/>
+                          <a:latin typeface="Times New Roman" pitchFamily="18" charset="0"/>
+                          <a:ea typeface="+mn-ea"/>
+                          <a:cs typeface="+mn-cs"/>
+                        </a:rPr>
+                        <a:t>0x10000200</a:t>
+                      </a:r>
+                      <a:endParaRPr kumimoji="0" lang="en-US" kern="1200" dirty="0">
+                        <a:solidFill>
+                          <a:schemeClr val="tx1"/>
+                        </a:solidFill>
+                        <a:latin typeface="+mn-lt"/>
+                        <a:ea typeface="+mn-ea"/>
+                        <a:cs typeface="+mn-cs"/>
+                      </a:endParaRPr>
+                    </a:p>
+                  </a:txBody>
+                  <a:tcPr/>
+                </a:tc>
+                <a:extLst>
+                  <a:ext uri="{0D108BD9-81ED-4DB2-BD59-A6C34878D82A}">
+                    <a16:rowId xmlns:a16="http://schemas.microsoft.com/office/drawing/2014/main" val="2656245920"/>
+                  </a:ext>
+                </a:extLst>
+              </a:tr>
+            </a:tbl>
+          </a:graphicData>
+        </a:graphic>
+      </p:graphicFrame>
+      <p:graphicFrame>
+        <p:nvGraphicFramePr>
+          <p:cNvPr id="10" name="Content Placeholder 9">
+            <a:extLst>
+              <a:ext uri="{FF2B5EF4-FFF2-40B4-BE49-F238E27FC236}">
+                <a16:creationId xmlns:a16="http://schemas.microsoft.com/office/drawing/2014/main" id="{C66D22D6-5FBA-4885-A9F9-CB0B7935CCAF}"/>
+              </a:ext>
+            </a:extLst>
+          </p:cNvPr>
+          <p:cNvGraphicFramePr>
+            <a:graphicFrameLocks/>
+          </p:cNvGraphicFramePr>
+          <p:nvPr>
+            <p:extLst>
+              <p:ext uri="{D42A27DB-BD31-4B8C-83A1-F6EECF244321}">
+                <p14:modId xmlns:p14="http://schemas.microsoft.com/office/powerpoint/2010/main" val="4292557206"/>
+              </p:ext>
+            </p:extLst>
+          </p:nvPr>
+        </p:nvGraphicFramePr>
+        <p:xfrm>
+          <a:off x="404523" y="243245"/>
+          <a:ext cx="599580" cy="5933440"/>
+        </p:xfrm>
+        <a:graphic>
+          <a:graphicData uri="http://schemas.openxmlformats.org/drawingml/2006/table">
+            <a:tbl>
+              <a:tblPr firstRow="1" bandRow="1">
+                <a:tableStyleId>{5940675A-B579-460E-94D1-54222C63F5DA}</a:tableStyleId>
+              </a:tblPr>
+              <a:tblGrid>
+                <a:gridCol w="599580">
+                  <a:extLst>
+                    <a:ext uri="{9D8B030D-6E8A-4147-A177-3AD203B41FA5}">
+                      <a16:colId xmlns:a16="http://schemas.microsoft.com/office/drawing/2014/main" val="484224260"/>
+                    </a:ext>
+                  </a:extLst>
+                </a:gridCol>
+              </a:tblGrid>
+              <a:tr h="370840">
+                <a:tc>
+                  <a:txBody>
+                    <a:bodyPr/>
+                    <a:lstStyle/>
+                    <a:p>
+                      <a:pPr algn="ctr"/>
+                      <a:r>
+                        <a:rPr lang="en-US" dirty="0"/>
+                        <a:t>0F</a:t>
+                      </a:r>
+                    </a:p>
+                  </a:txBody>
+                  <a:tcPr/>
+                </a:tc>
+                <a:extLst>
+                  <a:ext uri="{0D108BD9-81ED-4DB2-BD59-A6C34878D82A}">
+                    <a16:rowId xmlns:a16="http://schemas.microsoft.com/office/drawing/2014/main" val="2369013834"/>
+                  </a:ext>
+                </a:extLst>
+              </a:tr>
+              <a:tr h="370840">
+                <a:tc>
+                  <a:txBody>
+                    <a:bodyPr/>
+                    <a:lstStyle/>
+                    <a:p>
+                      <a:pPr algn="ctr"/>
+                      <a:r>
+                        <a:rPr lang="en-US" dirty="0"/>
+                        <a:t>0E</a:t>
+                      </a:r>
+                    </a:p>
+                  </a:txBody>
+                  <a:tcPr/>
+                </a:tc>
+                <a:extLst>
+                  <a:ext uri="{0D108BD9-81ED-4DB2-BD59-A6C34878D82A}">
+                    <a16:rowId xmlns:a16="http://schemas.microsoft.com/office/drawing/2014/main" val="859108738"/>
+                  </a:ext>
+                </a:extLst>
+              </a:tr>
+              <a:tr h="370840">
+                <a:tc>
+                  <a:txBody>
+                    <a:bodyPr/>
+                    <a:lstStyle/>
+                    <a:p>
+                      <a:pPr algn="ctr"/>
+                      <a:r>
+                        <a:rPr lang="en-US" dirty="0"/>
+                        <a:t>0D</a:t>
+                      </a:r>
+                    </a:p>
+                  </a:txBody>
+                  <a:tcPr/>
+                </a:tc>
+                <a:extLst>
+                  <a:ext uri="{0D108BD9-81ED-4DB2-BD59-A6C34878D82A}">
+                    <a16:rowId xmlns:a16="http://schemas.microsoft.com/office/drawing/2014/main" val="771704"/>
+                  </a:ext>
+                </a:extLst>
+              </a:tr>
+              <a:tr h="370840">
+                <a:tc>
+                  <a:txBody>
+                    <a:bodyPr/>
+                    <a:lstStyle/>
+                    <a:p>
+                      <a:pPr algn="ctr"/>
+                      <a:r>
+                        <a:rPr lang="en-US" dirty="0"/>
+                        <a:t>0C</a:t>
+                      </a:r>
+                    </a:p>
+                  </a:txBody>
+                  <a:tcPr/>
+                </a:tc>
+                <a:extLst>
+                  <a:ext uri="{0D108BD9-81ED-4DB2-BD59-A6C34878D82A}">
+                    <a16:rowId xmlns:a16="http://schemas.microsoft.com/office/drawing/2014/main" val="3326601895"/>
+                  </a:ext>
+                </a:extLst>
+              </a:tr>
+              <a:tr h="370840">
+                <a:tc>
+                  <a:txBody>
+                    <a:bodyPr/>
+                    <a:lstStyle/>
+                    <a:p>
+                      <a:pPr algn="ctr"/>
+                      <a:r>
+                        <a:rPr lang="en-US" dirty="0"/>
+                        <a:t>0B</a:t>
+                      </a:r>
+                    </a:p>
+                  </a:txBody>
+                  <a:tcPr/>
+                </a:tc>
+                <a:extLst>
+                  <a:ext uri="{0D108BD9-81ED-4DB2-BD59-A6C34878D82A}">
+                    <a16:rowId xmlns:a16="http://schemas.microsoft.com/office/drawing/2014/main" val="3935045626"/>
+                  </a:ext>
+                </a:extLst>
+              </a:tr>
+              <a:tr h="370840">
+                <a:tc>
+                  <a:txBody>
+                    <a:bodyPr/>
+                    <a:lstStyle/>
+                    <a:p>
+                      <a:pPr algn="ctr"/>
+                      <a:r>
+                        <a:rPr lang="en-US" dirty="0"/>
+                        <a:t>0A</a:t>
+                      </a:r>
+                    </a:p>
+                  </a:txBody>
+                  <a:tcPr/>
+                </a:tc>
+                <a:extLst>
+                  <a:ext uri="{0D108BD9-81ED-4DB2-BD59-A6C34878D82A}">
+                    <a16:rowId xmlns:a16="http://schemas.microsoft.com/office/drawing/2014/main" val="1822976809"/>
+                  </a:ext>
+                </a:extLst>
+              </a:tr>
+              <a:tr h="370840">
+                <a:tc>
+                  <a:txBody>
+                    <a:bodyPr/>
+                    <a:lstStyle/>
+                    <a:p>
+                      <a:pPr algn="ctr"/>
+                      <a:r>
+                        <a:rPr lang="en-US" dirty="0"/>
+                        <a:t>09</a:t>
+                      </a:r>
+                    </a:p>
+                  </a:txBody>
+                  <a:tcPr/>
+                </a:tc>
+                <a:extLst>
+                  <a:ext uri="{0D108BD9-81ED-4DB2-BD59-A6C34878D82A}">
+                    <a16:rowId xmlns:a16="http://schemas.microsoft.com/office/drawing/2014/main" val="4097080959"/>
+                  </a:ext>
+                </a:extLst>
+              </a:tr>
+              <a:tr h="370840">
+                <a:tc>
+                  <a:txBody>
+                    <a:bodyPr/>
+                    <a:lstStyle/>
+                    <a:p>
+                      <a:pPr algn="ctr"/>
+                      <a:r>
+                        <a:rPr lang="en-US" dirty="0"/>
+                        <a:t>08</a:t>
+                      </a:r>
+                    </a:p>
+                  </a:txBody>
+                  <a:tcPr/>
+                </a:tc>
+                <a:extLst>
+                  <a:ext uri="{0D108BD9-81ED-4DB2-BD59-A6C34878D82A}">
+                    <a16:rowId xmlns:a16="http://schemas.microsoft.com/office/drawing/2014/main" val="2491619246"/>
+                  </a:ext>
+                </a:extLst>
+              </a:tr>
+              <a:tr h="370840">
+                <a:tc>
+                  <a:txBody>
+                    <a:bodyPr/>
+                    <a:lstStyle/>
+                    <a:p>
+                      <a:pPr algn="ctr"/>
+                      <a:r>
+                        <a:rPr lang="en-US" dirty="0"/>
+                        <a:t>07</a:t>
+                      </a:r>
+                    </a:p>
+                  </a:txBody>
+                  <a:tcPr/>
+                </a:tc>
+                <a:extLst>
+                  <a:ext uri="{0D108BD9-81ED-4DB2-BD59-A6C34878D82A}">
+                    <a16:rowId xmlns:a16="http://schemas.microsoft.com/office/drawing/2014/main" val="1151578626"/>
+                  </a:ext>
+                </a:extLst>
+              </a:tr>
+              <a:tr h="370840">
+                <a:tc>
+                  <a:txBody>
+                    <a:bodyPr/>
+                    <a:lstStyle/>
+                    <a:p>
+                      <a:pPr algn="ctr"/>
+                      <a:r>
+                        <a:rPr lang="en-US" dirty="0"/>
+                        <a:t>06</a:t>
+                      </a:r>
+                    </a:p>
+                  </a:txBody>
+                  <a:tcPr/>
+                </a:tc>
+                <a:extLst>
+                  <a:ext uri="{0D108BD9-81ED-4DB2-BD59-A6C34878D82A}">
+                    <a16:rowId xmlns:a16="http://schemas.microsoft.com/office/drawing/2014/main" val="619717567"/>
+                  </a:ext>
+                </a:extLst>
+              </a:tr>
+              <a:tr h="370840">
+                <a:tc>
+                  <a:txBody>
+                    <a:bodyPr/>
+                    <a:lstStyle/>
+                    <a:p>
+                      <a:pPr algn="ctr"/>
+                      <a:r>
+                        <a:rPr lang="en-US" dirty="0"/>
+                        <a:t>05</a:t>
+                      </a:r>
+                    </a:p>
+                  </a:txBody>
+                  <a:tcPr/>
+                </a:tc>
+                <a:extLst>
+                  <a:ext uri="{0D108BD9-81ED-4DB2-BD59-A6C34878D82A}">
+                    <a16:rowId xmlns:a16="http://schemas.microsoft.com/office/drawing/2014/main" val="873267540"/>
+                  </a:ext>
+                </a:extLst>
+              </a:tr>
+              <a:tr h="370840">
+                <a:tc>
+                  <a:txBody>
+                    <a:bodyPr/>
+                    <a:lstStyle/>
+                    <a:p>
+                      <a:pPr algn="ctr"/>
+                      <a:r>
+                        <a:rPr lang="en-US" dirty="0"/>
+                        <a:t>04</a:t>
+                      </a:r>
+                    </a:p>
+                  </a:txBody>
+                  <a:tcPr/>
+                </a:tc>
+                <a:extLst>
+                  <a:ext uri="{0D108BD9-81ED-4DB2-BD59-A6C34878D82A}">
+                    <a16:rowId xmlns:a16="http://schemas.microsoft.com/office/drawing/2014/main" val="2595540954"/>
+                  </a:ext>
+                </a:extLst>
+              </a:tr>
+              <a:tr h="370840">
+                <a:tc>
+                  <a:txBody>
+                    <a:bodyPr/>
+                    <a:lstStyle/>
+                    <a:p>
+                      <a:pPr algn="ctr"/>
+                      <a:r>
+                        <a:rPr lang="en-US" dirty="0"/>
+                        <a:t>03</a:t>
+                      </a:r>
+                    </a:p>
+                  </a:txBody>
+                  <a:tcPr/>
+                </a:tc>
+                <a:extLst>
+                  <a:ext uri="{0D108BD9-81ED-4DB2-BD59-A6C34878D82A}">
+                    <a16:rowId xmlns:a16="http://schemas.microsoft.com/office/drawing/2014/main" val="3259480353"/>
+                  </a:ext>
+                </a:extLst>
+              </a:tr>
+              <a:tr h="370840">
+                <a:tc>
+                  <a:txBody>
+                    <a:bodyPr/>
+                    <a:lstStyle/>
+                    <a:p>
+                      <a:pPr algn="ctr"/>
+                      <a:r>
+                        <a:rPr lang="en-US" dirty="0"/>
+                        <a:t>02</a:t>
+                      </a:r>
+                    </a:p>
+                  </a:txBody>
+                  <a:tcPr/>
+                </a:tc>
+                <a:extLst>
+                  <a:ext uri="{0D108BD9-81ED-4DB2-BD59-A6C34878D82A}">
+                    <a16:rowId xmlns:a16="http://schemas.microsoft.com/office/drawing/2014/main" val="930990083"/>
+                  </a:ext>
+                </a:extLst>
+              </a:tr>
+              <a:tr h="370840">
+                <a:tc>
+                  <a:txBody>
+                    <a:bodyPr/>
+                    <a:lstStyle/>
+                    <a:p>
+                      <a:pPr algn="ctr"/>
+                      <a:r>
+                        <a:rPr lang="en-US" dirty="0"/>
+                        <a:t>01</a:t>
+                      </a:r>
+                    </a:p>
+                  </a:txBody>
+                  <a:tcPr/>
+                </a:tc>
+                <a:extLst>
+                  <a:ext uri="{0D108BD9-81ED-4DB2-BD59-A6C34878D82A}">
+                    <a16:rowId xmlns:a16="http://schemas.microsoft.com/office/drawing/2014/main" val="1201759903"/>
+                  </a:ext>
+                </a:extLst>
+              </a:tr>
+              <a:tr h="370840">
+                <a:tc>
+                  <a:txBody>
+                    <a:bodyPr/>
+                    <a:lstStyle/>
+                    <a:p>
+                      <a:pPr algn="ctr"/>
+                      <a:r>
+                        <a:rPr lang="en-US" dirty="0"/>
+                        <a:t>00</a:t>
+                      </a:r>
+                    </a:p>
+                  </a:txBody>
+                  <a:tcPr/>
+                </a:tc>
+                <a:extLst>
+                  <a:ext uri="{0D108BD9-81ED-4DB2-BD59-A6C34878D82A}">
+                    <a16:rowId xmlns:a16="http://schemas.microsoft.com/office/drawing/2014/main" val="3680620396"/>
+                  </a:ext>
+                </a:extLst>
+              </a:tr>
+            </a:tbl>
+          </a:graphicData>
+        </a:graphic>
+      </p:graphicFrame>
+      <p:graphicFrame>
+        <p:nvGraphicFramePr>
+          <p:cNvPr id="11" name="Content Placeholder 9">
+            <a:extLst>
+              <a:ext uri="{FF2B5EF4-FFF2-40B4-BE49-F238E27FC236}">
+                <a16:creationId xmlns:a16="http://schemas.microsoft.com/office/drawing/2014/main" id="{77A79F3C-0AA4-B3F6-0754-9C4A0DBE1DEF}"/>
+              </a:ext>
+            </a:extLst>
+          </p:cNvPr>
+          <p:cNvGraphicFramePr>
+            <a:graphicFrameLocks/>
+          </p:cNvGraphicFramePr>
+          <p:nvPr>
+            <p:extLst>
+              <p:ext uri="{D42A27DB-BD31-4B8C-83A1-F6EECF244321}">
+                <p14:modId xmlns:p14="http://schemas.microsoft.com/office/powerpoint/2010/main" val="3324919692"/>
+              </p:ext>
+            </p:extLst>
+          </p:nvPr>
+        </p:nvGraphicFramePr>
+        <p:xfrm>
+          <a:off x="1725741" y="223520"/>
+          <a:ext cx="599580" cy="5933440"/>
+        </p:xfrm>
+        <a:graphic>
+          <a:graphicData uri="http://schemas.openxmlformats.org/drawingml/2006/table">
+            <a:tbl>
+              <a:tblPr firstRow="1" bandRow="1">
+                <a:tableStyleId>{5940675A-B579-460E-94D1-54222C63F5DA}</a:tableStyleId>
+              </a:tblPr>
+              <a:tblGrid>
+                <a:gridCol w="599580">
+                  <a:extLst>
+                    <a:ext uri="{9D8B030D-6E8A-4147-A177-3AD203B41FA5}">
+                      <a16:colId xmlns:a16="http://schemas.microsoft.com/office/drawing/2014/main" val="484224260"/>
+                    </a:ext>
+                  </a:extLst>
+                </a:gridCol>
+              </a:tblGrid>
+              <a:tr h="370840">
+                <a:tc>
+                  <a:txBody>
+                    <a:bodyPr/>
+                    <a:lstStyle/>
+                    <a:p>
+                      <a:pPr algn="ctr"/>
+                      <a:r>
+                        <a:rPr lang="en-US" dirty="0"/>
+                        <a:t>1F</a:t>
+                      </a:r>
+                    </a:p>
+                  </a:txBody>
+                  <a:tcPr/>
+                </a:tc>
+                <a:extLst>
+                  <a:ext uri="{0D108BD9-81ED-4DB2-BD59-A6C34878D82A}">
+                    <a16:rowId xmlns:a16="http://schemas.microsoft.com/office/drawing/2014/main" val="2369013834"/>
+                  </a:ext>
+                </a:extLst>
+              </a:tr>
+              <a:tr h="370840">
+                <a:tc>
+                  <a:txBody>
+                    <a:bodyPr/>
+                    <a:lstStyle/>
+                    <a:p>
+                      <a:pPr algn="ctr"/>
+                      <a:r>
+                        <a:rPr lang="en-US" dirty="0"/>
+                        <a:t>1E</a:t>
+                      </a:r>
+                    </a:p>
+                  </a:txBody>
+                  <a:tcPr/>
+                </a:tc>
+                <a:extLst>
+                  <a:ext uri="{0D108BD9-81ED-4DB2-BD59-A6C34878D82A}">
+                    <a16:rowId xmlns:a16="http://schemas.microsoft.com/office/drawing/2014/main" val="859108738"/>
+                  </a:ext>
+                </a:extLst>
+              </a:tr>
+              <a:tr h="370840">
+                <a:tc>
+                  <a:txBody>
+                    <a:bodyPr/>
+                    <a:lstStyle/>
+                    <a:p>
+                      <a:pPr algn="ctr"/>
+                      <a:r>
+                        <a:rPr lang="en-US" dirty="0"/>
+                        <a:t>1D</a:t>
+                      </a:r>
+                    </a:p>
+                  </a:txBody>
+                  <a:tcPr/>
+                </a:tc>
+                <a:extLst>
+                  <a:ext uri="{0D108BD9-81ED-4DB2-BD59-A6C34878D82A}">
+                    <a16:rowId xmlns:a16="http://schemas.microsoft.com/office/drawing/2014/main" val="771704"/>
+                  </a:ext>
+                </a:extLst>
+              </a:tr>
+              <a:tr h="370840">
+                <a:tc>
+                  <a:txBody>
+                    <a:bodyPr/>
+                    <a:lstStyle/>
+                    <a:p>
+                      <a:pPr algn="ctr"/>
+                      <a:r>
+                        <a:rPr lang="en-US" dirty="0"/>
+                        <a:t>1C</a:t>
+                      </a:r>
+                    </a:p>
+                  </a:txBody>
+                  <a:tcPr/>
+                </a:tc>
+                <a:extLst>
+                  <a:ext uri="{0D108BD9-81ED-4DB2-BD59-A6C34878D82A}">
+                    <a16:rowId xmlns:a16="http://schemas.microsoft.com/office/drawing/2014/main" val="3326601895"/>
+                  </a:ext>
+                </a:extLst>
+              </a:tr>
+              <a:tr h="370840">
+                <a:tc>
+                  <a:txBody>
+                    <a:bodyPr/>
+                    <a:lstStyle/>
+                    <a:p>
+                      <a:pPr algn="ctr"/>
+                      <a:r>
+                        <a:rPr lang="en-US" dirty="0"/>
+                        <a:t>1B</a:t>
+                      </a:r>
+                    </a:p>
+                  </a:txBody>
+                  <a:tcPr/>
+                </a:tc>
+                <a:extLst>
+                  <a:ext uri="{0D108BD9-81ED-4DB2-BD59-A6C34878D82A}">
+                    <a16:rowId xmlns:a16="http://schemas.microsoft.com/office/drawing/2014/main" val="3935045626"/>
+                  </a:ext>
+                </a:extLst>
+              </a:tr>
+              <a:tr h="370840">
+                <a:tc>
+                  <a:txBody>
+                    <a:bodyPr/>
+                    <a:lstStyle/>
+                    <a:p>
+                      <a:pPr algn="ctr"/>
+                      <a:r>
+                        <a:rPr lang="en-US" dirty="0"/>
+                        <a:t>1A</a:t>
+                      </a:r>
+                    </a:p>
+                  </a:txBody>
+                  <a:tcPr/>
+                </a:tc>
+                <a:extLst>
+                  <a:ext uri="{0D108BD9-81ED-4DB2-BD59-A6C34878D82A}">
+                    <a16:rowId xmlns:a16="http://schemas.microsoft.com/office/drawing/2014/main" val="1822976809"/>
+                  </a:ext>
+                </a:extLst>
+              </a:tr>
+              <a:tr h="370840">
+                <a:tc>
+                  <a:txBody>
+                    <a:bodyPr/>
+                    <a:lstStyle/>
+                    <a:p>
+                      <a:pPr algn="ctr"/>
+                      <a:r>
+                        <a:rPr lang="en-US" dirty="0"/>
+                        <a:t>19</a:t>
+                      </a:r>
+                    </a:p>
+                  </a:txBody>
+                  <a:tcPr/>
+                </a:tc>
+                <a:extLst>
+                  <a:ext uri="{0D108BD9-81ED-4DB2-BD59-A6C34878D82A}">
+                    <a16:rowId xmlns:a16="http://schemas.microsoft.com/office/drawing/2014/main" val="4097080959"/>
+                  </a:ext>
+                </a:extLst>
+              </a:tr>
+              <a:tr h="370840">
+                <a:tc>
+                  <a:txBody>
+                    <a:bodyPr/>
+                    <a:lstStyle/>
+                    <a:p>
+                      <a:pPr algn="ctr"/>
+                      <a:r>
+                        <a:rPr lang="en-US" dirty="0"/>
+                        <a:t>18</a:t>
+                      </a:r>
+                    </a:p>
+                  </a:txBody>
+                  <a:tcPr/>
+                </a:tc>
+                <a:extLst>
+                  <a:ext uri="{0D108BD9-81ED-4DB2-BD59-A6C34878D82A}">
+                    <a16:rowId xmlns:a16="http://schemas.microsoft.com/office/drawing/2014/main" val="2491619246"/>
+                  </a:ext>
+                </a:extLst>
+              </a:tr>
+              <a:tr h="370840">
+                <a:tc>
+                  <a:txBody>
+                    <a:bodyPr/>
+                    <a:lstStyle/>
+                    <a:p>
+                      <a:pPr algn="ctr"/>
+                      <a:r>
+                        <a:rPr lang="en-US" dirty="0"/>
+                        <a:t>17</a:t>
+                      </a:r>
+                    </a:p>
+                  </a:txBody>
+                  <a:tcPr/>
+                </a:tc>
+                <a:extLst>
+                  <a:ext uri="{0D108BD9-81ED-4DB2-BD59-A6C34878D82A}">
+                    <a16:rowId xmlns:a16="http://schemas.microsoft.com/office/drawing/2014/main" val="1151578626"/>
+                  </a:ext>
+                </a:extLst>
+              </a:tr>
+              <a:tr h="370840">
+                <a:tc>
+                  <a:txBody>
+                    <a:bodyPr/>
+                    <a:lstStyle/>
+                    <a:p>
+                      <a:pPr algn="ctr"/>
+                      <a:r>
+                        <a:rPr lang="en-US" dirty="0"/>
+                        <a:t>16</a:t>
+                      </a:r>
+                    </a:p>
+                  </a:txBody>
+                  <a:tcPr/>
+                </a:tc>
+                <a:extLst>
+                  <a:ext uri="{0D108BD9-81ED-4DB2-BD59-A6C34878D82A}">
+                    <a16:rowId xmlns:a16="http://schemas.microsoft.com/office/drawing/2014/main" val="619717567"/>
+                  </a:ext>
+                </a:extLst>
+              </a:tr>
+              <a:tr h="370840">
+                <a:tc>
+                  <a:txBody>
+                    <a:bodyPr/>
+                    <a:lstStyle/>
+                    <a:p>
+                      <a:pPr algn="ctr"/>
+                      <a:r>
+                        <a:rPr lang="en-US" dirty="0"/>
+                        <a:t>15</a:t>
+                      </a:r>
+                    </a:p>
+                  </a:txBody>
+                  <a:tcPr/>
+                </a:tc>
+                <a:extLst>
+                  <a:ext uri="{0D108BD9-81ED-4DB2-BD59-A6C34878D82A}">
+                    <a16:rowId xmlns:a16="http://schemas.microsoft.com/office/drawing/2014/main" val="873267540"/>
+                  </a:ext>
+                </a:extLst>
+              </a:tr>
+              <a:tr h="370840">
+                <a:tc>
+                  <a:txBody>
+                    <a:bodyPr/>
+                    <a:lstStyle/>
+                    <a:p>
+                      <a:pPr algn="ctr"/>
+                      <a:r>
+                        <a:rPr lang="en-US" dirty="0"/>
+                        <a:t>14</a:t>
+                      </a:r>
+                    </a:p>
+                  </a:txBody>
+                  <a:tcPr/>
+                </a:tc>
+                <a:extLst>
+                  <a:ext uri="{0D108BD9-81ED-4DB2-BD59-A6C34878D82A}">
+                    <a16:rowId xmlns:a16="http://schemas.microsoft.com/office/drawing/2014/main" val="2595540954"/>
+                  </a:ext>
+                </a:extLst>
+              </a:tr>
+              <a:tr h="370840">
+                <a:tc>
+                  <a:txBody>
+                    <a:bodyPr/>
+                    <a:lstStyle/>
+                    <a:p>
+                      <a:pPr algn="ctr"/>
+                      <a:r>
+                        <a:rPr lang="en-US" dirty="0"/>
+                        <a:t>13</a:t>
+                      </a:r>
+                    </a:p>
+                  </a:txBody>
+                  <a:tcPr/>
+                </a:tc>
+                <a:extLst>
+                  <a:ext uri="{0D108BD9-81ED-4DB2-BD59-A6C34878D82A}">
+                    <a16:rowId xmlns:a16="http://schemas.microsoft.com/office/drawing/2014/main" val="3259480353"/>
+                  </a:ext>
+                </a:extLst>
+              </a:tr>
+              <a:tr h="370840">
+                <a:tc>
+                  <a:txBody>
+                    <a:bodyPr/>
+                    <a:lstStyle/>
+                    <a:p>
+                      <a:pPr algn="ctr"/>
+                      <a:r>
+                        <a:rPr lang="en-US" dirty="0"/>
+                        <a:t>12</a:t>
+                      </a:r>
+                    </a:p>
+                  </a:txBody>
+                  <a:tcPr/>
+                </a:tc>
+                <a:extLst>
+                  <a:ext uri="{0D108BD9-81ED-4DB2-BD59-A6C34878D82A}">
+                    <a16:rowId xmlns:a16="http://schemas.microsoft.com/office/drawing/2014/main" val="930990083"/>
+                  </a:ext>
+                </a:extLst>
+              </a:tr>
+              <a:tr h="370840">
+                <a:tc>
+                  <a:txBody>
+                    <a:bodyPr/>
+                    <a:lstStyle/>
+                    <a:p>
+                      <a:pPr algn="ctr"/>
+                      <a:r>
+                        <a:rPr lang="en-US" dirty="0"/>
+                        <a:t>11</a:t>
+                      </a:r>
+                    </a:p>
+                  </a:txBody>
+                  <a:tcPr/>
+                </a:tc>
+                <a:extLst>
+                  <a:ext uri="{0D108BD9-81ED-4DB2-BD59-A6C34878D82A}">
+                    <a16:rowId xmlns:a16="http://schemas.microsoft.com/office/drawing/2014/main" val="1201759903"/>
+                  </a:ext>
+                </a:extLst>
+              </a:tr>
+              <a:tr h="370840">
+                <a:tc>
+                  <a:txBody>
+                    <a:bodyPr/>
+                    <a:lstStyle/>
+                    <a:p>
+                      <a:pPr algn="ctr"/>
+                      <a:r>
+                        <a:rPr lang="en-US" dirty="0"/>
+                        <a:t>10</a:t>
+                      </a:r>
+                    </a:p>
+                  </a:txBody>
+                  <a:tcPr/>
+                </a:tc>
+                <a:extLst>
+                  <a:ext uri="{0D108BD9-81ED-4DB2-BD59-A6C34878D82A}">
+                    <a16:rowId xmlns:a16="http://schemas.microsoft.com/office/drawing/2014/main" val="3680620396"/>
+                  </a:ext>
+                </a:extLst>
+              </a:tr>
+            </a:tbl>
+          </a:graphicData>
+        </a:graphic>
+      </p:graphicFrame>
+      <p:graphicFrame>
+        <p:nvGraphicFramePr>
+          <p:cNvPr id="12" name="Content Placeholder 9">
+            <a:extLst>
+              <a:ext uri="{FF2B5EF4-FFF2-40B4-BE49-F238E27FC236}">
+                <a16:creationId xmlns:a16="http://schemas.microsoft.com/office/drawing/2014/main" id="{8E0D479D-BD41-9749-78E1-AE7DB7FEF62B}"/>
+              </a:ext>
+            </a:extLst>
+          </p:cNvPr>
+          <p:cNvGraphicFramePr>
+            <a:graphicFrameLocks/>
+          </p:cNvGraphicFramePr>
+          <p:nvPr>
+            <p:extLst>
+              <p:ext uri="{D42A27DB-BD31-4B8C-83A1-F6EECF244321}">
+                <p14:modId xmlns:p14="http://schemas.microsoft.com/office/powerpoint/2010/main" val="636815016"/>
+              </p:ext>
+            </p:extLst>
+          </p:nvPr>
+        </p:nvGraphicFramePr>
+        <p:xfrm>
+          <a:off x="3320795" y="219948"/>
+          <a:ext cx="599580" cy="5933440"/>
+        </p:xfrm>
+        <a:graphic>
+          <a:graphicData uri="http://schemas.openxmlformats.org/drawingml/2006/table">
+            <a:tbl>
+              <a:tblPr firstRow="1" bandRow="1">
+                <a:tableStyleId>{5940675A-B579-460E-94D1-54222C63F5DA}</a:tableStyleId>
+              </a:tblPr>
+              <a:tblGrid>
+                <a:gridCol w="599580">
+                  <a:extLst>
+                    <a:ext uri="{9D8B030D-6E8A-4147-A177-3AD203B41FA5}">
+                      <a16:colId xmlns:a16="http://schemas.microsoft.com/office/drawing/2014/main" val="484224260"/>
+                    </a:ext>
+                  </a:extLst>
+                </a:gridCol>
+              </a:tblGrid>
+              <a:tr h="370840">
+                <a:tc>
+                  <a:txBody>
+                    <a:bodyPr/>
+                    <a:lstStyle/>
+                    <a:p>
+                      <a:pPr algn="ctr"/>
+                      <a:r>
+                        <a:rPr lang="en-US" dirty="0"/>
+                        <a:t>AA</a:t>
+                      </a:r>
+                    </a:p>
+                  </a:txBody>
+                  <a:tcPr/>
+                </a:tc>
+                <a:extLst>
+                  <a:ext uri="{0D108BD9-81ED-4DB2-BD59-A6C34878D82A}">
+                    <a16:rowId xmlns:a16="http://schemas.microsoft.com/office/drawing/2014/main" val="2369013834"/>
+                  </a:ext>
+                </a:extLst>
+              </a:tr>
+              <a:tr h="370840">
+                <a:tc>
+                  <a:txBody>
+                    <a:bodyPr/>
+                    <a:lstStyle/>
+                    <a:p>
+                      <a:pPr algn="ctr"/>
+                      <a:r>
+                        <a:rPr lang="en-US" dirty="0"/>
+                        <a:t>99</a:t>
+                      </a:r>
+                    </a:p>
+                  </a:txBody>
+                  <a:tcPr/>
+                </a:tc>
+                <a:extLst>
+                  <a:ext uri="{0D108BD9-81ED-4DB2-BD59-A6C34878D82A}">
+                    <a16:rowId xmlns:a16="http://schemas.microsoft.com/office/drawing/2014/main" val="859108738"/>
+                  </a:ext>
+                </a:extLst>
+              </a:tr>
+              <a:tr h="370840">
+                <a:tc>
+                  <a:txBody>
+                    <a:bodyPr/>
+                    <a:lstStyle/>
+                    <a:p>
+                      <a:pPr algn="ctr"/>
+                      <a:r>
+                        <a:rPr lang="en-US" dirty="0"/>
+                        <a:t>88</a:t>
+                      </a:r>
+                    </a:p>
+                  </a:txBody>
+                  <a:tcPr/>
+                </a:tc>
+                <a:extLst>
+                  <a:ext uri="{0D108BD9-81ED-4DB2-BD59-A6C34878D82A}">
+                    <a16:rowId xmlns:a16="http://schemas.microsoft.com/office/drawing/2014/main" val="771704"/>
+                  </a:ext>
+                </a:extLst>
+              </a:tr>
+              <a:tr h="370840">
+                <a:tc>
+                  <a:txBody>
+                    <a:bodyPr/>
+                    <a:lstStyle/>
+                    <a:p>
+                      <a:pPr algn="ctr"/>
+                      <a:r>
+                        <a:rPr lang="en-US" dirty="0"/>
+                        <a:t>77</a:t>
+                      </a:r>
+                    </a:p>
+                  </a:txBody>
+                  <a:tcPr/>
+                </a:tc>
+                <a:extLst>
+                  <a:ext uri="{0D108BD9-81ED-4DB2-BD59-A6C34878D82A}">
+                    <a16:rowId xmlns:a16="http://schemas.microsoft.com/office/drawing/2014/main" val="3326601895"/>
+                  </a:ext>
+                </a:extLst>
+              </a:tr>
+              <a:tr h="370840">
+                <a:tc>
+                  <a:txBody>
+                    <a:bodyPr/>
+                    <a:lstStyle/>
+                    <a:p>
+                      <a:pPr algn="ctr"/>
+                      <a:r>
+                        <a:rPr lang="en-US" dirty="0"/>
+                        <a:t>66</a:t>
+                      </a:r>
+                    </a:p>
+                  </a:txBody>
+                  <a:tcPr/>
+                </a:tc>
+                <a:extLst>
+                  <a:ext uri="{0D108BD9-81ED-4DB2-BD59-A6C34878D82A}">
+                    <a16:rowId xmlns:a16="http://schemas.microsoft.com/office/drawing/2014/main" val="3935045626"/>
+                  </a:ext>
+                </a:extLst>
+              </a:tr>
+              <a:tr h="370840">
+                <a:tc>
+                  <a:txBody>
+                    <a:bodyPr/>
+                    <a:lstStyle/>
+                    <a:p>
+                      <a:pPr algn="ctr"/>
+                      <a:r>
+                        <a:rPr lang="en-US" dirty="0"/>
+                        <a:t>55</a:t>
+                      </a:r>
+                    </a:p>
+                  </a:txBody>
+                  <a:tcPr/>
+                </a:tc>
+                <a:extLst>
+                  <a:ext uri="{0D108BD9-81ED-4DB2-BD59-A6C34878D82A}">
+                    <a16:rowId xmlns:a16="http://schemas.microsoft.com/office/drawing/2014/main" val="1822976809"/>
+                  </a:ext>
+                </a:extLst>
+              </a:tr>
+              <a:tr h="370840">
+                <a:tc>
+                  <a:txBody>
+                    <a:bodyPr/>
+                    <a:lstStyle/>
+                    <a:p>
+                      <a:pPr algn="ctr"/>
+                      <a:r>
+                        <a:rPr lang="en-US" dirty="0"/>
+                        <a:t>44</a:t>
+                      </a:r>
+                    </a:p>
+                  </a:txBody>
+                  <a:tcPr/>
+                </a:tc>
+                <a:extLst>
+                  <a:ext uri="{0D108BD9-81ED-4DB2-BD59-A6C34878D82A}">
+                    <a16:rowId xmlns:a16="http://schemas.microsoft.com/office/drawing/2014/main" val="4097080959"/>
+                  </a:ext>
+                </a:extLst>
+              </a:tr>
+              <a:tr h="370840">
+                <a:tc>
+                  <a:txBody>
+                    <a:bodyPr/>
+                    <a:lstStyle/>
+                    <a:p>
+                      <a:pPr algn="ctr"/>
+                      <a:r>
+                        <a:rPr lang="en-US" dirty="0"/>
+                        <a:t>33</a:t>
+                      </a:r>
+                    </a:p>
+                  </a:txBody>
+                  <a:tcPr/>
+                </a:tc>
+                <a:extLst>
+                  <a:ext uri="{0D108BD9-81ED-4DB2-BD59-A6C34878D82A}">
+                    <a16:rowId xmlns:a16="http://schemas.microsoft.com/office/drawing/2014/main" val="2491619246"/>
+                  </a:ext>
+                </a:extLst>
+              </a:tr>
+              <a:tr h="370840">
+                <a:tc>
+                  <a:txBody>
+                    <a:bodyPr/>
+                    <a:lstStyle/>
+                    <a:p>
+                      <a:pPr algn="ctr"/>
+                      <a:r>
+                        <a:rPr lang="en-US" dirty="0"/>
+                        <a:t>22</a:t>
+                      </a:r>
+                    </a:p>
+                  </a:txBody>
+                  <a:tcPr/>
+                </a:tc>
+                <a:extLst>
+                  <a:ext uri="{0D108BD9-81ED-4DB2-BD59-A6C34878D82A}">
+                    <a16:rowId xmlns:a16="http://schemas.microsoft.com/office/drawing/2014/main" val="1151578626"/>
+                  </a:ext>
+                </a:extLst>
+              </a:tr>
+              <a:tr h="370840">
+                <a:tc>
+                  <a:txBody>
+                    <a:bodyPr/>
+                    <a:lstStyle/>
+                    <a:p>
+                      <a:pPr algn="ctr"/>
+                      <a:r>
+                        <a:rPr lang="en-US" dirty="0"/>
+                        <a:t>11</a:t>
+                      </a:r>
+                    </a:p>
+                  </a:txBody>
+                  <a:tcPr/>
+                </a:tc>
+                <a:extLst>
+                  <a:ext uri="{0D108BD9-81ED-4DB2-BD59-A6C34878D82A}">
+                    <a16:rowId xmlns:a16="http://schemas.microsoft.com/office/drawing/2014/main" val="619717567"/>
+                  </a:ext>
+                </a:extLst>
+              </a:tr>
+              <a:tr h="370840">
+                <a:tc>
+                  <a:txBody>
+                    <a:bodyPr/>
+                    <a:lstStyle/>
+                    <a:p>
+                      <a:pPr algn="ctr"/>
+                      <a:r>
+                        <a:rPr lang="en-US" dirty="0"/>
+                        <a:t>FF</a:t>
+                      </a:r>
+                    </a:p>
+                  </a:txBody>
+                  <a:tcPr/>
+                </a:tc>
+                <a:extLst>
+                  <a:ext uri="{0D108BD9-81ED-4DB2-BD59-A6C34878D82A}">
+                    <a16:rowId xmlns:a16="http://schemas.microsoft.com/office/drawing/2014/main" val="873267540"/>
+                  </a:ext>
+                </a:extLst>
+              </a:tr>
+              <a:tr h="370840">
+                <a:tc>
+                  <a:txBody>
+                    <a:bodyPr/>
+                    <a:lstStyle/>
+                    <a:p>
+                      <a:pPr algn="ctr"/>
+                      <a:r>
+                        <a:rPr lang="en-US" dirty="0"/>
+                        <a:t>EE</a:t>
+                      </a:r>
+                    </a:p>
+                  </a:txBody>
+                  <a:tcPr/>
+                </a:tc>
+                <a:extLst>
+                  <a:ext uri="{0D108BD9-81ED-4DB2-BD59-A6C34878D82A}">
+                    <a16:rowId xmlns:a16="http://schemas.microsoft.com/office/drawing/2014/main" val="2595540954"/>
+                  </a:ext>
+                </a:extLst>
+              </a:tr>
+              <a:tr h="370840">
+                <a:tc>
+                  <a:txBody>
+                    <a:bodyPr/>
+                    <a:lstStyle/>
+                    <a:p>
+                      <a:pPr algn="ctr"/>
+                      <a:r>
+                        <a:rPr lang="en-US" dirty="0"/>
+                        <a:t>12</a:t>
+                      </a:r>
+                    </a:p>
+                  </a:txBody>
+                  <a:tcPr/>
+                </a:tc>
+                <a:extLst>
+                  <a:ext uri="{0D108BD9-81ED-4DB2-BD59-A6C34878D82A}">
+                    <a16:rowId xmlns:a16="http://schemas.microsoft.com/office/drawing/2014/main" val="3259480353"/>
+                  </a:ext>
+                </a:extLst>
+              </a:tr>
+              <a:tr h="370840">
+                <a:tc>
+                  <a:txBody>
+                    <a:bodyPr/>
+                    <a:lstStyle/>
+                    <a:p>
+                      <a:pPr algn="ctr"/>
+                      <a:r>
+                        <a:rPr lang="en-US" dirty="0"/>
+                        <a:t>11</a:t>
+                      </a:r>
+                    </a:p>
+                  </a:txBody>
+                  <a:tcPr/>
+                </a:tc>
+                <a:extLst>
+                  <a:ext uri="{0D108BD9-81ED-4DB2-BD59-A6C34878D82A}">
+                    <a16:rowId xmlns:a16="http://schemas.microsoft.com/office/drawing/2014/main" val="930990083"/>
+                  </a:ext>
+                </a:extLst>
+              </a:tr>
+              <a:tr h="370840">
+                <a:tc>
+                  <a:txBody>
+                    <a:bodyPr/>
+                    <a:lstStyle/>
+                    <a:p>
+                      <a:pPr algn="ctr"/>
+                      <a:r>
+                        <a:rPr lang="en-US" dirty="0"/>
+                        <a:t>1B</a:t>
+                      </a:r>
+                    </a:p>
+                  </a:txBody>
+                  <a:tcPr/>
+                </a:tc>
+                <a:extLst>
+                  <a:ext uri="{0D108BD9-81ED-4DB2-BD59-A6C34878D82A}">
+                    <a16:rowId xmlns:a16="http://schemas.microsoft.com/office/drawing/2014/main" val="1201759903"/>
+                  </a:ext>
+                </a:extLst>
+              </a:tr>
+              <a:tr h="370840">
+                <a:tc>
+                  <a:txBody>
+                    <a:bodyPr/>
+                    <a:lstStyle/>
+                    <a:p>
+                      <a:pPr algn="ctr"/>
+                      <a:r>
+                        <a:rPr lang="en-US" dirty="0"/>
+                        <a:t>AA</a:t>
+                      </a:r>
+                    </a:p>
+                  </a:txBody>
+                  <a:tcPr/>
+                </a:tc>
+                <a:extLst>
+                  <a:ext uri="{0D108BD9-81ED-4DB2-BD59-A6C34878D82A}">
+                    <a16:rowId xmlns:a16="http://schemas.microsoft.com/office/drawing/2014/main" val="3680620396"/>
+                  </a:ext>
+                </a:extLst>
+              </a:tr>
+            </a:tbl>
+          </a:graphicData>
+        </a:graphic>
+      </p:graphicFrame>
+      <p:sp>
+        <p:nvSpPr>
+          <p:cNvPr id="16" name="TextBox 15">
+            <a:extLst>
+              <a:ext uri="{FF2B5EF4-FFF2-40B4-BE49-F238E27FC236}">
+                <a16:creationId xmlns:a16="http://schemas.microsoft.com/office/drawing/2014/main" id="{D8691280-3701-7284-8180-9F8BD7E6732F}"/>
+              </a:ext>
+            </a:extLst>
+          </p:cNvPr>
+          <p:cNvSpPr txBox="1"/>
+          <p:nvPr/>
+        </p:nvSpPr>
+        <p:spPr>
+          <a:xfrm>
+            <a:off x="0" y="6156960"/>
+            <a:ext cx="1452880" cy="369332"/>
+          </a:xfrm>
+          <a:prstGeom prst="rect">
+            <a:avLst/>
+          </a:prstGeom>
+          <a:noFill/>
+        </p:spPr>
+        <p:txBody>
+          <a:bodyPr wrap="square">
+            <a:spAutoFit/>
+          </a:bodyPr>
+          <a:lstStyle/>
+          <a:p>
+            <a:r>
+              <a:rPr lang="en-US" sz="1800" b="0" dirty="0">
+                <a:latin typeface="Consolas" panose="020B0609020204030204" pitchFamily="49" charset="0"/>
+                <a:cs typeface="Consolas" panose="020B0609020204030204" pitchFamily="49" charset="0"/>
+              </a:rPr>
+              <a:t>0x100001E0</a:t>
+            </a:r>
+          </a:p>
+        </p:txBody>
+      </p:sp>
+      <p:sp>
+        <p:nvSpPr>
+          <p:cNvPr id="17" name="TextBox 16">
+            <a:extLst>
+              <a:ext uri="{FF2B5EF4-FFF2-40B4-BE49-F238E27FC236}">
+                <a16:creationId xmlns:a16="http://schemas.microsoft.com/office/drawing/2014/main" id="{54DAF454-D38A-E54A-0A83-F3163F2194FD}"/>
+              </a:ext>
+            </a:extLst>
+          </p:cNvPr>
+          <p:cNvSpPr txBox="1"/>
+          <p:nvPr/>
+        </p:nvSpPr>
+        <p:spPr>
+          <a:xfrm>
+            <a:off x="10017" y="6396533"/>
+            <a:ext cx="1818921" cy="369332"/>
+          </a:xfrm>
+          <a:prstGeom prst="rect">
+            <a:avLst/>
+          </a:prstGeom>
+          <a:noFill/>
+        </p:spPr>
+        <p:txBody>
+          <a:bodyPr wrap="square">
+            <a:spAutoFit/>
+          </a:bodyPr>
+          <a:lstStyle/>
+          <a:p>
+            <a:r>
+              <a:rPr lang="en-US" sz="1800" b="0" dirty="0">
+                <a:latin typeface="+mn-lt"/>
+                <a:cs typeface="Consolas" panose="020B0609020204030204" pitchFamily="49" charset="0"/>
+              </a:rPr>
+              <a:t>Mem Address</a:t>
+            </a:r>
+          </a:p>
+        </p:txBody>
+      </p:sp>
+      <p:sp>
+        <p:nvSpPr>
+          <p:cNvPr id="18" name="TextBox 17">
+            <a:extLst>
+              <a:ext uri="{FF2B5EF4-FFF2-40B4-BE49-F238E27FC236}">
+                <a16:creationId xmlns:a16="http://schemas.microsoft.com/office/drawing/2014/main" id="{7E2E3134-A567-7018-92F0-D86F35E570CB}"/>
+              </a:ext>
+            </a:extLst>
+          </p:cNvPr>
+          <p:cNvSpPr txBox="1"/>
+          <p:nvPr/>
+        </p:nvSpPr>
+        <p:spPr>
+          <a:xfrm>
+            <a:off x="1487315" y="6156960"/>
+            <a:ext cx="1452880" cy="369332"/>
+          </a:xfrm>
+          <a:prstGeom prst="rect">
+            <a:avLst/>
+          </a:prstGeom>
+          <a:noFill/>
+        </p:spPr>
+        <p:txBody>
+          <a:bodyPr wrap="square">
+            <a:spAutoFit/>
+          </a:bodyPr>
+          <a:lstStyle/>
+          <a:p>
+            <a:r>
+              <a:rPr lang="en-US" sz="1800" b="0" dirty="0">
+                <a:latin typeface="Consolas" panose="020B0609020204030204" pitchFamily="49" charset="0"/>
+              </a:rPr>
+              <a:t>0x100001F0</a:t>
+            </a:r>
+            <a:endParaRPr lang="en-US" sz="1800" b="0" dirty="0">
+              <a:latin typeface="Consolas" panose="020B0609020204030204" pitchFamily="49" charset="0"/>
+              <a:cs typeface="Consolas" panose="020B0609020204030204" pitchFamily="49" charset="0"/>
+            </a:endParaRPr>
+          </a:p>
+        </p:txBody>
+      </p:sp>
+      <p:sp>
+        <p:nvSpPr>
+          <p:cNvPr id="19" name="TextBox 18">
+            <a:extLst>
+              <a:ext uri="{FF2B5EF4-FFF2-40B4-BE49-F238E27FC236}">
+                <a16:creationId xmlns:a16="http://schemas.microsoft.com/office/drawing/2014/main" id="{57E19796-203A-5975-9E7E-A51D96722A9D}"/>
+              </a:ext>
+            </a:extLst>
+          </p:cNvPr>
+          <p:cNvSpPr txBox="1"/>
+          <p:nvPr/>
+        </p:nvSpPr>
+        <p:spPr>
+          <a:xfrm>
+            <a:off x="2894145" y="6159458"/>
+            <a:ext cx="1452880" cy="369332"/>
+          </a:xfrm>
+          <a:prstGeom prst="rect">
+            <a:avLst/>
+          </a:prstGeom>
+          <a:noFill/>
+        </p:spPr>
+        <p:txBody>
+          <a:bodyPr wrap="square">
+            <a:spAutoFit/>
+          </a:bodyPr>
+          <a:lstStyle/>
+          <a:p>
+            <a:r>
+              <a:rPr lang="en-US" sz="1800" b="0" dirty="0">
+                <a:latin typeface="Consolas" panose="020B0609020204030204" pitchFamily="49" charset="0"/>
+              </a:rPr>
+              <a:t>0x10000200</a:t>
+            </a:r>
+            <a:endParaRPr lang="en-US" sz="1800" b="0" dirty="0">
+              <a:latin typeface="Consolas" panose="020B0609020204030204" pitchFamily="49" charset="0"/>
+              <a:cs typeface="Consolas" panose="020B0609020204030204" pitchFamily="49" charset="0"/>
+            </a:endParaRPr>
+          </a:p>
+        </p:txBody>
+      </p:sp>
+      <p:sp>
+        <p:nvSpPr>
+          <p:cNvPr id="20" name="TextBox 19">
+            <a:extLst>
+              <a:ext uri="{FF2B5EF4-FFF2-40B4-BE49-F238E27FC236}">
+                <a16:creationId xmlns:a16="http://schemas.microsoft.com/office/drawing/2014/main" id="{4246B73D-93B0-BE96-6E77-F5047B876FB4}"/>
+              </a:ext>
+            </a:extLst>
+          </p:cNvPr>
+          <p:cNvSpPr txBox="1"/>
+          <p:nvPr/>
+        </p:nvSpPr>
+        <p:spPr>
+          <a:xfrm>
+            <a:off x="1459041" y="6396533"/>
+            <a:ext cx="1562908" cy="365760"/>
+          </a:xfrm>
+          <a:prstGeom prst="rect">
+            <a:avLst/>
+          </a:prstGeom>
+          <a:noFill/>
+        </p:spPr>
+        <p:txBody>
+          <a:bodyPr wrap="square">
+            <a:spAutoFit/>
+          </a:bodyPr>
+          <a:lstStyle/>
+          <a:p>
+            <a:r>
+              <a:rPr lang="en-US" sz="1800" b="0" dirty="0">
+                <a:latin typeface="+mn-lt"/>
+                <a:cs typeface="Consolas" panose="020B0609020204030204" pitchFamily="49" charset="0"/>
+              </a:rPr>
+              <a:t>Mem Address</a:t>
+            </a:r>
+          </a:p>
+        </p:txBody>
+      </p:sp>
+      <p:sp>
+        <p:nvSpPr>
+          <p:cNvPr id="21" name="TextBox 20">
+            <a:extLst>
+              <a:ext uri="{FF2B5EF4-FFF2-40B4-BE49-F238E27FC236}">
+                <a16:creationId xmlns:a16="http://schemas.microsoft.com/office/drawing/2014/main" id="{2D08279E-530F-10AE-C181-2446B85EE3E6}"/>
+              </a:ext>
+            </a:extLst>
+          </p:cNvPr>
+          <p:cNvSpPr txBox="1"/>
+          <p:nvPr/>
+        </p:nvSpPr>
+        <p:spPr>
+          <a:xfrm>
+            <a:off x="2949805" y="6392961"/>
+            <a:ext cx="1562909" cy="369332"/>
+          </a:xfrm>
+          <a:prstGeom prst="rect">
+            <a:avLst/>
+          </a:prstGeom>
+          <a:noFill/>
+        </p:spPr>
+        <p:txBody>
+          <a:bodyPr wrap="square">
+            <a:spAutoFit/>
+          </a:bodyPr>
+          <a:lstStyle/>
+          <a:p>
+            <a:r>
+              <a:rPr lang="en-US" sz="1800" b="0" dirty="0">
+                <a:latin typeface="+mn-lt"/>
+                <a:cs typeface="Consolas" panose="020B0609020204030204" pitchFamily="49" charset="0"/>
+              </a:rPr>
+              <a:t>Mem Address</a:t>
+            </a:r>
+          </a:p>
+        </p:txBody>
+      </p:sp>
+      <p:sp>
+        <p:nvSpPr>
+          <p:cNvPr id="6" name="Content Placeholder 3">
+            <a:extLst>
+              <a:ext uri="{FF2B5EF4-FFF2-40B4-BE49-F238E27FC236}">
+                <a16:creationId xmlns:a16="http://schemas.microsoft.com/office/drawing/2014/main" id="{57F96825-B097-324D-C2F7-FAFF800F7FC6}"/>
+              </a:ext>
+            </a:extLst>
+          </p:cNvPr>
+          <p:cNvSpPr txBox="1">
+            <a:spLocks/>
+          </p:cNvSpPr>
+          <p:nvPr/>
+        </p:nvSpPr>
+        <p:spPr>
+          <a:xfrm>
+            <a:off x="4091355" y="1331259"/>
+            <a:ext cx="4877877" cy="2686131"/>
+          </a:xfrm>
+          <a:prstGeom prst="rect">
+            <a:avLst/>
+          </a:prstGeom>
+        </p:spPr>
+        <p:txBody>
+          <a:bodyPr vert="horz">
+            <a:normAutofit fontScale="92500" lnSpcReduction="20000"/>
+          </a:bodyPr>
+          <a:lstStyle>
+            <a:lvl1pPr marL="274320" indent="-274320" algn="l" rtl="0" eaLnBrk="1" latinLnBrk="0" hangingPunct="1">
+              <a:spcBef>
+                <a:spcPts val="600"/>
+              </a:spcBef>
+              <a:buClr>
+                <a:schemeClr val="accent1"/>
+              </a:buClr>
+              <a:buSzPct val="76000"/>
+              <a:buFont typeface="Wingdings 3"/>
+              <a:buChar char=""/>
+              <a:defRPr kumimoji="0" sz="2600" kern="1200">
+                <a:solidFill>
+                  <a:schemeClr val="tx1"/>
+                </a:solidFill>
+                <a:latin typeface="+mn-lt"/>
+                <a:ea typeface="+mn-ea"/>
+                <a:cs typeface="+mn-cs"/>
+              </a:defRPr>
+            </a:lvl1pPr>
+            <a:lvl2pPr marL="548640" indent="-274320" algn="l" rtl="0" eaLnBrk="1" latinLnBrk="0" hangingPunct="1">
+              <a:spcBef>
+                <a:spcPts val="500"/>
+              </a:spcBef>
+              <a:buClr>
+                <a:schemeClr val="accent2"/>
+              </a:buClr>
+              <a:buSzPct val="76000"/>
+              <a:buFont typeface="Wingdings 3"/>
+              <a:buChar char=""/>
+              <a:defRPr kumimoji="0" sz="2300" kern="1200">
+                <a:solidFill>
+                  <a:schemeClr val="tx2"/>
+                </a:solidFill>
+                <a:latin typeface="+mn-lt"/>
+                <a:ea typeface="+mn-ea"/>
+                <a:cs typeface="+mn-cs"/>
+              </a:defRPr>
+            </a:lvl2pPr>
+            <a:lvl3pPr marL="822960" indent="-228600" algn="l" rtl="0" eaLnBrk="1" latinLnBrk="0" hangingPunct="1">
+              <a:spcBef>
+                <a:spcPts val="500"/>
+              </a:spcBef>
+              <a:buClr>
+                <a:schemeClr val="bg1">
+                  <a:shade val="50000"/>
+                </a:schemeClr>
+              </a:buClr>
+              <a:buSzPct val="76000"/>
+              <a:buFont typeface="Wingdings 3"/>
+              <a:buChar char=""/>
+              <a:defRPr kumimoji="0" sz="2000" kern="1200">
+                <a:solidFill>
+                  <a:schemeClr val="tx1"/>
+                </a:solidFill>
+                <a:latin typeface="+mn-lt"/>
+                <a:ea typeface="+mn-ea"/>
+                <a:cs typeface="+mn-cs"/>
+              </a:defRPr>
+            </a:lvl3pPr>
+            <a:lvl4pPr marL="1097280" indent="-228600" algn="l" rtl="0" eaLnBrk="1" latinLnBrk="0" hangingPunct="1">
+              <a:spcBef>
+                <a:spcPts val="400"/>
+              </a:spcBef>
+              <a:buClr>
+                <a:schemeClr val="accent2">
+                  <a:shade val="75000"/>
+                </a:schemeClr>
+              </a:buClr>
+              <a:buSzPct val="70000"/>
+              <a:buFont typeface="Wingdings"/>
+              <a:buChar char=""/>
+              <a:defRPr kumimoji="0" sz="1800" kern="1200">
+                <a:solidFill>
+                  <a:schemeClr val="tx1"/>
+                </a:solidFill>
+                <a:latin typeface="+mn-lt"/>
+                <a:ea typeface="+mn-ea"/>
+                <a:cs typeface="+mn-cs"/>
+              </a:defRPr>
+            </a:lvl4pPr>
+            <a:lvl5pPr marL="1371600" indent="-228600" algn="l" rtl="0" eaLnBrk="1" latinLnBrk="0" hangingPunct="1">
+              <a:spcBef>
+                <a:spcPts val="300"/>
+              </a:spcBef>
+              <a:buClr>
+                <a:schemeClr val="accent2"/>
+              </a:buClr>
+              <a:buSzPct val="70000"/>
+              <a:buFont typeface="Wingdings"/>
+              <a:buChar char=""/>
+              <a:defRPr kumimoji="0" sz="1600" kern="1200">
+                <a:solidFill>
+                  <a:schemeClr val="tx1"/>
+                </a:solidFill>
+                <a:latin typeface="+mn-lt"/>
+                <a:ea typeface="+mn-ea"/>
+                <a:cs typeface="+mn-cs"/>
+              </a:defRPr>
+            </a:lvl5pPr>
+            <a:lvl6pPr marL="1645920" indent="-182880" algn="l" rtl="0" eaLnBrk="1" latinLnBrk="0" hangingPunct="1">
+              <a:spcBef>
+                <a:spcPts val="300"/>
+              </a:spcBef>
+              <a:buClr>
+                <a:srgbClr val="9FB8CD">
+                  <a:shade val="75000"/>
+                </a:srgbClr>
+              </a:buClr>
+              <a:buSzPct val="75000"/>
+              <a:buFont typeface="Wingdings 3"/>
+              <a:buChar char=""/>
+              <a:defRPr kumimoji="0" lang="en-US" sz="1600" kern="1200" smtClean="0">
+                <a:solidFill>
+                  <a:schemeClr val="tx1"/>
+                </a:solidFill>
+                <a:latin typeface="+mn-lt"/>
+                <a:ea typeface="+mn-ea"/>
+                <a:cs typeface="+mn-cs"/>
+              </a:defRPr>
+            </a:lvl6pPr>
+            <a:lvl7pPr marL="1828800" indent="-182880" algn="l" rtl="0" eaLnBrk="1" latinLnBrk="0" hangingPunct="1">
+              <a:spcBef>
+                <a:spcPts val="300"/>
+              </a:spcBef>
+              <a:buClr>
+                <a:srgbClr val="727CA3">
+                  <a:shade val="75000"/>
+                </a:srgbClr>
+              </a:buClr>
+              <a:buSzPct val="75000"/>
+              <a:buFont typeface="Wingdings 3"/>
+              <a:buChar char=""/>
+              <a:defRPr kumimoji="0" lang="en-US" sz="1400" kern="1200" smtClean="0">
+                <a:solidFill>
+                  <a:schemeClr val="tx1"/>
+                </a:solidFill>
+                <a:latin typeface="+mn-lt"/>
+                <a:ea typeface="+mn-ea"/>
+                <a:cs typeface="+mn-cs"/>
+              </a:defRPr>
+            </a:lvl7pPr>
+            <a:lvl8pPr marL="2011680" indent="-182880" algn="l" rtl="0" eaLnBrk="1" latinLnBrk="0" hangingPunct="1">
+              <a:spcBef>
+                <a:spcPts val="300"/>
+              </a:spcBef>
+              <a:buClr>
+                <a:prstClr val="white">
+                  <a:shade val="50000"/>
+                </a:prstClr>
+              </a:buClr>
+              <a:buSzPct val="75000"/>
+              <a:buFont typeface="Wingdings 3"/>
+              <a:buChar char=""/>
+              <a:defRPr kumimoji="0" lang="en-US" sz="1400" kern="1200" smtClean="0">
+                <a:solidFill>
+                  <a:schemeClr val="tx1"/>
+                </a:solidFill>
+                <a:latin typeface="+mn-lt"/>
+                <a:ea typeface="+mn-ea"/>
+                <a:cs typeface="+mn-cs"/>
+              </a:defRPr>
+            </a:lvl8pPr>
+            <a:lvl9pPr marL="2194560" indent="-182880" algn="l" rtl="0" eaLnBrk="1" latinLnBrk="0" hangingPunct="1">
+              <a:spcBef>
+                <a:spcPts val="300"/>
+              </a:spcBef>
+              <a:buClr>
+                <a:srgbClr val="9FB8CD"/>
+              </a:buClr>
+              <a:buSzPct val="75000"/>
+              <a:buFont typeface="Wingdings 3"/>
+              <a:buChar char=""/>
+              <a:defRPr kumimoji="0" lang="en-US" sz="1200" kern="1200" smtClean="0">
+                <a:solidFill>
+                  <a:schemeClr val="tx1"/>
+                </a:solidFill>
+                <a:latin typeface="+mn-lt"/>
+                <a:ea typeface="+mn-ea"/>
+                <a:cs typeface="+mn-cs"/>
+              </a:defRPr>
+            </a:lvl9pPr>
+          </a:lstStyle>
+          <a:p>
+            <a:pPr fontAlgn="auto">
+              <a:spcAft>
+                <a:spcPts val="0"/>
+              </a:spcAft>
+            </a:pPr>
+            <a:r>
+              <a:rPr lang="pt-BR" b="0" dirty="0"/>
+              <a:t>MOVW R0, #0xAFE1</a:t>
+            </a:r>
+          </a:p>
+          <a:p>
+            <a:pPr fontAlgn="auto">
+              <a:spcAft>
+                <a:spcPts val="0"/>
+              </a:spcAft>
+            </a:pPr>
+            <a:r>
+              <a:rPr lang="pt-BR" b="0" dirty="0"/>
+              <a:t>MOVT R0, #0xBADC</a:t>
+            </a:r>
+          </a:p>
+          <a:p>
+            <a:pPr fontAlgn="auto">
+              <a:spcAft>
+                <a:spcPts val="0"/>
+              </a:spcAft>
+            </a:pPr>
+            <a:r>
+              <a:rPr lang="pt-BR" b="0" dirty="0"/>
+              <a:t>MOVT R2, #0xABCD</a:t>
+            </a:r>
+          </a:p>
+          <a:p>
+            <a:pPr fontAlgn="auto">
+              <a:spcAft>
+                <a:spcPts val="0"/>
+              </a:spcAft>
+            </a:pPr>
+            <a:r>
+              <a:rPr lang="pt-BR" b="0" dirty="0"/>
+              <a:t>STR R3, [R1]</a:t>
+            </a:r>
+          </a:p>
+          <a:p>
+            <a:pPr fontAlgn="auto">
+              <a:spcAft>
+                <a:spcPts val="0"/>
+              </a:spcAft>
+            </a:pPr>
+            <a:r>
+              <a:rPr lang="pt-BR" b="0" dirty="0"/>
+              <a:t>LDRSH R4, (R1, #0xC)</a:t>
+            </a:r>
+          </a:p>
+          <a:p>
+            <a:pPr fontAlgn="auto">
+              <a:spcAft>
+                <a:spcPts val="0"/>
+              </a:spcAft>
+            </a:pPr>
+            <a:r>
+              <a:rPr lang="pt-BR" b="0" dirty="0"/>
+              <a:t>PUSH (R1, R3)</a:t>
+            </a:r>
+          </a:p>
+          <a:p>
+            <a:pPr fontAlgn="auto">
+              <a:spcAft>
+                <a:spcPts val="0"/>
+              </a:spcAft>
+            </a:pPr>
+            <a:r>
+              <a:rPr lang="pt-BR" b="0" dirty="0"/>
+              <a:t>POP (R5)</a:t>
+            </a:r>
+            <a:endParaRPr lang="en-US" b="0" dirty="0"/>
+          </a:p>
+        </p:txBody>
+      </p:sp>
+    </p:spTree>
+    <p:extLst>
+      <p:ext uri="{BB962C8B-B14F-4D97-AF65-F5344CB8AC3E}">
+        <p14:creationId xmlns:p14="http://schemas.microsoft.com/office/powerpoint/2010/main" val="754608230"/>
+      </p:ext>
+    </p:extLst>
+  </p:cSld>
+  <p:clrMapOvr>
+    <a:masterClrMapping/>
+  </p:clrMapOvr>
+  <p:transition>
+    <p:pull dir="ru"/>
+  </p:transition>
+</p:sld>
+</file>
+
 <file path=ppt/slides/slide4.xml><?xml version="1.0" encoding="utf-8"?>
 <p:sld xmlns:a="http://schemas.openxmlformats.org/drawingml/2006/main" xmlns:r="http://schemas.openxmlformats.org/officeDocument/2006/relationships" xmlns:p="http://schemas.openxmlformats.org/presentationml/2006/main">
   <p:cSld>

--- a/PPTs/Ch5_ARM_Load_Store_Exercises_ANS.pptx
+++ b/PPTs/Ch5_ARM_Load_Store_Exercises_ANS.pptx
@@ -44,8 +44,8 @@
     <p:sldId id="816" r:id="rId32"/>
     <p:sldId id="817" r:id="rId33"/>
     <p:sldId id="818" r:id="rId34"/>
-    <p:sldId id="820" r:id="rId35"/>
-    <p:sldId id="819" r:id="rId36"/>
+    <p:sldId id="819" r:id="rId35"/>
+    <p:sldId id="820" r:id="rId36"/>
   </p:sldIdLst>
   <p:sldSz cx="9144000" cy="6858000" type="screen4x3"/>
   <p:notesSz cx="9296400" cy="7010400"/>
@@ -230,7 +230,7 @@
 <file path=ppt/revisionInfo.xml><?xml version="1.0" encoding="utf-8"?>
 <p1510:revInfo xmlns:a="http://schemas.openxmlformats.org/drawingml/2006/main" xmlns:r="http://schemas.openxmlformats.org/officeDocument/2006/relationships" xmlns:p1510="http://schemas.microsoft.com/office/powerpoint/2015/10/main">
   <p1510:revLst>
-    <p1510:client id="{95D25279-C3AD-4B13-92A2-4AC656D27A67}" v="350" dt="2025-10-21T21:58:59.992"/>
+    <p1510:client id="{95D25279-C3AD-4B13-92A2-4AC656D27A67}" v="398" dt="2025-10-21T23:19:41.926"/>
   </p1510:revLst>
 </p1510:revInfo>
 </file>
@@ -240,10 +240,40 @@
   <pc:docChgLst>
     <pc:chgData name="Zonghua Gu" userId="9a7e1853e1951ef5" providerId="LiveId" clId="{CF1FAA12-072C-4ED5-BA76-0FFFAEFDB88A}"/>
     <pc:docChg chg="undo custSel addSld delSld modSld sldOrd modNotesMaster modHandout">
-      <pc:chgData name="Zonghua Gu" userId="9a7e1853e1951ef5" providerId="LiveId" clId="{CF1FAA12-072C-4ED5-BA76-0FFFAEFDB88A}" dt="2025-10-21T21:58:55.102" v="2920" actId="22"/>
+      <pc:chgData name="Zonghua Gu" userId="9a7e1853e1951ef5" providerId="LiveId" clId="{CF1FAA12-072C-4ED5-BA76-0FFFAEFDB88A}" dt="2025-10-21T23:20:04.004" v="3573" actId="1076"/>
       <pc:docMkLst>
         <pc:docMk/>
       </pc:docMkLst>
+      <pc:sldChg chg="modSp">
+        <pc:chgData name="Zonghua Gu" userId="9a7e1853e1951ef5" providerId="LiveId" clId="{CF1FAA12-072C-4ED5-BA76-0FFFAEFDB88A}" dt="2025-10-21T22:27:40.768" v="2971" actId="20577"/>
+        <pc:sldMkLst>
+          <pc:docMk/>
+          <pc:sldMk cId="3116329460" sldId="368"/>
+        </pc:sldMkLst>
+        <pc:spChg chg="mod">
+          <ac:chgData name="Zonghua Gu" userId="9a7e1853e1951ef5" providerId="LiveId" clId="{CF1FAA12-072C-4ED5-BA76-0FFFAEFDB88A}" dt="2025-10-21T22:27:40.768" v="2971" actId="20577"/>
+          <ac:spMkLst>
+            <pc:docMk/>
+            <pc:sldMk cId="3116329460" sldId="368"/>
+            <ac:spMk id="4" creationId="{00000000-0000-0000-0000-000000000000}"/>
+          </ac:spMkLst>
+        </pc:spChg>
+      </pc:sldChg>
+      <pc:sldChg chg="modSp mod">
+        <pc:chgData name="Zonghua Gu" userId="9a7e1853e1951ef5" providerId="LiveId" clId="{CF1FAA12-072C-4ED5-BA76-0FFFAEFDB88A}" dt="2025-10-21T22:22:04.343" v="2923" actId="20577"/>
+        <pc:sldMkLst>
+          <pc:docMk/>
+          <pc:sldMk cId="598515287" sldId="370"/>
+        </pc:sldMkLst>
+        <pc:spChg chg="mod">
+          <ac:chgData name="Zonghua Gu" userId="9a7e1853e1951ef5" providerId="LiveId" clId="{CF1FAA12-072C-4ED5-BA76-0FFFAEFDB88A}" dt="2025-10-21T22:22:04.343" v="2923" actId="20577"/>
+          <ac:spMkLst>
+            <pc:docMk/>
+            <pc:sldMk cId="598515287" sldId="370"/>
+            <ac:spMk id="4" creationId="{00000000-0000-0000-0000-000000000000}"/>
+          </ac:spMkLst>
+        </pc:spChg>
+      </pc:sldChg>
       <pc:sldChg chg="add del">
         <pc:chgData name="Zonghua Gu" userId="9a7e1853e1951ef5" providerId="LiveId" clId="{CF1FAA12-072C-4ED5-BA76-0FFFAEFDB88A}" dt="2025-09-24T21:50:44.726" v="623"/>
         <pc:sldMkLst>
@@ -251,8 +281,8 @@
           <pc:sldMk cId="146821145" sldId="495"/>
         </pc:sldMkLst>
       </pc:sldChg>
-      <pc:sldChg chg="delSp modSp add del mod modTransition modAnim">
-        <pc:chgData name="Zonghua Gu" userId="9a7e1853e1951ef5" providerId="LiveId" clId="{CF1FAA12-072C-4ED5-BA76-0FFFAEFDB88A}" dt="2025-09-21T21:00:43.715" v="614" actId="1076"/>
+      <pc:sldChg chg="addSp delSp modSp add del mod modTransition modAnim">
+        <pc:chgData name="Zonghua Gu" userId="9a7e1853e1951ef5" providerId="LiveId" clId="{CF1FAA12-072C-4ED5-BA76-0FFFAEFDB88A}" dt="2025-10-21T22:25:54.458" v="2937" actId="1076"/>
         <pc:sldMkLst>
           <pc:docMk/>
           <pc:sldMk cId="1864663475" sldId="774"/>
@@ -265,9 +295,41 @@
             <ac:spMk id="6" creationId="{9847AA0A-7964-4433-C181-1EB7B5E48F3F}"/>
           </ac:spMkLst>
         </pc:spChg>
+        <pc:spChg chg="add mod">
+          <ac:chgData name="Zonghua Gu" userId="9a7e1853e1951ef5" providerId="LiveId" clId="{CF1FAA12-072C-4ED5-BA76-0FFFAEFDB88A}" dt="2025-10-21T22:25:51.120" v="2936" actId="1076"/>
+          <ac:spMkLst>
+            <pc:docMk/>
+            <pc:sldMk cId="1864663475" sldId="774"/>
+            <ac:spMk id="8" creationId="{B9B3AF0F-A272-85F5-9499-4FA634AB7DC6}"/>
+          </ac:spMkLst>
+        </pc:spChg>
+        <pc:picChg chg="mod">
+          <ac:chgData name="Zonghua Gu" userId="9a7e1853e1951ef5" providerId="LiveId" clId="{CF1FAA12-072C-4ED5-BA76-0FFFAEFDB88A}" dt="2025-10-21T22:24:45.926" v="2924" actId="14826"/>
+          <ac:picMkLst>
+            <pc:docMk/>
+            <pc:sldMk cId="1864663475" sldId="774"/>
+            <ac:picMk id="12" creationId="{00000000-0000-0000-0000-000000000000}"/>
+          </ac:picMkLst>
+        </pc:picChg>
+        <pc:picChg chg="mod">
+          <ac:chgData name="Zonghua Gu" userId="9a7e1853e1951ef5" providerId="LiveId" clId="{CF1FAA12-072C-4ED5-BA76-0FFFAEFDB88A}" dt="2025-10-21T22:25:27.339" v="2930" actId="14100"/>
+          <ac:picMkLst>
+            <pc:docMk/>
+            <pc:sldMk cId="1864663475" sldId="774"/>
+            <ac:picMk id="13" creationId="{00000000-0000-0000-0000-000000000000}"/>
+          </ac:picMkLst>
+        </pc:picChg>
+        <pc:picChg chg="mod">
+          <ac:chgData name="Zonghua Gu" userId="9a7e1853e1951ef5" providerId="LiveId" clId="{CF1FAA12-072C-4ED5-BA76-0FFFAEFDB88A}" dt="2025-10-21T22:25:54.458" v="2937" actId="1076"/>
+          <ac:picMkLst>
+            <pc:docMk/>
+            <pc:sldMk cId="1864663475" sldId="774"/>
+            <ac:picMk id="14" creationId="{00000000-0000-0000-0000-000000000000}"/>
+          </ac:picMkLst>
+        </pc:picChg>
       </pc:sldChg>
       <pc:sldChg chg="addSp delSp modSp new mod">
-        <pc:chgData name="Zonghua Gu" userId="9a7e1853e1951ef5" providerId="LiveId" clId="{CF1FAA12-072C-4ED5-BA76-0FFFAEFDB88A}" dt="2025-09-25T23:32:29.832" v="1314" actId="207"/>
+        <pc:chgData name="Zonghua Gu" userId="9a7e1853e1951ef5" providerId="LiveId" clId="{CF1FAA12-072C-4ED5-BA76-0FFFAEFDB88A}" dt="2025-10-21T22:38:05.239" v="3061" actId="1038"/>
         <pc:sldMkLst>
           <pc:docMk/>
           <pc:sldMk cId="3896189839" sldId="799"/>
@@ -281,7 +343,7 @@
           </ac:spMkLst>
         </pc:spChg>
         <pc:spChg chg="add mod">
-          <ac:chgData name="Zonghua Gu" userId="9a7e1853e1951ef5" providerId="LiveId" clId="{CF1FAA12-072C-4ED5-BA76-0FFFAEFDB88A}" dt="2025-09-25T23:32:29.832" v="1314" actId="207"/>
+          <ac:chgData name="Zonghua Gu" userId="9a7e1853e1951ef5" providerId="LiveId" clId="{CF1FAA12-072C-4ED5-BA76-0FFFAEFDB88A}" dt="2025-10-21T22:38:05.239" v="3061" actId="1038"/>
           <ac:spMkLst>
             <pc:docMk/>
             <pc:sldMk cId="3896189839" sldId="799"/>
@@ -369,7 +431,7 @@
         </pc:graphicFrameChg>
       </pc:sldChg>
       <pc:sldChg chg="addSp delSp modSp new mod">
-        <pc:chgData name="Zonghua Gu" userId="9a7e1853e1951ef5" providerId="LiveId" clId="{CF1FAA12-072C-4ED5-BA76-0FFFAEFDB88A}" dt="2025-09-25T21:51:10.870" v="1212" actId="20577"/>
+        <pc:chgData name="Zonghua Gu" userId="9a7e1853e1951ef5" providerId="LiveId" clId="{CF1FAA12-072C-4ED5-BA76-0FFFAEFDB88A}" dt="2025-10-21T22:44:19.619" v="3233" actId="1035"/>
         <pc:sldMkLst>
           <pc:docMk/>
           <pc:sldMk cId="2664882224" sldId="803"/>
@@ -383,7 +445,7 @@
           </ac:spMkLst>
         </pc:spChg>
         <pc:spChg chg="mod">
-          <ac:chgData name="Zonghua Gu" userId="9a7e1853e1951ef5" providerId="LiveId" clId="{CF1FAA12-072C-4ED5-BA76-0FFFAEFDB88A}" dt="2025-09-25T21:45:15.376" v="1120" actId="27636"/>
+          <ac:chgData name="Zonghua Gu" userId="9a7e1853e1951ef5" providerId="LiveId" clId="{CF1FAA12-072C-4ED5-BA76-0FFFAEFDB88A}" dt="2025-10-21T22:44:00.955" v="3182" actId="1076"/>
           <ac:spMkLst>
             <pc:docMk/>
             <pc:sldMk cId="2664882224" sldId="803"/>
@@ -391,7 +453,7 @@
           </ac:spMkLst>
         </pc:spChg>
         <pc:spChg chg="add mod">
-          <ac:chgData name="Zonghua Gu" userId="9a7e1853e1951ef5" providerId="LiveId" clId="{CF1FAA12-072C-4ED5-BA76-0FFFAEFDB88A}" dt="2025-09-25T21:43:29.385" v="1083" actId="1076"/>
+          <ac:chgData name="Zonghua Gu" userId="9a7e1853e1951ef5" providerId="LiveId" clId="{CF1FAA12-072C-4ED5-BA76-0FFFAEFDB88A}" dt="2025-10-21T22:44:19.619" v="3233" actId="1035"/>
           <ac:spMkLst>
             <pc:docMk/>
             <pc:sldMk cId="2664882224" sldId="803"/>
@@ -399,7 +461,7 @@
           </ac:spMkLst>
         </pc:spChg>
         <pc:spChg chg="add mod">
-          <ac:chgData name="Zonghua Gu" userId="9a7e1853e1951ef5" providerId="LiveId" clId="{CF1FAA12-072C-4ED5-BA76-0FFFAEFDB88A}" dt="2025-09-25T21:43:29.385" v="1083" actId="1076"/>
+          <ac:chgData name="Zonghua Gu" userId="9a7e1853e1951ef5" providerId="LiveId" clId="{CF1FAA12-072C-4ED5-BA76-0FFFAEFDB88A}" dt="2025-10-21T22:44:19.619" v="3233" actId="1035"/>
           <ac:spMkLst>
             <pc:docMk/>
             <pc:sldMk cId="2664882224" sldId="803"/>
@@ -407,7 +469,7 @@
           </ac:spMkLst>
         </pc:spChg>
         <pc:spChg chg="add mod">
-          <ac:chgData name="Zonghua Gu" userId="9a7e1853e1951ef5" providerId="LiveId" clId="{CF1FAA12-072C-4ED5-BA76-0FFFAEFDB88A}" dt="2025-09-25T21:43:10.570" v="1078" actId="1076"/>
+          <ac:chgData name="Zonghua Gu" userId="9a7e1853e1951ef5" providerId="LiveId" clId="{CF1FAA12-072C-4ED5-BA76-0FFFAEFDB88A}" dt="2025-10-21T22:44:19.619" v="3233" actId="1035"/>
           <ac:spMkLst>
             <pc:docMk/>
             <pc:sldMk cId="2664882224" sldId="803"/>
@@ -415,7 +477,7 @@
           </ac:spMkLst>
         </pc:spChg>
         <pc:spChg chg="add mod">
-          <ac:chgData name="Zonghua Gu" userId="9a7e1853e1951ef5" providerId="LiveId" clId="{CF1FAA12-072C-4ED5-BA76-0FFFAEFDB88A}" dt="2025-09-25T21:43:10.570" v="1078" actId="1076"/>
+          <ac:chgData name="Zonghua Gu" userId="9a7e1853e1951ef5" providerId="LiveId" clId="{CF1FAA12-072C-4ED5-BA76-0FFFAEFDB88A}" dt="2025-10-21T22:44:19.619" v="3233" actId="1035"/>
           <ac:spMkLst>
             <pc:docMk/>
             <pc:sldMk cId="2664882224" sldId="803"/>
@@ -423,7 +485,7 @@
           </ac:spMkLst>
         </pc:spChg>
         <pc:graphicFrameChg chg="add mod modGraphic">
-          <ac:chgData name="Zonghua Gu" userId="9a7e1853e1951ef5" providerId="LiveId" clId="{CF1FAA12-072C-4ED5-BA76-0FFFAEFDB88A}" dt="2025-09-25T21:43:10.570" v="1078" actId="1076"/>
+          <ac:chgData name="Zonghua Gu" userId="9a7e1853e1951ef5" providerId="LiveId" clId="{CF1FAA12-072C-4ED5-BA76-0FFFAEFDB88A}" dt="2025-10-21T22:44:19.619" v="3233" actId="1035"/>
           <ac:graphicFrameMkLst>
             <pc:docMk/>
             <pc:sldMk cId="2664882224" sldId="803"/>
@@ -431,7 +493,7 @@
           </ac:graphicFrameMkLst>
         </pc:graphicFrameChg>
         <pc:graphicFrameChg chg="add mod modGraphic">
-          <ac:chgData name="Zonghua Gu" userId="9a7e1853e1951ef5" providerId="LiveId" clId="{CF1FAA12-072C-4ED5-BA76-0FFFAEFDB88A}" dt="2025-09-25T21:43:10.570" v="1078" actId="1076"/>
+          <ac:chgData name="Zonghua Gu" userId="9a7e1853e1951ef5" providerId="LiveId" clId="{CF1FAA12-072C-4ED5-BA76-0FFFAEFDB88A}" dt="2025-10-21T22:44:19.619" v="3233" actId="1035"/>
           <ac:graphicFrameMkLst>
             <pc:docMk/>
             <pc:sldMk cId="2664882224" sldId="803"/>
@@ -463,7 +525,7 @@
         </pc:spChg>
       </pc:sldChg>
       <pc:sldChg chg="modSp add mod">
-        <pc:chgData name="Zonghua Gu" userId="9a7e1853e1951ef5" providerId="LiveId" clId="{CF1FAA12-072C-4ED5-BA76-0FFFAEFDB88A}" dt="2025-09-25T21:51:26.700" v="1222" actId="20577"/>
+        <pc:chgData name="Zonghua Gu" userId="9a7e1853e1951ef5" providerId="LiveId" clId="{CF1FAA12-072C-4ED5-BA76-0FFFAEFDB88A}" dt="2025-10-21T22:45:50.494" v="3240" actId="1076"/>
         <pc:sldMkLst>
           <pc:docMk/>
           <pc:sldMk cId="3336550644" sldId="805"/>
@@ -477,16 +539,64 @@
           </ac:spMkLst>
         </pc:spChg>
         <pc:spChg chg="mod">
-          <ac:chgData name="Zonghua Gu" userId="9a7e1853e1951ef5" providerId="LiveId" clId="{CF1FAA12-072C-4ED5-BA76-0FFFAEFDB88A}" dt="2025-09-25T21:50:05.816" v="1202"/>
+          <ac:chgData name="Zonghua Gu" userId="9a7e1853e1951ef5" providerId="LiveId" clId="{CF1FAA12-072C-4ED5-BA76-0FFFAEFDB88A}" dt="2025-10-21T22:45:45.284" v="3239" actId="20577"/>
           <ac:spMkLst>
             <pc:docMk/>
             <pc:sldMk cId="3336550644" sldId="805"/>
             <ac:spMk id="4" creationId="{22D5A64C-016C-A0F2-38AF-054CBADAE79C}"/>
           </ac:spMkLst>
         </pc:spChg>
+        <pc:spChg chg="mod">
+          <ac:chgData name="Zonghua Gu" userId="9a7e1853e1951ef5" providerId="LiveId" clId="{CF1FAA12-072C-4ED5-BA76-0FFFAEFDB88A}" dt="2025-10-21T22:45:50.494" v="3240" actId="1076"/>
+          <ac:spMkLst>
+            <pc:docMk/>
+            <pc:sldMk cId="3336550644" sldId="805"/>
+            <ac:spMk id="10" creationId="{07A996FC-F93E-6EF2-A02F-BA392BF9A202}"/>
+          </ac:spMkLst>
+        </pc:spChg>
+        <pc:spChg chg="mod">
+          <ac:chgData name="Zonghua Gu" userId="9a7e1853e1951ef5" providerId="LiveId" clId="{CF1FAA12-072C-4ED5-BA76-0FFFAEFDB88A}" dt="2025-10-21T22:45:50.494" v="3240" actId="1076"/>
+          <ac:spMkLst>
+            <pc:docMk/>
+            <pc:sldMk cId="3336550644" sldId="805"/>
+            <ac:spMk id="11" creationId="{9303034B-1544-8514-5223-EA486A850EC3}"/>
+          </ac:spMkLst>
+        </pc:spChg>
+        <pc:spChg chg="mod">
+          <ac:chgData name="Zonghua Gu" userId="9a7e1853e1951ef5" providerId="LiveId" clId="{CF1FAA12-072C-4ED5-BA76-0FFFAEFDB88A}" dt="2025-10-21T22:45:50.494" v="3240" actId="1076"/>
+          <ac:spMkLst>
+            <pc:docMk/>
+            <pc:sldMk cId="3336550644" sldId="805"/>
+            <ac:spMk id="12" creationId="{50110493-0041-BD86-E3E1-1704C9C6DDC3}"/>
+          </ac:spMkLst>
+        </pc:spChg>
+        <pc:spChg chg="mod">
+          <ac:chgData name="Zonghua Gu" userId="9a7e1853e1951ef5" providerId="LiveId" clId="{CF1FAA12-072C-4ED5-BA76-0FFFAEFDB88A}" dt="2025-10-21T22:45:50.494" v="3240" actId="1076"/>
+          <ac:spMkLst>
+            <pc:docMk/>
+            <pc:sldMk cId="3336550644" sldId="805"/>
+            <ac:spMk id="13" creationId="{83CA7F24-6687-6FF3-F8F0-EDA8288DA6CA}"/>
+          </ac:spMkLst>
+        </pc:spChg>
+        <pc:graphicFrameChg chg="mod">
+          <ac:chgData name="Zonghua Gu" userId="9a7e1853e1951ef5" providerId="LiveId" clId="{CF1FAA12-072C-4ED5-BA76-0FFFAEFDB88A}" dt="2025-10-21T22:45:50.494" v="3240" actId="1076"/>
+          <ac:graphicFrameMkLst>
+            <pc:docMk/>
+            <pc:sldMk cId="3336550644" sldId="805"/>
+            <ac:graphicFrameMk id="8" creationId="{F6C059E5-F0E5-8833-AA36-573533B7B6AE}"/>
+          </ac:graphicFrameMkLst>
+        </pc:graphicFrameChg>
+        <pc:graphicFrameChg chg="mod">
+          <ac:chgData name="Zonghua Gu" userId="9a7e1853e1951ef5" providerId="LiveId" clId="{CF1FAA12-072C-4ED5-BA76-0FFFAEFDB88A}" dt="2025-10-21T22:45:50.494" v="3240" actId="1076"/>
+          <ac:graphicFrameMkLst>
+            <pc:docMk/>
+            <pc:sldMk cId="3336550644" sldId="805"/>
+            <ac:graphicFrameMk id="9" creationId="{9521C1A2-D863-2E48-2394-4B8095D9FC9E}"/>
+          </ac:graphicFrameMkLst>
+        </pc:graphicFrameChg>
       </pc:sldChg>
       <pc:sldChg chg="modSp add mod">
-        <pc:chgData name="Zonghua Gu" userId="9a7e1853e1951ef5" providerId="LiveId" clId="{CF1FAA12-072C-4ED5-BA76-0FFFAEFDB88A}" dt="2025-09-25T21:58:26.722" v="1248" actId="20577"/>
+        <pc:chgData name="Zonghua Gu" userId="9a7e1853e1951ef5" providerId="LiveId" clId="{CF1FAA12-072C-4ED5-BA76-0FFFAEFDB88A}" dt="2025-10-21T22:49:33.260" v="3244" actId="1076"/>
         <pc:sldMkLst>
           <pc:docMk/>
           <pc:sldMk cId="1204830540" sldId="806"/>
@@ -500,13 +610,61 @@
           </ac:spMkLst>
         </pc:spChg>
         <pc:spChg chg="mod">
-          <ac:chgData name="Zonghua Gu" userId="9a7e1853e1951ef5" providerId="LiveId" clId="{CF1FAA12-072C-4ED5-BA76-0FFFAEFDB88A}" dt="2025-09-25T21:58:26.722" v="1248" actId="20577"/>
+          <ac:chgData name="Zonghua Gu" userId="9a7e1853e1951ef5" providerId="LiveId" clId="{CF1FAA12-072C-4ED5-BA76-0FFFAEFDB88A}" dt="2025-10-21T22:48:08.527" v="3243" actId="20577"/>
           <ac:spMkLst>
             <pc:docMk/>
             <pc:sldMk cId="1204830540" sldId="806"/>
             <ac:spMk id="4" creationId="{F5BD1FD1-2387-26FB-4BF0-E2B12311B2D2}"/>
           </ac:spMkLst>
         </pc:spChg>
+        <pc:spChg chg="mod">
+          <ac:chgData name="Zonghua Gu" userId="9a7e1853e1951ef5" providerId="LiveId" clId="{CF1FAA12-072C-4ED5-BA76-0FFFAEFDB88A}" dt="2025-10-21T22:49:33.260" v="3244" actId="1076"/>
+          <ac:spMkLst>
+            <pc:docMk/>
+            <pc:sldMk cId="1204830540" sldId="806"/>
+            <ac:spMk id="10" creationId="{CD328998-F5A5-38ED-01EA-1EC3EF7E338A}"/>
+          </ac:spMkLst>
+        </pc:spChg>
+        <pc:spChg chg="mod">
+          <ac:chgData name="Zonghua Gu" userId="9a7e1853e1951ef5" providerId="LiveId" clId="{CF1FAA12-072C-4ED5-BA76-0FFFAEFDB88A}" dt="2025-10-21T22:49:33.260" v="3244" actId="1076"/>
+          <ac:spMkLst>
+            <pc:docMk/>
+            <pc:sldMk cId="1204830540" sldId="806"/>
+            <ac:spMk id="11" creationId="{87B6A0A7-7A1C-7320-C242-11989D0D0ED0}"/>
+          </ac:spMkLst>
+        </pc:spChg>
+        <pc:spChg chg="mod">
+          <ac:chgData name="Zonghua Gu" userId="9a7e1853e1951ef5" providerId="LiveId" clId="{CF1FAA12-072C-4ED5-BA76-0FFFAEFDB88A}" dt="2025-10-21T22:49:33.260" v="3244" actId="1076"/>
+          <ac:spMkLst>
+            <pc:docMk/>
+            <pc:sldMk cId="1204830540" sldId="806"/>
+            <ac:spMk id="12" creationId="{564CC732-54C8-85E9-07B7-FAF0798F74AA}"/>
+          </ac:spMkLst>
+        </pc:spChg>
+        <pc:spChg chg="mod">
+          <ac:chgData name="Zonghua Gu" userId="9a7e1853e1951ef5" providerId="LiveId" clId="{CF1FAA12-072C-4ED5-BA76-0FFFAEFDB88A}" dt="2025-10-21T22:49:33.260" v="3244" actId="1076"/>
+          <ac:spMkLst>
+            <pc:docMk/>
+            <pc:sldMk cId="1204830540" sldId="806"/>
+            <ac:spMk id="13" creationId="{2C9720F2-1965-B15A-E7DD-DB560229807A}"/>
+          </ac:spMkLst>
+        </pc:spChg>
+        <pc:graphicFrameChg chg="mod">
+          <ac:chgData name="Zonghua Gu" userId="9a7e1853e1951ef5" providerId="LiveId" clId="{CF1FAA12-072C-4ED5-BA76-0FFFAEFDB88A}" dt="2025-10-21T22:49:33.260" v="3244" actId="1076"/>
+          <ac:graphicFrameMkLst>
+            <pc:docMk/>
+            <pc:sldMk cId="1204830540" sldId="806"/>
+            <ac:graphicFrameMk id="8" creationId="{A9B3120B-E6CB-D08B-C83A-65EA4EBFEEBA}"/>
+          </ac:graphicFrameMkLst>
+        </pc:graphicFrameChg>
+        <pc:graphicFrameChg chg="mod">
+          <ac:chgData name="Zonghua Gu" userId="9a7e1853e1951ef5" providerId="LiveId" clId="{CF1FAA12-072C-4ED5-BA76-0FFFAEFDB88A}" dt="2025-10-21T22:49:33.260" v="3244" actId="1076"/>
+          <ac:graphicFrameMkLst>
+            <pc:docMk/>
+            <pc:sldMk cId="1204830540" sldId="806"/>
+            <ac:graphicFrameMk id="9" creationId="{68A9D7B6-EE91-3397-F114-367B143D28C0}"/>
+          </ac:graphicFrameMkLst>
+        </pc:graphicFrameChg>
       </pc:sldChg>
       <pc:sldChg chg="delSp modSp add mod">
         <pc:chgData name="Zonghua Gu" userId="9a7e1853e1951ef5" providerId="LiveId" clId="{CF1FAA12-072C-4ED5-BA76-0FFFAEFDB88A}" dt="2025-10-08T01:29:45.447" v="1329" actId="21"/>
@@ -826,8 +984,8 @@
           </ac:graphicFrameMkLst>
         </pc:graphicFrameChg>
       </pc:sldChg>
-      <pc:sldChg chg="delSp modSp add mod">
-        <pc:chgData name="Zonghua Gu" userId="9a7e1853e1951ef5" providerId="LiveId" clId="{CF1FAA12-072C-4ED5-BA76-0FFFAEFDB88A}" dt="2025-10-21T21:54:30.491" v="2867" actId="14734"/>
+      <pc:sldChg chg="addSp delSp modSp add mod ord">
+        <pc:chgData name="Zonghua Gu" userId="9a7e1853e1951ef5" providerId="LiveId" clId="{CF1FAA12-072C-4ED5-BA76-0FFFAEFDB88A}" dt="2025-10-21T23:20:04.004" v="3573" actId="1076"/>
         <pc:sldMkLst>
           <pc:docMk/>
           <pc:sldMk cId="3653550031" sldId="819"/>
@@ -838,6 +996,22 @@
             <pc:docMk/>
             <pc:sldMk cId="3653550031" sldId="819"/>
             <ac:spMk id="2" creationId="{8D6A2D63-87B9-C779-5841-28DFFCC174D8}"/>
+          </ac:spMkLst>
+        </pc:spChg>
+        <pc:spChg chg="mod">
+          <ac:chgData name="Zonghua Gu" userId="9a7e1853e1951ef5" providerId="LiveId" clId="{CF1FAA12-072C-4ED5-BA76-0FFFAEFDB88A}" dt="2025-10-21T23:19:52.814" v="3572" actId="14100"/>
+          <ac:spMkLst>
+            <pc:docMk/>
+            <pc:sldMk cId="3653550031" sldId="819"/>
+            <ac:spMk id="4" creationId="{47E16147-F6FF-DA8E-A54B-3AD6FD9BC42D}"/>
+          </ac:spMkLst>
+        </pc:spChg>
+        <pc:spChg chg="add del mod">
+          <ac:chgData name="Zonghua Gu" userId="9a7e1853e1951ef5" providerId="LiveId" clId="{CF1FAA12-072C-4ED5-BA76-0FFFAEFDB88A}" dt="2025-10-21T23:19:46.488" v="3569" actId="478"/>
+          <ac:spMkLst>
+            <pc:docMk/>
+            <pc:sldMk cId="3653550031" sldId="819"/>
+            <ac:spMk id="5" creationId="{14C46A35-2005-77E1-D1E1-B09F11824443}"/>
           </ac:spMkLst>
         </pc:spChg>
         <pc:spChg chg="del mod">
@@ -856,13 +1030,29 @@
             <ac:graphicFrameMk id="6" creationId="{20BD6E28-A5B2-15E2-4657-69B74D865AD1}"/>
           </ac:graphicFrameMkLst>
         </pc:graphicFrameChg>
+        <pc:graphicFrameChg chg="add mod">
+          <ac:chgData name="Zonghua Gu" userId="9a7e1853e1951ef5" providerId="LiveId" clId="{CF1FAA12-072C-4ED5-BA76-0FFFAEFDB88A}" dt="2025-10-21T23:20:04.004" v="3573" actId="1076"/>
+          <ac:graphicFrameMkLst>
+            <pc:docMk/>
+            <pc:sldMk cId="3653550031" sldId="819"/>
+            <ac:graphicFrameMk id="7" creationId="{744E2143-7A13-BD9D-79CC-8CEAA8258A28}"/>
+          </ac:graphicFrameMkLst>
+        </pc:graphicFrameChg>
       </pc:sldChg>
-      <pc:sldChg chg="addSp new mod">
-        <pc:chgData name="Zonghua Gu" userId="9a7e1853e1951ef5" providerId="LiveId" clId="{CF1FAA12-072C-4ED5-BA76-0FFFAEFDB88A}" dt="2025-10-21T21:58:55.102" v="2920" actId="22"/>
+      <pc:sldChg chg="addSp delSp modSp new mod">
+        <pc:chgData name="Zonghua Gu" userId="9a7e1853e1951ef5" providerId="LiveId" clId="{CF1FAA12-072C-4ED5-BA76-0FFFAEFDB88A}" dt="2025-10-21T23:19:19.479" v="3567" actId="1076"/>
         <pc:sldMkLst>
           <pc:docMk/>
           <pc:sldMk cId="606520013" sldId="820"/>
         </pc:sldMkLst>
+        <pc:spChg chg="add del mod">
+          <ac:chgData name="Zonghua Gu" userId="9a7e1853e1951ef5" providerId="LiveId" clId="{CF1FAA12-072C-4ED5-BA76-0FFFAEFDB88A}" dt="2025-10-21T23:19:19.479" v="3567" actId="1076"/>
+          <ac:spMkLst>
+            <pc:docMk/>
+            <pc:sldMk cId="606520013" sldId="820"/>
+            <ac:spMk id="5" creationId="{32A79334-25D3-6F34-8E60-D781DF9B18E9}"/>
+          </ac:spMkLst>
+        </pc:spChg>
         <pc:picChg chg="add">
           <ac:chgData name="Zonghua Gu" userId="9a7e1853e1951ef5" providerId="LiveId" clId="{CF1FAA12-072C-4ED5-BA76-0FFFAEFDB88A}" dt="2025-10-21T21:58:55.102" v="2920" actId="22"/>
           <ac:picMkLst>
@@ -871,6 +1061,60 @@
             <ac:picMk id="6" creationId="{DBA7E6FD-31CB-BF98-56D2-635FB4217B9E}"/>
           </ac:picMkLst>
         </pc:picChg>
+      </pc:sldChg>
+      <pc:sldChg chg="modSp add del mod">
+        <pc:chgData name="Zonghua Gu" userId="9a7e1853e1951ef5" providerId="LiveId" clId="{CF1FAA12-072C-4ED5-BA76-0FFFAEFDB88A}" dt="2025-10-21T23:16:56.406" v="3507" actId="47"/>
+        <pc:sldMkLst>
+          <pc:docMk/>
+          <pc:sldMk cId="264931008" sldId="821"/>
+        </pc:sldMkLst>
+        <pc:spChg chg="mod">
+          <ac:chgData name="Zonghua Gu" userId="9a7e1853e1951ef5" providerId="LiveId" clId="{CF1FAA12-072C-4ED5-BA76-0FFFAEFDB88A}" dt="2025-10-21T22:50:37.603" v="3255" actId="20577"/>
+          <ac:spMkLst>
+            <pc:docMk/>
+            <pc:sldMk cId="264931008" sldId="821"/>
+            <ac:spMk id="2" creationId="{F8083EAB-FFC3-F4EA-09D5-AF2B72986DBE}"/>
+          </ac:spMkLst>
+        </pc:spChg>
+        <pc:spChg chg="mod">
+          <ac:chgData name="Zonghua Gu" userId="9a7e1853e1951ef5" providerId="LiveId" clId="{CF1FAA12-072C-4ED5-BA76-0FFFAEFDB88A}" dt="2025-10-21T22:59:35.906" v="3483" actId="20577"/>
+          <ac:spMkLst>
+            <pc:docMk/>
+            <pc:sldMk cId="264931008" sldId="821"/>
+            <ac:spMk id="10" creationId="{9998843F-85FA-42AA-56E1-7931DB6DC6DF}"/>
+          </ac:spMkLst>
+        </pc:spChg>
+        <pc:spChg chg="mod">
+          <ac:chgData name="Zonghua Gu" userId="9a7e1853e1951ef5" providerId="LiveId" clId="{CF1FAA12-072C-4ED5-BA76-0FFFAEFDB88A}" dt="2025-10-21T23:02:34.868" v="3506" actId="20577"/>
+          <ac:spMkLst>
+            <pc:docMk/>
+            <pc:sldMk cId="264931008" sldId="821"/>
+            <ac:spMk id="11" creationId="{0B1A91FE-A044-D5A1-3340-EFF3676534C4}"/>
+          </ac:spMkLst>
+        </pc:spChg>
+        <pc:graphicFrameChg chg="modGraphic">
+          <ac:chgData name="Zonghua Gu" userId="9a7e1853e1951ef5" providerId="LiveId" clId="{CF1FAA12-072C-4ED5-BA76-0FFFAEFDB88A}" dt="2025-10-21T23:01:40.279" v="3485" actId="207"/>
+          <ac:graphicFrameMkLst>
+            <pc:docMk/>
+            <pc:sldMk cId="264931008" sldId="821"/>
+            <ac:graphicFrameMk id="7" creationId="{7030E39E-B193-3BBF-A4A9-1873E89A8E66}"/>
+          </ac:graphicFrameMkLst>
+        </pc:graphicFrameChg>
+        <pc:graphicFrameChg chg="mod modGraphic">
+          <ac:chgData name="Zonghua Gu" userId="9a7e1853e1951ef5" providerId="LiveId" clId="{CF1FAA12-072C-4ED5-BA76-0FFFAEFDB88A}" dt="2025-10-21T22:56:06.662" v="3329" actId="207"/>
+          <ac:graphicFrameMkLst>
+            <pc:docMk/>
+            <pc:sldMk cId="264931008" sldId="821"/>
+            <ac:graphicFrameMk id="8" creationId="{5C49654E-F929-61E6-C5C2-006A4E800316}"/>
+          </ac:graphicFrameMkLst>
+        </pc:graphicFrameChg>
+      </pc:sldChg>
+      <pc:sldChg chg="new del">
+        <pc:chgData name="Zonghua Gu" userId="9a7e1853e1951ef5" providerId="LiveId" clId="{CF1FAA12-072C-4ED5-BA76-0FFFAEFDB88A}" dt="2025-10-21T22:50:29.190" v="3246" actId="680"/>
+        <pc:sldMkLst>
+          <pc:docMk/>
+          <pc:sldMk cId="1378059341" sldId="821"/>
+        </pc:sldMkLst>
       </pc:sldChg>
     </pc:docChg>
   </pc:docChgLst>
@@ -1268,6 +1512,13 @@
             <a:tailEnd/>
           </a:ln>
         </p:spPr>
+        <p:txBody>
+          <a:bodyPr/>
+          <a:lstStyle/>
+          <a:p>
+            <a:endParaRPr lang="en-US"/>
+          </a:p>
+        </p:txBody>
       </p:sp>
     </p:spTree>
     <p:extLst>
@@ -1430,6 +1681,13 @@
           </p:nvPr>
         </p:nvSpPr>
         <p:spPr/>
+        <p:txBody>
+          <a:bodyPr/>
+          <a:lstStyle/>
+          <a:p>
+            <a:endParaRPr lang="en-US"/>
+          </a:p>
+        </p:txBody>
       </p:sp>
       <p:sp>
         <p:nvSpPr>
@@ -1493,6 +1751,13 @@
           </p:nvPr>
         </p:nvSpPr>
         <p:spPr/>
+        <p:txBody>
+          <a:bodyPr/>
+          <a:lstStyle/>
+          <a:p>
+            <a:endParaRPr lang="en-US"/>
+          </a:p>
+        </p:txBody>
       </p:sp>
       <p:sp>
         <p:nvSpPr>
@@ -1602,6 +1867,13 @@
           </p:nvPr>
         </p:nvSpPr>
         <p:spPr/>
+        <p:txBody>
+          <a:bodyPr/>
+          <a:lstStyle/>
+          <a:p>
+            <a:endParaRPr lang="en-US"/>
+          </a:p>
+        </p:txBody>
       </p:sp>
       <p:sp>
         <p:nvSpPr>
@@ -1902,6 +2174,13 @@
           </p:nvPr>
         </p:nvSpPr>
         <p:spPr/>
+        <p:txBody>
+          <a:bodyPr/>
+          <a:lstStyle/>
+          <a:p>
+            <a:endParaRPr lang="en-US"/>
+          </a:p>
+        </p:txBody>
       </p:sp>
       <p:sp>
         <p:nvSpPr>
@@ -2208,6 +2487,13 @@
           </p:nvPr>
         </p:nvSpPr>
         <p:spPr/>
+        <p:txBody>
+          <a:bodyPr/>
+          <a:lstStyle/>
+          <a:p>
+            <a:endParaRPr lang="en-US"/>
+          </a:p>
+        </p:txBody>
       </p:sp>
       <p:sp>
         <p:nvSpPr>
@@ -2391,6 +2677,13 @@
           </p:nvPr>
         </p:nvSpPr>
         <p:spPr/>
+        <p:txBody>
+          <a:bodyPr/>
+          <a:lstStyle/>
+          <a:p>
+            <a:endParaRPr lang="en-US"/>
+          </a:p>
+        </p:txBody>
       </p:sp>
       <p:sp>
         <p:nvSpPr>
@@ -2559,6 +2852,13 @@
           </p:nvPr>
         </p:nvSpPr>
         <p:spPr/>
+        <p:txBody>
+          <a:bodyPr/>
+          <a:lstStyle/>
+          <a:p>
+            <a:endParaRPr lang="en-US"/>
+          </a:p>
+        </p:txBody>
       </p:sp>
       <p:sp>
         <p:nvSpPr>
@@ -2733,6 +3033,13 @@
           </p:nvPr>
         </p:nvSpPr>
         <p:spPr/>
+        <p:txBody>
+          <a:bodyPr/>
+          <a:lstStyle/>
+          <a:p>
+            <a:endParaRPr lang="en-US"/>
+          </a:p>
+        </p:txBody>
       </p:sp>
       <p:sp>
         <p:nvSpPr>
@@ -2895,6 +3202,13 @@
           </p:nvPr>
         </p:nvSpPr>
         <p:spPr/>
+        <p:txBody>
+          <a:bodyPr/>
+          <a:lstStyle/>
+          <a:p>
+            <a:endParaRPr lang="en-US"/>
+          </a:p>
+        </p:txBody>
       </p:sp>
       <p:sp>
         <p:nvSpPr>
@@ -2968,6 +3282,13 @@
           </p:nvPr>
         </p:nvSpPr>
         <p:spPr/>
+        <p:txBody>
+          <a:bodyPr/>
+          <a:lstStyle/>
+          <a:p>
+            <a:endParaRPr lang="en-US"/>
+          </a:p>
+        </p:txBody>
       </p:sp>
       <p:sp>
         <p:nvSpPr>
@@ -3032,6 +3353,13 @@
           </p:nvPr>
         </p:nvSpPr>
         <p:spPr/>
+        <p:txBody>
+          <a:bodyPr/>
+          <a:lstStyle/>
+          <a:p>
+            <a:endParaRPr lang="en-US"/>
+          </a:p>
+        </p:txBody>
       </p:sp>
       <p:sp>
         <p:nvSpPr>
@@ -3093,6 +3421,13 @@
           </p:nvPr>
         </p:nvSpPr>
         <p:spPr/>
+        <p:txBody>
+          <a:bodyPr/>
+          <a:lstStyle/>
+          <a:p>
+            <a:endParaRPr lang="en-US"/>
+          </a:p>
+        </p:txBody>
       </p:sp>
       <p:sp>
         <p:nvSpPr>
@@ -3160,6 +3495,13 @@
           </a:xfrm>
           <a:ln/>
         </p:spPr>
+        <p:txBody>
+          <a:bodyPr/>
+          <a:lstStyle/>
+          <a:p>
+            <a:endParaRPr lang="en-US"/>
+          </a:p>
+        </p:txBody>
       </p:sp>
       <p:sp>
         <p:nvSpPr>
@@ -3252,6 +3594,13 @@
           </a:xfrm>
           <a:ln/>
         </p:spPr>
+        <p:txBody>
+          <a:bodyPr/>
+          <a:lstStyle/>
+          <a:p>
+            <a:endParaRPr lang="en-US"/>
+          </a:p>
+        </p:txBody>
       </p:sp>
       <p:sp>
         <p:nvSpPr>
@@ -3344,6 +3693,13 @@
           </a:xfrm>
           <a:ln/>
         </p:spPr>
+        <p:txBody>
+          <a:bodyPr/>
+          <a:lstStyle/>
+          <a:p>
+            <a:endParaRPr lang="en-US"/>
+          </a:p>
+        </p:txBody>
       </p:sp>
       <p:sp>
         <p:nvSpPr>
@@ -3448,6 +3804,13 @@
           </a:xfrm>
           <a:ln/>
         </p:spPr>
+        <p:txBody>
+          <a:bodyPr/>
+          <a:lstStyle/>
+          <a:p>
+            <a:endParaRPr lang="en-US"/>
+          </a:p>
+        </p:txBody>
       </p:sp>
       <p:sp>
         <p:nvSpPr>
@@ -3558,6 +3921,13 @@
           </a:xfrm>
           <a:ln/>
         </p:spPr>
+        <p:txBody>
+          <a:bodyPr/>
+          <a:lstStyle/>
+          <a:p>
+            <a:endParaRPr lang="en-US"/>
+          </a:p>
+        </p:txBody>
       </p:sp>
       <p:sp>
         <p:nvSpPr>
@@ -3650,6 +4020,13 @@
           </p:nvPr>
         </p:nvSpPr>
         <p:spPr/>
+        <p:txBody>
+          <a:bodyPr/>
+          <a:lstStyle/>
+          <a:p>
+            <a:endParaRPr lang="en-US"/>
+          </a:p>
+        </p:txBody>
       </p:sp>
       <p:sp>
         <p:nvSpPr>
@@ -13017,15 +13394,20 @@
           <p:nvPr/>
         </p:nvPicPr>
         <p:blipFill>
-          <a:blip r:embed="rId5"/>
-          <a:stretch>
-            <a:fillRect/>
-          </a:stretch>
+          <a:blip r:embed="rId5">
+            <a:extLst>
+              <a:ext uri="{28A0092B-C50C-407E-A947-70E740481C1C}">
+                <a14:useLocalDpi xmlns:a14="http://schemas.microsoft.com/office/drawing/2010/main" val="0"/>
+              </a:ext>
+            </a:extLst>
+          </a:blip>
+          <a:srcRect/>
+          <a:stretch/>
         </p:blipFill>
         <p:spPr>
           <a:xfrm>
-            <a:off x="4701867" y="4223976"/>
-            <a:ext cx="4059366" cy="305375"/>
+            <a:off x="4827632" y="4223976"/>
+            <a:ext cx="3807836" cy="305375"/>
           </a:xfrm>
           <a:prstGeom prst="rect">
             <a:avLst/>
@@ -13041,15 +13423,20 @@
           <p:nvPr/>
         </p:nvPicPr>
         <p:blipFill>
-          <a:blip r:embed="rId6"/>
-          <a:stretch>
-            <a:fillRect/>
-          </a:stretch>
+          <a:blip r:embed="rId6">
+            <a:extLst>
+              <a:ext uri="{28A0092B-C50C-407E-A947-70E740481C1C}">
+                <a14:useLocalDpi xmlns:a14="http://schemas.microsoft.com/office/drawing/2010/main" val="0"/>
+              </a:ext>
+            </a:extLst>
+          </a:blip>
+          <a:srcRect/>
+          <a:stretch/>
         </p:blipFill>
         <p:spPr>
           <a:xfrm>
-            <a:off x="4667611" y="4777320"/>
-            <a:ext cx="4127879" cy="327188"/>
+            <a:off x="4827632" y="4670653"/>
+            <a:ext cx="3807836" cy="283696"/>
           </a:xfrm>
           <a:prstGeom prst="rect">
             <a:avLst/>
@@ -13072,7 +13459,7 @@
         </p:blipFill>
         <p:spPr>
           <a:xfrm>
-            <a:off x="4701867" y="5317344"/>
+            <a:off x="4827630" y="5273334"/>
             <a:ext cx="3665419" cy="335912"/>
           </a:xfrm>
           <a:prstGeom prst="rect">
@@ -13281,6 +13668,52 @@
               </a:rPr>
               <a:t>Review</a:t>
             </a:r>
+          </a:p>
+        </p:txBody>
+      </p:sp>
+      <p:sp>
+        <p:nvSpPr>
+          <p:cNvPr id="8" name="Arrow: Down 7">
+            <a:extLst>
+              <a:ext uri="{FF2B5EF4-FFF2-40B4-BE49-F238E27FC236}">
+                <a16:creationId xmlns:a16="http://schemas.microsoft.com/office/drawing/2014/main" id="{B9B3AF0F-A272-85F5-9499-4FA634AB7DC6}"/>
+              </a:ext>
+            </a:extLst>
+          </p:cNvPr>
+          <p:cNvSpPr/>
+          <p:nvPr/>
+        </p:nvSpPr>
+        <p:spPr>
+          <a:xfrm>
+            <a:off x="6486835" y="4994116"/>
+            <a:ext cx="347011" cy="279218"/>
+          </a:xfrm>
+          <a:prstGeom prst="downArrow">
+            <a:avLst/>
+          </a:prstGeom>
+        </p:spPr>
+        <p:style>
+          <a:lnRef idx="2">
+            <a:schemeClr val="accent1">
+              <a:shade val="15000"/>
+            </a:schemeClr>
+          </a:lnRef>
+          <a:fillRef idx="1">
+            <a:schemeClr val="accent1"/>
+          </a:fillRef>
+          <a:effectRef idx="0">
+            <a:schemeClr val="accent1"/>
+          </a:effectRef>
+          <a:fontRef idx="minor">
+            <a:schemeClr val="lt1"/>
+          </a:fontRef>
+        </p:style>
+        <p:txBody>
+          <a:bodyPr rtlCol="0" anchor="ctr"/>
+          <a:lstStyle/>
+          <a:p>
+            <a:pPr algn="ctr"/>
+            <a:endParaRPr lang="en-US"/>
           </a:p>
         </p:txBody>
       </p:sp>
@@ -15005,7 +15438,7 @@
                   <a:prstClr val="black"/>
                 </a:solidFill>
               </a:rPr>
-              <a:t>(b) How many memory cycles are required to read the word at address 102?</a:t>
+              <a:t>(c) How many memory cycles are required to read the word at address 102?</a:t>
             </a:r>
           </a:p>
           <a:p>
@@ -15016,7 +15449,7 @@
                   <a:prstClr val="black"/>
                 </a:solidFill>
               </a:rPr>
-              <a:t>(c) How many memory cycles are required to read the half word at address 102?</a:t>
+              <a:t>(d) How many memory cycles are required to read the half word at address 102?</a:t>
             </a:r>
             <a:endParaRPr lang="en-US" sz="1000" b="0" dirty="0">
               <a:solidFill>
@@ -20237,7 +20670,7 @@
                   <a:prstClr val="black"/>
                 </a:solidFill>
               </a:rPr>
-              <a:t>It takes __2 or 3__ memory cycle(s) to read a double word from memory (a double word may span at most 3 consecutive words in memory)</a:t>
+              <a:t>It takes __2 or 3__ memory cycle(s) to read a double word from memory (a double word may span at least 2 consecutive words, and at most 3 consecutive words in memory)</a:t>
             </a:r>
             <a:endParaRPr lang="en-US" sz="2400" b="0" dirty="0">
               <a:solidFill>
@@ -24067,8 +24500,8 @@
         </p:nvSpPr>
         <p:spPr>
           <a:xfrm>
-            <a:off x="4909627" y="5123992"/>
-            <a:ext cx="4140937" cy="1200329"/>
+            <a:off x="4519205" y="4967784"/>
+            <a:ext cx="4571999" cy="1754326"/>
           </a:xfrm>
           <a:prstGeom prst="rect">
             <a:avLst/>
@@ -24103,7 +24536,7 @@
               <a:rPr lang="en-US" sz="1800" b="0" dirty="0">
                 <a:latin typeface="+mn-lt"/>
               </a:rPr>
-              <a:t>The order in which registers are listed does not matter. For STM/LDM, the lowest-numbered register is stored/loaded at the lowest memory address.</a:t>
+              <a:t>The order in which registers are listed does not matter. For STM/LDM, the lowest-numbered register is stored/loaded at the lowest memory address. (Note that r3 is incremented by 4 (1 word) each time, not 1 byte)</a:t>
             </a:r>
           </a:p>
         </p:txBody>
@@ -24349,26 +24782,26 @@
         </p:nvSpPr>
         <p:spPr>
           <a:xfrm>
-            <a:off x="457200" y="1143000"/>
+            <a:off x="457200" y="1267161"/>
             <a:ext cx="8229600" cy="3558746"/>
           </a:xfrm>
         </p:spPr>
         <p:txBody>
           <a:bodyPr>
-            <a:normAutofit fontScale="77500" lnSpcReduction="20000"/>
+            <a:normAutofit fontScale="70000" lnSpcReduction="20000"/>
           </a:bodyPr>
           <a:lstStyle/>
           <a:p>
             <a:r>
               <a:rPr lang="en-US" dirty="0"/>
-              <a:t>ANS after LDRB R7, [R2, #1] (detailed explanations not needed for exam):</a:t>
+              <a:t>After STR R5, [R2, #0] (same as STR R5, [R2]) and LDRB R7, [R2, #1] (detailed explanations not needed for exam):</a:t>
             </a:r>
           </a:p>
           <a:p>
             <a:pPr lvl="1"/>
             <a:r>
               <a:rPr lang="en-US" dirty="0"/>
-              <a:t>STR stores a 32-bit register value to memory at base-plus-immediate without changing the base, and LDRB loads a single byte and zero-extends to 32 bits, so endianness only affects which byte resides at offset +1. </a:t>
+              <a:t>Memory address R2 contains  0x23456789. STR stores a 32-bit register value to memory at base-plus-immediate without changing the base, and LDRB loads a single byte and zero-extends to 32 bits, so endianness only affects which byte resides at offset +1. </a:t>
             </a:r>
           </a:p>
           <a:p>
@@ -24409,13 +24842,13 @@
           <p:nvPr>
             <p:extLst>
               <p:ext uri="{D42A27DB-BD31-4B8C-83A1-F6EECF244321}">
-                <p14:modId xmlns:p14="http://schemas.microsoft.com/office/powerpoint/2010/main" val="2911319937"/>
+                <p14:modId xmlns:p14="http://schemas.microsoft.com/office/powerpoint/2010/main" val="3111946580"/>
               </p:ext>
             </p:extLst>
           </p:nvPr>
         </p:nvGraphicFramePr>
         <p:xfrm>
-          <a:off x="955314" y="4506220"/>
+          <a:off x="721634" y="4323340"/>
           <a:ext cx="3798173" cy="2286000"/>
         </p:xfrm>
         <a:graphic>
@@ -24762,13 +25195,13 @@
           <p:nvPr>
             <p:extLst>
               <p:ext uri="{D42A27DB-BD31-4B8C-83A1-F6EECF244321}">
-                <p14:modId xmlns:p14="http://schemas.microsoft.com/office/powerpoint/2010/main" val="2238231094"/>
+                <p14:modId xmlns:p14="http://schemas.microsoft.com/office/powerpoint/2010/main" val="3278337131"/>
               </p:ext>
             </p:extLst>
           </p:nvPr>
         </p:nvGraphicFramePr>
         <p:xfrm>
-          <a:off x="5261097" y="4506220"/>
+          <a:off x="5027417" y="4323340"/>
           <a:ext cx="3798173" cy="2286000"/>
         </p:xfrm>
         <a:graphic>
@@ -25114,7 +25547,7 @@
         </p:nvSpPr>
         <p:spPr>
           <a:xfrm>
-            <a:off x="498025" y="6378507"/>
+            <a:off x="264345" y="6195627"/>
             <a:ext cx="541606" cy="461665"/>
           </a:xfrm>
           <a:prstGeom prst="rect">
@@ -25152,7 +25585,7 @@
         </p:nvSpPr>
         <p:spPr>
           <a:xfrm>
-            <a:off x="990600" y="6502668"/>
+            <a:off x="756920" y="6319788"/>
             <a:ext cx="298611" cy="240892"/>
           </a:xfrm>
           <a:prstGeom prst="rightArrow">
@@ -25198,7 +25631,7 @@
         </p:nvSpPr>
         <p:spPr>
           <a:xfrm>
-            <a:off x="4834846" y="6378507"/>
+            <a:off x="4601166" y="6195627"/>
             <a:ext cx="541606" cy="461665"/>
           </a:xfrm>
           <a:prstGeom prst="rect">
@@ -25236,7 +25669,7 @@
         </p:nvSpPr>
         <p:spPr>
           <a:xfrm>
-            <a:off x="5327421" y="6502668"/>
+            <a:off x="5093741" y="6319788"/>
             <a:ext cx="298611" cy="240892"/>
           </a:xfrm>
           <a:prstGeom prst="rightArrow">
@@ -25366,27 +25799,23 @@
           <a:lstStyle/>
           <a:p>
             <a:r>
-              <a:rPr lang="en-US" dirty="0"/>
+              <a:rPr lang="en-US" sz="2400" dirty="0"/>
               <a:t>ANS after LDRSH R7, [R2, #1]:</a:t>
             </a:r>
           </a:p>
           <a:p>
             <a:pPr lvl="1"/>
             <a:r>
-              <a:rPr lang="en-US" dirty="0"/>
+              <a:rPr lang="en-US" sz="2000" dirty="0"/>
               <a:t>Big-endian: the word 0x23456789 is laid out in memory as bytes 23 45 67 89 at addresses A, A+1, A+2, A+3 respectively, so LDRSH R7, [R2, #1] reads 0x4567 and sign-extends it to R7 = 0x00004567. (Sign bit is 0 for 0x4567)</a:t>
             </a:r>
           </a:p>
           <a:p>
             <a:pPr lvl="1"/>
             <a:r>
-              <a:rPr lang="en-US" dirty="0"/>
+              <a:rPr lang="en-US" sz="2000" dirty="0"/>
               <a:t>Little-endian: the same word is laid out as 89 67 45 23 at addresses A, A+1, A+2, A+3 respectively, so LDRSH R7, [R2, #1] reads 0x4567 and sign-extends it to R7 = 0x00004567. (Sign bit is 0 for 0x4567)</a:t>
             </a:r>
-          </a:p>
-          <a:p>
-            <a:pPr lvl="1"/>
-            <a:endParaRPr lang="en-US" dirty="0"/>
           </a:p>
         </p:txBody>
       </p:sp>
@@ -25402,10 +25831,16 @@
           <p:cNvGraphicFramePr>
             <a:graphicFrameLocks noGrp="1"/>
           </p:cNvGraphicFramePr>
-          <p:nvPr/>
+          <p:nvPr>
+            <p:extLst>
+              <p:ext uri="{D42A27DB-BD31-4B8C-83A1-F6EECF244321}">
+                <p14:modId xmlns:p14="http://schemas.microsoft.com/office/powerpoint/2010/main" val="2889823835"/>
+              </p:ext>
+            </p:extLst>
+          </p:nvPr>
         </p:nvGraphicFramePr>
         <p:xfrm>
-          <a:off x="955314" y="4506220"/>
+          <a:off x="773827" y="4069340"/>
           <a:ext cx="3798173" cy="2286000"/>
         </p:xfrm>
         <a:graphic>
@@ -25749,10 +26184,16 @@
           <p:cNvGraphicFramePr>
             <a:graphicFrameLocks noGrp="1"/>
           </p:cNvGraphicFramePr>
-          <p:nvPr/>
+          <p:nvPr>
+            <p:extLst>
+              <p:ext uri="{D42A27DB-BD31-4B8C-83A1-F6EECF244321}">
+                <p14:modId xmlns:p14="http://schemas.microsoft.com/office/powerpoint/2010/main" val="1282393997"/>
+              </p:ext>
+            </p:extLst>
+          </p:nvPr>
         </p:nvGraphicFramePr>
         <p:xfrm>
-          <a:off x="5261097" y="4506220"/>
+          <a:off x="5079610" y="4069340"/>
           <a:ext cx="3798173" cy="2286000"/>
         </p:xfrm>
         <a:graphic>
@@ -26098,7 +26539,7 @@
         </p:nvSpPr>
         <p:spPr>
           <a:xfrm>
-            <a:off x="498025" y="6378507"/>
+            <a:off x="316538" y="5941627"/>
             <a:ext cx="541606" cy="461665"/>
           </a:xfrm>
           <a:prstGeom prst="rect">
@@ -26136,7 +26577,7 @@
         </p:nvSpPr>
         <p:spPr>
           <a:xfrm>
-            <a:off x="990600" y="6502668"/>
+            <a:off x="809113" y="6065788"/>
             <a:ext cx="298611" cy="240892"/>
           </a:xfrm>
           <a:prstGeom prst="rightArrow">
@@ -26182,7 +26623,7 @@
         </p:nvSpPr>
         <p:spPr>
           <a:xfrm>
-            <a:off x="4834846" y="6378507"/>
+            <a:off x="4653359" y="5941627"/>
             <a:ext cx="541606" cy="461665"/>
           </a:xfrm>
           <a:prstGeom prst="rect">
@@ -26220,7 +26661,7 @@
         </p:nvSpPr>
         <p:spPr>
           <a:xfrm>
-            <a:off x="5327421" y="6502668"/>
+            <a:off x="5145934" y="6065788"/>
             <a:ext cx="298611" cy="240892"/>
           </a:xfrm>
           <a:prstGeom prst="rightArrow">
@@ -30819,21 +31260,21 @@
           <a:p>
             <a:r>
               <a:rPr lang="en-US" dirty="0"/>
-              <a:t>ANS after LDRSH R7, [R2, #1]:</a:t>
+              <a:t>ANS after LDRSH R7, [R2, #2]:</a:t>
             </a:r>
           </a:p>
           <a:p>
             <a:pPr lvl="1"/>
             <a:r>
               <a:rPr lang="en-US" dirty="0"/>
-              <a:t>Big-endian: the word 0x23456789 is laid out in memory as bytes 23 45 67 89 at addresses A, A+1, A+2, A+3 respectively, so LDRSH R7, [R2, #1] reads 0x6789 and sign-extends it to R7 = 0x00006789. </a:t>
+              <a:t>Big-endian: the word 0x23456789 is laid out in memory as bytes 23 45 67 89 at addresses A, A+1, A+2, A+3 respectively, so LDRSH R7, [R2, #2] reads 0x6789 and sign-extends it to R7 = 0x00006789. </a:t>
             </a:r>
           </a:p>
           <a:p>
             <a:pPr lvl="1"/>
             <a:r>
               <a:rPr lang="en-US" dirty="0"/>
-              <a:t>Little-endian: the same word is laid out as 89 67 45 23 at addresses A, A+1, A+2, A+3 respectively, so LDRSH R7, [R2, #1] reads 0x2345 and sign-extends it to R7 = 0x00002345. </a:t>
+              <a:t>Little-endian: the same word is laid out as 89 67 45 23 at addresses A, A+1, A+2, A+3 respectively, so LDRSH R7, [R2, #2] reads 0x2345 and sign-extends it to R7 = 0x00002345. </a:t>
             </a:r>
           </a:p>
           <a:p>
@@ -30854,10 +31295,16 @@
           <p:cNvGraphicFramePr>
             <a:graphicFrameLocks noGrp="1"/>
           </p:cNvGraphicFramePr>
-          <p:nvPr/>
+          <p:nvPr>
+            <p:extLst>
+              <p:ext uri="{D42A27DB-BD31-4B8C-83A1-F6EECF244321}">
+                <p14:modId xmlns:p14="http://schemas.microsoft.com/office/powerpoint/2010/main" val="2373286293"/>
+              </p:ext>
+            </p:extLst>
+          </p:nvPr>
         </p:nvGraphicFramePr>
         <p:xfrm>
-          <a:off x="955314" y="4506220"/>
+          <a:off x="773827" y="4221740"/>
           <a:ext cx="3798173" cy="2286000"/>
         </p:xfrm>
         <a:graphic>
@@ -31201,10 +31648,16 @@
           <p:cNvGraphicFramePr>
             <a:graphicFrameLocks noGrp="1"/>
           </p:cNvGraphicFramePr>
-          <p:nvPr/>
+          <p:nvPr>
+            <p:extLst>
+              <p:ext uri="{D42A27DB-BD31-4B8C-83A1-F6EECF244321}">
+                <p14:modId xmlns:p14="http://schemas.microsoft.com/office/powerpoint/2010/main" val="1700288449"/>
+              </p:ext>
+            </p:extLst>
+          </p:nvPr>
         </p:nvGraphicFramePr>
         <p:xfrm>
-          <a:off x="5261097" y="4506220"/>
+          <a:off x="5079610" y="4221740"/>
           <a:ext cx="3798173" cy="2286000"/>
         </p:xfrm>
         <a:graphic>
@@ -31550,7 +32003,7 @@
         </p:nvSpPr>
         <p:spPr>
           <a:xfrm>
-            <a:off x="498025" y="6378507"/>
+            <a:off x="316538" y="6094027"/>
             <a:ext cx="541606" cy="461665"/>
           </a:xfrm>
           <a:prstGeom prst="rect">
@@ -31588,7 +32041,7 @@
         </p:nvSpPr>
         <p:spPr>
           <a:xfrm>
-            <a:off x="990600" y="6502668"/>
+            <a:off x="809113" y="6218188"/>
             <a:ext cx="298611" cy="240892"/>
           </a:xfrm>
           <a:prstGeom prst="rightArrow">
@@ -31634,7 +32087,7 @@
         </p:nvSpPr>
         <p:spPr>
           <a:xfrm>
-            <a:off x="4834846" y="6378507"/>
+            <a:off x="4653359" y="6094027"/>
             <a:ext cx="541606" cy="461665"/>
           </a:xfrm>
           <a:prstGeom prst="rect">
@@ -31672,7 +32125,7 @@
         </p:nvSpPr>
         <p:spPr>
           <a:xfrm>
-            <a:off x="5327421" y="6502668"/>
+            <a:off x="5145934" y="6218188"/>
             <a:ext cx="298611" cy="240892"/>
           </a:xfrm>
           <a:prstGeom prst="rightArrow">
@@ -38706,149 +39159,6 @@
   <p:cSld>
     <p:spTree>
       <p:nvGrpSpPr>
-        <p:cNvPr id="1" name=""/>
-        <p:cNvGrpSpPr/>
-        <p:nvPr/>
-      </p:nvGrpSpPr>
-      <p:grpSpPr>
-        <a:xfrm>
-          <a:off x="0" y="0"/>
-          <a:ext cx="0" cy="0"/>
-          <a:chOff x="0" y="0"/>
-          <a:chExt cx="0" cy="0"/>
-        </a:xfrm>
-      </p:grpSpPr>
-      <p:sp>
-        <p:nvSpPr>
-          <p:cNvPr id="2" name="Title 1">
-            <a:extLst>
-              <a:ext uri="{FF2B5EF4-FFF2-40B4-BE49-F238E27FC236}">
-                <a16:creationId xmlns:a16="http://schemas.microsoft.com/office/drawing/2014/main" id="{BD71EDE7-580A-D7EC-1F9A-0ADA4EBCA7FD}"/>
-              </a:ext>
-            </a:extLst>
-          </p:cNvPr>
-          <p:cNvSpPr>
-            <a:spLocks noGrp="1"/>
-          </p:cNvSpPr>
-          <p:nvPr>
-            <p:ph type="title"/>
-          </p:nvPr>
-        </p:nvSpPr>
-        <p:spPr/>
-        <p:txBody>
-          <a:bodyPr/>
-          <a:lstStyle/>
-          <a:p>
-            <a:endParaRPr lang="en-US"/>
-          </a:p>
-        </p:txBody>
-      </p:sp>
-      <p:sp>
-        <p:nvSpPr>
-          <p:cNvPr id="3" name="Slide Number Placeholder 2">
-            <a:extLst>
-              <a:ext uri="{FF2B5EF4-FFF2-40B4-BE49-F238E27FC236}">
-                <a16:creationId xmlns:a16="http://schemas.microsoft.com/office/drawing/2014/main" id="{69212CA9-B083-7D95-603D-B6C26B0D67F4}"/>
-              </a:ext>
-            </a:extLst>
-          </p:cNvPr>
-          <p:cNvSpPr>
-            <a:spLocks noGrp="1"/>
-          </p:cNvSpPr>
-          <p:nvPr>
-            <p:ph type="sldNum" sz="quarter" idx="12"/>
-          </p:nvPr>
-        </p:nvSpPr>
-        <p:spPr/>
-        <p:txBody>
-          <a:bodyPr/>
-          <a:lstStyle/>
-          <a:p>
-            <a:fld id="{AEE14D4A-FE32-40AF-B06D-E9622816B101}" type="slidenum">
-              <a:rPr lang="en-US" smtClean="0"/>
-              <a:pPr/>
-              <a:t>34</a:t>
-            </a:fld>
-            <a:endParaRPr lang="en-US"/>
-          </a:p>
-        </p:txBody>
-      </p:sp>
-      <p:sp>
-        <p:nvSpPr>
-          <p:cNvPr id="4" name="Content Placeholder 3">
-            <a:extLst>
-              <a:ext uri="{FF2B5EF4-FFF2-40B4-BE49-F238E27FC236}">
-                <a16:creationId xmlns:a16="http://schemas.microsoft.com/office/drawing/2014/main" id="{3993DB85-14D3-DCA0-8DAE-156878EE97F2}"/>
-              </a:ext>
-            </a:extLst>
-          </p:cNvPr>
-          <p:cNvSpPr>
-            <a:spLocks noGrp="1"/>
-          </p:cNvSpPr>
-          <p:nvPr>
-            <p:ph sz="quarter" idx="1"/>
-          </p:nvPr>
-        </p:nvSpPr>
-        <p:spPr/>
-        <p:txBody>
-          <a:bodyPr/>
-          <a:lstStyle/>
-          <a:p>
-            <a:endParaRPr lang="en-US"/>
-          </a:p>
-        </p:txBody>
-      </p:sp>
-      <p:pic>
-        <p:nvPicPr>
-          <p:cNvPr id="6" name="Picture 5">
-            <a:extLst>
-              <a:ext uri="{FF2B5EF4-FFF2-40B4-BE49-F238E27FC236}">
-                <a16:creationId xmlns:a16="http://schemas.microsoft.com/office/drawing/2014/main" id="{DBA7E6FD-31CB-BF98-56D2-635FB4217B9E}"/>
-              </a:ext>
-            </a:extLst>
-          </p:cNvPr>
-          <p:cNvPicPr>
-            <a:picLocks noChangeAspect="1"/>
-          </p:cNvPicPr>
-          <p:nvPr/>
-        </p:nvPicPr>
-        <p:blipFill>
-          <a:blip r:embed="rId3"/>
-          <a:stretch>
-            <a:fillRect/>
-          </a:stretch>
-        </p:blipFill>
-        <p:spPr>
-          <a:xfrm>
-            <a:off x="1780953" y="0"/>
-            <a:ext cx="5582093" cy="6858000"/>
-          </a:xfrm>
-          <a:prstGeom prst="rect">
-            <a:avLst/>
-          </a:prstGeom>
-        </p:spPr>
-      </p:pic>
-    </p:spTree>
-    <p:extLst>
-      <p:ext uri="{BB962C8B-B14F-4D97-AF65-F5344CB8AC3E}">
-        <p14:creationId xmlns:p14="http://schemas.microsoft.com/office/powerpoint/2010/main" val="606520013"/>
-      </p:ext>
-    </p:extLst>
-  </p:cSld>
-  <p:clrMapOvr>
-    <a:masterClrMapping/>
-  </p:clrMapOvr>
-  <p:transition>
-    <p:pull dir="ru"/>
-  </p:transition>
-</p:sld>
-</file>
-
-<file path=ppt/slides/slide35.xml><?xml version="1.0" encoding="utf-8"?>
-<p:sld xmlns:a="http://schemas.openxmlformats.org/drawingml/2006/main" xmlns:r="http://schemas.openxmlformats.org/officeDocument/2006/relationships" xmlns:p="http://schemas.openxmlformats.org/presentationml/2006/main">
-  <p:cSld>
-    <p:spTree>
-      <p:nvGrpSpPr>
         <p:cNvPr id="1" name="">
           <a:extLst>
             <a:ext uri="{FF2B5EF4-FFF2-40B4-BE49-F238E27FC236}">
@@ -38921,7 +39231,7 @@
             <a:fld id="{AEE14D4A-FE32-40AF-B06D-E9622816B101}" type="slidenum">
               <a:rPr lang="en-US" smtClean="0"/>
               <a:pPr/>
-              <a:t>35</a:t>
+              <a:t>34</a:t>
             </a:fld>
             <a:endParaRPr lang="en-US"/>
           </a:p>
@@ -38946,7 +39256,7 @@
         <p:spPr>
           <a:xfrm>
             <a:off x="137322" y="1219200"/>
-            <a:ext cx="4821952" cy="4937760"/>
+            <a:ext cx="5650020" cy="4937760"/>
           </a:xfrm>
         </p:spPr>
         <p:txBody>
@@ -39496,10 +39806,681 @@
           </a:graphicData>
         </a:graphic>
       </p:graphicFrame>
+      <p:graphicFrame>
+        <p:nvGraphicFramePr>
+          <p:cNvPr id="7" name="Content Placeholder 6">
+            <a:extLst>
+              <a:ext uri="{FF2B5EF4-FFF2-40B4-BE49-F238E27FC236}">
+                <a16:creationId xmlns:a16="http://schemas.microsoft.com/office/drawing/2014/main" id="{744E2143-7A13-BD9D-79CC-8CEAA8258A28}"/>
+              </a:ext>
+            </a:extLst>
+          </p:cNvPr>
+          <p:cNvGraphicFramePr>
+            <a:graphicFrameLocks/>
+          </p:cNvGraphicFramePr>
+          <p:nvPr>
+            <p:extLst>
+              <p:ext uri="{D42A27DB-BD31-4B8C-83A1-F6EECF244321}">
+                <p14:modId xmlns:p14="http://schemas.microsoft.com/office/powerpoint/2010/main" val="4011575496"/>
+              </p:ext>
+            </p:extLst>
+          </p:nvPr>
+        </p:nvGraphicFramePr>
+        <p:xfrm>
+          <a:off x="457200" y="6228257"/>
+          <a:ext cx="8423243" cy="370840"/>
+        </p:xfrm>
+        <a:graphic>
+          <a:graphicData uri="http://schemas.openxmlformats.org/drawingml/2006/table">
+            <a:tbl>
+              <a:tblPr firstRow="1" bandRow="1">
+                <a:tableStyleId>{5940675A-B579-460E-94D1-54222C63F5DA}</a:tableStyleId>
+              </a:tblPr>
+              <a:tblGrid>
+                <a:gridCol w="1820338">
+                  <a:extLst>
+                    <a:ext uri="{9D8B030D-6E8A-4147-A177-3AD203B41FA5}">
+                      <a16:colId xmlns:a16="http://schemas.microsoft.com/office/drawing/2014/main" val="4041087470"/>
+                    </a:ext>
+                  </a:extLst>
+                </a:gridCol>
+                <a:gridCol w="549956">
+                  <a:extLst>
+                    <a:ext uri="{9D8B030D-6E8A-4147-A177-3AD203B41FA5}">
+                      <a16:colId xmlns:a16="http://schemas.microsoft.com/office/drawing/2014/main" val="475833553"/>
+                    </a:ext>
+                  </a:extLst>
+                </a:gridCol>
+                <a:gridCol w="549956">
+                  <a:extLst>
+                    <a:ext uri="{9D8B030D-6E8A-4147-A177-3AD203B41FA5}">
+                      <a16:colId xmlns:a16="http://schemas.microsoft.com/office/drawing/2014/main" val="3440583969"/>
+                    </a:ext>
+                  </a:extLst>
+                </a:gridCol>
+                <a:gridCol w="549956">
+                  <a:extLst>
+                    <a:ext uri="{9D8B030D-6E8A-4147-A177-3AD203B41FA5}">
+                      <a16:colId xmlns:a16="http://schemas.microsoft.com/office/drawing/2014/main" val="3973726920"/>
+                    </a:ext>
+                  </a:extLst>
+                </a:gridCol>
+                <a:gridCol w="549956">
+                  <a:extLst>
+                    <a:ext uri="{9D8B030D-6E8A-4147-A177-3AD203B41FA5}">
+                      <a16:colId xmlns:a16="http://schemas.microsoft.com/office/drawing/2014/main" val="1099364392"/>
+                    </a:ext>
+                  </a:extLst>
+                </a:gridCol>
+                <a:gridCol w="549956">
+                  <a:extLst>
+                    <a:ext uri="{9D8B030D-6E8A-4147-A177-3AD203B41FA5}">
+                      <a16:colId xmlns:a16="http://schemas.microsoft.com/office/drawing/2014/main" val="598594491"/>
+                    </a:ext>
+                  </a:extLst>
+                </a:gridCol>
+                <a:gridCol w="549956">
+                  <a:extLst>
+                    <a:ext uri="{9D8B030D-6E8A-4147-A177-3AD203B41FA5}">
+                      <a16:colId xmlns:a16="http://schemas.microsoft.com/office/drawing/2014/main" val="3299168853"/>
+                    </a:ext>
+                  </a:extLst>
+                </a:gridCol>
+                <a:gridCol w="549956">
+                  <a:extLst>
+                    <a:ext uri="{9D8B030D-6E8A-4147-A177-3AD203B41FA5}">
+                      <a16:colId xmlns:a16="http://schemas.microsoft.com/office/drawing/2014/main" val="3639377261"/>
+                    </a:ext>
+                  </a:extLst>
+                </a:gridCol>
+                <a:gridCol w="549956">
+                  <a:extLst>
+                    <a:ext uri="{9D8B030D-6E8A-4147-A177-3AD203B41FA5}">
+                      <a16:colId xmlns:a16="http://schemas.microsoft.com/office/drawing/2014/main" val="2095656865"/>
+                    </a:ext>
+                  </a:extLst>
+                </a:gridCol>
+                <a:gridCol w="553389">
+                  <a:extLst>
+                    <a:ext uri="{9D8B030D-6E8A-4147-A177-3AD203B41FA5}">
+                      <a16:colId xmlns:a16="http://schemas.microsoft.com/office/drawing/2014/main" val="2172498307"/>
+                    </a:ext>
+                  </a:extLst>
+                </a:gridCol>
+                <a:gridCol w="549956">
+                  <a:extLst>
+                    <a:ext uri="{9D8B030D-6E8A-4147-A177-3AD203B41FA5}">
+                      <a16:colId xmlns:a16="http://schemas.microsoft.com/office/drawing/2014/main" val="3928751653"/>
+                    </a:ext>
+                  </a:extLst>
+                </a:gridCol>
+                <a:gridCol w="549956">
+                  <a:extLst>
+                    <a:ext uri="{9D8B030D-6E8A-4147-A177-3AD203B41FA5}">
+                      <a16:colId xmlns:a16="http://schemas.microsoft.com/office/drawing/2014/main" val="1178522413"/>
+                    </a:ext>
+                  </a:extLst>
+                </a:gridCol>
+                <a:gridCol w="549956">
+                  <a:extLst>
+                    <a:ext uri="{9D8B030D-6E8A-4147-A177-3AD203B41FA5}">
+                      <a16:colId xmlns:a16="http://schemas.microsoft.com/office/drawing/2014/main" val="4096721898"/>
+                    </a:ext>
+                  </a:extLst>
+                </a:gridCol>
+              </a:tblGrid>
+              <a:tr h="370840">
+                <a:tc>
+                  <a:txBody>
+                    <a:bodyPr/>
+                    <a:lstStyle/>
+                    <a:p>
+                      <a:pPr marL="0" marR="0" lvl="0" indent="0" algn="ctr" defTabSz="914400" rtl="0" eaLnBrk="1" fontAlgn="auto" latinLnBrk="0" hangingPunct="1">
+                        <a:lnSpc>
+                          <a:spcPct val="100000"/>
+                        </a:lnSpc>
+                        <a:spcBef>
+                          <a:spcPts val="0"/>
+                        </a:spcBef>
+                        <a:spcAft>
+                          <a:spcPts val="0"/>
+                        </a:spcAft>
+                        <a:buClrTx/>
+                        <a:buSzTx/>
+                        <a:buFontTx/>
+                        <a:buNone/>
+                        <a:tabLst/>
+                        <a:defRPr/>
+                      </a:pPr>
+                      <a:r>
+                        <a:rPr lang="de-DE" sz="1800" b="0" i="0" kern="1200" dirty="0">
+                          <a:solidFill>
+                            <a:schemeClr val="tx1"/>
+                          </a:solidFill>
+                          <a:effectLst/>
+                          <a:latin typeface="Times New Roman" pitchFamily="18" charset="0"/>
+                          <a:ea typeface="+mn-ea"/>
+                          <a:cs typeface="+mn-cs"/>
+                        </a:rPr>
+                        <a:t>0x10000010</a:t>
+                      </a:r>
+                      <a:endParaRPr lang="en-US" sz="1800" b="0" dirty="0">
+                        <a:latin typeface="Consolas" panose="020B0609020204030204" pitchFamily="49" charset="0"/>
+                        <a:cs typeface="Consolas" panose="020B0609020204030204" pitchFamily="49" charset="0"/>
+                      </a:endParaRPr>
+                    </a:p>
+                  </a:txBody>
+                  <a:tcPr>
+                    <a:solidFill>
+                      <a:schemeClr val="bg1"/>
+                    </a:solidFill>
+                  </a:tcPr>
+                </a:tc>
+                <a:tc>
+                  <a:txBody>
+                    <a:bodyPr/>
+                    <a:lstStyle/>
+                    <a:p>
+                      <a:pPr algn="ctr"/>
+                      <a:r>
+                        <a:rPr lang="en-US" dirty="0"/>
+                        <a:t>FF</a:t>
+                      </a:r>
+                    </a:p>
+                  </a:txBody>
+                  <a:tcPr>
+                    <a:solidFill>
+                      <a:schemeClr val="bg1"/>
+                    </a:solidFill>
+                  </a:tcPr>
+                </a:tc>
+                <a:tc>
+                  <a:txBody>
+                    <a:bodyPr/>
+                    <a:lstStyle/>
+                    <a:p>
+                      <a:pPr marL="0" algn="ctr" rtl="0" eaLnBrk="1" latinLnBrk="0" hangingPunct="1"/>
+                      <a:r>
+                        <a:rPr kumimoji="0" lang="en-US" kern="1200" dirty="0">
+                          <a:solidFill>
+                            <a:schemeClr val="tx1"/>
+                          </a:solidFill>
+                          <a:latin typeface="+mn-lt"/>
+                          <a:ea typeface="+mn-ea"/>
+                          <a:cs typeface="+mn-cs"/>
+                        </a:rPr>
+                        <a:t>EF</a:t>
+                      </a:r>
+                    </a:p>
+                  </a:txBody>
+                  <a:tcPr>
+                    <a:solidFill>
+                      <a:schemeClr val="bg1"/>
+                    </a:solidFill>
+                  </a:tcPr>
+                </a:tc>
+                <a:tc>
+                  <a:txBody>
+                    <a:bodyPr/>
+                    <a:lstStyle/>
+                    <a:p>
+                      <a:pPr marL="0" algn="ctr" rtl="0" eaLnBrk="1" latinLnBrk="0" hangingPunct="1"/>
+                      <a:r>
+                        <a:rPr kumimoji="0" lang="en-US" kern="1200" dirty="0">
+                          <a:solidFill>
+                            <a:schemeClr val="tx1"/>
+                          </a:solidFill>
+                          <a:latin typeface="+mn-lt"/>
+                          <a:ea typeface="+mn-ea"/>
+                          <a:cs typeface="+mn-cs"/>
+                        </a:rPr>
+                        <a:t>CD</a:t>
+                      </a:r>
+                    </a:p>
+                  </a:txBody>
+                  <a:tcPr>
+                    <a:solidFill>
+                      <a:schemeClr val="bg1"/>
+                    </a:solidFill>
+                  </a:tcPr>
+                </a:tc>
+                <a:tc>
+                  <a:txBody>
+                    <a:bodyPr/>
+                    <a:lstStyle/>
+                    <a:p>
+                      <a:pPr marL="0" algn="ctr" rtl="0" eaLnBrk="1" latinLnBrk="0" hangingPunct="1"/>
+                      <a:r>
+                        <a:rPr kumimoji="0" lang="en-US" kern="1200" dirty="0">
+                          <a:solidFill>
+                            <a:schemeClr val="tx1"/>
+                          </a:solidFill>
+                          <a:latin typeface="+mn-lt"/>
+                          <a:ea typeface="+mn-ea"/>
+                          <a:cs typeface="+mn-cs"/>
+                        </a:rPr>
+                        <a:t>AB</a:t>
+                      </a:r>
+                    </a:p>
+                  </a:txBody>
+                  <a:tcPr>
+                    <a:solidFill>
+                      <a:schemeClr val="bg1"/>
+                    </a:solidFill>
+                  </a:tcPr>
+                </a:tc>
+                <a:tc>
+                  <a:txBody>
+                    <a:bodyPr/>
+                    <a:lstStyle/>
+                    <a:p>
+                      <a:pPr marL="0" algn="ctr" rtl="0" eaLnBrk="1" latinLnBrk="0" hangingPunct="1"/>
+                      <a:r>
+                        <a:rPr kumimoji="0" lang="en-US" kern="1200" dirty="0">
+                          <a:solidFill>
+                            <a:schemeClr val="tx1"/>
+                          </a:solidFill>
+                          <a:latin typeface="+mn-lt"/>
+                          <a:ea typeface="+mn-ea"/>
+                          <a:cs typeface="+mn-cs"/>
+                        </a:rPr>
+                        <a:t>00</a:t>
+                      </a:r>
+                    </a:p>
+                  </a:txBody>
+                  <a:tcPr>
+                    <a:solidFill>
+                      <a:schemeClr val="bg1"/>
+                    </a:solidFill>
+                  </a:tcPr>
+                </a:tc>
+                <a:tc>
+                  <a:txBody>
+                    <a:bodyPr/>
+                    <a:lstStyle/>
+                    <a:p>
+                      <a:pPr marL="0" algn="ctr" rtl="0" eaLnBrk="1" latinLnBrk="0" hangingPunct="1"/>
+                      <a:r>
+                        <a:rPr kumimoji="0" lang="en-US" kern="1200" dirty="0">
+                          <a:solidFill>
+                            <a:schemeClr val="tx1"/>
+                          </a:solidFill>
+                          <a:latin typeface="+mn-lt"/>
+                          <a:ea typeface="+mn-ea"/>
+                          <a:cs typeface="+mn-cs"/>
+                        </a:rPr>
+                        <a:t>00</a:t>
+                      </a:r>
+                    </a:p>
+                  </a:txBody>
+                  <a:tcPr>
+                    <a:solidFill>
+                      <a:schemeClr val="bg1"/>
+                    </a:solidFill>
+                  </a:tcPr>
+                </a:tc>
+                <a:tc>
+                  <a:txBody>
+                    <a:bodyPr/>
+                    <a:lstStyle/>
+                    <a:p>
+                      <a:pPr marL="0" algn="ctr" rtl="0" eaLnBrk="1" latinLnBrk="0" hangingPunct="1"/>
+                      <a:r>
+                        <a:rPr kumimoji="0" lang="en-US" kern="1200" dirty="0">
+                          <a:solidFill>
+                            <a:schemeClr val="tx1"/>
+                          </a:solidFill>
+                          <a:latin typeface="+mn-lt"/>
+                          <a:ea typeface="+mn-ea"/>
+                          <a:cs typeface="+mn-cs"/>
+                        </a:rPr>
+                        <a:t>CD</a:t>
+                      </a:r>
+                    </a:p>
+                  </a:txBody>
+                  <a:tcPr>
+                    <a:solidFill>
+                      <a:schemeClr val="bg1"/>
+                    </a:solidFill>
+                  </a:tcPr>
+                </a:tc>
+                <a:tc>
+                  <a:txBody>
+                    <a:bodyPr/>
+                    <a:lstStyle/>
+                    <a:p>
+                      <a:pPr marL="0" algn="ctr" rtl="0" eaLnBrk="1" latinLnBrk="0" hangingPunct="1"/>
+                      <a:r>
+                        <a:rPr kumimoji="0" lang="en-US" kern="1200" dirty="0">
+                          <a:solidFill>
+                            <a:schemeClr val="tx1"/>
+                          </a:solidFill>
+                          <a:latin typeface="+mn-lt"/>
+                          <a:ea typeface="+mn-ea"/>
+                          <a:cs typeface="+mn-cs"/>
+                        </a:rPr>
+                        <a:t>AB</a:t>
+                      </a:r>
+                    </a:p>
+                  </a:txBody>
+                  <a:tcPr>
+                    <a:solidFill>
+                      <a:schemeClr val="bg1"/>
+                    </a:solidFill>
+                  </a:tcPr>
+                </a:tc>
+                <a:tc>
+                  <a:txBody>
+                    <a:bodyPr/>
+                    <a:lstStyle/>
+                    <a:p>
+                      <a:pPr marL="0" algn="ctr" rtl="0" eaLnBrk="1" latinLnBrk="0" hangingPunct="1"/>
+                      <a:r>
+                        <a:rPr kumimoji="0" lang="en-US" kern="1200" dirty="0">
+                          <a:solidFill>
+                            <a:schemeClr val="tx1"/>
+                          </a:solidFill>
+                          <a:latin typeface="+mn-lt"/>
+                          <a:ea typeface="+mn-ea"/>
+                          <a:cs typeface="+mn-cs"/>
+                        </a:rPr>
+                        <a:t>D0</a:t>
+                      </a:r>
+                    </a:p>
+                  </a:txBody>
+                  <a:tcPr>
+                    <a:solidFill>
+                      <a:schemeClr val="bg1"/>
+                    </a:solidFill>
+                  </a:tcPr>
+                </a:tc>
+                <a:tc>
+                  <a:txBody>
+                    <a:bodyPr/>
+                    <a:lstStyle/>
+                    <a:p>
+                      <a:pPr marL="0" algn="ctr" rtl="0" eaLnBrk="1" latinLnBrk="0" hangingPunct="1"/>
+                      <a:r>
+                        <a:rPr kumimoji="0" lang="en-US" kern="1200" dirty="0">
+                          <a:solidFill>
+                            <a:schemeClr val="tx1"/>
+                          </a:solidFill>
+                          <a:latin typeface="+mn-lt"/>
+                          <a:ea typeface="+mn-ea"/>
+                          <a:cs typeface="+mn-cs"/>
+                        </a:rPr>
+                        <a:t>BC</a:t>
+                      </a:r>
+                    </a:p>
+                  </a:txBody>
+                  <a:tcPr>
+                    <a:solidFill>
+                      <a:schemeClr val="bg1"/>
+                    </a:solidFill>
+                  </a:tcPr>
+                </a:tc>
+                <a:tc>
+                  <a:txBody>
+                    <a:bodyPr/>
+                    <a:lstStyle/>
+                    <a:p>
+                      <a:pPr marL="0" algn="ctr" rtl="0" eaLnBrk="1" latinLnBrk="0" hangingPunct="1"/>
+                      <a:r>
+                        <a:rPr kumimoji="0" lang="en-US" kern="1200" dirty="0">
+                          <a:solidFill>
+                            <a:schemeClr val="tx1"/>
+                          </a:solidFill>
+                          <a:latin typeface="+mn-lt"/>
+                          <a:ea typeface="+mn-ea"/>
+                          <a:cs typeface="+mn-cs"/>
+                        </a:rPr>
+                        <a:t>D8</a:t>
+                      </a:r>
+                    </a:p>
+                  </a:txBody>
+                  <a:tcPr>
+                    <a:solidFill>
+                      <a:schemeClr val="bg1"/>
+                    </a:solidFill>
+                  </a:tcPr>
+                </a:tc>
+                <a:tc>
+                  <a:txBody>
+                    <a:bodyPr/>
+                    <a:lstStyle/>
+                    <a:p>
+                      <a:pPr marL="0" algn="ctr" rtl="0" eaLnBrk="1" latinLnBrk="0" hangingPunct="1"/>
+                      <a:r>
+                        <a:rPr kumimoji="0" lang="en-US" kern="1200" dirty="0">
+                          <a:solidFill>
+                            <a:schemeClr val="tx1"/>
+                          </a:solidFill>
+                          <a:latin typeface="+mn-lt"/>
+                          <a:ea typeface="+mn-ea"/>
+                          <a:cs typeface="+mn-cs"/>
+                        </a:rPr>
+                        <a:t>A8</a:t>
+                      </a:r>
+                    </a:p>
+                  </a:txBody>
+                  <a:tcPr>
+                    <a:solidFill>
+                      <a:schemeClr val="bg1"/>
+                    </a:solidFill>
+                  </a:tcPr>
+                </a:tc>
+                <a:extLst>
+                  <a:ext uri="{0D108BD9-81ED-4DB2-BD59-A6C34878D82A}">
+                    <a16:rowId xmlns:a16="http://schemas.microsoft.com/office/drawing/2014/main" val="3396541759"/>
+                  </a:ext>
+                </a:extLst>
+              </a:tr>
+            </a:tbl>
+          </a:graphicData>
+        </a:graphic>
+      </p:graphicFrame>
     </p:spTree>
     <p:extLst>
       <p:ext uri="{BB962C8B-B14F-4D97-AF65-F5344CB8AC3E}">
         <p14:creationId xmlns:p14="http://schemas.microsoft.com/office/powerpoint/2010/main" val="3653550031"/>
+      </p:ext>
+    </p:extLst>
+  </p:cSld>
+  <p:clrMapOvr>
+    <a:masterClrMapping/>
+  </p:clrMapOvr>
+  <p:transition>
+    <p:pull dir="ru"/>
+  </p:transition>
+</p:sld>
+</file>
+
+<file path=ppt/slides/slide35.xml><?xml version="1.0" encoding="utf-8"?>
+<p:sld xmlns:a="http://schemas.openxmlformats.org/drawingml/2006/main" xmlns:r="http://schemas.openxmlformats.org/officeDocument/2006/relationships" xmlns:p="http://schemas.openxmlformats.org/presentationml/2006/main">
+  <p:cSld>
+    <p:spTree>
+      <p:nvGrpSpPr>
+        <p:cNvPr id="1" name=""/>
+        <p:cNvGrpSpPr/>
+        <p:nvPr/>
+      </p:nvGrpSpPr>
+      <p:grpSpPr>
+        <a:xfrm>
+          <a:off x="0" y="0"/>
+          <a:ext cx="0" cy="0"/>
+          <a:chOff x="0" y="0"/>
+          <a:chExt cx="0" cy="0"/>
+        </a:xfrm>
+      </p:grpSpPr>
+      <p:sp>
+        <p:nvSpPr>
+          <p:cNvPr id="2" name="Title 1">
+            <a:extLst>
+              <a:ext uri="{FF2B5EF4-FFF2-40B4-BE49-F238E27FC236}">
+                <a16:creationId xmlns:a16="http://schemas.microsoft.com/office/drawing/2014/main" id="{BD71EDE7-580A-D7EC-1F9A-0ADA4EBCA7FD}"/>
+              </a:ext>
+            </a:extLst>
+          </p:cNvPr>
+          <p:cNvSpPr>
+            <a:spLocks noGrp="1"/>
+          </p:cNvSpPr>
+          <p:nvPr>
+            <p:ph type="title"/>
+          </p:nvPr>
+        </p:nvSpPr>
+        <p:spPr/>
+        <p:txBody>
+          <a:bodyPr/>
+          <a:lstStyle/>
+          <a:p>
+            <a:endParaRPr lang="en-US"/>
+          </a:p>
+        </p:txBody>
+      </p:sp>
+      <p:sp>
+        <p:nvSpPr>
+          <p:cNvPr id="3" name="Slide Number Placeholder 2">
+            <a:extLst>
+              <a:ext uri="{FF2B5EF4-FFF2-40B4-BE49-F238E27FC236}">
+                <a16:creationId xmlns:a16="http://schemas.microsoft.com/office/drawing/2014/main" id="{69212CA9-B083-7D95-603D-B6C26B0D67F4}"/>
+              </a:ext>
+            </a:extLst>
+          </p:cNvPr>
+          <p:cNvSpPr>
+            <a:spLocks noGrp="1"/>
+          </p:cNvSpPr>
+          <p:nvPr>
+            <p:ph type="sldNum" sz="quarter" idx="12"/>
+          </p:nvPr>
+        </p:nvSpPr>
+        <p:spPr/>
+        <p:txBody>
+          <a:bodyPr/>
+          <a:lstStyle/>
+          <a:p>
+            <a:fld id="{AEE14D4A-FE32-40AF-B06D-E9622816B101}" type="slidenum">
+              <a:rPr lang="en-US" smtClean="0"/>
+              <a:pPr/>
+              <a:t>35</a:t>
+            </a:fld>
+            <a:endParaRPr lang="en-US"/>
+          </a:p>
+        </p:txBody>
+      </p:sp>
+      <p:sp>
+        <p:nvSpPr>
+          <p:cNvPr id="4" name="Content Placeholder 3">
+            <a:extLst>
+              <a:ext uri="{FF2B5EF4-FFF2-40B4-BE49-F238E27FC236}">
+                <a16:creationId xmlns:a16="http://schemas.microsoft.com/office/drawing/2014/main" id="{3993DB85-14D3-DCA0-8DAE-156878EE97F2}"/>
+              </a:ext>
+            </a:extLst>
+          </p:cNvPr>
+          <p:cNvSpPr>
+            <a:spLocks noGrp="1"/>
+          </p:cNvSpPr>
+          <p:nvPr>
+            <p:ph sz="quarter" idx="1"/>
+          </p:nvPr>
+        </p:nvSpPr>
+        <p:spPr/>
+        <p:txBody>
+          <a:bodyPr/>
+          <a:lstStyle/>
+          <a:p>
+            <a:endParaRPr lang="en-US"/>
+          </a:p>
+        </p:txBody>
+      </p:sp>
+      <p:pic>
+        <p:nvPicPr>
+          <p:cNvPr id="6" name="Picture 5">
+            <a:extLst>
+              <a:ext uri="{FF2B5EF4-FFF2-40B4-BE49-F238E27FC236}">
+                <a16:creationId xmlns:a16="http://schemas.microsoft.com/office/drawing/2014/main" id="{DBA7E6FD-31CB-BF98-56D2-635FB4217B9E}"/>
+              </a:ext>
+            </a:extLst>
+          </p:cNvPr>
+          <p:cNvPicPr>
+            <a:picLocks noChangeAspect="1"/>
+          </p:cNvPicPr>
+          <p:nvPr/>
+        </p:nvPicPr>
+        <p:blipFill>
+          <a:blip r:embed="rId3"/>
+          <a:stretch>
+            <a:fillRect/>
+          </a:stretch>
+        </p:blipFill>
+        <p:spPr>
+          <a:xfrm>
+            <a:off x="1780953" y="0"/>
+            <a:ext cx="5582093" cy="6858000"/>
+          </a:xfrm>
+          <a:prstGeom prst="rect">
+            <a:avLst/>
+          </a:prstGeom>
+        </p:spPr>
+      </p:pic>
+      <p:sp>
+        <p:nvSpPr>
+          <p:cNvPr id="5" name="TextBox 4">
+            <a:extLst>
+              <a:ext uri="{FF2B5EF4-FFF2-40B4-BE49-F238E27FC236}">
+                <a16:creationId xmlns:a16="http://schemas.microsoft.com/office/drawing/2014/main" id="{32A79334-25D3-6F34-8E60-D781DF9B18E9}"/>
+              </a:ext>
+            </a:extLst>
+          </p:cNvPr>
+          <p:cNvSpPr txBox="1"/>
+          <p:nvPr/>
+        </p:nvSpPr>
+        <p:spPr>
+          <a:xfrm>
+            <a:off x="5598005" y="1124188"/>
+            <a:ext cx="3088794" cy="369332"/>
+          </a:xfrm>
+          <a:prstGeom prst="rect">
+            <a:avLst/>
+          </a:prstGeom>
+          <a:solidFill>
+            <a:schemeClr val="bg1">
+              <a:lumMod val="85000"/>
+            </a:schemeClr>
+          </a:solidFill>
+        </p:spPr>
+        <p:style>
+          <a:lnRef idx="1">
+            <a:schemeClr val="dk1"/>
+          </a:lnRef>
+          <a:fillRef idx="2">
+            <a:schemeClr val="dk1"/>
+          </a:fillRef>
+          <a:effectRef idx="1">
+            <a:schemeClr val="dk1"/>
+          </a:effectRef>
+          <a:fontRef idx="minor">
+            <a:schemeClr val="dk1"/>
+          </a:fontRef>
+        </p:style>
+        <p:txBody>
+          <a:bodyPr wrap="none" rtlCol="0">
+            <a:spAutoFit/>
+          </a:bodyPr>
+          <a:lstStyle/>
+          <a:p>
+            <a:r>
+              <a:rPr lang="en-US" sz="1800" b="0" dirty="0">
+                <a:latin typeface="+mn-lt"/>
+              </a:rPr>
+              <a:t>See PPT notes for YouTube link</a:t>
+            </a:r>
+          </a:p>
+        </p:txBody>
+      </p:sp>
+    </p:spTree>
+    <p:extLst>
+      <p:ext uri="{BB962C8B-B14F-4D97-AF65-F5344CB8AC3E}">
+        <p14:creationId xmlns:p14="http://schemas.microsoft.com/office/powerpoint/2010/main" val="606520013"/>
       </p:ext>
     </p:extLst>
   </p:cSld>

--- a/PPTs/Ch5_ARM_Load_Store_Exercises_ANS.pptx
+++ b/PPTs/Ch5_ARM_Load_Store_Exercises_ANS.pptx
@@ -230,7 +230,7 @@
 <file path=ppt/revisionInfo.xml><?xml version="1.0" encoding="utf-8"?>
 <p1510:revInfo xmlns:a="http://schemas.openxmlformats.org/drawingml/2006/main" xmlns:r="http://schemas.openxmlformats.org/officeDocument/2006/relationships" xmlns:p1510="http://schemas.microsoft.com/office/powerpoint/2015/10/main">
   <p1510:revLst>
-    <p1510:client id="{95D25279-C3AD-4B13-92A2-4AC656D27A67}" v="398" dt="2025-10-21T23:19:41.926"/>
+    <p1510:client id="{95D25279-C3AD-4B13-92A2-4AC656D27A67}" v="407" dt="2025-10-21T23:28:57.132"/>
   </p1510:revLst>
 </p1510:revInfo>
 </file>
@@ -240,7 +240,7 @@
   <pc:docChgLst>
     <pc:chgData name="Zonghua Gu" userId="9a7e1853e1951ef5" providerId="LiveId" clId="{CF1FAA12-072C-4ED5-BA76-0FFFAEFDB88A}"/>
     <pc:docChg chg="undo custSel addSld delSld modSld sldOrd modNotesMaster modHandout">
-      <pc:chgData name="Zonghua Gu" userId="9a7e1853e1951ef5" providerId="LiveId" clId="{CF1FAA12-072C-4ED5-BA76-0FFFAEFDB88A}" dt="2025-10-21T23:20:04.004" v="3573" actId="1076"/>
+      <pc:chgData name="Zonghua Gu" userId="9a7e1853e1951ef5" providerId="LiveId" clId="{CF1FAA12-072C-4ED5-BA76-0FFFAEFDB88A}" dt="2025-10-21T23:30:00.128" v="3643" actId="404"/>
       <pc:docMkLst>
         <pc:docMk/>
       </pc:docMkLst>
@@ -985,7 +985,7 @@
         </pc:graphicFrameChg>
       </pc:sldChg>
       <pc:sldChg chg="addSp delSp modSp add mod ord">
-        <pc:chgData name="Zonghua Gu" userId="9a7e1853e1951ef5" providerId="LiveId" clId="{CF1FAA12-072C-4ED5-BA76-0FFFAEFDB88A}" dt="2025-10-21T23:20:04.004" v="3573" actId="1076"/>
+        <pc:chgData name="Zonghua Gu" userId="9a7e1853e1951ef5" providerId="LiveId" clId="{CF1FAA12-072C-4ED5-BA76-0FFFAEFDB88A}" dt="2025-10-21T23:29:49.656" v="3641" actId="1036"/>
         <pc:sldMkLst>
           <pc:docMk/>
           <pc:sldMk cId="3653550031" sldId="819"/>
@@ -1006,6 +1006,14 @@
             <ac:spMk id="4" creationId="{47E16147-F6FF-DA8E-A54B-3AD6FD9BC42D}"/>
           </ac:spMkLst>
         </pc:spChg>
+        <pc:spChg chg="add mod ord">
+          <ac:chgData name="Zonghua Gu" userId="9a7e1853e1951ef5" providerId="LiveId" clId="{CF1FAA12-072C-4ED5-BA76-0FFFAEFDB88A}" dt="2025-10-21T23:29:36.055" v="3618" actId="1036"/>
+          <ac:spMkLst>
+            <pc:docMk/>
+            <pc:sldMk cId="3653550031" sldId="819"/>
+            <ac:spMk id="5" creationId="{0C104577-4185-350D-E7F1-6C339C3527F4}"/>
+          </ac:spMkLst>
+        </pc:spChg>
         <pc:spChg chg="add del mod">
           <ac:chgData name="Zonghua Gu" userId="9a7e1853e1951ef5" providerId="LiveId" clId="{CF1FAA12-072C-4ED5-BA76-0FFFAEFDB88A}" dt="2025-10-21T23:19:46.488" v="3569" actId="478"/>
           <ac:spMkLst>
@@ -1023,7 +1031,7 @@
           </ac:spMkLst>
         </pc:spChg>
         <pc:graphicFrameChg chg="mod modGraphic">
-          <ac:chgData name="Zonghua Gu" userId="9a7e1853e1951ef5" providerId="LiveId" clId="{CF1FAA12-072C-4ED5-BA76-0FFFAEFDB88A}" dt="2025-10-21T21:54:30.491" v="2867" actId="14734"/>
+          <ac:chgData name="Zonghua Gu" userId="9a7e1853e1951ef5" providerId="LiveId" clId="{CF1FAA12-072C-4ED5-BA76-0FFFAEFDB88A}" dt="2025-10-21T23:29:49.656" v="3641" actId="1036"/>
           <ac:graphicFrameMkLst>
             <pc:docMk/>
             <pc:sldMk cId="3653550031" sldId="819"/>
@@ -1031,7 +1039,7 @@
           </ac:graphicFrameMkLst>
         </pc:graphicFrameChg>
         <pc:graphicFrameChg chg="add mod">
-          <ac:chgData name="Zonghua Gu" userId="9a7e1853e1951ef5" providerId="LiveId" clId="{CF1FAA12-072C-4ED5-BA76-0FFFAEFDB88A}" dt="2025-10-21T23:20:04.004" v="3573" actId="1076"/>
+          <ac:chgData name="Zonghua Gu" userId="9a7e1853e1951ef5" providerId="LiveId" clId="{CF1FAA12-072C-4ED5-BA76-0FFFAEFDB88A}" dt="2025-10-21T23:29:49.656" v="3641" actId="1036"/>
           <ac:graphicFrameMkLst>
             <pc:docMk/>
             <pc:sldMk cId="3653550031" sldId="819"/>
@@ -1040,13 +1048,13 @@
         </pc:graphicFrameChg>
       </pc:sldChg>
       <pc:sldChg chg="addSp delSp modSp new mod">
-        <pc:chgData name="Zonghua Gu" userId="9a7e1853e1951ef5" providerId="LiveId" clId="{CF1FAA12-072C-4ED5-BA76-0FFFAEFDB88A}" dt="2025-10-21T23:19:19.479" v="3567" actId="1076"/>
+        <pc:chgData name="Zonghua Gu" userId="9a7e1853e1951ef5" providerId="LiveId" clId="{CF1FAA12-072C-4ED5-BA76-0FFFAEFDB88A}" dt="2025-10-21T23:30:00.128" v="3643" actId="404"/>
         <pc:sldMkLst>
           <pc:docMk/>
           <pc:sldMk cId="606520013" sldId="820"/>
         </pc:sldMkLst>
         <pc:spChg chg="add del mod">
-          <ac:chgData name="Zonghua Gu" userId="9a7e1853e1951ef5" providerId="LiveId" clId="{CF1FAA12-072C-4ED5-BA76-0FFFAEFDB88A}" dt="2025-10-21T23:19:19.479" v="3567" actId="1076"/>
+          <ac:chgData name="Zonghua Gu" userId="9a7e1853e1951ef5" providerId="LiveId" clId="{CF1FAA12-072C-4ED5-BA76-0FFFAEFDB88A}" dt="2025-10-21T23:30:00.128" v="3643" actId="404"/>
           <ac:spMkLst>
             <pc:docMk/>
             <pc:sldMk cId="606520013" sldId="820"/>
@@ -1108,6 +1116,53 @@
             <ac:graphicFrameMk id="8" creationId="{5C49654E-F929-61E6-C5C2-006A4E800316}"/>
           </ac:graphicFrameMkLst>
         </pc:graphicFrameChg>
+      </pc:sldChg>
+      <pc:sldChg chg="addSp delSp modSp new del mod">
+        <pc:chgData name="Zonghua Gu" userId="9a7e1853e1951ef5" providerId="LiveId" clId="{CF1FAA12-072C-4ED5-BA76-0FFFAEFDB88A}" dt="2025-10-21T23:29:51.761" v="3642" actId="47"/>
+        <pc:sldMkLst>
+          <pc:docMk/>
+          <pc:sldMk cId="1213710140" sldId="821"/>
+        </pc:sldMkLst>
+        <pc:spChg chg="del mod">
+          <ac:chgData name="Zonghua Gu" userId="9a7e1853e1951ef5" providerId="LiveId" clId="{CF1FAA12-072C-4ED5-BA76-0FFFAEFDB88A}" dt="2025-10-21T23:28:54.605" v="3601" actId="478"/>
+          <ac:spMkLst>
+            <pc:docMk/>
+            <pc:sldMk cId="1213710140" sldId="821"/>
+            <ac:spMk id="2" creationId="{2DCAAD60-24CA-3845-810F-D025F0B9843E}"/>
+          </ac:spMkLst>
+        </pc:spChg>
+        <pc:spChg chg="add mod">
+          <ac:chgData name="Zonghua Gu" userId="9a7e1853e1951ef5" providerId="LiveId" clId="{CF1FAA12-072C-4ED5-BA76-0FFFAEFDB88A}" dt="2025-10-21T23:28:39.609" v="3597"/>
+          <ac:spMkLst>
+            <pc:docMk/>
+            <pc:sldMk cId="1213710140" sldId="821"/>
+            <ac:spMk id="5" creationId="{89702899-F022-872A-9634-4218E5DF64C7}"/>
+          </ac:spMkLst>
+        </pc:spChg>
+        <pc:spChg chg="add del mod">
+          <ac:chgData name="Zonghua Gu" userId="9a7e1853e1951ef5" providerId="LiveId" clId="{CF1FAA12-072C-4ED5-BA76-0FFFAEFDB88A}" dt="2025-10-21T23:28:56.937" v="3604" actId="478"/>
+          <ac:spMkLst>
+            <pc:docMk/>
+            <pc:sldMk cId="1213710140" sldId="821"/>
+            <ac:spMk id="7" creationId="{A29CF462-FF04-DE35-9BC0-394985D86E04}"/>
+          </ac:spMkLst>
+        </pc:spChg>
+        <pc:spChg chg="add mod">
+          <ac:chgData name="Zonghua Gu" userId="9a7e1853e1951ef5" providerId="LiveId" clId="{CF1FAA12-072C-4ED5-BA76-0FFFAEFDB88A}" dt="2025-10-21T23:28:55.516" v="3603"/>
+          <ac:spMkLst>
+            <pc:docMk/>
+            <pc:sldMk cId="1213710140" sldId="821"/>
+            <ac:spMk id="8" creationId="{9E09E155-AB6D-3495-57A6-E35E28998DDD}"/>
+          </ac:spMkLst>
+        </pc:spChg>
+        <pc:spChg chg="add mod">
+          <ac:chgData name="Zonghua Gu" userId="9a7e1853e1951ef5" providerId="LiveId" clId="{CF1FAA12-072C-4ED5-BA76-0FFFAEFDB88A}" dt="2025-10-21T23:28:57.132" v="3605"/>
+          <ac:spMkLst>
+            <pc:docMk/>
+            <pc:sldMk cId="1213710140" sldId="821"/>
+            <ac:spMk id="9" creationId="{DD002108-ACD9-A585-5DE5-90E90F1F38A7}"/>
+          </ac:spMkLst>
+        </pc:spChg>
       </pc:sldChg>
       <pc:sldChg chg="new del">
         <pc:chgData name="Zonghua Gu" userId="9a7e1853e1951ef5" providerId="LiveId" clId="{CF1FAA12-072C-4ED5-BA76-0FFFAEFDB88A}" dt="2025-10-21T22:50:29.190" v="3246" actId="680"/>
@@ -39179,6 +39234,1065 @@
       </p:grpSpPr>
       <p:sp>
         <p:nvSpPr>
+          <p:cNvPr id="5" name="TextBox 4">
+            <a:extLst>
+              <a:ext uri="{FF2B5EF4-FFF2-40B4-BE49-F238E27FC236}">
+                <a16:creationId xmlns:a16="http://schemas.microsoft.com/office/drawing/2014/main" id="{0C104577-4185-350D-E7F1-6C339C3527F4}"/>
+              </a:ext>
+            </a:extLst>
+          </p:cNvPr>
+          <p:cNvSpPr txBox="1"/>
+          <p:nvPr/>
+        </p:nvSpPr>
+        <p:spPr>
+          <a:xfrm>
+            <a:off x="5442882" y="48225"/>
+            <a:ext cx="3563796" cy="5693866"/>
+          </a:xfrm>
+          <a:prstGeom prst="rect">
+            <a:avLst/>
+          </a:prstGeom>
+          <a:solidFill>
+            <a:sysClr val="window" lastClr="FFFFFF"/>
+          </a:solidFill>
+          <a:ln w="19050" cap="flat" cmpd="sng" algn="ctr">
+            <a:solidFill>
+              <a:srgbClr val="4F81BD"/>
+            </a:solidFill>
+            <a:prstDash val="solid"/>
+          </a:ln>
+          <a:effectLst/>
+        </p:spPr>
+        <p:txBody>
+          <a:bodyPr wrap="none" rtlCol="0">
+            <a:spAutoFit/>
+          </a:bodyPr>
+          <a:lstStyle/>
+          <a:p>
+            <a:pPr marL="0" marR="0" lvl="0" indent="0" defTabSz="914400" eaLnBrk="1" fontAlgn="auto" latinLnBrk="0" hangingPunct="1">
+              <a:lnSpc>
+                <a:spcPct val="100000"/>
+              </a:lnSpc>
+              <a:spcBef>
+                <a:spcPts val="0"/>
+              </a:spcBef>
+              <a:spcAft>
+                <a:spcPts val="0"/>
+              </a:spcAft>
+              <a:buClrTx/>
+              <a:buSzTx/>
+              <a:buFontTx/>
+              <a:buNone/>
+              <a:tabLst/>
+              <a:defRPr/>
+            </a:pPr>
+            <a:r>
+              <a:rPr lang="pt-BR" b="0" kern="0" dirty="0">
+                <a:solidFill>
+                  <a:prstClr val="black"/>
+                </a:solidFill>
+                <a:latin typeface="Consolas" panose="020B0609020204030204" pitchFamily="49" charset="0"/>
+                <a:cs typeface="Consolas" panose="020B0609020204030204" pitchFamily="49" charset="0"/>
+              </a:rPr>
+              <a:t>   </a:t>
+            </a:r>
+            <a:r>
+              <a:rPr kumimoji="0" lang="pt-BR" b="0" i="0" u="none" strike="noStrike" kern="0" cap="none" spc="0" normalizeH="0" baseline="0" noProof="0" dirty="0">
+                <a:ln>
+                  <a:noFill/>
+                </a:ln>
+                <a:solidFill>
+                  <a:prstClr val="black"/>
+                </a:solidFill>
+                <a:effectLst/>
+                <a:uLnTx/>
+                <a:uFillTx/>
+                <a:latin typeface="Consolas" panose="020B0609020204030204" pitchFamily="49" charset="0"/>
+                <a:ea typeface="+mn-ea"/>
+                <a:cs typeface="Consolas" panose="020B0609020204030204" pitchFamily="49" charset="0"/>
+              </a:rPr>
+              <a:t> LDR R1, =0x10000010</a:t>
+            </a:r>
+          </a:p>
+          <a:p>
+            <a:pPr marL="0" marR="0" lvl="0" indent="0" defTabSz="914400" eaLnBrk="1" fontAlgn="auto" latinLnBrk="0" hangingPunct="1">
+              <a:lnSpc>
+                <a:spcPct val="100000"/>
+              </a:lnSpc>
+              <a:spcBef>
+                <a:spcPts val="0"/>
+              </a:spcBef>
+              <a:spcAft>
+                <a:spcPts val="0"/>
+              </a:spcAft>
+              <a:buClrTx/>
+              <a:buSzTx/>
+              <a:buFontTx/>
+              <a:buNone/>
+              <a:tabLst/>
+              <a:defRPr/>
+            </a:pPr>
+            <a:r>
+              <a:rPr kumimoji="0" lang="pt-BR" b="0" i="0" u="none" strike="noStrike" kern="0" cap="none" spc="0" normalizeH="0" baseline="0" noProof="0" dirty="0">
+                <a:ln>
+                  <a:noFill/>
+                </a:ln>
+                <a:solidFill>
+                  <a:prstClr val="black"/>
+                </a:solidFill>
+                <a:effectLst/>
+                <a:uLnTx/>
+                <a:uFillTx/>
+                <a:latin typeface="Consolas" panose="020B0609020204030204" pitchFamily="49" charset="0"/>
+                <a:ea typeface="+mn-ea"/>
+                <a:cs typeface="Consolas" panose="020B0609020204030204" pitchFamily="49" charset="0"/>
+              </a:rPr>
+              <a:t>    LDR R2, [R1]</a:t>
+            </a:r>
+          </a:p>
+          <a:p>
+            <a:pPr marL="0" marR="0" lvl="0" indent="0" defTabSz="914400" eaLnBrk="1" fontAlgn="auto" latinLnBrk="0" hangingPunct="1">
+              <a:lnSpc>
+                <a:spcPct val="100000"/>
+              </a:lnSpc>
+              <a:spcBef>
+                <a:spcPts val="0"/>
+              </a:spcBef>
+              <a:spcAft>
+                <a:spcPts val="0"/>
+              </a:spcAft>
+              <a:buClrTx/>
+              <a:buSzTx/>
+              <a:buFontTx/>
+              <a:buNone/>
+              <a:tabLst/>
+              <a:defRPr/>
+            </a:pPr>
+            <a:r>
+              <a:rPr kumimoji="0" lang="pt-BR" b="0" i="0" u="none" strike="noStrike" kern="0" cap="none" spc="0" normalizeH="0" baseline="0" noProof="0" dirty="0">
+                <a:ln>
+                  <a:noFill/>
+                </a:ln>
+                <a:solidFill>
+                  <a:prstClr val="black"/>
+                </a:solidFill>
+                <a:effectLst/>
+                <a:uLnTx/>
+                <a:uFillTx/>
+                <a:latin typeface="Consolas" panose="020B0609020204030204" pitchFamily="49" charset="0"/>
+                <a:ea typeface="+mn-ea"/>
+                <a:cs typeface="Consolas" panose="020B0609020204030204" pitchFamily="49" charset="0"/>
+              </a:rPr>
+              <a:t>    LDR R3, [R1,#4]</a:t>
+            </a:r>
+          </a:p>
+          <a:p>
+            <a:pPr marL="0" marR="0" lvl="0" indent="0" defTabSz="914400" eaLnBrk="1" fontAlgn="auto" latinLnBrk="0" hangingPunct="1">
+              <a:lnSpc>
+                <a:spcPct val="100000"/>
+              </a:lnSpc>
+              <a:spcBef>
+                <a:spcPts val="0"/>
+              </a:spcBef>
+              <a:spcAft>
+                <a:spcPts val="0"/>
+              </a:spcAft>
+              <a:buClrTx/>
+              <a:buSzTx/>
+              <a:buFontTx/>
+              <a:buNone/>
+              <a:tabLst/>
+              <a:defRPr/>
+            </a:pPr>
+            <a:r>
+              <a:rPr kumimoji="0" lang="pt-BR" b="0" i="0" u="none" strike="noStrike" kern="0" cap="none" spc="0" normalizeH="0" baseline="0" noProof="0" dirty="0">
+                <a:ln>
+                  <a:noFill/>
+                </a:ln>
+                <a:solidFill>
+                  <a:prstClr val="black"/>
+                </a:solidFill>
+                <a:effectLst/>
+                <a:uLnTx/>
+                <a:uFillTx/>
+                <a:latin typeface="Consolas" panose="020B0609020204030204" pitchFamily="49" charset="0"/>
+                <a:ea typeface="+mn-ea"/>
+                <a:cs typeface="Consolas" panose="020B0609020204030204" pitchFamily="49" charset="0"/>
+              </a:rPr>
+              <a:t>    BL max</a:t>
+            </a:r>
+          </a:p>
+          <a:p>
+            <a:pPr marL="0" marR="0" lvl="0" indent="0" defTabSz="914400" eaLnBrk="1" fontAlgn="auto" latinLnBrk="0" hangingPunct="1">
+              <a:lnSpc>
+                <a:spcPct val="100000"/>
+              </a:lnSpc>
+              <a:spcBef>
+                <a:spcPts val="0"/>
+              </a:spcBef>
+              <a:spcAft>
+                <a:spcPts val="0"/>
+              </a:spcAft>
+              <a:buClrTx/>
+              <a:buSzTx/>
+              <a:buFontTx/>
+              <a:buNone/>
+              <a:tabLst/>
+              <a:defRPr/>
+            </a:pPr>
+            <a:r>
+              <a:rPr kumimoji="0" lang="pt-BR" b="0" i="0" u="none" strike="noStrike" kern="0" cap="none" spc="0" normalizeH="0" baseline="0" noProof="0" dirty="0">
+                <a:ln>
+                  <a:noFill/>
+                </a:ln>
+                <a:solidFill>
+                  <a:prstClr val="black"/>
+                </a:solidFill>
+                <a:effectLst/>
+                <a:uLnTx/>
+                <a:uFillTx/>
+                <a:latin typeface="Consolas" panose="020B0609020204030204" pitchFamily="49" charset="0"/>
+                <a:ea typeface="+mn-ea"/>
+                <a:cs typeface="Consolas" panose="020B0609020204030204" pitchFamily="49" charset="0"/>
+              </a:rPr>
+              <a:t>    SUBS R4, R2, R0  @NZCV = 0110</a:t>
+            </a:r>
+          </a:p>
+          <a:p>
+            <a:pPr marL="0" marR="0" lvl="0" indent="0" defTabSz="914400" eaLnBrk="1" fontAlgn="auto" latinLnBrk="0" hangingPunct="1">
+              <a:lnSpc>
+                <a:spcPct val="100000"/>
+              </a:lnSpc>
+              <a:spcBef>
+                <a:spcPts val="0"/>
+              </a:spcBef>
+              <a:spcAft>
+                <a:spcPts val="0"/>
+              </a:spcAft>
+              <a:buClrTx/>
+              <a:buSzTx/>
+              <a:buFontTx/>
+              <a:buNone/>
+              <a:tabLst/>
+              <a:defRPr/>
+            </a:pPr>
+            <a:r>
+              <a:rPr kumimoji="0" lang="pt-BR" b="0" i="0" u="none" strike="noStrike" kern="0" cap="none" spc="0" normalizeH="0" baseline="0" noProof="0" dirty="0">
+                <a:ln>
+                  <a:noFill/>
+                </a:ln>
+                <a:solidFill>
+                  <a:prstClr val="black"/>
+                </a:solidFill>
+                <a:effectLst/>
+                <a:uLnTx/>
+                <a:uFillTx/>
+                <a:latin typeface="Consolas" panose="020B0609020204030204" pitchFamily="49" charset="0"/>
+                <a:ea typeface="+mn-ea"/>
+                <a:cs typeface="Consolas" panose="020B0609020204030204" pitchFamily="49" charset="0"/>
+              </a:rPr>
+              <a:t>    MOVW R5, #1</a:t>
+            </a:r>
+          </a:p>
+          <a:p>
+            <a:pPr marL="0" marR="0" lvl="0" indent="0" defTabSz="914400" eaLnBrk="1" fontAlgn="auto" latinLnBrk="0" hangingPunct="1">
+              <a:lnSpc>
+                <a:spcPct val="100000"/>
+              </a:lnSpc>
+              <a:spcBef>
+                <a:spcPts val="0"/>
+              </a:spcBef>
+              <a:spcAft>
+                <a:spcPts val="0"/>
+              </a:spcAft>
+              <a:buClrTx/>
+              <a:buSzTx/>
+              <a:buFontTx/>
+              <a:buNone/>
+              <a:tabLst/>
+              <a:defRPr/>
+            </a:pPr>
+            <a:r>
+              <a:rPr kumimoji="0" lang="pt-BR" b="0" i="0" u="none" strike="noStrike" kern="0" cap="none" spc="0" normalizeH="0" baseline="0" noProof="0" dirty="0">
+                <a:ln>
+                  <a:noFill/>
+                </a:ln>
+                <a:solidFill>
+                  <a:prstClr val="black"/>
+                </a:solidFill>
+                <a:effectLst/>
+                <a:uLnTx/>
+                <a:uFillTx/>
+                <a:latin typeface="Consolas" panose="020B0609020204030204" pitchFamily="49" charset="0"/>
+                <a:ea typeface="+mn-ea"/>
+                <a:cs typeface="Consolas" panose="020B0609020204030204" pitchFamily="49" charset="0"/>
+              </a:rPr>
+              <a:t>    LSL R6, R5, #4</a:t>
+            </a:r>
+          </a:p>
+          <a:p>
+            <a:pPr marL="0" marR="0" lvl="0" indent="0" defTabSz="914400" eaLnBrk="1" fontAlgn="auto" latinLnBrk="0" hangingPunct="1">
+              <a:lnSpc>
+                <a:spcPct val="100000"/>
+              </a:lnSpc>
+              <a:spcBef>
+                <a:spcPts val="0"/>
+              </a:spcBef>
+              <a:spcAft>
+                <a:spcPts val="0"/>
+              </a:spcAft>
+              <a:buClrTx/>
+              <a:buSzTx/>
+              <a:buFontTx/>
+              <a:buNone/>
+              <a:tabLst/>
+              <a:defRPr/>
+            </a:pPr>
+            <a:r>
+              <a:rPr kumimoji="0" lang="pt-BR" b="0" i="0" u="none" strike="noStrike" kern="0" cap="none" spc="0" normalizeH="0" baseline="0" noProof="0" dirty="0">
+                <a:ln>
+                  <a:noFill/>
+                </a:ln>
+                <a:solidFill>
+                  <a:prstClr val="black"/>
+                </a:solidFill>
+                <a:effectLst/>
+                <a:uLnTx/>
+                <a:uFillTx/>
+                <a:latin typeface="Consolas" panose="020B0609020204030204" pitchFamily="49" charset="0"/>
+                <a:ea typeface="+mn-ea"/>
+                <a:cs typeface="Consolas" panose="020B0609020204030204" pitchFamily="49" charset="0"/>
+              </a:rPr>
+              <a:t>    BIC R7, R2, R4</a:t>
+            </a:r>
+          </a:p>
+          <a:p>
+            <a:pPr marL="0" marR="0" lvl="0" indent="0" defTabSz="914400" eaLnBrk="1" fontAlgn="auto" latinLnBrk="0" hangingPunct="1">
+              <a:lnSpc>
+                <a:spcPct val="100000"/>
+              </a:lnSpc>
+              <a:spcBef>
+                <a:spcPts val="0"/>
+              </a:spcBef>
+              <a:spcAft>
+                <a:spcPts val="0"/>
+              </a:spcAft>
+              <a:buClrTx/>
+              <a:buSzTx/>
+              <a:buFontTx/>
+              <a:buNone/>
+              <a:tabLst/>
+              <a:defRPr/>
+            </a:pPr>
+            <a:r>
+              <a:rPr kumimoji="0" lang="pt-BR" b="0" i="0" u="none" strike="noStrike" kern="0" cap="none" spc="0" normalizeH="0" baseline="0" noProof="0" dirty="0">
+                <a:ln>
+                  <a:noFill/>
+                </a:ln>
+                <a:solidFill>
+                  <a:prstClr val="black"/>
+                </a:solidFill>
+                <a:effectLst/>
+                <a:uLnTx/>
+                <a:uFillTx/>
+                <a:latin typeface="Consolas" panose="020B0609020204030204" pitchFamily="49" charset="0"/>
+                <a:ea typeface="+mn-ea"/>
+                <a:cs typeface="Consolas" panose="020B0609020204030204" pitchFamily="49" charset="0"/>
+              </a:rPr>
+              <a:t>    ANDS R8, R7, </a:t>
+            </a:r>
+            <a:r>
+              <a:rPr lang="pt-BR" b="0" kern="0" dirty="0">
+                <a:solidFill>
+                  <a:prstClr val="black"/>
+                </a:solidFill>
+                <a:latin typeface="Consolas" panose="020B0609020204030204" pitchFamily="49" charset="0"/>
+                <a:cs typeface="Consolas" panose="020B0609020204030204" pitchFamily="49" charset="0"/>
+              </a:rPr>
+              <a:t>R6  @NZCV </a:t>
+            </a:r>
+            <a:r>
+              <a:rPr kumimoji="0" lang="pt-BR" b="0" i="0" u="none" strike="noStrike" kern="0" cap="none" spc="0" normalizeH="0" baseline="0" noProof="0" dirty="0">
+                <a:ln>
+                  <a:noFill/>
+                </a:ln>
+                <a:solidFill>
+                  <a:prstClr val="black"/>
+                </a:solidFill>
+                <a:effectLst/>
+                <a:uLnTx/>
+                <a:uFillTx/>
+                <a:latin typeface="Consolas" panose="020B0609020204030204" pitchFamily="49" charset="0"/>
+                <a:ea typeface="+mn-ea"/>
+                <a:cs typeface="Consolas" panose="020B0609020204030204" pitchFamily="49" charset="0"/>
+              </a:rPr>
+              <a:t>= 0110</a:t>
+            </a:r>
+          </a:p>
+          <a:p>
+            <a:pPr marL="0" marR="0" lvl="0" indent="0" defTabSz="914400" eaLnBrk="1" fontAlgn="auto" latinLnBrk="0" hangingPunct="1">
+              <a:lnSpc>
+                <a:spcPct val="100000"/>
+              </a:lnSpc>
+              <a:spcBef>
+                <a:spcPts val="0"/>
+              </a:spcBef>
+              <a:spcAft>
+                <a:spcPts val="0"/>
+              </a:spcAft>
+              <a:buClrTx/>
+              <a:buSzTx/>
+              <a:buFontTx/>
+              <a:buNone/>
+              <a:tabLst/>
+              <a:defRPr/>
+            </a:pPr>
+            <a:r>
+              <a:rPr kumimoji="0" lang="pt-BR" b="0" i="0" u="none" strike="noStrike" kern="0" cap="none" spc="0" normalizeH="0" baseline="0" noProof="0" dirty="0">
+                <a:ln>
+                  <a:noFill/>
+                </a:ln>
+                <a:solidFill>
+                  <a:prstClr val="black"/>
+                </a:solidFill>
+                <a:effectLst/>
+                <a:uLnTx/>
+                <a:uFillTx/>
+                <a:latin typeface="Consolas" panose="020B0609020204030204" pitchFamily="49" charset="0"/>
+                <a:ea typeface="+mn-ea"/>
+                <a:cs typeface="Consolas" panose="020B0609020204030204" pitchFamily="49" charset="0"/>
+              </a:rPr>
+              <a:t>    ROR R9, R3, #12</a:t>
+            </a:r>
+          </a:p>
+          <a:p>
+            <a:pPr marL="0" marR="0" lvl="0" indent="0" defTabSz="914400" eaLnBrk="1" fontAlgn="auto" latinLnBrk="0" hangingPunct="1">
+              <a:lnSpc>
+                <a:spcPct val="100000"/>
+              </a:lnSpc>
+              <a:spcBef>
+                <a:spcPts val="0"/>
+              </a:spcBef>
+              <a:spcAft>
+                <a:spcPts val="0"/>
+              </a:spcAft>
+              <a:buClrTx/>
+              <a:buSzTx/>
+              <a:buFontTx/>
+              <a:buNone/>
+              <a:tabLst/>
+              <a:defRPr/>
+            </a:pPr>
+            <a:r>
+              <a:rPr kumimoji="0" lang="pt-BR" b="0" i="0" u="none" strike="noStrike" kern="0" cap="none" spc="0" normalizeH="0" baseline="0" noProof="0" dirty="0">
+                <a:ln>
+                  <a:noFill/>
+                </a:ln>
+                <a:solidFill>
+                  <a:prstClr val="black"/>
+                </a:solidFill>
+                <a:effectLst/>
+                <a:uLnTx/>
+                <a:uFillTx/>
+                <a:latin typeface="Consolas" panose="020B0609020204030204" pitchFamily="49" charset="0"/>
+                <a:ea typeface="+mn-ea"/>
+                <a:cs typeface="Consolas" panose="020B0609020204030204" pitchFamily="49" charset="0"/>
+              </a:rPr>
+              <a:t>    REV R10, R9</a:t>
+            </a:r>
+          </a:p>
+          <a:p>
+            <a:pPr marL="0" marR="0" lvl="0" indent="0" defTabSz="914400" eaLnBrk="1" fontAlgn="auto" latinLnBrk="0" hangingPunct="1">
+              <a:lnSpc>
+                <a:spcPct val="100000"/>
+              </a:lnSpc>
+              <a:spcBef>
+                <a:spcPts val="0"/>
+              </a:spcBef>
+              <a:spcAft>
+                <a:spcPts val="0"/>
+              </a:spcAft>
+              <a:buClrTx/>
+              <a:buSzTx/>
+              <a:buFontTx/>
+              <a:buNone/>
+              <a:tabLst/>
+              <a:defRPr/>
+            </a:pPr>
+            <a:r>
+              <a:rPr kumimoji="0" lang="pt-BR" b="0" i="0" u="none" strike="noStrike" kern="0" cap="none" spc="0" normalizeH="0" baseline="0" noProof="0" dirty="0">
+                <a:ln>
+                  <a:noFill/>
+                </a:ln>
+                <a:solidFill>
+                  <a:prstClr val="black"/>
+                </a:solidFill>
+                <a:effectLst/>
+                <a:uLnTx/>
+                <a:uFillTx/>
+                <a:latin typeface="Consolas" panose="020B0609020204030204" pitchFamily="49" charset="0"/>
+                <a:ea typeface="+mn-ea"/>
+                <a:cs typeface="Consolas" panose="020B0609020204030204" pitchFamily="49" charset="0"/>
+              </a:rPr>
+              <a:t>    RBIT R11, R10</a:t>
+            </a:r>
+          </a:p>
+          <a:p>
+            <a:pPr marL="0" marR="0" lvl="0" indent="0" defTabSz="914400" eaLnBrk="1" fontAlgn="auto" latinLnBrk="0" hangingPunct="1">
+              <a:lnSpc>
+                <a:spcPct val="100000"/>
+              </a:lnSpc>
+              <a:spcBef>
+                <a:spcPts val="0"/>
+              </a:spcBef>
+              <a:spcAft>
+                <a:spcPts val="0"/>
+              </a:spcAft>
+              <a:buClrTx/>
+              <a:buSzTx/>
+              <a:buFontTx/>
+              <a:buNone/>
+              <a:tabLst/>
+              <a:defRPr/>
+            </a:pPr>
+            <a:r>
+              <a:rPr kumimoji="0" lang="pt-BR" b="0" i="0" u="none" strike="noStrike" kern="0" cap="none" spc="0" normalizeH="0" baseline="0" noProof="0" dirty="0">
+                <a:ln>
+                  <a:noFill/>
+                </a:ln>
+                <a:solidFill>
+                  <a:prstClr val="black"/>
+                </a:solidFill>
+                <a:effectLst/>
+                <a:uLnTx/>
+                <a:uFillTx/>
+                <a:latin typeface="Consolas" panose="020B0609020204030204" pitchFamily="49" charset="0"/>
+                <a:ea typeface="+mn-ea"/>
+                <a:cs typeface="Consolas" panose="020B0609020204030204" pitchFamily="49" charset="0"/>
+              </a:rPr>
+              <a:t>    ADDS R12, R3, </a:t>
+            </a:r>
+            <a:r>
+              <a:rPr lang="pt-BR" b="0" kern="0" dirty="0">
+                <a:solidFill>
+                  <a:prstClr val="black"/>
+                </a:solidFill>
+                <a:latin typeface="Consolas" panose="020B0609020204030204" pitchFamily="49" charset="0"/>
+                <a:cs typeface="Consolas" panose="020B0609020204030204" pitchFamily="49" charset="0"/>
+              </a:rPr>
+              <a:t>R9 @NZCV </a:t>
+            </a:r>
+            <a:r>
+              <a:rPr kumimoji="0" lang="pt-BR" b="0" i="0" u="none" strike="noStrike" kern="0" cap="none" spc="0" normalizeH="0" baseline="0" noProof="0" dirty="0">
+                <a:ln>
+                  <a:noFill/>
+                </a:ln>
+                <a:solidFill>
+                  <a:prstClr val="black"/>
+                </a:solidFill>
+                <a:effectLst/>
+                <a:uLnTx/>
+                <a:uFillTx/>
+                <a:latin typeface="Consolas" panose="020B0609020204030204" pitchFamily="49" charset="0"/>
+                <a:ea typeface="+mn-ea"/>
+                <a:cs typeface="Consolas" panose="020B0609020204030204" pitchFamily="49" charset="0"/>
+              </a:rPr>
+              <a:t>= 1000</a:t>
+            </a:r>
+          </a:p>
+          <a:p>
+            <a:pPr marL="0" marR="0" lvl="0" indent="0" defTabSz="914400" eaLnBrk="1" fontAlgn="auto" latinLnBrk="0" hangingPunct="1">
+              <a:lnSpc>
+                <a:spcPct val="100000"/>
+              </a:lnSpc>
+              <a:spcBef>
+                <a:spcPts val="0"/>
+              </a:spcBef>
+              <a:spcAft>
+                <a:spcPts val="0"/>
+              </a:spcAft>
+              <a:buClrTx/>
+              <a:buSzTx/>
+              <a:buFontTx/>
+              <a:buNone/>
+              <a:tabLst/>
+              <a:defRPr/>
+            </a:pPr>
+            <a:r>
+              <a:rPr kumimoji="0" lang="pt-BR" b="0" i="0" u="none" strike="noStrike" kern="0" cap="none" spc="0" normalizeH="0" baseline="0" noProof="0" dirty="0">
+                <a:ln>
+                  <a:noFill/>
+                </a:ln>
+                <a:solidFill>
+                  <a:prstClr val="black"/>
+                </a:solidFill>
+                <a:effectLst/>
+                <a:uLnTx/>
+                <a:uFillTx/>
+                <a:latin typeface="Consolas" panose="020B0609020204030204" pitchFamily="49" charset="0"/>
+                <a:ea typeface="+mn-ea"/>
+                <a:cs typeface="Consolas" panose="020B0609020204030204" pitchFamily="49" charset="0"/>
+              </a:rPr>
+              <a:t>    STR R12, [R1,#8]</a:t>
+            </a:r>
+          </a:p>
+          <a:p>
+            <a:pPr marL="0" marR="0" lvl="0" indent="0" defTabSz="914400" eaLnBrk="1" fontAlgn="auto" latinLnBrk="0" hangingPunct="1">
+              <a:lnSpc>
+                <a:spcPct val="100000"/>
+              </a:lnSpc>
+              <a:spcBef>
+                <a:spcPts val="0"/>
+              </a:spcBef>
+              <a:spcAft>
+                <a:spcPts val="0"/>
+              </a:spcAft>
+              <a:buClrTx/>
+              <a:buSzTx/>
+              <a:buFontTx/>
+              <a:buNone/>
+              <a:tabLst/>
+              <a:defRPr/>
+            </a:pPr>
+            <a:endParaRPr kumimoji="0" lang="pt-BR" b="0" i="0" u="none" strike="noStrike" kern="0" cap="none" spc="0" normalizeH="0" baseline="0" noProof="0" dirty="0">
+              <a:ln>
+                <a:noFill/>
+              </a:ln>
+              <a:solidFill>
+                <a:prstClr val="black"/>
+              </a:solidFill>
+              <a:effectLst/>
+              <a:uLnTx/>
+              <a:uFillTx/>
+              <a:latin typeface="Consolas" panose="020B0609020204030204" pitchFamily="49" charset="0"/>
+              <a:ea typeface="+mn-ea"/>
+              <a:cs typeface="Consolas" panose="020B0609020204030204" pitchFamily="49" charset="0"/>
+            </a:endParaRPr>
+          </a:p>
+          <a:p>
+            <a:pPr marL="0" marR="0" lvl="0" indent="0" defTabSz="914400" eaLnBrk="1" fontAlgn="auto" latinLnBrk="0" hangingPunct="1">
+              <a:lnSpc>
+                <a:spcPct val="100000"/>
+              </a:lnSpc>
+              <a:spcBef>
+                <a:spcPts val="0"/>
+              </a:spcBef>
+              <a:spcAft>
+                <a:spcPts val="0"/>
+              </a:spcAft>
+              <a:buClrTx/>
+              <a:buSzTx/>
+              <a:buFontTx/>
+              <a:buNone/>
+              <a:tabLst/>
+              <a:defRPr/>
+            </a:pPr>
+            <a:r>
+              <a:rPr kumimoji="0" lang="pt-BR" b="0" i="0" u="none" strike="noStrike" kern="0" cap="none" spc="0" normalizeH="0" baseline="0" noProof="0" dirty="0">
+                <a:ln>
+                  <a:noFill/>
+                </a:ln>
+                <a:solidFill>
+                  <a:prstClr val="black"/>
+                </a:solidFill>
+                <a:effectLst/>
+                <a:uLnTx/>
+                <a:uFillTx/>
+                <a:latin typeface="Consolas" panose="020B0609020204030204" pitchFamily="49" charset="0"/>
+                <a:ea typeface="+mn-ea"/>
+                <a:cs typeface="Consolas" panose="020B0609020204030204" pitchFamily="49" charset="0"/>
+              </a:rPr>
+              <a:t>loop B loop</a:t>
+            </a:r>
+          </a:p>
+          <a:p>
+            <a:pPr marL="0" marR="0" lvl="0" indent="0" defTabSz="914400" eaLnBrk="1" fontAlgn="auto" latinLnBrk="0" hangingPunct="1">
+              <a:lnSpc>
+                <a:spcPct val="100000"/>
+              </a:lnSpc>
+              <a:spcBef>
+                <a:spcPts val="0"/>
+              </a:spcBef>
+              <a:spcAft>
+                <a:spcPts val="0"/>
+              </a:spcAft>
+              <a:buClrTx/>
+              <a:buSzTx/>
+              <a:buFontTx/>
+              <a:buNone/>
+              <a:tabLst/>
+              <a:defRPr/>
+            </a:pPr>
+            <a:r>
+              <a:rPr kumimoji="0" lang="pt-BR" b="0" i="0" u="none" strike="noStrike" kern="0" cap="none" spc="0" normalizeH="0" baseline="0" noProof="0" dirty="0">
+                <a:ln>
+                  <a:noFill/>
+                </a:ln>
+                <a:solidFill>
+                  <a:prstClr val="black"/>
+                </a:solidFill>
+                <a:effectLst/>
+                <a:uLnTx/>
+                <a:uFillTx/>
+                <a:latin typeface="Consolas" panose="020B0609020204030204" pitchFamily="49" charset="0"/>
+                <a:ea typeface="+mn-ea"/>
+                <a:cs typeface="Consolas" panose="020B0609020204030204" pitchFamily="49" charset="0"/>
+              </a:rPr>
+              <a:t>     ENDP</a:t>
+            </a:r>
+          </a:p>
+          <a:p>
+            <a:pPr marL="0" marR="0" lvl="0" indent="0" defTabSz="914400" eaLnBrk="1" fontAlgn="auto" latinLnBrk="0" hangingPunct="1">
+              <a:lnSpc>
+                <a:spcPct val="100000"/>
+              </a:lnSpc>
+              <a:spcBef>
+                <a:spcPts val="0"/>
+              </a:spcBef>
+              <a:spcAft>
+                <a:spcPts val="0"/>
+              </a:spcAft>
+              <a:buClrTx/>
+              <a:buSzTx/>
+              <a:buFontTx/>
+              <a:buNone/>
+              <a:tabLst/>
+              <a:defRPr/>
+            </a:pPr>
+            <a:endParaRPr kumimoji="0" lang="pt-BR" b="0" i="0" u="none" strike="noStrike" kern="0" cap="none" spc="0" normalizeH="0" baseline="0" noProof="0" dirty="0">
+              <a:ln>
+                <a:noFill/>
+              </a:ln>
+              <a:solidFill>
+                <a:prstClr val="black"/>
+              </a:solidFill>
+              <a:effectLst/>
+              <a:uLnTx/>
+              <a:uFillTx/>
+              <a:latin typeface="Consolas" panose="020B0609020204030204" pitchFamily="49" charset="0"/>
+              <a:ea typeface="+mn-ea"/>
+              <a:cs typeface="Consolas" panose="020B0609020204030204" pitchFamily="49" charset="0"/>
+            </a:endParaRPr>
+          </a:p>
+          <a:p>
+            <a:pPr marL="0" marR="0" lvl="0" indent="0" defTabSz="914400" eaLnBrk="1" fontAlgn="auto" latinLnBrk="0" hangingPunct="1">
+              <a:lnSpc>
+                <a:spcPct val="100000"/>
+              </a:lnSpc>
+              <a:spcBef>
+                <a:spcPts val="0"/>
+              </a:spcBef>
+              <a:spcAft>
+                <a:spcPts val="0"/>
+              </a:spcAft>
+              <a:buClrTx/>
+              <a:buSzTx/>
+              <a:buFontTx/>
+              <a:buNone/>
+              <a:tabLst/>
+              <a:defRPr/>
+            </a:pPr>
+            <a:r>
+              <a:rPr kumimoji="0" lang="pt-BR" b="0" i="0" u="none" strike="noStrike" kern="0" cap="none" spc="0" normalizeH="0" baseline="0" noProof="0" dirty="0">
+                <a:ln>
+                  <a:noFill/>
+                </a:ln>
+                <a:solidFill>
+                  <a:prstClr val="black"/>
+                </a:solidFill>
+                <a:effectLst/>
+                <a:uLnTx/>
+                <a:uFillTx/>
+                <a:latin typeface="Consolas" panose="020B0609020204030204" pitchFamily="49" charset="0"/>
+                <a:ea typeface="+mn-ea"/>
+                <a:cs typeface="Consolas" panose="020B0609020204030204" pitchFamily="49" charset="0"/>
+              </a:rPr>
+              <a:t>max PROC</a:t>
+            </a:r>
+          </a:p>
+          <a:p>
+            <a:pPr marL="0" marR="0" lvl="0" indent="0" defTabSz="914400" eaLnBrk="1" fontAlgn="auto" latinLnBrk="0" hangingPunct="1">
+              <a:lnSpc>
+                <a:spcPct val="100000"/>
+              </a:lnSpc>
+              <a:spcBef>
+                <a:spcPts val="0"/>
+              </a:spcBef>
+              <a:spcAft>
+                <a:spcPts val="0"/>
+              </a:spcAft>
+              <a:buClrTx/>
+              <a:buSzTx/>
+              <a:buFontTx/>
+              <a:buNone/>
+              <a:tabLst/>
+              <a:defRPr/>
+            </a:pPr>
+            <a:r>
+              <a:rPr kumimoji="0" lang="pt-BR" b="0" i="0" u="none" strike="noStrike" kern="0" cap="none" spc="0" normalizeH="0" baseline="0" noProof="0" dirty="0">
+                <a:ln>
+                  <a:noFill/>
+                </a:ln>
+                <a:solidFill>
+                  <a:prstClr val="black"/>
+                </a:solidFill>
+                <a:effectLst/>
+                <a:uLnTx/>
+                <a:uFillTx/>
+                <a:latin typeface="Consolas" panose="020B0609020204030204" pitchFamily="49" charset="0"/>
+                <a:ea typeface="+mn-ea"/>
+                <a:cs typeface="Consolas" panose="020B0609020204030204" pitchFamily="49" charset="0"/>
+              </a:rPr>
+              <a:t>     CMP R2, </a:t>
+            </a:r>
+            <a:r>
+              <a:rPr lang="pt-BR" b="0" kern="0" dirty="0">
+                <a:solidFill>
+                  <a:prstClr val="black"/>
+                </a:solidFill>
+                <a:latin typeface="Consolas" panose="020B0609020204030204" pitchFamily="49" charset="0"/>
+                <a:cs typeface="Consolas" panose="020B0609020204030204" pitchFamily="49" charset="0"/>
+              </a:rPr>
+              <a:t>R3      @NZCV </a:t>
+            </a:r>
+            <a:r>
+              <a:rPr kumimoji="0" lang="pt-BR" b="0" i="0" u="none" strike="noStrike" kern="0" cap="none" spc="0" normalizeH="0" baseline="0" noProof="0" dirty="0">
+                <a:ln>
+                  <a:noFill/>
+                </a:ln>
+                <a:solidFill>
+                  <a:prstClr val="black"/>
+                </a:solidFill>
+                <a:effectLst/>
+                <a:uLnTx/>
+                <a:uFillTx/>
+                <a:latin typeface="Consolas" panose="020B0609020204030204" pitchFamily="49" charset="0"/>
+                <a:ea typeface="+mn-ea"/>
+                <a:cs typeface="Consolas" panose="020B0609020204030204" pitchFamily="49" charset="0"/>
+              </a:rPr>
+              <a:t>= 0010</a:t>
+            </a:r>
+          </a:p>
+          <a:p>
+            <a:pPr marL="0" marR="0" lvl="0" indent="0" defTabSz="914400" eaLnBrk="1" fontAlgn="auto" latinLnBrk="0" hangingPunct="1">
+              <a:lnSpc>
+                <a:spcPct val="100000"/>
+              </a:lnSpc>
+              <a:spcBef>
+                <a:spcPts val="0"/>
+              </a:spcBef>
+              <a:spcAft>
+                <a:spcPts val="0"/>
+              </a:spcAft>
+              <a:buClrTx/>
+              <a:buSzTx/>
+              <a:buFontTx/>
+              <a:buNone/>
+              <a:tabLst/>
+              <a:defRPr/>
+            </a:pPr>
+            <a:r>
+              <a:rPr kumimoji="0" lang="pt-BR" b="0" i="0" u="none" strike="noStrike" kern="0" cap="none" spc="0" normalizeH="0" baseline="0" noProof="0" dirty="0">
+                <a:ln>
+                  <a:noFill/>
+                </a:ln>
+                <a:solidFill>
+                  <a:prstClr val="black"/>
+                </a:solidFill>
+                <a:effectLst/>
+                <a:uLnTx/>
+                <a:uFillTx/>
+                <a:latin typeface="Consolas" panose="020B0609020204030204" pitchFamily="49" charset="0"/>
+                <a:ea typeface="+mn-ea"/>
+                <a:cs typeface="Consolas" panose="020B0609020204030204" pitchFamily="49" charset="0"/>
+              </a:rPr>
+              <a:t>     BLT second</a:t>
+            </a:r>
+          </a:p>
+          <a:p>
+            <a:pPr marL="0" marR="0" lvl="0" indent="0" defTabSz="914400" eaLnBrk="1" fontAlgn="auto" latinLnBrk="0" hangingPunct="1">
+              <a:lnSpc>
+                <a:spcPct val="100000"/>
+              </a:lnSpc>
+              <a:spcBef>
+                <a:spcPts val="0"/>
+              </a:spcBef>
+              <a:spcAft>
+                <a:spcPts val="0"/>
+              </a:spcAft>
+              <a:buClrTx/>
+              <a:buSzTx/>
+              <a:buFontTx/>
+              <a:buNone/>
+              <a:tabLst/>
+              <a:defRPr/>
+            </a:pPr>
+            <a:r>
+              <a:rPr kumimoji="0" lang="pt-BR" b="0" i="0" u="none" strike="noStrike" kern="0" cap="none" spc="0" normalizeH="0" baseline="0" noProof="0" dirty="0">
+                <a:ln>
+                  <a:noFill/>
+                </a:ln>
+                <a:solidFill>
+                  <a:prstClr val="black"/>
+                </a:solidFill>
+                <a:effectLst/>
+                <a:uLnTx/>
+                <a:uFillTx/>
+                <a:latin typeface="Consolas" panose="020B0609020204030204" pitchFamily="49" charset="0"/>
+                <a:ea typeface="+mn-ea"/>
+                <a:cs typeface="Consolas" panose="020B0609020204030204" pitchFamily="49" charset="0"/>
+              </a:rPr>
+              <a:t>first MOV R0, R2</a:t>
+            </a:r>
+          </a:p>
+          <a:p>
+            <a:pPr marL="0" marR="0" lvl="0" indent="0" defTabSz="914400" eaLnBrk="1" fontAlgn="auto" latinLnBrk="0" hangingPunct="1">
+              <a:lnSpc>
+                <a:spcPct val="100000"/>
+              </a:lnSpc>
+              <a:spcBef>
+                <a:spcPts val="0"/>
+              </a:spcBef>
+              <a:spcAft>
+                <a:spcPts val="0"/>
+              </a:spcAft>
+              <a:buClrTx/>
+              <a:buSzTx/>
+              <a:buFontTx/>
+              <a:buNone/>
+              <a:tabLst/>
+              <a:defRPr/>
+            </a:pPr>
+            <a:r>
+              <a:rPr kumimoji="0" lang="pt-BR" b="0" i="0" u="none" strike="noStrike" kern="0" cap="none" spc="0" normalizeH="0" baseline="0" noProof="0" dirty="0">
+                <a:ln>
+                  <a:noFill/>
+                </a:ln>
+                <a:solidFill>
+                  <a:prstClr val="black"/>
+                </a:solidFill>
+                <a:effectLst/>
+                <a:uLnTx/>
+                <a:uFillTx/>
+                <a:latin typeface="Consolas" panose="020B0609020204030204" pitchFamily="49" charset="0"/>
+                <a:ea typeface="+mn-ea"/>
+                <a:cs typeface="Consolas" panose="020B0609020204030204" pitchFamily="49" charset="0"/>
+              </a:rPr>
+              <a:t>      B done</a:t>
+            </a:r>
+          </a:p>
+          <a:p>
+            <a:pPr marL="0" marR="0" lvl="0" indent="0" defTabSz="914400" eaLnBrk="1" fontAlgn="auto" latinLnBrk="0" hangingPunct="1">
+              <a:lnSpc>
+                <a:spcPct val="100000"/>
+              </a:lnSpc>
+              <a:spcBef>
+                <a:spcPts val="0"/>
+              </a:spcBef>
+              <a:spcAft>
+                <a:spcPts val="0"/>
+              </a:spcAft>
+              <a:buClrTx/>
+              <a:buSzTx/>
+              <a:buFontTx/>
+              <a:buNone/>
+              <a:tabLst/>
+              <a:defRPr/>
+            </a:pPr>
+            <a:r>
+              <a:rPr kumimoji="0" lang="pt-BR" b="0" i="0" u="none" strike="noStrike" kern="0" cap="none" spc="0" normalizeH="0" baseline="0" noProof="0" dirty="0">
+                <a:ln>
+                  <a:noFill/>
+                </a:ln>
+                <a:solidFill>
+                  <a:prstClr val="black"/>
+                </a:solidFill>
+                <a:effectLst/>
+                <a:uLnTx/>
+                <a:uFillTx/>
+                <a:latin typeface="Consolas" panose="020B0609020204030204" pitchFamily="49" charset="0"/>
+                <a:ea typeface="+mn-ea"/>
+                <a:cs typeface="Consolas" panose="020B0609020204030204" pitchFamily="49" charset="0"/>
+              </a:rPr>
+              <a:t>second MOV R0, R3</a:t>
+            </a:r>
+          </a:p>
+          <a:p>
+            <a:pPr marL="0" marR="0" lvl="0" indent="0" defTabSz="914400" eaLnBrk="1" fontAlgn="auto" latinLnBrk="0" hangingPunct="1">
+              <a:lnSpc>
+                <a:spcPct val="100000"/>
+              </a:lnSpc>
+              <a:spcBef>
+                <a:spcPts val="0"/>
+              </a:spcBef>
+              <a:spcAft>
+                <a:spcPts val="0"/>
+              </a:spcAft>
+              <a:buClrTx/>
+              <a:buSzTx/>
+              <a:buFontTx/>
+              <a:buNone/>
+              <a:tabLst/>
+              <a:defRPr/>
+            </a:pPr>
+            <a:r>
+              <a:rPr kumimoji="0" lang="pt-BR" b="0" i="0" u="none" strike="noStrike" kern="0" cap="none" spc="0" normalizeH="0" baseline="0" noProof="0" dirty="0">
+                <a:ln>
+                  <a:noFill/>
+                </a:ln>
+                <a:solidFill>
+                  <a:prstClr val="black"/>
+                </a:solidFill>
+                <a:effectLst/>
+                <a:uLnTx/>
+                <a:uFillTx/>
+                <a:latin typeface="Consolas" panose="020B0609020204030204" pitchFamily="49" charset="0"/>
+                <a:ea typeface="+mn-ea"/>
+                <a:cs typeface="Consolas" panose="020B0609020204030204" pitchFamily="49" charset="0"/>
+              </a:rPr>
+              <a:t>done   BX LR</a:t>
+            </a:r>
+          </a:p>
+          <a:p>
+            <a:pPr marL="0" marR="0" lvl="0" indent="0" defTabSz="914400" eaLnBrk="1" fontAlgn="auto" latinLnBrk="0" hangingPunct="1">
+              <a:lnSpc>
+                <a:spcPct val="100000"/>
+              </a:lnSpc>
+              <a:spcBef>
+                <a:spcPts val="0"/>
+              </a:spcBef>
+              <a:spcAft>
+                <a:spcPts val="0"/>
+              </a:spcAft>
+              <a:buClrTx/>
+              <a:buSzTx/>
+              <a:buFontTx/>
+              <a:buNone/>
+              <a:tabLst/>
+              <a:defRPr/>
+            </a:pPr>
+            <a:r>
+              <a:rPr kumimoji="0" lang="pt-BR" b="0" i="0" u="none" strike="noStrike" kern="0" cap="none" spc="0" normalizeH="0" baseline="0" noProof="0" dirty="0">
+                <a:ln>
+                  <a:noFill/>
+                </a:ln>
+                <a:solidFill>
+                  <a:prstClr val="black"/>
+                </a:solidFill>
+                <a:effectLst/>
+                <a:uLnTx/>
+                <a:uFillTx/>
+                <a:latin typeface="Consolas" panose="020B0609020204030204" pitchFamily="49" charset="0"/>
+                <a:ea typeface="+mn-ea"/>
+                <a:cs typeface="Consolas" panose="020B0609020204030204" pitchFamily="49" charset="0"/>
+              </a:rPr>
+              <a:t>     ENDP</a:t>
+            </a:r>
+          </a:p>
+        </p:txBody>
+      </p:sp>
+      <p:sp>
+        <p:nvSpPr>
           <p:cNvPr id="2" name="Title 1">
             <a:extLst>
               <a:ext uri="{FF2B5EF4-FFF2-40B4-BE49-F238E27FC236}">
@@ -39285,13 +40399,13 @@
           <p:nvPr>
             <p:extLst>
               <p:ext uri="{D42A27DB-BD31-4B8C-83A1-F6EECF244321}">
-                <p14:modId xmlns:p14="http://schemas.microsoft.com/office/powerpoint/2010/main" val="1581620029"/>
+                <p14:modId xmlns:p14="http://schemas.microsoft.com/office/powerpoint/2010/main" val="3351817991"/>
               </p:ext>
             </p:extLst>
           </p:nvPr>
         </p:nvGraphicFramePr>
         <p:xfrm>
-          <a:off x="137320" y="4551113"/>
+          <a:off x="137320" y="4817338"/>
           <a:ext cx="8869358" cy="1483360"/>
         </p:xfrm>
         <a:graphic>
@@ -39370,7 +40484,11 @@
                       </a:r>
                     </a:p>
                   </a:txBody>
-                  <a:tcPr/>
+                  <a:tcPr>
+                    <a:solidFill>
+                      <a:schemeClr val="bg1"/>
+                    </a:solidFill>
+                  </a:tcPr>
                 </a:tc>
                 <a:tc>
                   <a:txBody>
@@ -39383,7 +40501,11 @@
                       </a:r>
                     </a:p>
                   </a:txBody>
-                  <a:tcPr/>
+                  <a:tcPr>
+                    <a:solidFill>
+                      <a:schemeClr val="bg1"/>
+                    </a:solidFill>
+                  </a:tcPr>
                 </a:tc>
                 <a:tc>
                   <a:txBody>
@@ -39396,7 +40518,11 @@
                       </a:r>
                     </a:p>
                   </a:txBody>
-                  <a:tcPr/>
+                  <a:tcPr>
+                    <a:solidFill>
+                      <a:schemeClr val="bg1"/>
+                    </a:solidFill>
+                  </a:tcPr>
                 </a:tc>
                 <a:tc>
                   <a:txBody>
@@ -39409,7 +40535,11 @@
                       </a:r>
                     </a:p>
                   </a:txBody>
-                  <a:tcPr/>
+                  <a:tcPr>
+                    <a:solidFill>
+                      <a:schemeClr val="bg1"/>
+                    </a:solidFill>
+                  </a:tcPr>
                 </a:tc>
                 <a:tc>
                   <a:txBody>
@@ -39422,7 +40552,11 @@
                       </a:r>
                     </a:p>
                   </a:txBody>
-                  <a:tcPr/>
+                  <a:tcPr>
+                    <a:solidFill>
+                      <a:schemeClr val="bg1"/>
+                    </a:solidFill>
+                  </a:tcPr>
                 </a:tc>
                 <a:tc>
                   <a:txBody>
@@ -39435,7 +40569,11 @@
                       </a:r>
                     </a:p>
                   </a:txBody>
-                  <a:tcPr/>
+                  <a:tcPr>
+                    <a:solidFill>
+                      <a:schemeClr val="bg1"/>
+                    </a:solidFill>
+                  </a:tcPr>
                 </a:tc>
                 <a:tc>
                   <a:txBody>
@@ -39448,7 +40586,11 @@
                       </a:r>
                     </a:p>
                   </a:txBody>
-                  <a:tcPr/>
+                  <a:tcPr>
+                    <a:solidFill>
+                      <a:schemeClr val="bg1"/>
+                    </a:solidFill>
+                  </a:tcPr>
                 </a:tc>
                 <a:tc>
                   <a:txBody>
@@ -39461,7 +40603,11 @@
                       </a:r>
                     </a:p>
                   </a:txBody>
-                  <a:tcPr/>
+                  <a:tcPr>
+                    <a:solidFill>
+                      <a:schemeClr val="bg1"/>
+                    </a:solidFill>
+                  </a:tcPr>
                 </a:tc>
                 <a:extLst>
                   <a:ext uri="{0D108BD9-81ED-4DB2-BD59-A6C34878D82A}">
@@ -39481,7 +40627,11 @@
                       </a:r>
                     </a:p>
                   </a:txBody>
-                  <a:tcPr/>
+                  <a:tcPr>
+                    <a:solidFill>
+                      <a:schemeClr val="bg1"/>
+                    </a:solidFill>
+                  </a:tcPr>
                 </a:tc>
                 <a:tc>
                   <a:txBody>
@@ -39494,7 +40644,11 @@
                       </a:r>
                     </a:p>
                   </a:txBody>
-                  <a:tcPr/>
+                  <a:tcPr>
+                    <a:solidFill>
+                      <a:schemeClr val="bg1"/>
+                    </a:solidFill>
+                  </a:tcPr>
                 </a:tc>
                 <a:tc>
                   <a:txBody>
@@ -39507,7 +40661,11 @@
                       </a:r>
                     </a:p>
                   </a:txBody>
-                  <a:tcPr/>
+                  <a:tcPr>
+                    <a:solidFill>
+                      <a:schemeClr val="bg1"/>
+                    </a:solidFill>
+                  </a:tcPr>
                 </a:tc>
                 <a:tc>
                   <a:txBody>
@@ -39520,7 +40678,11 @@
                       </a:r>
                     </a:p>
                   </a:txBody>
-                  <a:tcPr/>
+                  <a:tcPr>
+                    <a:solidFill>
+                      <a:schemeClr val="bg1"/>
+                    </a:solidFill>
+                  </a:tcPr>
                 </a:tc>
                 <a:tc>
                   <a:txBody>
@@ -39533,7 +40695,11 @@
                       </a:r>
                     </a:p>
                   </a:txBody>
-                  <a:tcPr/>
+                  <a:tcPr>
+                    <a:solidFill>
+                      <a:schemeClr val="bg1"/>
+                    </a:solidFill>
+                  </a:tcPr>
                 </a:tc>
                 <a:tc>
                   <a:txBody>
@@ -39546,7 +40712,11 @@
                       </a:r>
                     </a:p>
                   </a:txBody>
-                  <a:tcPr/>
+                  <a:tcPr>
+                    <a:solidFill>
+                      <a:schemeClr val="bg1"/>
+                    </a:solidFill>
+                  </a:tcPr>
                 </a:tc>
                 <a:tc>
                   <a:txBody>
@@ -39559,7 +40729,11 @@
                       </a:r>
                     </a:p>
                   </a:txBody>
-                  <a:tcPr/>
+                  <a:tcPr>
+                    <a:solidFill>
+                      <a:schemeClr val="bg1"/>
+                    </a:solidFill>
+                  </a:tcPr>
                 </a:tc>
                 <a:tc>
                   <a:txBody>
@@ -39572,7 +40746,11 @@
                       </a:r>
                     </a:p>
                   </a:txBody>
-                  <a:tcPr/>
+                  <a:tcPr>
+                    <a:solidFill>
+                      <a:schemeClr val="bg1"/>
+                    </a:solidFill>
+                  </a:tcPr>
                 </a:tc>
                 <a:extLst>
                   <a:ext uri="{0D108BD9-81ED-4DB2-BD59-A6C34878D82A}">
@@ -39592,7 +40770,11 @@
                       </a:r>
                     </a:p>
                   </a:txBody>
-                  <a:tcPr/>
+                  <a:tcPr>
+                    <a:solidFill>
+                      <a:schemeClr val="bg1"/>
+                    </a:solidFill>
+                  </a:tcPr>
                 </a:tc>
                 <a:tc>
                   <a:txBody>
@@ -39605,7 +40787,11 @@
                       </a:r>
                     </a:p>
                   </a:txBody>
-                  <a:tcPr/>
+                  <a:tcPr>
+                    <a:solidFill>
+                      <a:schemeClr val="bg1"/>
+                    </a:solidFill>
+                  </a:tcPr>
                 </a:tc>
                 <a:tc>
                   <a:txBody>
@@ -39618,7 +40804,11 @@
                       </a:r>
                     </a:p>
                   </a:txBody>
-                  <a:tcPr/>
+                  <a:tcPr>
+                    <a:solidFill>
+                      <a:schemeClr val="bg1"/>
+                    </a:solidFill>
+                  </a:tcPr>
                 </a:tc>
                 <a:tc>
                   <a:txBody>
@@ -39631,7 +40821,11 @@
                       </a:r>
                     </a:p>
                   </a:txBody>
-                  <a:tcPr/>
+                  <a:tcPr>
+                    <a:solidFill>
+                      <a:schemeClr val="bg1"/>
+                    </a:solidFill>
+                  </a:tcPr>
                 </a:tc>
                 <a:tc>
                   <a:txBody>
@@ -39644,7 +40838,11 @@
                       </a:r>
                     </a:p>
                   </a:txBody>
-                  <a:tcPr/>
+                  <a:tcPr>
+                    <a:solidFill>
+                      <a:schemeClr val="bg1"/>
+                    </a:solidFill>
+                  </a:tcPr>
                 </a:tc>
                 <a:tc>
                   <a:txBody>
@@ -39657,7 +40855,11 @@
                       </a:r>
                     </a:p>
                   </a:txBody>
-                  <a:tcPr/>
+                  <a:tcPr>
+                    <a:solidFill>
+                      <a:schemeClr val="bg1"/>
+                    </a:solidFill>
+                  </a:tcPr>
                 </a:tc>
                 <a:tc>
                   <a:txBody>
@@ -39670,7 +40872,11 @@
                       </a:r>
                     </a:p>
                   </a:txBody>
-                  <a:tcPr/>
+                  <a:tcPr>
+                    <a:solidFill>
+                      <a:schemeClr val="bg1"/>
+                    </a:solidFill>
+                  </a:tcPr>
                 </a:tc>
                 <a:tc>
                   <a:txBody>
@@ -39683,7 +40889,11 @@
                       </a:r>
                     </a:p>
                   </a:txBody>
-                  <a:tcPr/>
+                  <a:tcPr>
+                    <a:solidFill>
+                      <a:schemeClr val="bg1"/>
+                    </a:solidFill>
+                  </a:tcPr>
                 </a:tc>
                 <a:extLst>
                   <a:ext uri="{0D108BD9-81ED-4DB2-BD59-A6C34878D82A}">
@@ -39703,7 +40913,11 @@
                       </a:r>
                     </a:p>
                   </a:txBody>
-                  <a:tcPr/>
+                  <a:tcPr>
+                    <a:solidFill>
+                      <a:schemeClr val="bg1"/>
+                    </a:solidFill>
+                  </a:tcPr>
                 </a:tc>
                 <a:tc>
                   <a:txBody>
@@ -39716,7 +40930,11 @@
                       </a:r>
                     </a:p>
                   </a:txBody>
-                  <a:tcPr/>
+                  <a:tcPr>
+                    <a:solidFill>
+                      <a:schemeClr val="bg1"/>
+                    </a:solidFill>
+                  </a:tcPr>
                 </a:tc>
                 <a:tc>
                   <a:txBody>
@@ -39729,7 +40947,11 @@
                       </a:r>
                     </a:p>
                   </a:txBody>
-                  <a:tcPr/>
+                  <a:tcPr>
+                    <a:solidFill>
+                      <a:schemeClr val="bg1"/>
+                    </a:solidFill>
+                  </a:tcPr>
                 </a:tc>
                 <a:tc>
                   <a:txBody>
@@ -39742,7 +40964,11 @@
                       </a:r>
                     </a:p>
                   </a:txBody>
-                  <a:tcPr/>
+                  <a:tcPr>
+                    <a:solidFill>
+                      <a:schemeClr val="bg1"/>
+                    </a:solidFill>
+                  </a:tcPr>
                 </a:tc>
                 <a:tc>
                   <a:txBody>
@@ -39755,7 +40981,11 @@
                       </a:r>
                     </a:p>
                   </a:txBody>
-                  <a:tcPr/>
+                  <a:tcPr>
+                    <a:solidFill>
+                      <a:schemeClr val="bg1"/>
+                    </a:solidFill>
+                  </a:tcPr>
                 </a:tc>
                 <a:tc>
                   <a:txBody>
@@ -39768,7 +40998,11 @@
                       </a:r>
                     </a:p>
                   </a:txBody>
-                  <a:tcPr/>
+                  <a:tcPr>
+                    <a:solidFill>
+                      <a:schemeClr val="bg1"/>
+                    </a:solidFill>
+                  </a:tcPr>
                 </a:tc>
                 <a:tc>
                   <a:txBody>
@@ -39781,7 +41015,11 @@
                       </a:r>
                     </a:p>
                   </a:txBody>
-                  <a:tcPr/>
+                  <a:tcPr>
+                    <a:solidFill>
+                      <a:schemeClr val="bg1"/>
+                    </a:solidFill>
+                  </a:tcPr>
                 </a:tc>
                 <a:tc>
                   <a:txBody>
@@ -39794,7 +41032,11 @@
                       </a:r>
                     </a:p>
                   </a:txBody>
-                  <a:tcPr/>
+                  <a:tcPr>
+                    <a:solidFill>
+                      <a:schemeClr val="bg1"/>
+                    </a:solidFill>
+                  </a:tcPr>
                 </a:tc>
                 <a:extLst>
                   <a:ext uri="{0D108BD9-81ED-4DB2-BD59-A6C34878D82A}">
@@ -39821,13 +41063,13 @@
           <p:nvPr>
             <p:extLst>
               <p:ext uri="{D42A27DB-BD31-4B8C-83A1-F6EECF244321}">
-                <p14:modId xmlns:p14="http://schemas.microsoft.com/office/powerpoint/2010/main" val="4011575496"/>
+                <p14:modId xmlns:p14="http://schemas.microsoft.com/office/powerpoint/2010/main" val="1554147959"/>
               </p:ext>
             </p:extLst>
           </p:nvPr>
         </p:nvGraphicFramePr>
         <p:xfrm>
-          <a:off x="457200" y="6228257"/>
+          <a:off x="457200" y="6367157"/>
           <a:ext cx="8423243" cy="370840"/>
         </p:xfrm>
         <a:graphic>
@@ -40436,8 +41678,8 @@
         </p:nvSpPr>
         <p:spPr>
           <a:xfrm>
-            <a:off x="5598005" y="1124188"/>
-            <a:ext cx="3088794" cy="369332"/>
+            <a:off x="5239190" y="827197"/>
+            <a:ext cx="3812212" cy="738664"/>
           </a:xfrm>
           <a:prstGeom prst="rect">
             <a:avLst/>
@@ -40463,16 +41705,23 @@
           </a:fontRef>
         </p:style>
         <p:txBody>
-          <a:bodyPr wrap="none" rtlCol="0">
+          <a:bodyPr wrap="square" rtlCol="0">
             <a:spAutoFit/>
           </a:bodyPr>
           <a:lstStyle/>
           <a:p>
             <a:r>
-              <a:rPr lang="en-US" sz="1800" b="0" dirty="0">
+              <a:rPr lang="en-US" b="0" dirty="0">
+                <a:latin typeface="+mn-lt"/>
+                <a:hlinkClick r:id="rId4"/>
+              </a:rPr>
+              <a:t>https://www.youtube.com/watch?v=XkjC1avu6Ow&amp;list=PLHv6klbVebn0pCLcmCxGVa7ZPx7CB01Rh&amp;index=6</a:t>
+            </a:r>
+            <a:r>
+              <a:rPr lang="en-US" b="0" dirty="0">
                 <a:latin typeface="+mn-lt"/>
               </a:rPr>
-              <a:t>See PPT notes for YouTube link</a:t>
+              <a:t> </a:t>
             </a:r>
           </a:p>
         </p:txBody>

--- a/PPTs/Ch5_ARM_Load_Store_Exercises_ANS.pptx
+++ b/PPTs/Ch5_ARM_Load_Store_Exercises_ANS.pptx
@@ -5,10 +5,10 @@
     <p:sldMasterId id="2147483686" r:id="rId1"/>
   </p:sldMasterIdLst>
   <p:notesMasterIdLst>
-    <p:notesMasterId r:id="rId37"/>
+    <p:notesMasterId r:id="rId39"/>
   </p:notesMasterIdLst>
   <p:handoutMasterIdLst>
-    <p:handoutMasterId r:id="rId38"/>
+    <p:handoutMasterId r:id="rId40"/>
   </p:handoutMasterIdLst>
   <p:sldIdLst>
     <p:sldId id="385" r:id="rId2"/>
@@ -20,32 +20,34 @@
     <p:sldId id="359" r:id="rId8"/>
     <p:sldId id="417" r:id="rId9"/>
     <p:sldId id="798" r:id="rId10"/>
-    <p:sldId id="808" r:id="rId11"/>
-    <p:sldId id="813" r:id="rId12"/>
-    <p:sldId id="809" r:id="rId13"/>
-    <p:sldId id="811" r:id="rId14"/>
-    <p:sldId id="812" r:id="rId15"/>
-    <p:sldId id="774" r:id="rId16"/>
-    <p:sldId id="345" r:id="rId17"/>
-    <p:sldId id="346" r:id="rId18"/>
-    <p:sldId id="369" r:id="rId19"/>
-    <p:sldId id="370" r:id="rId20"/>
-    <p:sldId id="367" r:id="rId21"/>
-    <p:sldId id="368" r:id="rId22"/>
-    <p:sldId id="365" r:id="rId23"/>
-    <p:sldId id="366" r:id="rId24"/>
-    <p:sldId id="495" r:id="rId25"/>
-    <p:sldId id="801" r:id="rId26"/>
-    <p:sldId id="799" r:id="rId27"/>
-    <p:sldId id="804" r:id="rId28"/>
-    <p:sldId id="803" r:id="rId29"/>
-    <p:sldId id="805" r:id="rId30"/>
-    <p:sldId id="806" r:id="rId31"/>
-    <p:sldId id="816" r:id="rId32"/>
-    <p:sldId id="817" r:id="rId33"/>
-    <p:sldId id="818" r:id="rId34"/>
-    <p:sldId id="819" r:id="rId35"/>
-    <p:sldId id="820" r:id="rId36"/>
+    <p:sldId id="813" r:id="rId11"/>
+    <p:sldId id="809" r:id="rId12"/>
+    <p:sldId id="811" r:id="rId13"/>
+    <p:sldId id="812" r:id="rId14"/>
+    <p:sldId id="774" r:id="rId15"/>
+    <p:sldId id="345" r:id="rId16"/>
+    <p:sldId id="346" r:id="rId17"/>
+    <p:sldId id="369" r:id="rId18"/>
+    <p:sldId id="370" r:id="rId19"/>
+    <p:sldId id="367" r:id="rId20"/>
+    <p:sldId id="368" r:id="rId21"/>
+    <p:sldId id="365" r:id="rId22"/>
+    <p:sldId id="366" r:id="rId23"/>
+    <p:sldId id="495" r:id="rId24"/>
+    <p:sldId id="801" r:id="rId25"/>
+    <p:sldId id="799" r:id="rId26"/>
+    <p:sldId id="804" r:id="rId27"/>
+    <p:sldId id="803" r:id="rId28"/>
+    <p:sldId id="805" r:id="rId29"/>
+    <p:sldId id="806" r:id="rId30"/>
+    <p:sldId id="816" r:id="rId31"/>
+    <p:sldId id="817" r:id="rId32"/>
+    <p:sldId id="818" r:id="rId33"/>
+    <p:sldId id="819" r:id="rId34"/>
+    <p:sldId id="821" r:id="rId35"/>
+    <p:sldId id="823" r:id="rId36"/>
+    <p:sldId id="820" r:id="rId37"/>
+    <p:sldId id="822" r:id="rId38"/>
   </p:sldIdLst>
   <p:sldSz cx="9144000" cy="6858000" type="screen4x3"/>
   <p:notesSz cx="9296400" cy="7010400"/>
@@ -230,7 +232,7 @@
 <file path=ppt/revisionInfo.xml><?xml version="1.0" encoding="utf-8"?>
 <p1510:revInfo xmlns:a="http://schemas.openxmlformats.org/drawingml/2006/main" xmlns:r="http://schemas.openxmlformats.org/officeDocument/2006/relationships" xmlns:p1510="http://schemas.microsoft.com/office/powerpoint/2015/10/main">
   <p1510:revLst>
-    <p1510:client id="{95D25279-C3AD-4B13-92A2-4AC656D27A67}" v="407" dt="2025-10-21T23:28:57.132"/>
+    <p1510:client id="{95D25279-C3AD-4B13-92A2-4AC656D27A67}" v="454" dt="2025-10-22T00:55:02.806"/>
   </p1510:revLst>
 </p1510:revInfo>
 </file>
@@ -240,16 +242,205 @@
   <pc:docChgLst>
     <pc:chgData name="Zonghua Gu" userId="9a7e1853e1951ef5" providerId="LiveId" clId="{CF1FAA12-072C-4ED5-BA76-0FFFAEFDB88A}"/>
     <pc:docChg chg="undo custSel addSld delSld modSld sldOrd modNotesMaster modHandout">
-      <pc:chgData name="Zonghua Gu" userId="9a7e1853e1951ef5" providerId="LiveId" clId="{CF1FAA12-072C-4ED5-BA76-0FFFAEFDB88A}" dt="2025-10-21T23:30:00.128" v="3643" actId="404"/>
+      <pc:chgData name="Zonghua Gu" userId="9a7e1853e1951ef5" providerId="LiveId" clId="{CF1FAA12-072C-4ED5-BA76-0FFFAEFDB88A}" dt="2025-10-22T00:55:47.841" v="4329" actId="478"/>
       <pc:docMkLst>
         <pc:docMk/>
       </pc:docMkLst>
-      <pc:sldChg chg="modSp">
-        <pc:chgData name="Zonghua Gu" userId="9a7e1853e1951ef5" providerId="LiveId" clId="{CF1FAA12-072C-4ED5-BA76-0FFFAEFDB88A}" dt="2025-10-21T22:27:40.768" v="2971" actId="20577"/>
+      <pc:sldChg chg="modSp mod">
+        <pc:chgData name="Zonghua Gu" userId="9a7e1853e1951ef5" providerId="LiveId" clId="{CF1FAA12-072C-4ED5-BA76-0FFFAEFDB88A}" dt="2025-10-22T00:51:36.795" v="4296" actId="20577"/>
+        <pc:sldMkLst>
+          <pc:docMk/>
+          <pc:sldMk cId="936686548" sldId="345"/>
+        </pc:sldMkLst>
+        <pc:spChg chg="mod">
+          <ac:chgData name="Zonghua Gu" userId="9a7e1853e1951ef5" providerId="LiveId" clId="{CF1FAA12-072C-4ED5-BA76-0FFFAEFDB88A}" dt="2025-10-22T00:51:36.795" v="4296" actId="20577"/>
+          <ac:spMkLst>
+            <pc:docMk/>
+            <pc:sldMk cId="936686548" sldId="345"/>
+            <ac:spMk id="2" creationId="{00000000-0000-0000-0000-000000000000}"/>
+          </ac:spMkLst>
+        </pc:spChg>
+      </pc:sldChg>
+      <pc:sldChg chg="modSp mod">
+        <pc:chgData name="Zonghua Gu" userId="9a7e1853e1951ef5" providerId="LiveId" clId="{CF1FAA12-072C-4ED5-BA76-0FFFAEFDB88A}" dt="2025-10-22T00:51:45.513" v="4303" actId="20577"/>
+        <pc:sldMkLst>
+          <pc:docMk/>
+          <pc:sldMk cId="2173526811" sldId="346"/>
+        </pc:sldMkLst>
+        <pc:spChg chg="mod">
+          <ac:chgData name="Zonghua Gu" userId="9a7e1853e1951ef5" providerId="LiveId" clId="{CF1FAA12-072C-4ED5-BA76-0FFFAEFDB88A}" dt="2025-10-22T00:51:45.513" v="4303" actId="20577"/>
+          <ac:spMkLst>
+            <pc:docMk/>
+            <pc:sldMk cId="2173526811" sldId="346"/>
+            <ac:spMk id="2" creationId="{00000000-0000-0000-0000-000000000000}"/>
+          </ac:spMkLst>
+        </pc:spChg>
+      </pc:sldChg>
+      <pc:sldChg chg="modSp mod">
+        <pc:chgData name="Zonghua Gu" userId="9a7e1853e1951ef5" providerId="LiveId" clId="{CF1FAA12-072C-4ED5-BA76-0FFFAEFDB88A}" dt="2025-10-22T00:50:44.004" v="4282" actId="20577"/>
+        <pc:sldMkLst>
+          <pc:docMk/>
+          <pc:sldMk cId="3359075723" sldId="356"/>
+        </pc:sldMkLst>
+        <pc:spChg chg="mod">
+          <ac:chgData name="Zonghua Gu" userId="9a7e1853e1951ef5" providerId="LiveId" clId="{CF1FAA12-072C-4ED5-BA76-0FFFAEFDB88A}" dt="2025-10-22T00:50:44.004" v="4282" actId="20577"/>
+          <ac:spMkLst>
+            <pc:docMk/>
+            <pc:sldMk cId="3359075723" sldId="356"/>
+            <ac:spMk id="46084" creationId="{00000000-0000-0000-0000-000000000000}"/>
+          </ac:spMkLst>
+        </pc:spChg>
+      </pc:sldChg>
+      <pc:sldChg chg="modSp mod">
+        <pc:chgData name="Zonghua Gu" userId="9a7e1853e1951ef5" providerId="LiveId" clId="{CF1FAA12-072C-4ED5-BA76-0FFFAEFDB88A}" dt="2025-10-22T00:50:49.443" v="4287" actId="20577"/>
+        <pc:sldMkLst>
+          <pc:docMk/>
+          <pc:sldMk cId="1209470724" sldId="357"/>
+        </pc:sldMkLst>
+        <pc:spChg chg="mod">
+          <ac:chgData name="Zonghua Gu" userId="9a7e1853e1951ef5" providerId="LiveId" clId="{CF1FAA12-072C-4ED5-BA76-0FFFAEFDB88A}" dt="2025-10-22T00:50:49.443" v="4287" actId="20577"/>
+          <ac:spMkLst>
+            <pc:docMk/>
+            <pc:sldMk cId="1209470724" sldId="357"/>
+            <ac:spMk id="46084" creationId="{00000000-0000-0000-0000-000000000000}"/>
+          </ac:spMkLst>
+        </pc:spChg>
+      </pc:sldChg>
+      <pc:sldChg chg="modSp mod">
+        <pc:chgData name="Zonghua Gu" userId="9a7e1853e1951ef5" providerId="LiveId" clId="{CF1FAA12-072C-4ED5-BA76-0FFFAEFDB88A}" dt="2025-10-22T00:51:07.369" v="4292" actId="20577"/>
+        <pc:sldMkLst>
+          <pc:docMk/>
+          <pc:sldMk cId="1502810167" sldId="358"/>
+        </pc:sldMkLst>
+        <pc:spChg chg="mod">
+          <ac:chgData name="Zonghua Gu" userId="9a7e1853e1951ef5" providerId="LiveId" clId="{CF1FAA12-072C-4ED5-BA76-0FFFAEFDB88A}" dt="2025-10-22T00:51:07.369" v="4292" actId="20577"/>
+          <ac:spMkLst>
+            <pc:docMk/>
+            <pc:sldMk cId="1502810167" sldId="358"/>
+            <ac:spMk id="25606" creationId="{00000000-0000-0000-0000-000000000000}"/>
+          </ac:spMkLst>
+        </pc:spChg>
+      </pc:sldChg>
+      <pc:sldChg chg="modSp mod">
+        <pc:chgData name="Zonghua Gu" userId="9a7e1853e1951ef5" providerId="LiveId" clId="{CF1FAA12-072C-4ED5-BA76-0FFFAEFDB88A}" dt="2025-10-22T00:51:12.718" v="4295"/>
+        <pc:sldMkLst>
+          <pc:docMk/>
+          <pc:sldMk cId="670903100" sldId="359"/>
+        </pc:sldMkLst>
+        <pc:spChg chg="mod">
+          <ac:chgData name="Zonghua Gu" userId="9a7e1853e1951ef5" providerId="LiveId" clId="{CF1FAA12-072C-4ED5-BA76-0FFFAEFDB88A}" dt="2025-10-22T00:51:12.718" v="4295"/>
+          <ac:spMkLst>
+            <pc:docMk/>
+            <pc:sldMk cId="670903100" sldId="359"/>
+            <ac:spMk id="25606" creationId="{00000000-0000-0000-0000-000000000000}"/>
+          </ac:spMkLst>
+        </pc:spChg>
+      </pc:sldChg>
+      <pc:sldChg chg="modSp mod">
+        <pc:chgData name="Zonghua Gu" userId="9a7e1853e1951ef5" providerId="LiveId" clId="{CF1FAA12-072C-4ED5-BA76-0FFFAEFDB88A}" dt="2025-10-22T00:50:52.874" v="4288" actId="6549"/>
+        <pc:sldMkLst>
+          <pc:docMk/>
+          <pc:sldMk cId="3486040908" sldId="363"/>
+        </pc:sldMkLst>
+        <pc:spChg chg="mod">
+          <ac:chgData name="Zonghua Gu" userId="9a7e1853e1951ef5" providerId="LiveId" clId="{CF1FAA12-072C-4ED5-BA76-0FFFAEFDB88A}" dt="2025-10-22T00:50:52.874" v="4288" actId="6549"/>
+          <ac:spMkLst>
+            <pc:docMk/>
+            <pc:sldMk cId="3486040908" sldId="363"/>
+            <ac:spMk id="2" creationId="{00000000-0000-0000-0000-000000000000}"/>
+          </ac:spMkLst>
+        </pc:spChg>
+      </pc:sldChg>
+      <pc:sldChg chg="modSp mod">
+        <pc:chgData name="Zonghua Gu" userId="9a7e1853e1951ef5" providerId="LiveId" clId="{CF1FAA12-072C-4ED5-BA76-0FFFAEFDB88A}" dt="2025-10-22T00:51:04.413" v="4291"/>
+        <pc:sldMkLst>
+          <pc:docMk/>
+          <pc:sldMk cId="3561992185" sldId="364"/>
+        </pc:sldMkLst>
+        <pc:spChg chg="mod">
+          <ac:chgData name="Zonghua Gu" userId="9a7e1853e1951ef5" providerId="LiveId" clId="{CF1FAA12-072C-4ED5-BA76-0FFFAEFDB88A}" dt="2025-10-22T00:51:04.413" v="4291"/>
+          <ac:spMkLst>
+            <pc:docMk/>
+            <pc:sldMk cId="3561992185" sldId="364"/>
+            <ac:spMk id="2" creationId="{00000000-0000-0000-0000-000000000000}"/>
+          </ac:spMkLst>
+        </pc:spChg>
+      </pc:sldChg>
+      <pc:sldChg chg="modSp mod">
+        <pc:chgData name="Zonghua Gu" userId="9a7e1853e1951ef5" providerId="LiveId" clId="{CF1FAA12-072C-4ED5-BA76-0FFFAEFDB88A}" dt="2025-10-22T00:49:15.188" v="4257" actId="20577"/>
+        <pc:sldMkLst>
+          <pc:docMk/>
+          <pc:sldMk cId="802972020" sldId="365"/>
+        </pc:sldMkLst>
+        <pc:spChg chg="mod">
+          <ac:chgData name="Zonghua Gu" userId="9a7e1853e1951ef5" providerId="LiveId" clId="{CF1FAA12-072C-4ED5-BA76-0FFFAEFDB88A}" dt="2025-10-22T00:49:03.943" v="4255" actId="20577"/>
+          <ac:spMkLst>
+            <pc:docMk/>
+            <pc:sldMk cId="802972020" sldId="365"/>
+            <ac:spMk id="2" creationId="{00000000-0000-0000-0000-000000000000}"/>
+          </ac:spMkLst>
+        </pc:spChg>
+        <pc:spChg chg="mod">
+          <ac:chgData name="Zonghua Gu" userId="9a7e1853e1951ef5" providerId="LiveId" clId="{CF1FAA12-072C-4ED5-BA76-0FFFAEFDB88A}" dt="2025-10-22T00:49:15.188" v="4257" actId="20577"/>
+          <ac:spMkLst>
+            <pc:docMk/>
+            <pc:sldMk cId="802972020" sldId="365"/>
+            <ac:spMk id="4" creationId="{00000000-0000-0000-0000-000000000000}"/>
+          </ac:spMkLst>
+        </pc:spChg>
+      </pc:sldChg>
+      <pc:sldChg chg="modSp mod">
+        <pc:chgData name="Zonghua Gu" userId="9a7e1853e1951ef5" providerId="LiveId" clId="{CF1FAA12-072C-4ED5-BA76-0FFFAEFDB88A}" dt="2025-10-22T00:49:50.613" v="4267" actId="20577"/>
+        <pc:sldMkLst>
+          <pc:docMk/>
+          <pc:sldMk cId="415260018" sldId="366"/>
+        </pc:sldMkLst>
+        <pc:spChg chg="mod">
+          <ac:chgData name="Zonghua Gu" userId="9a7e1853e1951ef5" providerId="LiveId" clId="{CF1FAA12-072C-4ED5-BA76-0FFFAEFDB88A}" dt="2025-10-22T00:49:30.285" v="4264" actId="20577"/>
+          <ac:spMkLst>
+            <pc:docMk/>
+            <pc:sldMk cId="415260018" sldId="366"/>
+            <ac:spMk id="2" creationId="{00000000-0000-0000-0000-000000000000}"/>
+          </ac:spMkLst>
+        </pc:spChg>
+        <pc:spChg chg="mod">
+          <ac:chgData name="Zonghua Gu" userId="9a7e1853e1951ef5" providerId="LiveId" clId="{CF1FAA12-072C-4ED5-BA76-0FFFAEFDB88A}" dt="2025-10-22T00:49:50.613" v="4267" actId="20577"/>
+          <ac:spMkLst>
+            <pc:docMk/>
+            <pc:sldMk cId="415260018" sldId="366"/>
+            <ac:spMk id="4" creationId="{00000000-0000-0000-0000-000000000000}"/>
+          </ac:spMkLst>
+        </pc:spChg>
+      </pc:sldChg>
+      <pc:sldChg chg="modSp mod">
+        <pc:chgData name="Zonghua Gu" userId="9a7e1853e1951ef5" providerId="LiveId" clId="{CF1FAA12-072C-4ED5-BA76-0FFFAEFDB88A}" dt="2025-10-22T00:52:02.093" v="4312" actId="20577"/>
+        <pc:sldMkLst>
+          <pc:docMk/>
+          <pc:sldMk cId="1910717593" sldId="367"/>
+        </pc:sldMkLst>
+        <pc:spChg chg="mod">
+          <ac:chgData name="Zonghua Gu" userId="9a7e1853e1951ef5" providerId="LiveId" clId="{CF1FAA12-072C-4ED5-BA76-0FFFAEFDB88A}" dt="2025-10-22T00:52:02.093" v="4312" actId="20577"/>
+          <ac:spMkLst>
+            <pc:docMk/>
+            <pc:sldMk cId="1910717593" sldId="367"/>
+            <ac:spMk id="9" creationId="{78DA596E-85CA-C0C6-85A8-74A98C3DFFDB}"/>
+          </ac:spMkLst>
+        </pc:spChg>
+      </pc:sldChg>
+      <pc:sldChg chg="modSp mod">
+        <pc:chgData name="Zonghua Gu" userId="9a7e1853e1951ef5" providerId="LiveId" clId="{CF1FAA12-072C-4ED5-BA76-0FFFAEFDB88A}" dt="2025-10-22T00:52:11.817" v="4319" actId="20577"/>
         <pc:sldMkLst>
           <pc:docMk/>
           <pc:sldMk cId="3116329460" sldId="368"/>
         </pc:sldMkLst>
+        <pc:spChg chg="mod">
+          <ac:chgData name="Zonghua Gu" userId="9a7e1853e1951ef5" providerId="LiveId" clId="{CF1FAA12-072C-4ED5-BA76-0FFFAEFDB88A}" dt="2025-10-22T00:52:11.817" v="4319" actId="20577"/>
+          <ac:spMkLst>
+            <pc:docMk/>
+            <pc:sldMk cId="3116329460" sldId="368"/>
+            <ac:spMk id="2" creationId="{00000000-0000-0000-0000-000000000000}"/>
+          </ac:spMkLst>
+        </pc:spChg>
         <pc:spChg chg="mod">
           <ac:chgData name="Zonghua Gu" userId="9a7e1853e1951ef5" providerId="LiveId" clId="{CF1FAA12-072C-4ED5-BA76-0FFFAEFDB88A}" dt="2025-10-21T22:27:40.768" v="2971" actId="20577"/>
           <ac:spMkLst>
@@ -260,13 +451,44 @@
         </pc:spChg>
       </pc:sldChg>
       <pc:sldChg chg="modSp mod">
-        <pc:chgData name="Zonghua Gu" userId="9a7e1853e1951ef5" providerId="LiveId" clId="{CF1FAA12-072C-4ED5-BA76-0FFFAEFDB88A}" dt="2025-10-21T22:22:04.343" v="2923" actId="20577"/>
+        <pc:chgData name="Zonghua Gu" userId="9a7e1853e1951ef5" providerId="LiveId" clId="{CF1FAA12-072C-4ED5-BA76-0FFFAEFDB88A}" dt="2025-10-22T00:51:51.924" v="4307" actId="20577"/>
+        <pc:sldMkLst>
+          <pc:docMk/>
+          <pc:sldMk cId="1545068738" sldId="369"/>
+        </pc:sldMkLst>
+        <pc:spChg chg="mod">
+          <ac:chgData name="Zonghua Gu" userId="9a7e1853e1951ef5" providerId="LiveId" clId="{CF1FAA12-072C-4ED5-BA76-0FFFAEFDB88A}" dt="2025-10-22T00:51:51.924" v="4307" actId="20577"/>
+          <ac:spMkLst>
+            <pc:docMk/>
+            <pc:sldMk cId="1545068738" sldId="369"/>
+            <ac:spMk id="2" creationId="{00000000-0000-0000-0000-000000000000}"/>
+          </ac:spMkLst>
+        </pc:spChg>
+        <pc:spChg chg="mod">
+          <ac:chgData name="Zonghua Gu" userId="9a7e1853e1951ef5" providerId="LiveId" clId="{CF1FAA12-072C-4ED5-BA76-0FFFAEFDB88A}" dt="2025-10-22T00:47:47.373" v="4250" actId="20577"/>
+          <ac:spMkLst>
+            <pc:docMk/>
+            <pc:sldMk cId="1545068738" sldId="369"/>
+            <ac:spMk id="4" creationId="{00000000-0000-0000-0000-000000000000}"/>
+          </ac:spMkLst>
+        </pc:spChg>
+      </pc:sldChg>
+      <pc:sldChg chg="modSp mod">
+        <pc:chgData name="Zonghua Gu" userId="9a7e1853e1951ef5" providerId="LiveId" clId="{CF1FAA12-072C-4ED5-BA76-0FFFAEFDB88A}" dt="2025-10-22T00:51:56.385" v="4311" actId="20577"/>
         <pc:sldMkLst>
           <pc:docMk/>
           <pc:sldMk cId="598515287" sldId="370"/>
         </pc:sldMkLst>
         <pc:spChg chg="mod">
-          <ac:chgData name="Zonghua Gu" userId="9a7e1853e1951ef5" providerId="LiveId" clId="{CF1FAA12-072C-4ED5-BA76-0FFFAEFDB88A}" dt="2025-10-21T22:22:04.343" v="2923" actId="20577"/>
+          <ac:chgData name="Zonghua Gu" userId="9a7e1853e1951ef5" providerId="LiveId" clId="{CF1FAA12-072C-4ED5-BA76-0FFFAEFDB88A}" dt="2025-10-22T00:51:56.385" v="4311" actId="20577"/>
+          <ac:spMkLst>
+            <pc:docMk/>
+            <pc:sldMk cId="598515287" sldId="370"/>
+            <ac:spMk id="2" creationId="{00000000-0000-0000-0000-000000000000}"/>
+          </ac:spMkLst>
+        </pc:spChg>
+        <pc:spChg chg="mod">
+          <ac:chgData name="Zonghua Gu" userId="9a7e1853e1951ef5" providerId="LiveId" clId="{CF1FAA12-072C-4ED5-BA76-0FFFAEFDB88A}" dt="2025-10-22T00:48:09.984" v="4254" actId="20577"/>
           <ac:spMkLst>
             <pc:docMk/>
             <pc:sldMk cId="598515287" sldId="370"/>
@@ -274,12 +496,20 @@
           </ac:spMkLst>
         </pc:spChg>
       </pc:sldChg>
-      <pc:sldChg chg="add del">
-        <pc:chgData name="Zonghua Gu" userId="9a7e1853e1951ef5" providerId="LiveId" clId="{CF1FAA12-072C-4ED5-BA76-0FFFAEFDB88A}" dt="2025-09-24T21:50:44.726" v="623"/>
+      <pc:sldChg chg="addSp modSp add del">
+        <pc:chgData name="Zonghua Gu" userId="9a7e1853e1951ef5" providerId="LiveId" clId="{CF1FAA12-072C-4ED5-BA76-0FFFAEFDB88A}" dt="2025-10-22T00:52:43.400" v="4320"/>
         <pc:sldMkLst>
           <pc:docMk/>
           <pc:sldMk cId="146821145" sldId="495"/>
         </pc:sldMkLst>
+        <pc:spChg chg="add mod">
+          <ac:chgData name="Zonghua Gu" userId="9a7e1853e1951ef5" providerId="LiveId" clId="{CF1FAA12-072C-4ED5-BA76-0FFFAEFDB88A}" dt="2025-10-22T00:52:43.400" v="4320"/>
+          <ac:spMkLst>
+            <pc:docMk/>
+            <pc:sldMk cId="146821145" sldId="495"/>
+            <ac:spMk id="4" creationId="{FA6A14B0-92BB-D509-5DE4-9E034654971E}"/>
+          </ac:spMkLst>
+        </pc:spChg>
       </pc:sldChg>
       <pc:sldChg chg="addSp delSp modSp add del mod modTransition modAnim">
         <pc:chgData name="Zonghua Gu" userId="9a7e1853e1951ef5" providerId="LiveId" clId="{CF1FAA12-072C-4ED5-BA76-0FFFAEFDB88A}" dt="2025-10-21T22:25:54.458" v="2937" actId="1076"/>
@@ -287,14 +517,6 @@
           <pc:docMk/>
           <pc:sldMk cId="1864663475" sldId="774"/>
         </pc:sldMkLst>
-        <pc:spChg chg="mod">
-          <ac:chgData name="Zonghua Gu" userId="9a7e1853e1951ef5" providerId="LiveId" clId="{CF1FAA12-072C-4ED5-BA76-0FFFAEFDB88A}" dt="2025-09-21T21:00:43.715" v="614" actId="1076"/>
-          <ac:spMkLst>
-            <pc:docMk/>
-            <pc:sldMk cId="1864663475" sldId="774"/>
-            <ac:spMk id="6" creationId="{9847AA0A-7964-4433-C181-1EB7B5E48F3F}"/>
-          </ac:spMkLst>
-        </pc:spChg>
         <pc:spChg chg="add mod">
           <ac:chgData name="Zonghua Gu" userId="9a7e1853e1951ef5" providerId="LiveId" clId="{CF1FAA12-072C-4ED5-BA76-0FFFAEFDB88A}" dt="2025-10-21T22:25:51.120" v="2936" actId="1076"/>
           <ac:spMkLst>
@@ -502,7 +724,7 @@
         </pc:graphicFrameChg>
       </pc:sldChg>
       <pc:sldChg chg="modSp add mod modNotesTx">
-        <pc:chgData name="Zonghua Gu" userId="9a7e1853e1951ef5" providerId="LiveId" clId="{CF1FAA12-072C-4ED5-BA76-0FFFAEFDB88A}" dt="2025-09-25T21:58:48.416" v="1249" actId="20577"/>
+        <pc:chgData name="Zonghua Gu" userId="9a7e1853e1951ef5" providerId="LiveId" clId="{CF1FAA12-072C-4ED5-BA76-0FFFAEFDB88A}" dt="2025-10-22T00:15:46.837" v="4015" actId="20577"/>
         <pc:sldMkLst>
           <pc:docMk/>
           <pc:sldMk cId="2882502133" sldId="804"/>
@@ -516,7 +738,7 @@
           </ac:spMkLst>
         </pc:spChg>
         <pc:spChg chg="mod">
-          <ac:chgData name="Zonghua Gu" userId="9a7e1853e1951ef5" providerId="LiveId" clId="{CF1FAA12-072C-4ED5-BA76-0FFFAEFDB88A}" dt="2025-09-25T21:51:57.726" v="1226" actId="6549"/>
+          <ac:chgData name="Zonghua Gu" userId="9a7e1853e1951ef5" providerId="LiveId" clId="{CF1FAA12-072C-4ED5-BA76-0FFFAEFDB88A}" dt="2025-10-22T00:15:46.837" v="4015" actId="20577"/>
           <ac:spMkLst>
             <pc:docMk/>
             <pc:sldMk cId="2882502133" sldId="804"/>
@@ -666,8 +888,8 @@
           </ac:graphicFrameMkLst>
         </pc:graphicFrameChg>
       </pc:sldChg>
-      <pc:sldChg chg="delSp modSp add mod">
-        <pc:chgData name="Zonghua Gu" userId="9a7e1853e1951ef5" providerId="LiveId" clId="{CF1FAA12-072C-4ED5-BA76-0FFFAEFDB88A}" dt="2025-10-08T01:29:45.447" v="1329" actId="21"/>
+      <pc:sldChg chg="delSp modSp add del mod">
+        <pc:chgData name="Zonghua Gu" userId="9a7e1853e1951ef5" providerId="LiveId" clId="{CF1FAA12-072C-4ED5-BA76-0FFFAEFDB88A}" dt="2025-10-21T23:51:15.209" v="3756" actId="47"/>
         <pc:sldMkLst>
           <pc:docMk/>
           <pc:sldMk cId="1650360982" sldId="808"/>
@@ -713,13 +935,13 @@
         </pc:graphicFrameChg>
       </pc:sldChg>
       <pc:sldChg chg="addSp delSp modSp add mod">
-        <pc:chgData name="Zonghua Gu" userId="9a7e1853e1951ef5" providerId="LiveId" clId="{CF1FAA12-072C-4ED5-BA76-0FFFAEFDB88A}" dt="2025-10-08T01:55:37.750" v="1664" actId="20577"/>
+        <pc:chgData name="Zonghua Gu" userId="9a7e1853e1951ef5" providerId="LiveId" clId="{CF1FAA12-072C-4ED5-BA76-0FFFAEFDB88A}" dt="2025-10-22T00:00:36.454" v="3908" actId="20577"/>
         <pc:sldMkLst>
           <pc:docMk/>
           <pc:sldMk cId="2957949268" sldId="811"/>
         </pc:sldMkLst>
         <pc:spChg chg="mod">
-          <ac:chgData name="Zonghua Gu" userId="9a7e1853e1951ef5" providerId="LiveId" clId="{CF1FAA12-072C-4ED5-BA76-0FFFAEFDB88A}" dt="2025-10-08T01:55:37.750" v="1664" actId="20577"/>
+          <ac:chgData name="Zonghua Gu" userId="9a7e1853e1951ef5" providerId="LiveId" clId="{CF1FAA12-072C-4ED5-BA76-0FFFAEFDB88A}" dt="2025-10-22T00:00:36.454" v="3908" actId="20577"/>
           <ac:spMkLst>
             <pc:docMk/>
             <pc:sldMk cId="2957949268" sldId="811"/>
@@ -744,13 +966,13 @@
         </pc:graphicFrameChg>
       </pc:sldChg>
       <pc:sldChg chg="addSp delSp modSp add mod">
-        <pc:chgData name="Zonghua Gu" userId="9a7e1853e1951ef5" providerId="LiveId" clId="{CF1FAA12-072C-4ED5-BA76-0FFFAEFDB88A}" dt="2025-10-08T01:55:53.918" v="1670" actId="20577"/>
+        <pc:chgData name="Zonghua Gu" userId="9a7e1853e1951ef5" providerId="LiveId" clId="{CF1FAA12-072C-4ED5-BA76-0FFFAEFDB88A}" dt="2025-10-22T00:00:39.797" v="3913" actId="20577"/>
         <pc:sldMkLst>
           <pc:docMk/>
           <pc:sldMk cId="195030017" sldId="812"/>
         </pc:sldMkLst>
         <pc:spChg chg="mod">
-          <ac:chgData name="Zonghua Gu" userId="9a7e1853e1951ef5" providerId="LiveId" clId="{CF1FAA12-072C-4ED5-BA76-0FFFAEFDB88A}" dt="2025-10-08T01:55:53.918" v="1670" actId="20577"/>
+          <ac:chgData name="Zonghua Gu" userId="9a7e1853e1951ef5" providerId="LiveId" clId="{CF1FAA12-072C-4ED5-BA76-0FFFAEFDB88A}" dt="2025-10-22T00:00:39.797" v="3913" actId="20577"/>
           <ac:spMkLst>
             <pc:docMk/>
             <pc:sldMk cId="195030017" sldId="812"/>
@@ -758,12 +980,20 @@
           </ac:spMkLst>
         </pc:spChg>
       </pc:sldChg>
-      <pc:sldChg chg="add">
-        <pc:chgData name="Zonghua Gu" userId="9a7e1853e1951ef5" providerId="LiveId" clId="{CF1FAA12-072C-4ED5-BA76-0FFFAEFDB88A}" dt="2025-10-08T02:01:36.758" v="1672"/>
+      <pc:sldChg chg="modSp add mod">
+        <pc:chgData name="Zonghua Gu" userId="9a7e1853e1951ef5" providerId="LiveId" clId="{CF1FAA12-072C-4ED5-BA76-0FFFAEFDB88A}" dt="2025-10-22T00:00:29.660" v="3903" actId="20577"/>
         <pc:sldMkLst>
           <pc:docMk/>
           <pc:sldMk cId="1716263769" sldId="813"/>
         </pc:sldMkLst>
+        <pc:spChg chg="mod">
+          <ac:chgData name="Zonghua Gu" userId="9a7e1853e1951ef5" providerId="LiveId" clId="{CF1FAA12-072C-4ED5-BA76-0FFFAEFDB88A}" dt="2025-10-22T00:00:29.660" v="3903" actId="20577"/>
+          <ac:spMkLst>
+            <pc:docMk/>
+            <pc:sldMk cId="1716263769" sldId="813"/>
+            <ac:spMk id="4" creationId="{2E30BEB6-14A6-7DA1-64FA-D0E05B682530}"/>
+          </ac:spMkLst>
+        </pc:spChg>
       </pc:sldChg>
       <pc:sldChg chg="addSp delSp modSp new del mod">
         <pc:chgData name="Zonghua Gu" userId="9a7e1853e1951ef5" providerId="LiveId" clId="{CF1FAA12-072C-4ED5-BA76-0FFFAEFDB88A}" dt="2025-10-21T19:27:16.819" v="2452" actId="47"/>
@@ -773,13 +1003,13 @@
         </pc:sldMkLst>
       </pc:sldChg>
       <pc:sldChg chg="addSp delSp modSp new mod">
-        <pc:chgData name="Zonghua Gu" userId="9a7e1853e1951ef5" providerId="LiveId" clId="{CF1FAA12-072C-4ED5-BA76-0FFFAEFDB88A}" dt="2025-10-21T20:49:59.856" v="2461" actId="1076"/>
+        <pc:chgData name="Zonghua Gu" userId="9a7e1853e1951ef5" providerId="LiveId" clId="{CF1FAA12-072C-4ED5-BA76-0FFFAEFDB88A}" dt="2025-10-22T00:50:26.032" v="4275" actId="20577"/>
         <pc:sldMkLst>
           <pc:docMk/>
           <pc:sldMk cId="811401925" sldId="816"/>
         </pc:sldMkLst>
         <pc:spChg chg="mod">
-          <ac:chgData name="Zonghua Gu" userId="9a7e1853e1951ef5" providerId="LiveId" clId="{CF1FAA12-072C-4ED5-BA76-0FFFAEFDB88A}" dt="2025-10-21T19:27:11.773" v="2451" actId="20577"/>
+          <ac:chgData name="Zonghua Gu" userId="9a7e1853e1951ef5" providerId="LiveId" clId="{CF1FAA12-072C-4ED5-BA76-0FFFAEFDB88A}" dt="2025-10-22T00:50:15.019" v="4269" actId="20577"/>
           <ac:spMkLst>
             <pc:docMk/>
             <pc:sldMk cId="811401925" sldId="816"/>
@@ -803,7 +1033,7 @@
           </ac:spMkLst>
         </pc:spChg>
         <pc:spChg chg="add mod">
-          <ac:chgData name="Zonghua Gu" userId="9a7e1853e1951ef5" providerId="LiveId" clId="{CF1FAA12-072C-4ED5-BA76-0FFFAEFDB88A}" dt="2025-10-21T20:49:59.856" v="2461" actId="1076"/>
+          <ac:chgData name="Zonghua Gu" userId="9a7e1853e1951ef5" providerId="LiveId" clId="{CF1FAA12-072C-4ED5-BA76-0FFFAEFDB88A}" dt="2025-10-22T00:50:26.032" v="4275" actId="20577"/>
           <ac:spMkLst>
             <pc:docMk/>
             <pc:sldMk cId="811401925" sldId="816"/>
@@ -811,7 +1041,7 @@
           </ac:spMkLst>
         </pc:spChg>
         <pc:spChg chg="add mod">
-          <ac:chgData name="Zonghua Gu" userId="9a7e1853e1951ef5" providerId="LiveId" clId="{CF1FAA12-072C-4ED5-BA76-0FFFAEFDB88A}" dt="2025-10-21T19:27:04.038" v="2426" actId="404"/>
+          <ac:chgData name="Zonghua Gu" userId="9a7e1853e1951ef5" providerId="LiveId" clId="{CF1FAA12-072C-4ED5-BA76-0FFFAEFDB88A}" dt="2025-10-22T00:16:42.106" v="4044" actId="27636"/>
           <ac:spMkLst>
             <pc:docMk/>
             <pc:sldMk cId="811401925" sldId="816"/>
@@ -860,13 +1090,13 @@
         </pc:picChg>
       </pc:sldChg>
       <pc:sldChg chg="addSp delSp modSp add mod">
-        <pc:chgData name="Zonghua Gu" userId="9a7e1853e1951ef5" providerId="LiveId" clId="{CF1FAA12-072C-4ED5-BA76-0FFFAEFDB88A}" dt="2025-10-21T20:58:35.736" v="2679" actId="478"/>
+        <pc:chgData name="Zonghua Gu" userId="9a7e1853e1951ef5" providerId="LiveId" clId="{CF1FAA12-072C-4ED5-BA76-0FFFAEFDB88A}" dt="2025-10-22T00:50:29.405" v="4277" actId="20577"/>
         <pc:sldMkLst>
           <pc:docMk/>
           <pc:sldMk cId="436543705" sldId="817"/>
         </pc:sldMkLst>
         <pc:spChg chg="mod">
-          <ac:chgData name="Zonghua Gu" userId="9a7e1853e1951ef5" providerId="LiveId" clId="{CF1FAA12-072C-4ED5-BA76-0FFFAEFDB88A}" dt="2025-10-21T20:51:22.513" v="2465" actId="404"/>
+          <ac:chgData name="Zonghua Gu" userId="9a7e1853e1951ef5" providerId="LiveId" clId="{CF1FAA12-072C-4ED5-BA76-0FFFAEFDB88A}" dt="2025-10-22T00:50:29.405" v="4277" actId="20577"/>
           <ac:spMkLst>
             <pc:docMk/>
             <pc:sldMk cId="436543705" sldId="817"/>
@@ -890,7 +1120,7 @@
           </ac:spMkLst>
         </pc:spChg>
         <pc:spChg chg="mod">
-          <ac:chgData name="Zonghua Gu" userId="9a7e1853e1951ef5" providerId="LiveId" clId="{CF1FAA12-072C-4ED5-BA76-0FFFAEFDB88A}" dt="2025-10-21T20:58:02.995" v="2678" actId="20577"/>
+          <ac:chgData name="Zonghua Gu" userId="9a7e1853e1951ef5" providerId="LiveId" clId="{CF1FAA12-072C-4ED5-BA76-0FFFAEFDB88A}" dt="2025-10-22T00:13:38.571" v="3966" actId="27636"/>
           <ac:spMkLst>
             <pc:docMk/>
             <pc:sldMk cId="436543705" sldId="817"/>
@@ -930,13 +1160,13 @@
         </pc:spChg>
       </pc:sldChg>
       <pc:sldChg chg="addSp delSp modSp new mod">
-        <pc:chgData name="Zonghua Gu" userId="9a7e1853e1951ef5" providerId="LiveId" clId="{CF1FAA12-072C-4ED5-BA76-0FFFAEFDB88A}" dt="2025-10-21T21:56:44.648" v="2918" actId="1076"/>
+        <pc:chgData name="Zonghua Gu" userId="9a7e1853e1951ef5" providerId="LiveId" clId="{CF1FAA12-072C-4ED5-BA76-0FFFAEFDB88A}" dt="2025-10-22T00:50:33.039" v="4279" actId="20577"/>
         <pc:sldMkLst>
           <pc:docMk/>
           <pc:sldMk cId="3488595267" sldId="818"/>
         </pc:sldMkLst>
         <pc:spChg chg="mod">
-          <ac:chgData name="Zonghua Gu" userId="9a7e1853e1951ef5" providerId="LiveId" clId="{CF1FAA12-072C-4ED5-BA76-0FFFAEFDB88A}" dt="2025-10-21T21:51:52.839" v="2818" actId="20577"/>
+          <ac:chgData name="Zonghua Gu" userId="9a7e1853e1951ef5" providerId="LiveId" clId="{CF1FAA12-072C-4ED5-BA76-0FFFAEFDB88A}" dt="2025-10-22T00:50:33.039" v="4279" actId="20577"/>
           <ac:spMkLst>
             <pc:docMk/>
             <pc:sldMk cId="3488595267" sldId="818"/>
@@ -944,7 +1174,7 @@
           </ac:spMkLst>
         </pc:spChg>
         <pc:spChg chg="mod">
-          <ac:chgData name="Zonghua Gu" userId="9a7e1853e1951ef5" providerId="LiveId" clId="{CF1FAA12-072C-4ED5-BA76-0FFFAEFDB88A}" dt="2025-10-21T21:51:37.238" v="2785" actId="14100"/>
+          <ac:chgData name="Zonghua Gu" userId="9a7e1853e1951ef5" providerId="LiveId" clId="{CF1FAA12-072C-4ED5-BA76-0FFFAEFDB88A}" dt="2025-10-22T00:42:27.661" v="4190" actId="27636"/>
           <ac:spMkLst>
             <pc:docMk/>
             <pc:sldMk cId="3488595267" sldId="818"/>
@@ -952,7 +1182,7 @@
           </ac:spMkLst>
         </pc:spChg>
         <pc:spChg chg="add mod">
-          <ac:chgData name="Zonghua Gu" userId="9a7e1853e1951ef5" providerId="LiveId" clId="{CF1FAA12-072C-4ED5-BA76-0FFFAEFDB88A}" dt="2025-10-21T21:52:01.082" v="2820" actId="1076"/>
+          <ac:chgData name="Zonghua Gu" userId="9a7e1853e1951ef5" providerId="LiveId" clId="{CF1FAA12-072C-4ED5-BA76-0FFFAEFDB88A}" dt="2025-10-21T23:58:56.962" v="3893" actId="20577"/>
           <ac:spMkLst>
             <pc:docMk/>
             <pc:sldMk cId="3488595267" sldId="818"/>
@@ -976,22 +1206,38 @@
           </ac:graphicFrameMkLst>
         </pc:graphicFrameChg>
         <pc:graphicFrameChg chg="add mod modGraphic">
-          <ac:chgData name="Zonghua Gu" userId="9a7e1853e1951ef5" providerId="LiveId" clId="{CF1FAA12-072C-4ED5-BA76-0FFFAEFDB88A}" dt="2025-10-21T21:56:44.648" v="2918" actId="1076"/>
+          <ac:chgData name="Zonghua Gu" userId="9a7e1853e1951ef5" providerId="LiveId" clId="{CF1FAA12-072C-4ED5-BA76-0FFFAEFDB88A}" dt="2025-10-22T00:31:09.285" v="4102" actId="20577"/>
           <ac:graphicFrameMkLst>
             <pc:docMk/>
             <pc:sldMk cId="3488595267" sldId="818"/>
             <ac:graphicFrameMk id="8" creationId="{C7C14E0C-8BA7-B240-2E5F-B804E09539CB}"/>
           </ac:graphicFrameMkLst>
         </pc:graphicFrameChg>
+        <pc:picChg chg="add del mod">
+          <ac:chgData name="Zonghua Gu" userId="9a7e1853e1951ef5" providerId="LiveId" clId="{CF1FAA12-072C-4ED5-BA76-0FFFAEFDB88A}" dt="2025-10-22T00:01:50.185" v="3914" actId="478"/>
+          <ac:picMkLst>
+            <pc:docMk/>
+            <pc:sldMk cId="3488595267" sldId="818"/>
+            <ac:picMk id="9" creationId="{5459461E-271B-8903-4B13-098AE5E38C33}"/>
+          </ac:picMkLst>
+        </pc:picChg>
+        <pc:picChg chg="add del mod">
+          <ac:chgData name="Zonghua Gu" userId="9a7e1853e1951ef5" providerId="LiveId" clId="{CF1FAA12-072C-4ED5-BA76-0FFFAEFDB88A}" dt="2025-10-22T00:41:12.619" v="4186" actId="478"/>
+          <ac:picMkLst>
+            <pc:docMk/>
+            <pc:sldMk cId="3488595267" sldId="818"/>
+            <ac:picMk id="11" creationId="{8D4D34D7-97B7-497F-40CB-021EF1EF9AAB}"/>
+          </ac:picMkLst>
+        </pc:picChg>
       </pc:sldChg>
-      <pc:sldChg chg="addSp delSp modSp add mod ord">
-        <pc:chgData name="Zonghua Gu" userId="9a7e1853e1951ef5" providerId="LiveId" clId="{CF1FAA12-072C-4ED5-BA76-0FFFAEFDB88A}" dt="2025-10-21T23:29:49.656" v="3641" actId="1036"/>
+      <pc:sldChg chg="addSp delSp modSp add mod ord modNotesTx">
+        <pc:chgData name="Zonghua Gu" userId="9a7e1853e1951ef5" providerId="LiveId" clId="{CF1FAA12-072C-4ED5-BA76-0FFFAEFDB88A}" dt="2025-10-22T00:55:47.841" v="4329" actId="478"/>
         <pc:sldMkLst>
           <pc:docMk/>
           <pc:sldMk cId="3653550031" sldId="819"/>
         </pc:sldMkLst>
         <pc:spChg chg="mod">
-          <ac:chgData name="Zonghua Gu" userId="9a7e1853e1951ef5" providerId="LiveId" clId="{CF1FAA12-072C-4ED5-BA76-0FFFAEFDB88A}" dt="2025-10-21T21:52:07.667" v="2826" actId="20577"/>
+          <ac:chgData name="Zonghua Gu" userId="9a7e1853e1951ef5" providerId="LiveId" clId="{CF1FAA12-072C-4ED5-BA76-0FFFAEFDB88A}" dt="2025-10-22T00:50:35.944" v="4281" actId="20577"/>
           <ac:spMkLst>
             <pc:docMk/>
             <pc:sldMk cId="3653550031" sldId="819"/>
@@ -999,15 +1245,15 @@
           </ac:spMkLst>
         </pc:spChg>
         <pc:spChg chg="mod">
-          <ac:chgData name="Zonghua Gu" userId="9a7e1853e1951ef5" providerId="LiveId" clId="{CF1FAA12-072C-4ED5-BA76-0FFFAEFDB88A}" dt="2025-10-21T23:19:52.814" v="3572" actId="14100"/>
+          <ac:chgData name="Zonghua Gu" userId="9a7e1853e1951ef5" providerId="LiveId" clId="{CF1FAA12-072C-4ED5-BA76-0FFFAEFDB88A}" dt="2025-10-22T00:43:12.498" v="4236" actId="20577"/>
           <ac:spMkLst>
             <pc:docMk/>
             <pc:sldMk cId="3653550031" sldId="819"/>
             <ac:spMk id="4" creationId="{47E16147-F6FF-DA8E-A54B-3AD6FD9BC42D}"/>
           </ac:spMkLst>
         </pc:spChg>
-        <pc:spChg chg="add mod ord">
-          <ac:chgData name="Zonghua Gu" userId="9a7e1853e1951ef5" providerId="LiveId" clId="{CF1FAA12-072C-4ED5-BA76-0FFFAEFDB88A}" dt="2025-10-21T23:29:36.055" v="3618" actId="1036"/>
+        <pc:spChg chg="add del mod ord">
+          <ac:chgData name="Zonghua Gu" userId="9a7e1853e1951ef5" providerId="LiveId" clId="{CF1FAA12-072C-4ED5-BA76-0FFFAEFDB88A}" dt="2025-10-22T00:03:01.548" v="3943" actId="478"/>
           <ac:spMkLst>
             <pc:docMk/>
             <pc:sldMk cId="3653550031" sldId="819"/>
@@ -1030,25 +1276,97 @@
             <ac:spMk id="5" creationId="{7B6009B9-DB25-9D67-FB29-210945594320}"/>
           </ac:spMkLst>
         </pc:spChg>
+        <pc:spChg chg="add mod">
+          <ac:chgData name="Zonghua Gu" userId="9a7e1853e1951ef5" providerId="LiveId" clId="{CF1FAA12-072C-4ED5-BA76-0FFFAEFDB88A}" dt="2025-10-22T00:01:56.039" v="3916"/>
+          <ac:spMkLst>
+            <pc:docMk/>
+            <pc:sldMk cId="3653550031" sldId="819"/>
+            <ac:spMk id="12" creationId="{40CDF3CF-5957-FE74-D9E1-DFB62DA656B4}"/>
+          </ac:spMkLst>
+        </pc:spChg>
+        <pc:spChg chg="add mod ord">
+          <ac:chgData name="Zonghua Gu" userId="9a7e1853e1951ef5" providerId="LiveId" clId="{CF1FAA12-072C-4ED5-BA76-0FFFAEFDB88A}" dt="2025-10-22T00:03:10.690" v="3945" actId="167"/>
+          <ac:spMkLst>
+            <pc:docMk/>
+            <pc:sldMk cId="3653550031" sldId="819"/>
+            <ac:spMk id="13" creationId="{03AB1D5E-EA8C-DC0E-3504-787C31C3FF4B}"/>
+          </ac:spMkLst>
+        </pc:spChg>
         <pc:graphicFrameChg chg="mod modGraphic">
-          <ac:chgData name="Zonghua Gu" userId="9a7e1853e1951ef5" providerId="LiveId" clId="{CF1FAA12-072C-4ED5-BA76-0FFFAEFDB88A}" dt="2025-10-21T23:29:49.656" v="3641" actId="1036"/>
+          <ac:chgData name="Zonghua Gu" userId="9a7e1853e1951ef5" providerId="LiveId" clId="{CF1FAA12-072C-4ED5-BA76-0FFFAEFDB88A}" dt="2025-10-22T00:08:51.767" v="3953"/>
           <ac:graphicFrameMkLst>
             <pc:docMk/>
             <pc:sldMk cId="3653550031" sldId="819"/>
             <ac:graphicFrameMk id="6" creationId="{20BD6E28-A5B2-15E2-4657-69B74D865AD1}"/>
           </ac:graphicFrameMkLst>
         </pc:graphicFrameChg>
-        <pc:graphicFrameChg chg="add mod">
-          <ac:chgData name="Zonghua Gu" userId="9a7e1853e1951ef5" providerId="LiveId" clId="{CF1FAA12-072C-4ED5-BA76-0FFFAEFDB88A}" dt="2025-10-21T23:29:49.656" v="3641" actId="1036"/>
+        <pc:graphicFrameChg chg="add mod modGraphic">
+          <ac:chgData name="Zonghua Gu" userId="9a7e1853e1951ef5" providerId="LiveId" clId="{CF1FAA12-072C-4ED5-BA76-0FFFAEFDB88A}" dt="2025-10-22T00:31:21.462" v="4105" actId="207"/>
           <ac:graphicFrameMkLst>
             <pc:docMk/>
             <pc:sldMk cId="3653550031" sldId="819"/>
             <ac:graphicFrameMk id="7" creationId="{744E2143-7A13-BD9D-79CC-8CEAA8258A28}"/>
           </ac:graphicFrameMkLst>
         </pc:graphicFrameChg>
+        <pc:picChg chg="add del mod">
+          <ac:chgData name="Zonghua Gu" userId="9a7e1853e1951ef5" providerId="LiveId" clId="{CF1FAA12-072C-4ED5-BA76-0FFFAEFDB88A}" dt="2025-10-21T23:43:43.202" v="3684" actId="478"/>
+          <ac:picMkLst>
+            <pc:docMk/>
+            <pc:sldMk cId="3653550031" sldId="819"/>
+            <ac:picMk id="9" creationId="{B7A81C1E-9DA2-159C-A6C4-E613E128BF5E}"/>
+          </ac:picMkLst>
+        </pc:picChg>
+        <pc:picChg chg="add del mod">
+          <ac:chgData name="Zonghua Gu" userId="9a7e1853e1951ef5" providerId="LiveId" clId="{CF1FAA12-072C-4ED5-BA76-0FFFAEFDB88A}" dt="2025-10-21T23:43:41.468" v="3682" actId="478"/>
+          <ac:picMkLst>
+            <pc:docMk/>
+            <pc:sldMk cId="3653550031" sldId="819"/>
+            <ac:picMk id="11" creationId="{E0A0BAC8-10EF-4DCA-78AA-51558855D03D}"/>
+          </ac:picMkLst>
+        </pc:picChg>
+        <pc:picChg chg="add del mod">
+          <ac:chgData name="Zonghua Gu" userId="9a7e1853e1951ef5" providerId="LiveId" clId="{CF1FAA12-072C-4ED5-BA76-0FFFAEFDB88A}" dt="2025-10-22T00:03:32.447" v="3948" actId="478"/>
+          <ac:picMkLst>
+            <pc:docMk/>
+            <pc:sldMk cId="3653550031" sldId="819"/>
+            <ac:picMk id="15" creationId="{6301AA68-0EEC-5B3A-BD9C-E581E69F6978}"/>
+          </ac:picMkLst>
+        </pc:picChg>
+        <pc:picChg chg="add del mod">
+          <ac:chgData name="Zonghua Gu" userId="9a7e1853e1951ef5" providerId="LiveId" clId="{CF1FAA12-072C-4ED5-BA76-0FFFAEFDB88A}" dt="2025-10-22T00:13:09.946" v="3962" actId="478"/>
+          <ac:picMkLst>
+            <pc:docMk/>
+            <pc:sldMk cId="3653550031" sldId="819"/>
+            <ac:picMk id="17" creationId="{CB553775-06AD-B2DD-E814-CD3699CC979E}"/>
+          </ac:picMkLst>
+        </pc:picChg>
+        <pc:picChg chg="add del mod">
+          <ac:chgData name="Zonghua Gu" userId="9a7e1853e1951ef5" providerId="LiveId" clId="{CF1FAA12-072C-4ED5-BA76-0FFFAEFDB88A}" dt="2025-10-22T00:41:11.253" v="4185" actId="478"/>
+          <ac:picMkLst>
+            <pc:docMk/>
+            <pc:sldMk cId="3653550031" sldId="819"/>
+            <ac:picMk id="19" creationId="{827EE029-E925-C0F8-283D-EE5EFECEDB83}"/>
+          </ac:picMkLst>
+        </pc:picChg>
+        <pc:picChg chg="add del">
+          <ac:chgData name="Zonghua Gu" userId="9a7e1853e1951ef5" providerId="LiveId" clId="{CF1FAA12-072C-4ED5-BA76-0FFFAEFDB88A}" dt="2025-10-22T00:42:05.745" v="4188" actId="478"/>
+          <ac:picMkLst>
+            <pc:docMk/>
+            <pc:sldMk cId="3653550031" sldId="819"/>
+            <ac:picMk id="21" creationId="{E225A38F-703A-7096-3943-B0593F0E2F61}"/>
+          </ac:picMkLst>
+        </pc:picChg>
+        <pc:picChg chg="add del mod">
+          <ac:chgData name="Zonghua Gu" userId="9a7e1853e1951ef5" providerId="LiveId" clId="{CF1FAA12-072C-4ED5-BA76-0FFFAEFDB88A}" dt="2025-10-22T00:55:47.841" v="4329" actId="478"/>
+          <ac:picMkLst>
+            <pc:docMk/>
+            <pc:sldMk cId="3653550031" sldId="819"/>
+            <ac:picMk id="23" creationId="{918F0FD2-3EF3-B9B4-9822-DEAC5B387B8D}"/>
+          </ac:picMkLst>
+        </pc:picChg>
       </pc:sldChg>
-      <pc:sldChg chg="addSp delSp modSp new mod">
-        <pc:chgData name="Zonghua Gu" userId="9a7e1853e1951ef5" providerId="LiveId" clId="{CF1FAA12-072C-4ED5-BA76-0FFFAEFDB88A}" dt="2025-10-21T23:30:00.128" v="3643" actId="404"/>
+      <pc:sldChg chg="addSp delSp modSp new mod ord">
+        <pc:chgData name="Zonghua Gu" userId="9a7e1853e1951ef5" providerId="LiveId" clId="{CF1FAA12-072C-4ED5-BA76-0FFFAEFDB88A}" dt="2025-10-22T00:31:49.354" v="4108"/>
         <pc:sldMkLst>
           <pc:docMk/>
           <pc:sldMk cId="606520013" sldId="820"/>
@@ -1170,6 +1488,131 @@
           <pc:docMk/>
           <pc:sldMk cId="1378059341" sldId="821"/>
         </pc:sldMkLst>
+      </pc:sldChg>
+      <pc:sldChg chg="addSp delSp modSp new mod modNotesTx">
+        <pc:chgData name="Zonghua Gu" userId="9a7e1853e1951ef5" providerId="LiveId" clId="{CF1FAA12-072C-4ED5-BA76-0FFFAEFDB88A}" dt="2025-10-22T00:55:18.025" v="4326" actId="113"/>
+        <pc:sldMkLst>
+          <pc:docMk/>
+          <pc:sldMk cId="2270848448" sldId="821"/>
+        </pc:sldMkLst>
+        <pc:spChg chg="del mod">
+          <ac:chgData name="Zonghua Gu" userId="9a7e1853e1951ef5" providerId="LiveId" clId="{CF1FAA12-072C-4ED5-BA76-0FFFAEFDB88A}" dt="2025-10-22T00:36:57.804" v="4120" actId="478"/>
+          <ac:spMkLst>
+            <pc:docMk/>
+            <pc:sldMk cId="2270848448" sldId="821"/>
+            <ac:spMk id="2" creationId="{DDD3CE1C-ED9A-AC1A-9706-EDD008F0CFA3}"/>
+          </ac:spMkLst>
+        </pc:spChg>
+        <pc:spChg chg="mod">
+          <ac:chgData name="Zonghua Gu" userId="9a7e1853e1951ef5" providerId="LiveId" clId="{CF1FAA12-072C-4ED5-BA76-0FFFAEFDB88A}" dt="2025-10-22T00:37:29.537" v="4129" actId="207"/>
+          <ac:spMkLst>
+            <pc:docMk/>
+            <pc:sldMk cId="2270848448" sldId="821"/>
+            <ac:spMk id="4" creationId="{53110734-57D2-2BF2-C541-48EEFD793D20}"/>
+          </ac:spMkLst>
+        </pc:spChg>
+        <pc:spChg chg="add del mod">
+          <ac:chgData name="Zonghua Gu" userId="9a7e1853e1951ef5" providerId="LiveId" clId="{CF1FAA12-072C-4ED5-BA76-0FFFAEFDB88A}" dt="2025-10-22T00:37:00.773" v="4121" actId="478"/>
+          <ac:spMkLst>
+            <pc:docMk/>
+            <pc:sldMk cId="2270848448" sldId="821"/>
+            <ac:spMk id="10" creationId="{E3BBBAAD-10E3-1C32-82DB-8AE62AAF4FC5}"/>
+          </ac:spMkLst>
+        </pc:spChg>
+        <pc:graphicFrameChg chg="add mod modGraphic">
+          <ac:chgData name="Zonghua Gu" userId="9a7e1853e1951ef5" providerId="LiveId" clId="{CF1FAA12-072C-4ED5-BA76-0FFFAEFDB88A}" dt="2025-10-22T00:54:59.287" v="4322"/>
+          <ac:graphicFrameMkLst>
+            <pc:docMk/>
+            <pc:sldMk cId="2270848448" sldId="821"/>
+            <ac:graphicFrameMk id="5" creationId="{AC30E1FB-AD9F-F830-145F-E37C379A0532}"/>
+          </ac:graphicFrameMkLst>
+        </pc:graphicFrameChg>
+        <pc:graphicFrameChg chg="add mod">
+          <ac:chgData name="Zonghua Gu" userId="9a7e1853e1951ef5" providerId="LiveId" clId="{CF1FAA12-072C-4ED5-BA76-0FFFAEFDB88A}" dt="2025-10-22T00:36:37.626" v="4118" actId="1036"/>
+          <ac:graphicFrameMkLst>
+            <pc:docMk/>
+            <pc:sldMk cId="2270848448" sldId="821"/>
+            <ac:graphicFrameMk id="6" creationId="{D224D27B-3F94-7C6B-E7AD-4D1E028E1241}"/>
+          </ac:graphicFrameMkLst>
+        </pc:graphicFrameChg>
+        <pc:picChg chg="add del mod">
+          <ac:chgData name="Zonghua Gu" userId="9a7e1853e1951ef5" providerId="LiveId" clId="{CF1FAA12-072C-4ED5-BA76-0FFFAEFDB88A}" dt="2025-10-22T00:36:17.365" v="4112" actId="478"/>
+          <ac:picMkLst>
+            <pc:docMk/>
+            <pc:sldMk cId="2270848448" sldId="821"/>
+            <ac:picMk id="8" creationId="{0476480D-700B-CE97-2DCA-ECB3461885FC}"/>
+          </ac:picMkLst>
+        </pc:picChg>
+        <pc:picChg chg="add del mod">
+          <ac:chgData name="Zonghua Gu" userId="9a7e1853e1951ef5" providerId="LiveId" clId="{CF1FAA12-072C-4ED5-BA76-0FFFAEFDB88A}" dt="2025-10-22T00:38:40.828" v="4132" actId="478"/>
+          <ac:picMkLst>
+            <pc:docMk/>
+            <pc:sldMk cId="2270848448" sldId="821"/>
+            <ac:picMk id="12" creationId="{F3F8ECEE-5307-61BA-51C8-85CFB6F2A29A}"/>
+          </ac:picMkLst>
+        </pc:picChg>
+      </pc:sldChg>
+      <pc:sldChg chg="modSp new mod">
+        <pc:chgData name="Zonghua Gu" userId="9a7e1853e1951ef5" providerId="LiveId" clId="{CF1FAA12-072C-4ED5-BA76-0FFFAEFDB88A}" dt="2025-10-22T00:29:40.529" v="4065" actId="27636"/>
+        <pc:sldMkLst>
+          <pc:docMk/>
+          <pc:sldMk cId="619272312" sldId="822"/>
+        </pc:sldMkLst>
+        <pc:spChg chg="mod">
+          <ac:chgData name="Zonghua Gu" userId="9a7e1853e1951ef5" providerId="LiveId" clId="{CF1FAA12-072C-4ED5-BA76-0FFFAEFDB88A}" dt="2025-10-22T00:29:40.529" v="4065" actId="27636"/>
+          <ac:spMkLst>
+            <pc:docMk/>
+            <pc:sldMk cId="619272312" sldId="822"/>
+            <ac:spMk id="4" creationId="{49B47C35-C1C8-8BDF-B4B8-1A999EEC4CDA}"/>
+          </ac:spMkLst>
+        </pc:spChg>
+      </pc:sldChg>
+      <pc:sldChg chg="addSp modSp new mod">
+        <pc:chgData name="Zonghua Gu" userId="9a7e1853e1951ef5" providerId="LiveId" clId="{CF1FAA12-072C-4ED5-BA76-0FFFAEFDB88A}" dt="2025-10-22T00:40:12.300" v="4178" actId="20577"/>
+        <pc:sldMkLst>
+          <pc:docMk/>
+          <pc:sldMk cId="357148919" sldId="823"/>
+        </pc:sldMkLst>
+        <pc:spChg chg="mod">
+          <ac:chgData name="Zonghua Gu" userId="9a7e1853e1951ef5" providerId="LiveId" clId="{CF1FAA12-072C-4ED5-BA76-0FFFAEFDB88A}" dt="2025-10-22T00:39:04.918" v="4152" actId="20577"/>
+          <ac:spMkLst>
+            <pc:docMk/>
+            <pc:sldMk cId="357148919" sldId="823"/>
+            <ac:spMk id="2" creationId="{B6A01A4E-B48D-1DBD-A8D9-2E7B56DAED3E}"/>
+          </ac:spMkLst>
+        </pc:spChg>
+        <pc:spChg chg="mod">
+          <ac:chgData name="Zonghua Gu" userId="9a7e1853e1951ef5" providerId="LiveId" clId="{CF1FAA12-072C-4ED5-BA76-0FFFAEFDB88A}" dt="2025-10-22T00:40:12.300" v="4178" actId="20577"/>
+          <ac:spMkLst>
+            <pc:docMk/>
+            <pc:sldMk cId="357148919" sldId="823"/>
+            <ac:spMk id="4" creationId="{92D7924B-1264-801F-B527-B071DE30B0D5}"/>
+          </ac:spMkLst>
+        </pc:spChg>
+        <pc:spChg chg="add mod">
+          <ac:chgData name="Zonghua Gu" userId="9a7e1853e1951ef5" providerId="LiveId" clId="{CF1FAA12-072C-4ED5-BA76-0FFFAEFDB88A}" dt="2025-10-22T00:38:57.480" v="4136"/>
+          <ac:spMkLst>
+            <pc:docMk/>
+            <pc:sldMk cId="357148919" sldId="823"/>
+            <ac:spMk id="5" creationId="{7271186D-05AA-4376-BD30-2CA45FBDA190}"/>
+          </ac:spMkLst>
+        </pc:spChg>
+        <pc:graphicFrameChg chg="add mod">
+          <ac:chgData name="Zonghua Gu" userId="9a7e1853e1951ef5" providerId="LiveId" clId="{CF1FAA12-072C-4ED5-BA76-0FFFAEFDB88A}" dt="2025-10-22T00:38:57.480" v="4136"/>
+          <ac:graphicFrameMkLst>
+            <pc:docMk/>
+            <pc:sldMk cId="357148919" sldId="823"/>
+            <ac:graphicFrameMk id="6" creationId="{7E4F03E2-3309-3F5B-7C2A-81D445DA8BA6}"/>
+          </ac:graphicFrameMkLst>
+        </pc:graphicFrameChg>
+        <pc:graphicFrameChg chg="add mod">
+          <ac:chgData name="Zonghua Gu" userId="9a7e1853e1951ef5" providerId="LiveId" clId="{CF1FAA12-072C-4ED5-BA76-0FFFAEFDB88A}" dt="2025-10-22T00:38:57.480" v="4136"/>
+          <ac:graphicFrameMkLst>
+            <pc:docMk/>
+            <pc:sldMk cId="357148919" sldId="823"/>
+            <ac:graphicFrameMk id="7" creationId="{F05BFDFB-FCA9-9356-1E8B-8D31B2E6CEF7}"/>
+          </ac:graphicFrameMkLst>
+        </pc:graphicFrameChg>
       </pc:sldChg>
     </pc:docChg>
   </pc:docChgLst>
@@ -1783,110 +2226,6 @@
   <p:cSld>
     <p:spTree>
       <p:nvGrpSpPr>
-        <p:cNvPr id="1" name=""/>
-        <p:cNvGrpSpPr/>
-        <p:nvPr/>
-      </p:nvGrpSpPr>
-      <p:grpSpPr>
-        <a:xfrm>
-          <a:off x="0" y="0"/>
-          <a:ext cx="0" cy="0"/>
-          <a:chOff x="0" y="0"/>
-          <a:chExt cx="0" cy="0"/>
-        </a:xfrm>
-      </p:grpSpPr>
-      <p:sp>
-        <p:nvSpPr>
-          <p:cNvPr id="2" name="Slide Image Placeholder 1"/>
-          <p:cNvSpPr>
-            <a:spLocks noGrp="1" noRot="1" noChangeAspect="1"/>
-          </p:cNvSpPr>
-          <p:nvPr>
-            <p:ph type="sldImg"/>
-          </p:nvPr>
-        </p:nvSpPr>
-        <p:spPr/>
-        <p:txBody>
-          <a:bodyPr/>
-          <a:lstStyle/>
-          <a:p>
-            <a:endParaRPr lang="en-US"/>
-          </a:p>
-        </p:txBody>
-      </p:sp>
-      <p:sp>
-        <p:nvSpPr>
-          <p:cNvPr id="3" name="Notes Placeholder 2"/>
-          <p:cNvSpPr>
-            <a:spLocks noGrp="1"/>
-          </p:cNvSpPr>
-          <p:nvPr>
-            <p:ph type="body" idx="1"/>
-          </p:nvPr>
-        </p:nvSpPr>
-        <p:spPr/>
-        <p:txBody>
-          <a:bodyPr/>
-          <a:lstStyle/>
-          <a:p>
-            <a:pPr defTabSz="945658">
-              <a:defRPr/>
-            </a:pPr>
-            <a:r>
-              <a:rPr lang="en-US" dirty="0">
-                <a:solidFill>
-                  <a:prstClr val="black"/>
-                </a:solidFill>
-              </a:rPr>
-              <a:t>Reading the 32-bit word at address 102 spans addresses 102..105, which cross a 4-byte alignment boundary if the bus expects aligned words at multiples of 4 (e.g., aligned words at 100 and 104). Since 102 is misaligned, the access requires two aligned 32-bit bus cycles (one covering 100..103 and one covering 104..107) with the CPU combining bytes</a:t>
-            </a:r>
-          </a:p>
-          <a:p>
-            <a:pPr defTabSz="945658">
-              <a:defRPr/>
-            </a:pPr>
-            <a:r>
-              <a:rPr lang="en-US" dirty="0">
-                <a:solidFill>
-                  <a:prstClr val="black"/>
-                </a:solidFill>
-              </a:rPr>
-              <a:t>Reading a 16-bit halfword at address 102 uses bytes 102..103, which reside within the same aligned 32-bit word (100..103). On a 32-bit bus that supports halfword transfers, this is a single bus cycle</a:t>
-            </a:r>
-          </a:p>
-          <a:p>
-            <a:pPr defTabSz="945658">
-              <a:defRPr/>
-            </a:pPr>
-            <a:endParaRPr lang="en-US" dirty="0">
-              <a:solidFill>
-                <a:prstClr val="black"/>
-              </a:solidFill>
-            </a:endParaRPr>
-          </a:p>
-          <a:p>
-            <a:endParaRPr lang="en-US" dirty="0"/>
-          </a:p>
-        </p:txBody>
-      </p:sp>
-    </p:spTree>
-    <p:extLst>
-      <p:ext uri="{BB962C8B-B14F-4D97-AF65-F5344CB8AC3E}">
-        <p14:creationId xmlns:p14="http://schemas.microsoft.com/office/powerpoint/2010/main" val="2152255892"/>
-      </p:ext>
-    </p:extLst>
-  </p:cSld>
-  <p:clrMapOvr>
-    <a:masterClrMapping/>
-  </p:clrMapOvr>
-</p:notes>
-</file>
-
-<file path=ppt/notesSlides/notesSlide11.xml><?xml version="1.0" encoding="utf-8"?>
-<p:notes xmlns:a="http://schemas.openxmlformats.org/drawingml/2006/main" xmlns:r="http://schemas.openxmlformats.org/officeDocument/2006/relationships" xmlns:p="http://schemas.openxmlformats.org/presentationml/2006/main">
-  <p:cSld>
-    <p:spTree>
-      <p:nvGrpSpPr>
         <p:cNvPr id="1" name="">
           <a:extLst>
             <a:ext uri="{FF2B5EF4-FFF2-40B4-BE49-F238E27FC236}">
@@ -2201,7 +2540,7 @@
 </p:notes>
 </file>
 
-<file path=ppt/notesSlides/notesSlide12.xml><?xml version="1.0" encoding="utf-8"?>
+<file path=ppt/notesSlides/notesSlide11.xml><?xml version="1.0" encoding="utf-8"?>
 <p:notes xmlns:a="http://schemas.openxmlformats.org/drawingml/2006/main" xmlns:r="http://schemas.openxmlformats.org/officeDocument/2006/relationships" xmlns:p="http://schemas.openxmlformats.org/presentationml/2006/main">
   <p:cSld>
     <p:spTree>
@@ -2502,7 +2841,7 @@
 </p:notes>
 </file>
 
-<file path=ppt/notesSlides/notesSlide13.xml><?xml version="1.0" encoding="utf-8"?>
+<file path=ppt/notesSlides/notesSlide12.xml><?xml version="1.0" encoding="utf-8"?>
 <p:notes xmlns:a="http://schemas.openxmlformats.org/drawingml/2006/main" xmlns:r="http://schemas.openxmlformats.org/officeDocument/2006/relationships" xmlns:p="http://schemas.openxmlformats.org/presentationml/2006/main">
   <p:cSld>
     <p:spTree>
@@ -2704,7 +3043,7 @@
 </p:notes>
 </file>
 
-<file path=ppt/notesSlides/notesSlide14.xml><?xml version="1.0" encoding="utf-8"?>
+<file path=ppt/notesSlides/notesSlide13.xml><?xml version="1.0" encoding="utf-8"?>
 <p:notes xmlns:a="http://schemas.openxmlformats.org/drawingml/2006/main" xmlns:r="http://schemas.openxmlformats.org/officeDocument/2006/relationships" xmlns:p="http://schemas.openxmlformats.org/presentationml/2006/main">
   <p:cSld>
     <p:spTree>
@@ -2867,7 +3206,7 @@
 </p:notes>
 </file>
 
-<file path=ppt/notesSlides/notesSlide15.xml><?xml version="1.0" encoding="utf-8"?>
+<file path=ppt/notesSlides/notesSlide14.xml><?xml version="1.0" encoding="utf-8"?>
 <p:notes xmlns:a="http://schemas.openxmlformats.org/drawingml/2006/main" xmlns:r="http://schemas.openxmlformats.org/officeDocument/2006/relationships" xmlns:p="http://schemas.openxmlformats.org/presentationml/2006/main">
   <p:cSld>
     <p:spTree>
@@ -3048,7 +3387,7 @@
 </p:notes>
 </file>
 
-<file path=ppt/notesSlides/notesSlide16.xml><?xml version="1.0" encoding="utf-8"?>
+<file path=ppt/notesSlides/notesSlide15.xml><?xml version="1.0" encoding="utf-8"?>
 <p:notes xmlns:a="http://schemas.openxmlformats.org/drawingml/2006/main" xmlns:r="http://schemas.openxmlformats.org/officeDocument/2006/relationships" xmlns:p="http://schemas.openxmlformats.org/presentationml/2006/main">
   <p:cSld>
     <p:spTree>
@@ -3229,7 +3568,7 @@
 </p:notes>
 </file>
 
-<file path=ppt/notesSlides/notesSlide17.xml><?xml version="1.0" encoding="utf-8"?>
+<file path=ppt/notesSlides/notesSlide16.xml><?xml version="1.0" encoding="utf-8"?>
 <p:notes xmlns:a="http://schemas.openxmlformats.org/drawingml/2006/main" xmlns:r="http://schemas.openxmlformats.org/officeDocument/2006/relationships" xmlns:p="http://schemas.openxmlformats.org/presentationml/2006/main">
   <p:cSld>
     <p:spTree>
@@ -3309,7 +3648,291 @@
 </p:notes>
 </file>
 
+<file path=ppt/notesSlides/notesSlide17.xml><?xml version="1.0" encoding="utf-8"?>
+<p:notes xmlns:a="http://schemas.openxmlformats.org/drawingml/2006/main" xmlns:r="http://schemas.openxmlformats.org/officeDocument/2006/relationships" xmlns:p="http://schemas.openxmlformats.org/presentationml/2006/main">
+  <p:cSld>
+    <p:spTree>
+      <p:nvGrpSpPr>
+        <p:cNvPr id="1" name=""/>
+        <p:cNvGrpSpPr/>
+        <p:nvPr/>
+      </p:nvGrpSpPr>
+      <p:grpSpPr>
+        <a:xfrm>
+          <a:off x="0" y="0"/>
+          <a:ext cx="0" cy="0"/>
+          <a:chOff x="0" y="0"/>
+          <a:chExt cx="0" cy="0"/>
+        </a:xfrm>
+      </p:grpSpPr>
+      <p:sp>
+        <p:nvSpPr>
+          <p:cNvPr id="2" name="Slide Image Placeholder 1"/>
+          <p:cNvSpPr>
+            <a:spLocks noGrp="1" noRot="1" noChangeAspect="1"/>
+          </p:cNvSpPr>
+          <p:nvPr>
+            <p:ph type="sldImg"/>
+          </p:nvPr>
+        </p:nvSpPr>
+        <p:spPr/>
+      </p:sp>
+      <p:sp>
+        <p:nvSpPr>
+          <p:cNvPr id="3" name="Notes Placeholder 2"/>
+          <p:cNvSpPr>
+            <a:spLocks noGrp="1"/>
+          </p:cNvSpPr>
+          <p:nvPr>
+            <p:ph type="body" idx="1"/>
+          </p:nvPr>
+        </p:nvSpPr>
+        <p:spPr/>
+        <p:txBody>
+          <a:bodyPr/>
+          <a:lstStyle/>
+          <a:p>
+            <a:r>
+              <a:rPr lang="pt-BR" dirty="0"/>
+              <a:t>R0  = 0xABCDEFFF     R4  = 0x00000000     R8  = 0x00000000     R12 = 0xAB8D7BCD0  </a:t>
+            </a:r>
+          </a:p>
+          <a:p>
+            <a:r>
+              <a:rPr lang="pt-BR" dirty="0"/>
+              <a:t>R1  = 0x10000010     R5  = 0x00000001     R9  = 0x008B3CD0     R13 = 0x10000200  </a:t>
+            </a:r>
+          </a:p>
+          <a:p>
+            <a:r>
+              <a:rPr lang="pt-BR" dirty="0"/>
+              <a:t>R2  = 0xABCDEFFF     R6  = 0x00000010     R10 = 0xDABCDAD0     R14 = 0x00000260  </a:t>
+            </a:r>
+          </a:p>
+          <a:p>
+            <a:r>
+              <a:rPr lang="pt-BR" dirty="0"/>
+              <a:t>R3  = 0xABCD0000     R7  = 0xABCDEFDF     R11 = 0x00503D0B     R15 = 0x00000250</a:t>
+            </a:r>
+          </a:p>
+          <a:p>
+            <a:endParaRPr lang="en-US" dirty="0"/>
+          </a:p>
+        </p:txBody>
+      </p:sp>
+    </p:spTree>
+    <p:extLst>
+      <p:ext uri="{BB962C8B-B14F-4D97-AF65-F5344CB8AC3E}">
+        <p14:creationId xmlns:p14="http://schemas.microsoft.com/office/powerpoint/2010/main" val="2412319270"/>
+      </p:ext>
+    </p:extLst>
+  </p:cSld>
+  <p:clrMapOvr>
+    <a:masterClrMapping/>
+  </p:clrMapOvr>
+</p:notes>
+</file>
+
 <file path=ppt/notesSlides/notesSlide18.xml><?xml version="1.0" encoding="utf-8"?>
+<p:notes xmlns:a="http://schemas.openxmlformats.org/drawingml/2006/main" xmlns:r="http://schemas.openxmlformats.org/officeDocument/2006/relationships" xmlns:p="http://schemas.openxmlformats.org/presentationml/2006/main">
+  <p:cSld>
+    <p:spTree>
+      <p:nvGrpSpPr>
+        <p:cNvPr id="1" name=""/>
+        <p:cNvGrpSpPr/>
+        <p:nvPr/>
+      </p:nvGrpSpPr>
+      <p:grpSpPr>
+        <a:xfrm>
+          <a:off x="0" y="0"/>
+          <a:ext cx="0" cy="0"/>
+          <a:chOff x="0" y="0"/>
+          <a:chExt cx="0" cy="0"/>
+        </a:xfrm>
+      </p:grpSpPr>
+      <p:sp>
+        <p:nvSpPr>
+          <p:cNvPr id="2" name="Slide Image Placeholder 1"/>
+          <p:cNvSpPr>
+            <a:spLocks noGrp="1" noRot="1" noChangeAspect="1"/>
+          </p:cNvSpPr>
+          <p:nvPr>
+            <p:ph type="sldImg"/>
+          </p:nvPr>
+        </p:nvSpPr>
+        <p:spPr/>
+      </p:sp>
+      <p:sp>
+        <p:nvSpPr>
+          <p:cNvPr id="3" name="Notes Placeholder 2"/>
+          <p:cNvSpPr>
+            <a:spLocks noGrp="1"/>
+          </p:cNvSpPr>
+          <p:nvPr>
+            <p:ph type="body" idx="1"/>
+          </p:nvPr>
+        </p:nvSpPr>
+        <p:spPr/>
+        <p:txBody>
+          <a:bodyPr/>
+          <a:lstStyle/>
+          <a:p>
+            <a:r>
+              <a:rPr lang="en-US" b="0" dirty="0"/>
+              <a:t>The program loads two words from memory, calls a max routine to choose the larger into R0, performs bit-masking and byte/bit-reordering operations, computes a rotated-sum, and stores that result back to memory at an 8‑byte offset from the base address R1, under little‑endian layout.</a:t>
+            </a:r>
+          </a:p>
+          <a:p>
+            <a:r>
+              <a:rPr lang="en-US" b="0" dirty="0"/>
+              <a:t>All intermediate register values, NZCV updates, and the final memory bytes at the store address are detailed below step by step.[1]</a:t>
+            </a:r>
+          </a:p>
+          <a:p>
+            <a:endParaRPr lang="en-US" b="0" dirty="0"/>
+          </a:p>
+          <a:p>
+            <a:r>
+              <a:rPr lang="en-US" b="0" dirty="0"/>
+              <a:t>### Setup</a:t>
+            </a:r>
+          </a:p>
+          <a:p>
+            <a:r>
+              <a:rPr lang="en-US" b="0" dirty="0"/>
+              <a:t>- Memory at 0x10000010 contains bytes FF EF CD AB, and at 0x10000014 contains 00 00 CD AB, which, under little‑endian, correspond to words 0xABCDEFFF and 0xABCD0000 respectively.[1]</a:t>
+            </a:r>
+          </a:p>
+          <a:p>
+            <a:r>
+              <a:rPr lang="en-US" b="0" dirty="0"/>
+              <a:t>- The code sequence is the one shown on slide 32, and NZCV flags are reported in N Z C V order exactly as annotated on the slide.[1]</a:t>
+            </a:r>
+          </a:p>
+          <a:p>
+            <a:endParaRPr lang="en-US" b="0" dirty="0"/>
+          </a:p>
+          <a:p>
+            <a:r>
+              <a:rPr lang="en-US" b="0" dirty="0"/>
+              <a:t>### Code listing</a:t>
+            </a:r>
+          </a:p>
+          <a:p>
+            <a:r>
+              <a:rPr lang="en-US" b="0" dirty="0"/>
+              <a:t>```arm</a:t>
+            </a:r>
+          </a:p>
+          <a:p>
+            <a:r>
+              <a:rPr lang="en-US" b="0" dirty="0"/>
+              <a:t>LDR R1, =0x10000010</a:t>
+            </a:r>
+          </a:p>
+          <a:p>
+            <a:r>
+              <a:rPr lang="en-US" b="0" dirty="0"/>
+              <a:t>LDR R2, [R1]</a:t>
+            </a:r>
+          </a:p>
+          <a:p>
+            <a:r>
+              <a:rPr lang="en-US" b="0" dirty="0"/>
+              <a:t>LDR R3, [R1,#4]</a:t>
+            </a:r>
+          </a:p>
+          <a:p>
+            <a:r>
+              <a:rPr lang="en-US" b="0" dirty="0"/>
+              <a:t>BL  max</a:t>
+            </a:r>
+          </a:p>
+          <a:p>
+            <a:r>
+              <a:rPr lang="en-US" b="0" dirty="0"/>
+              <a:t>SUBS R4, R2, R0     @NZCV =</a:t>
+            </a:r>
+          </a:p>
+          <a:p>
+            <a:r>
+              <a:rPr lang="en-US" b="0" dirty="0"/>
+              <a:t>MOVW R5, #1</a:t>
+            </a:r>
+          </a:p>
+          <a:p>
+            <a:r>
+              <a:rPr lang="en-US" b="0" dirty="0"/>
+              <a:t>LSL  R6, R5, #4</a:t>
+            </a:r>
+          </a:p>
+          <a:p>
+            <a:r>
+              <a:rPr lang="en-US" b="0" dirty="0"/>
+              <a:t>BIC  R7, R2, R6</a:t>
+            </a:r>
+          </a:p>
+          <a:p>
+            <a:r>
+              <a:rPr lang="en-US" b="0" dirty="0"/>
+              <a:t>ANDS R8, R7, R6     @NZCV =</a:t>
+            </a:r>
+          </a:p>
+          <a:p>
+            <a:r>
+              <a:rPr lang="en-US" b="0" dirty="0"/>
+              <a:t>ROR  R9, R3, #12</a:t>
+            </a:r>
+          </a:p>
+          <a:p>
+            <a:r>
+              <a:rPr lang="en-US" b="0" dirty="0"/>
+              <a:t>REV  R10, R9</a:t>
+            </a:r>
+          </a:p>
+          <a:p>
+            <a:r>
+              <a:rPr lang="en-US" b="0" dirty="0"/>
+              <a:t>RBIT R11, R10</a:t>
+            </a:r>
+          </a:p>
+          <a:p>
+            <a:r>
+              <a:rPr lang="en-US" b="0" dirty="0"/>
+              <a:t>ADDS R12, R3, R9    @NZCV =</a:t>
+            </a:r>
+          </a:p>
+          <a:p>
+            <a:r>
+              <a:rPr lang="en-US" b="0" dirty="0"/>
+              <a:t>STR  R12, [R1,#8]</a:t>
+            </a:r>
+          </a:p>
+          <a:p>
+            <a:r>
+              <a:rPr lang="en-US" b="0" dirty="0"/>
+              <a:t>```</a:t>
+            </a:r>
+          </a:p>
+          <a:p>
+            <a:endParaRPr lang="en-US" b="0" dirty="0"/>
+          </a:p>
+        </p:txBody>
+      </p:sp>
+    </p:spTree>
+    <p:extLst>
+      <p:ext uri="{BB962C8B-B14F-4D97-AF65-F5344CB8AC3E}">
+        <p14:creationId xmlns:p14="http://schemas.microsoft.com/office/powerpoint/2010/main" val="3526896143"/>
+      </p:ext>
+    </p:extLst>
+  </p:cSld>
+  <p:clrMapOvr>
+    <a:masterClrMapping/>
+  </p:clrMapOvr>
+</p:notes>
+</file>
+
+<file path=ppt/notesSlides/notesSlide19.xml><?xml version="1.0" encoding="utf-8"?>
 <p:notes xmlns:a="http://schemas.openxmlformats.org/drawingml/2006/main" xmlns:r="http://schemas.openxmlformats.org/officeDocument/2006/relationships" xmlns:p="http://schemas.openxmlformats.org/presentationml/2006/main">
   <p:cSld>
     <p:spTree>
@@ -3935,13 +4558,7 @@
   <p:cSld>
     <p:spTree>
       <p:nvGrpSpPr>
-        <p:cNvPr id="1" name="">
-          <a:extLst>
-            <a:ext uri="{FF2B5EF4-FFF2-40B4-BE49-F238E27FC236}">
-              <a16:creationId xmlns:a16="http://schemas.microsoft.com/office/drawing/2014/main" id="{A80E050F-0F5C-FDED-CCCE-CECD877F8878}"/>
-            </a:ext>
-          </a:extLst>
-        </p:cNvPr>
+        <p:cNvPr id="1" name=""/>
         <p:cNvGrpSpPr/>
         <p:nvPr/>
       </p:nvGrpSpPr>
@@ -3955,27 +4572,15 @@
       </p:grpSpPr>
       <p:sp>
         <p:nvSpPr>
-          <p:cNvPr id="56322" name="Rectangle 1026">
-            <a:extLst>
-              <a:ext uri="{FF2B5EF4-FFF2-40B4-BE49-F238E27FC236}">
-                <a16:creationId xmlns:a16="http://schemas.microsoft.com/office/drawing/2014/main" id="{59E3C006-BBB7-970C-4E50-FC0411AA4BE5}"/>
-              </a:ext>
-            </a:extLst>
-          </p:cNvPr>
+          <p:cNvPr id="2" name="Slide Image Placeholder 1"/>
           <p:cNvSpPr>
-            <a:spLocks noGrp="1" noRot="1" noChangeAspect="1" noChangeArrowheads="1" noTextEdit="1"/>
+            <a:spLocks noGrp="1" noRot="1" noChangeAspect="1"/>
           </p:cNvSpPr>
           <p:nvPr>
             <p:ph type="sldImg"/>
           </p:nvPr>
         </p:nvSpPr>
-        <p:spPr>
-          <a:xfrm>
-            <a:off x="2905125" y="628650"/>
-            <a:ext cx="3203575" cy="2401888"/>
-          </a:xfrm>
-          <a:ln/>
-        </p:spPr>
+        <p:spPr/>
         <p:txBody>
           <a:bodyPr/>
           <a:lstStyle/>
@@ -3986,58 +4591,51 @@
       </p:sp>
       <p:sp>
         <p:nvSpPr>
-          <p:cNvPr id="56323" name="Rectangle 1027">
-            <a:extLst>
-              <a:ext uri="{FF2B5EF4-FFF2-40B4-BE49-F238E27FC236}">
-                <a16:creationId xmlns:a16="http://schemas.microsoft.com/office/drawing/2014/main" id="{39420DA2-2658-32B5-8F22-01F670004876}"/>
-              </a:ext>
-            </a:extLst>
-          </p:cNvPr>
+          <p:cNvPr id="3" name="Notes Placeholder 2"/>
           <p:cNvSpPr>
-            <a:spLocks noGrp="1" noChangeArrowheads="1"/>
+            <a:spLocks noGrp="1"/>
           </p:cNvSpPr>
           <p:nvPr>
             <p:ph type="body" idx="1"/>
           </p:nvPr>
         </p:nvSpPr>
-        <p:spPr>
-          <a:xfrm>
-            <a:off x="1197751" y="3203711"/>
-            <a:ext cx="6605775" cy="3033667"/>
-          </a:xfrm>
-          <a:solidFill>
-            <a:srgbClr val="FFFFFF"/>
-          </a:solidFill>
-          <a:ln>
-            <a:solidFill>
-              <a:srgbClr val="000000"/>
-            </a:solidFill>
-          </a:ln>
-        </p:spPr>
+        <p:spPr/>
         <p:txBody>
-          <a:bodyPr lIns="84830" tIns="42414" rIns="84830" bIns="42414"/>
+          <a:bodyPr/>
           <a:lstStyle/>
           <a:p>
-            <a:r>
-              <a:rPr lang="en-US"/>
-              <a:t>Halfword access and signed halfword/byte accesses were added to the architecture in v4T, this is the reason the offset field is not as flexible as the normal word/byte load/store - not a problem because these accesses are less common.</a:t>
-            </a:r>
-          </a:p>
-          <a:p>
-            <a:endParaRPr lang="en-US"/>
-          </a:p>
-          <a:p>
-            <a:r>
-              <a:rPr lang="en-US"/>
-              <a:t>Link: diagram on next slide</a:t>
-            </a:r>
+            <a:endParaRPr lang="en-US" dirty="0"/>
+          </a:p>
+        </p:txBody>
+      </p:sp>
+      <p:sp>
+        <p:nvSpPr>
+          <p:cNvPr id="4" name="Slide Number Placeholder 3"/>
+          <p:cNvSpPr>
+            <a:spLocks noGrp="1"/>
+          </p:cNvSpPr>
+          <p:nvPr>
+            <p:ph type="sldNum" sz="quarter" idx="10"/>
+          </p:nvPr>
+        </p:nvSpPr>
+        <p:spPr/>
+        <p:txBody>
+          <a:bodyPr lIns="88139" tIns="44070" rIns="88139" bIns="44070"/>
+          <a:lstStyle/>
+          <a:p>
+            <a:fld id="{EF97FDFF-7B9F-7D4D-BFC0-AAD1F3D3D3CB}" type="slidenum">
+              <a:rPr lang="en-US" smtClean="0"/>
+              <a:pPr/>
+              <a:t>14</a:t>
+            </a:fld>
+            <a:endParaRPr lang="en-US" dirty="0"/>
           </a:p>
         </p:txBody>
       </p:sp>
     </p:spTree>
     <p:extLst>
       <p:ext uri="{BB962C8B-B14F-4D97-AF65-F5344CB8AC3E}">
-        <p14:creationId xmlns:p14="http://schemas.microsoft.com/office/powerpoint/2010/main" val="3774685930"/>
+        <p14:creationId xmlns:p14="http://schemas.microsoft.com/office/powerpoint/2010/main" val="906969298"/>
       </p:ext>
     </p:extLst>
   </p:cSld>
@@ -4098,30 +4696,42 @@
           <a:bodyPr/>
           <a:lstStyle/>
           <a:p>
-            <a:endParaRPr lang="en-US" dirty="0"/>
-          </a:p>
-        </p:txBody>
-      </p:sp>
-      <p:sp>
-        <p:nvSpPr>
-          <p:cNvPr id="4" name="Slide Number Placeholder 3"/>
-          <p:cNvSpPr>
-            <a:spLocks noGrp="1"/>
-          </p:cNvSpPr>
-          <p:nvPr>
-            <p:ph type="sldNum" sz="quarter" idx="10"/>
-          </p:nvPr>
-        </p:nvSpPr>
-        <p:spPr/>
-        <p:txBody>
-          <a:bodyPr lIns="88139" tIns="44070" rIns="88139" bIns="44070"/>
-          <a:lstStyle/>
-          <a:p>
-            <a:fld id="{EF97FDFF-7B9F-7D4D-BFC0-AAD1F3D3D3CB}" type="slidenum">
-              <a:rPr lang="en-US" smtClean="0"/>
-              <a:pPr/>
-              <a:t>15</a:t>
-            </a:fld>
+            <a:pPr defTabSz="945658">
+              <a:defRPr/>
+            </a:pPr>
+            <a:r>
+              <a:rPr lang="en-US" dirty="0">
+                <a:solidFill>
+                  <a:prstClr val="black"/>
+                </a:solidFill>
+              </a:rPr>
+              <a:t>Reading the 32-bit word at address 102 spans addresses 102..105, which cross a 4-byte alignment boundary if the bus expects aligned words at multiples of 4 (e.g., aligned words at 100 and 104). Since 102 is misaligned, the access requires two aligned 32-bit bus cycles (one covering 100..103 and one covering 104..107) with the CPU combining bytes</a:t>
+            </a:r>
+          </a:p>
+          <a:p>
+            <a:pPr defTabSz="945658">
+              <a:defRPr/>
+            </a:pPr>
+            <a:r>
+              <a:rPr lang="en-US" dirty="0">
+                <a:solidFill>
+                  <a:prstClr val="black"/>
+                </a:solidFill>
+              </a:rPr>
+              <a:t>Reading a 16-bit halfword at address 102 uses bytes 102..103, which reside within the same aligned 32-bit word (100..103). On a 32-bit bus that supports halfword transfers, this is a single bus cycle</a:t>
+            </a:r>
+          </a:p>
+          <a:p>
+            <a:pPr defTabSz="945658">
+              <a:defRPr/>
+            </a:pPr>
+            <a:endParaRPr lang="en-US" dirty="0">
+              <a:solidFill>
+                <a:prstClr val="black"/>
+              </a:solidFill>
+            </a:endParaRPr>
+          </a:p>
+          <a:p>
             <a:endParaRPr lang="en-US" dirty="0"/>
           </a:p>
         </p:txBody>
@@ -4129,7 +4739,7 @@
     </p:spTree>
     <p:extLst>
       <p:ext uri="{BB962C8B-B14F-4D97-AF65-F5344CB8AC3E}">
-        <p14:creationId xmlns:p14="http://schemas.microsoft.com/office/powerpoint/2010/main" val="906969298"/>
+        <p14:creationId xmlns:p14="http://schemas.microsoft.com/office/powerpoint/2010/main" val="2152255892"/>
       </p:ext>
     </p:extLst>
   </p:cSld>
@@ -8363,779 +8973,6 @@
         <p:cNvPr id="1" name="">
           <a:extLst>
             <a:ext uri="{FF2B5EF4-FFF2-40B4-BE49-F238E27FC236}">
-              <a16:creationId xmlns:a16="http://schemas.microsoft.com/office/drawing/2014/main" id="{EA0B5D89-8F13-36FF-935E-A5767EDF23A3}"/>
-            </a:ext>
-          </a:extLst>
-        </p:cNvPr>
-        <p:cNvGrpSpPr/>
-        <p:nvPr/>
-      </p:nvGrpSpPr>
-      <p:grpSpPr>
-        <a:xfrm>
-          <a:off x="0" y="0"/>
-          <a:ext cx="0" cy="0"/>
-          <a:chOff x="0" y="0"/>
-          <a:chExt cx="0" cy="0"/>
-        </a:xfrm>
-      </p:grpSpPr>
-      <p:sp>
-        <p:nvSpPr>
-          <p:cNvPr id="25602" name="Rectangle 1026">
-            <a:extLst>
-              <a:ext uri="{FF2B5EF4-FFF2-40B4-BE49-F238E27FC236}">
-                <a16:creationId xmlns:a16="http://schemas.microsoft.com/office/drawing/2014/main" id="{D486A61F-30FF-CC3A-3E75-5DF8F473ACD0}"/>
-              </a:ext>
-            </a:extLst>
-          </p:cNvPr>
-          <p:cNvSpPr>
-            <a:spLocks noChangeArrowheads="1"/>
-          </p:cNvSpPr>
-          <p:nvPr/>
-        </p:nvSpPr>
-        <p:spPr bwMode="auto">
-          <a:xfrm>
-            <a:off x="690563" y="6243638"/>
-            <a:ext cx="1903412" cy="455612"/>
-          </a:xfrm>
-          <a:prstGeom prst="rect">
-            <a:avLst/>
-          </a:prstGeom>
-          <a:noFill/>
-          <a:ln w="9525">
-            <a:noFill/>
-            <a:miter lim="800000"/>
-            <a:headEnd/>
-            <a:tailEnd/>
-          </a:ln>
-        </p:spPr>
-        <p:txBody>
-          <a:bodyPr wrap="none" anchor="ctr"/>
-          <a:lstStyle/>
-          <a:p>
-            <a:endParaRPr lang="en-US"/>
-          </a:p>
-        </p:txBody>
-      </p:sp>
-      <p:sp>
-        <p:nvSpPr>
-          <p:cNvPr id="25603" name="Rectangle 1027">
-            <a:extLst>
-              <a:ext uri="{FF2B5EF4-FFF2-40B4-BE49-F238E27FC236}">
-                <a16:creationId xmlns:a16="http://schemas.microsoft.com/office/drawing/2014/main" id="{D39A2FAD-3A79-CA5F-2B81-2862A1DDB0A0}"/>
-              </a:ext>
-            </a:extLst>
-          </p:cNvPr>
-          <p:cNvSpPr>
-            <a:spLocks noChangeArrowheads="1"/>
-          </p:cNvSpPr>
-          <p:nvPr/>
-        </p:nvSpPr>
-        <p:spPr bwMode="auto">
-          <a:xfrm>
-            <a:off x="3125788" y="6243638"/>
-            <a:ext cx="2892425" cy="455612"/>
-          </a:xfrm>
-          <a:prstGeom prst="rect">
-            <a:avLst/>
-          </a:prstGeom>
-          <a:noFill/>
-          <a:ln w="9525">
-            <a:noFill/>
-            <a:miter lim="800000"/>
-            <a:headEnd/>
-            <a:tailEnd/>
-          </a:ln>
-        </p:spPr>
-        <p:txBody>
-          <a:bodyPr wrap="none" anchor="ctr"/>
-          <a:lstStyle/>
-          <a:p>
-            <a:endParaRPr lang="en-US"/>
-          </a:p>
-        </p:txBody>
-      </p:sp>
-      <p:sp>
-        <p:nvSpPr>
-          <p:cNvPr id="25604" name="Rectangle 1028">
-            <a:extLst>
-              <a:ext uri="{FF2B5EF4-FFF2-40B4-BE49-F238E27FC236}">
-                <a16:creationId xmlns:a16="http://schemas.microsoft.com/office/drawing/2014/main" id="{34197335-FCAB-33C8-1087-8FABD86175E0}"/>
-              </a:ext>
-            </a:extLst>
-          </p:cNvPr>
-          <p:cNvSpPr>
-            <a:spLocks noChangeArrowheads="1"/>
-          </p:cNvSpPr>
-          <p:nvPr/>
-        </p:nvSpPr>
-        <p:spPr bwMode="auto">
-          <a:xfrm>
-            <a:off x="690563" y="6243638"/>
-            <a:ext cx="1903412" cy="455612"/>
-          </a:xfrm>
-          <a:prstGeom prst="rect">
-            <a:avLst/>
-          </a:prstGeom>
-          <a:noFill/>
-          <a:ln w="9525">
-            <a:noFill/>
-            <a:miter lim="800000"/>
-            <a:headEnd/>
-            <a:tailEnd/>
-          </a:ln>
-        </p:spPr>
-        <p:txBody>
-          <a:bodyPr wrap="none" anchor="ctr"/>
-          <a:lstStyle/>
-          <a:p>
-            <a:endParaRPr lang="en-US"/>
-          </a:p>
-        </p:txBody>
-      </p:sp>
-      <p:sp>
-        <p:nvSpPr>
-          <p:cNvPr id="25606" name="Rectangle 1030">
-            <a:extLst>
-              <a:ext uri="{FF2B5EF4-FFF2-40B4-BE49-F238E27FC236}">
-                <a16:creationId xmlns:a16="http://schemas.microsoft.com/office/drawing/2014/main" id="{A68A412D-6191-CA7A-7BC2-26F8E3696267}"/>
-              </a:ext>
-            </a:extLst>
-          </p:cNvPr>
-          <p:cNvSpPr>
-            <a:spLocks noGrp="1" noChangeArrowheads="1"/>
-          </p:cNvSpPr>
-          <p:nvPr>
-            <p:ph type="title"/>
-          </p:nvPr>
-        </p:nvSpPr>
-        <p:spPr>
-          <a:noFill/>
-        </p:spPr>
-        <p:txBody>
-          <a:bodyPr lIns="92075" tIns="46038" rIns="92075" bIns="46038"/>
-          <a:lstStyle/>
-          <a:p>
-            <a:pPr defTabSz="938213"/>
-            <a:r>
-              <a:rPr lang="en-US" dirty="0"/>
-              <a:t>Endianness ANS</a:t>
-            </a:r>
-          </a:p>
-        </p:txBody>
-      </p:sp>
-      <p:sp>
-        <p:nvSpPr>
-          <p:cNvPr id="25607" name="Rectangle 1031">
-            <a:extLst>
-              <a:ext uri="{FF2B5EF4-FFF2-40B4-BE49-F238E27FC236}">
-                <a16:creationId xmlns:a16="http://schemas.microsoft.com/office/drawing/2014/main" id="{A54DAC5D-CE7A-D6A6-3DB6-070228C7DEB3}"/>
-              </a:ext>
-            </a:extLst>
-          </p:cNvPr>
-          <p:cNvSpPr>
-            <a:spLocks noGrp="1" noChangeArrowheads="1"/>
-          </p:cNvSpPr>
-          <p:nvPr>
-            <p:ph sz="quarter" idx="1"/>
-          </p:nvPr>
-        </p:nvSpPr>
-        <p:spPr>
-          <a:xfrm>
-            <a:off x="3477717" y="1430312"/>
-            <a:ext cx="4804348" cy="1028075"/>
-          </a:xfrm>
-          <a:noFill/>
-        </p:spPr>
-        <p:txBody>
-          <a:bodyPr lIns="92075" tIns="46038" rIns="92075" bIns="46038" anchorCtr="1">
-            <a:normAutofit/>
-          </a:bodyPr>
-          <a:lstStyle/>
-          <a:p>
-            <a:pPr defTabSz="938213">
-              <a:lnSpc>
-                <a:spcPct val="90000"/>
-              </a:lnSpc>
-              <a:buNone/>
-            </a:pPr>
-            <a:r>
-              <a:rPr lang="en-US" dirty="0">
-                <a:latin typeface="Consolas" panose="020B0609020204030204" pitchFamily="49" charset="0"/>
-                <a:cs typeface="Consolas" panose="020B0609020204030204" pitchFamily="49" charset="0"/>
-              </a:rPr>
-              <a:t>LDR r11, [r0]</a:t>
-            </a:r>
-          </a:p>
-          <a:p>
-            <a:pPr defTabSz="938213">
-              <a:lnSpc>
-                <a:spcPct val="90000"/>
-              </a:lnSpc>
-              <a:buNone/>
-            </a:pPr>
-            <a:r>
-              <a:rPr lang="en-US" dirty="0">
-                <a:latin typeface="Consolas" panose="020B0609020204030204" pitchFamily="49" charset="0"/>
-                <a:cs typeface="Consolas" panose="020B0609020204030204" pitchFamily="49" charset="0"/>
-              </a:rPr>
-              <a:t>; r0 = </a:t>
-            </a:r>
-            <a:r>
-              <a:rPr lang="en-US" dirty="0" err="1">
-                <a:latin typeface="Consolas" panose="020B0609020204030204" pitchFamily="49" charset="0"/>
-                <a:cs typeface="Consolas" panose="020B0609020204030204" pitchFamily="49" charset="0"/>
-              </a:rPr>
-              <a:t>0x20008000</a:t>
-            </a:r>
-            <a:r>
-              <a:rPr lang="en-US" dirty="0">
-                <a:latin typeface="Consolas" panose="020B0609020204030204" pitchFamily="49" charset="0"/>
-                <a:cs typeface="Consolas" panose="020B0609020204030204" pitchFamily="49" charset="0"/>
-              </a:rPr>
-              <a:t> </a:t>
-            </a:r>
-          </a:p>
-        </p:txBody>
-      </p:sp>
-      <p:sp>
-        <p:nvSpPr>
-          <p:cNvPr id="8" name="Slide Number Placeholder 7">
-            <a:extLst>
-              <a:ext uri="{FF2B5EF4-FFF2-40B4-BE49-F238E27FC236}">
-                <a16:creationId xmlns:a16="http://schemas.microsoft.com/office/drawing/2014/main" id="{4ADD9F3B-7BAE-8A97-D937-6A9189E39F8C}"/>
-              </a:ext>
-            </a:extLst>
-          </p:cNvPr>
-          <p:cNvSpPr>
-            <a:spLocks noGrp="1"/>
-          </p:cNvSpPr>
-          <p:nvPr>
-            <p:ph type="sldNum" sz="quarter" idx="12"/>
-          </p:nvPr>
-        </p:nvSpPr>
-        <p:spPr/>
-        <p:txBody>
-          <a:bodyPr/>
-          <a:lstStyle/>
-          <a:p>
-            <a:fld id="{AEE14D4A-FE32-40AF-B06D-E9622816B101}" type="slidenum">
-              <a:rPr lang="en-US" smtClean="0"/>
-              <a:pPr/>
-              <a:t>10</a:t>
-            </a:fld>
-            <a:endParaRPr lang="en-US"/>
-          </a:p>
-        </p:txBody>
-      </p:sp>
-      <p:sp>
-        <p:nvSpPr>
-          <p:cNvPr id="11" name="TextBox 10">
-            <a:extLst>
-              <a:ext uri="{FF2B5EF4-FFF2-40B4-BE49-F238E27FC236}">
-                <a16:creationId xmlns:a16="http://schemas.microsoft.com/office/drawing/2014/main" id="{C23F9650-1AA8-6D79-532C-623863124D8F}"/>
-              </a:ext>
-            </a:extLst>
-          </p:cNvPr>
-          <p:cNvSpPr txBox="1"/>
-          <p:nvPr/>
-        </p:nvSpPr>
-        <p:spPr>
-          <a:xfrm>
-            <a:off x="366684" y="2231610"/>
-            <a:ext cx="2949846" cy="461665"/>
-          </a:xfrm>
-          <a:prstGeom prst="rect">
-            <a:avLst/>
-          </a:prstGeom>
-          <a:noFill/>
-        </p:spPr>
-        <p:txBody>
-          <a:bodyPr wrap="none" rtlCol="0">
-            <a:spAutoFit/>
-          </a:bodyPr>
-          <a:lstStyle/>
-          <a:p>
-            <a:r>
-              <a:rPr lang="en-US" sz="2400" dirty="0"/>
-              <a:t>r11 before load</a:t>
-            </a:r>
-          </a:p>
-        </p:txBody>
-      </p:sp>
-      <p:sp>
-        <p:nvSpPr>
-          <p:cNvPr id="12" name="Rectangle 11">
-            <a:extLst>
-              <a:ext uri="{FF2B5EF4-FFF2-40B4-BE49-F238E27FC236}">
-                <a16:creationId xmlns:a16="http://schemas.microsoft.com/office/drawing/2014/main" id="{6C835CEF-1048-E5FA-3564-79A31837611E}"/>
-              </a:ext>
-            </a:extLst>
-          </p:cNvPr>
-          <p:cNvSpPr/>
-          <p:nvPr/>
-        </p:nvSpPr>
-        <p:spPr>
-          <a:xfrm>
-            <a:off x="1026252" y="2741275"/>
-            <a:ext cx="2083633" cy="344774"/>
-          </a:xfrm>
-          <a:prstGeom prst="rect">
-            <a:avLst/>
-          </a:prstGeom>
-          <a:solidFill>
-            <a:schemeClr val="bg1"/>
-          </a:solidFill>
-        </p:spPr>
-        <p:style>
-          <a:lnRef idx="2">
-            <a:schemeClr val="accent1">
-              <a:shade val="50000"/>
-            </a:schemeClr>
-          </a:lnRef>
-          <a:fillRef idx="1">
-            <a:schemeClr val="accent1"/>
-          </a:fillRef>
-          <a:effectRef idx="0">
-            <a:schemeClr val="accent1"/>
-          </a:effectRef>
-          <a:fontRef idx="minor">
-            <a:schemeClr val="lt1"/>
-          </a:fontRef>
-        </p:style>
-        <p:txBody>
-          <a:bodyPr rtlCol="0" anchor="ctr"/>
-          <a:lstStyle/>
-          <a:p>
-            <a:pPr algn="ctr"/>
-            <a:r>
-              <a:rPr lang="en-US" sz="2400" dirty="0">
-                <a:solidFill>
-                  <a:schemeClr val="tx1"/>
-                </a:solidFill>
-                <a:latin typeface="Consolas" panose="020B0609020204030204" pitchFamily="49" charset="0"/>
-                <a:cs typeface="Consolas" panose="020B0609020204030204" pitchFamily="49" charset="0"/>
-              </a:rPr>
-              <a:t>0x12345678</a:t>
-            </a:r>
-          </a:p>
-        </p:txBody>
-      </p:sp>
-      <p:sp>
-        <p:nvSpPr>
-          <p:cNvPr id="13" name="TextBox 12">
-            <a:extLst>
-              <a:ext uri="{FF2B5EF4-FFF2-40B4-BE49-F238E27FC236}">
-                <a16:creationId xmlns:a16="http://schemas.microsoft.com/office/drawing/2014/main" id="{CFC3F200-1090-C91F-D874-A74F6CEEAA28}"/>
-              </a:ext>
-            </a:extLst>
-          </p:cNvPr>
-          <p:cNvSpPr txBox="1"/>
-          <p:nvPr/>
-        </p:nvSpPr>
-        <p:spPr>
-          <a:xfrm>
-            <a:off x="285829" y="3192496"/>
-            <a:ext cx="3881437" cy="830997"/>
-          </a:xfrm>
-          <a:prstGeom prst="rect">
-            <a:avLst/>
-          </a:prstGeom>
-          <a:noFill/>
-        </p:spPr>
-        <p:txBody>
-          <a:bodyPr wrap="square" rtlCol="0">
-            <a:spAutoFit/>
-          </a:bodyPr>
-          <a:lstStyle/>
-          <a:p>
-            <a:r>
-              <a:rPr lang="en-US" sz="2400" dirty="0"/>
-              <a:t>r11 after load w/ Big-Endian ordering  </a:t>
-            </a:r>
-          </a:p>
-        </p:txBody>
-      </p:sp>
-      <p:sp>
-        <p:nvSpPr>
-          <p:cNvPr id="2" name="TextBox 1">
-            <a:extLst>
-              <a:ext uri="{FF2B5EF4-FFF2-40B4-BE49-F238E27FC236}">
-                <a16:creationId xmlns:a16="http://schemas.microsoft.com/office/drawing/2014/main" id="{E098F370-163A-2658-2335-100E7AA8E86F}"/>
-              </a:ext>
-            </a:extLst>
-          </p:cNvPr>
-          <p:cNvSpPr txBox="1"/>
-          <p:nvPr/>
-        </p:nvSpPr>
-        <p:spPr>
-          <a:xfrm>
-            <a:off x="0" y="4388465"/>
-            <a:ext cx="4286171" cy="830997"/>
-          </a:xfrm>
-          <a:prstGeom prst="rect">
-            <a:avLst/>
-          </a:prstGeom>
-          <a:noFill/>
-        </p:spPr>
-        <p:txBody>
-          <a:bodyPr wrap="square" rtlCol="0">
-            <a:spAutoFit/>
-          </a:bodyPr>
-          <a:lstStyle/>
-          <a:p>
-            <a:r>
-              <a:rPr lang="en-US" sz="2400" dirty="0"/>
-              <a:t>r11 after load w/ Little-Endian ordering  </a:t>
-            </a:r>
-          </a:p>
-        </p:txBody>
-      </p:sp>
-      <p:sp>
-        <p:nvSpPr>
-          <p:cNvPr id="4" name="Rectangle 3">
-            <a:extLst>
-              <a:ext uri="{FF2B5EF4-FFF2-40B4-BE49-F238E27FC236}">
-                <a16:creationId xmlns:a16="http://schemas.microsoft.com/office/drawing/2014/main" id="{77A254B6-104C-2C8D-00A6-5DE241414A5B}"/>
-              </a:ext>
-            </a:extLst>
-          </p:cNvPr>
-          <p:cNvSpPr/>
-          <p:nvPr/>
-        </p:nvSpPr>
-        <p:spPr>
-          <a:xfrm>
-            <a:off x="1041817" y="5253741"/>
-            <a:ext cx="2083633" cy="344774"/>
-          </a:xfrm>
-          <a:prstGeom prst="rect">
-            <a:avLst/>
-          </a:prstGeom>
-          <a:solidFill>
-            <a:schemeClr val="bg1"/>
-          </a:solidFill>
-        </p:spPr>
-        <p:style>
-          <a:lnRef idx="2">
-            <a:schemeClr val="accent1">
-              <a:shade val="50000"/>
-            </a:schemeClr>
-          </a:lnRef>
-          <a:fillRef idx="1">
-            <a:schemeClr val="accent1"/>
-          </a:fillRef>
-          <a:effectRef idx="0">
-            <a:schemeClr val="accent1"/>
-          </a:effectRef>
-          <a:fontRef idx="minor">
-            <a:schemeClr val="lt1"/>
-          </a:fontRef>
-        </p:style>
-        <p:txBody>
-          <a:bodyPr rtlCol="0" anchor="ctr"/>
-          <a:lstStyle/>
-          <a:p>
-            <a:pPr algn="ctr"/>
-            <a:endParaRPr lang="en-US" sz="2400" dirty="0">
-              <a:solidFill>
-                <a:schemeClr val="tx1"/>
-              </a:solidFill>
-            </a:endParaRPr>
-          </a:p>
-        </p:txBody>
-      </p:sp>
-      <p:sp>
-        <p:nvSpPr>
-          <p:cNvPr id="5" name="Rectangle 4">
-            <a:extLst>
-              <a:ext uri="{FF2B5EF4-FFF2-40B4-BE49-F238E27FC236}">
-                <a16:creationId xmlns:a16="http://schemas.microsoft.com/office/drawing/2014/main" id="{329B190A-ACDD-BACD-C21E-5F8C20305539}"/>
-              </a:ext>
-            </a:extLst>
-          </p:cNvPr>
-          <p:cNvSpPr/>
-          <p:nvPr/>
-        </p:nvSpPr>
-        <p:spPr>
-          <a:xfrm>
-            <a:off x="1054556" y="5213529"/>
-            <a:ext cx="1883849" cy="461665"/>
-          </a:xfrm>
-          <a:prstGeom prst="rect">
-            <a:avLst/>
-          </a:prstGeom>
-        </p:spPr>
-        <p:txBody>
-          <a:bodyPr wrap="none">
-            <a:spAutoFit/>
-          </a:bodyPr>
-          <a:lstStyle/>
-          <a:p>
-            <a:r>
-              <a:rPr lang="en-US" sz="2400" dirty="0" err="1">
-                <a:solidFill>
-                  <a:srgbClr val="FF0000"/>
-                </a:solidFill>
-                <a:latin typeface="Consolas" panose="020B0609020204030204" pitchFamily="49" charset="0"/>
-                <a:cs typeface="Consolas" panose="020B0609020204030204" pitchFamily="49" charset="0"/>
-              </a:rPr>
-              <a:t>0xA7908CEE</a:t>
-            </a:r>
-            <a:endParaRPr lang="en-US" sz="2400" dirty="0">
-              <a:solidFill>
-                <a:srgbClr val="FF0000"/>
-              </a:solidFill>
-              <a:latin typeface="Consolas" panose="020B0609020204030204" pitchFamily="49" charset="0"/>
-              <a:cs typeface="Consolas" panose="020B0609020204030204" pitchFamily="49" charset="0"/>
-            </a:endParaRPr>
-          </a:p>
-        </p:txBody>
-      </p:sp>
-      <p:sp>
-        <p:nvSpPr>
-          <p:cNvPr id="6" name="Rectangle 5">
-            <a:extLst>
-              <a:ext uri="{FF2B5EF4-FFF2-40B4-BE49-F238E27FC236}">
-                <a16:creationId xmlns:a16="http://schemas.microsoft.com/office/drawing/2014/main" id="{67A10414-B4FB-30EC-4D9F-934B37630EBC}"/>
-              </a:ext>
-            </a:extLst>
-          </p:cNvPr>
-          <p:cNvSpPr/>
-          <p:nvPr/>
-        </p:nvSpPr>
-        <p:spPr>
-          <a:xfrm>
-            <a:off x="1041817" y="4032316"/>
-            <a:ext cx="2083633" cy="344774"/>
-          </a:xfrm>
-          <a:prstGeom prst="rect">
-            <a:avLst/>
-          </a:prstGeom>
-          <a:solidFill>
-            <a:schemeClr val="bg1"/>
-          </a:solidFill>
-        </p:spPr>
-        <p:style>
-          <a:lnRef idx="2">
-            <a:schemeClr val="accent1">
-              <a:shade val="50000"/>
-            </a:schemeClr>
-          </a:lnRef>
-          <a:fillRef idx="1">
-            <a:schemeClr val="accent1"/>
-          </a:fillRef>
-          <a:effectRef idx="0">
-            <a:schemeClr val="accent1"/>
-          </a:effectRef>
-          <a:fontRef idx="minor">
-            <a:schemeClr val="lt1"/>
-          </a:fontRef>
-        </p:style>
-        <p:txBody>
-          <a:bodyPr rtlCol="0" anchor="ctr"/>
-          <a:lstStyle/>
-          <a:p>
-            <a:pPr algn="ctr"/>
-            <a:endParaRPr lang="en-US" sz="2400" dirty="0">
-              <a:solidFill>
-                <a:schemeClr val="tx1"/>
-              </a:solidFill>
-            </a:endParaRPr>
-          </a:p>
-        </p:txBody>
-      </p:sp>
-      <p:sp>
-        <p:nvSpPr>
-          <p:cNvPr id="7" name="Rectangle 6">
-            <a:extLst>
-              <a:ext uri="{FF2B5EF4-FFF2-40B4-BE49-F238E27FC236}">
-                <a16:creationId xmlns:a16="http://schemas.microsoft.com/office/drawing/2014/main" id="{28E28B05-C518-793D-1FF8-DDB3F1934355}"/>
-              </a:ext>
-            </a:extLst>
-          </p:cNvPr>
-          <p:cNvSpPr/>
-          <p:nvPr/>
-        </p:nvSpPr>
-        <p:spPr>
-          <a:xfrm>
-            <a:off x="1054556" y="3992104"/>
-            <a:ext cx="1883849" cy="461665"/>
-          </a:xfrm>
-          <a:prstGeom prst="rect">
-            <a:avLst/>
-          </a:prstGeom>
-        </p:spPr>
-        <p:txBody>
-          <a:bodyPr wrap="none">
-            <a:spAutoFit/>
-          </a:bodyPr>
-          <a:lstStyle/>
-          <a:p>
-            <a:r>
-              <a:rPr lang="en-US" sz="2400" dirty="0">
-                <a:solidFill>
-                  <a:srgbClr val="FF0000"/>
-                </a:solidFill>
-                <a:latin typeface="Consolas" panose="020B0609020204030204" pitchFamily="49" charset="0"/>
-                <a:cs typeface="Consolas" panose="020B0609020204030204" pitchFamily="49" charset="0"/>
-              </a:rPr>
-              <a:t>0xEE8C90A7</a:t>
-            </a:r>
-          </a:p>
-        </p:txBody>
-      </p:sp>
-    </p:spTree>
-    <p:extLst>
-      <p:ext uri="{BB962C8B-B14F-4D97-AF65-F5344CB8AC3E}">
-        <p14:creationId xmlns:p14="http://schemas.microsoft.com/office/powerpoint/2010/main" val="1650360982"/>
-      </p:ext>
-    </p:extLst>
-  </p:cSld>
-  <p:clrMapOvr>
-    <a:masterClrMapping/>
-  </p:clrMapOvr>
-  <mc:AlternateContent xmlns:mc="http://schemas.openxmlformats.org/markup-compatibility/2006" xmlns:p14="http://schemas.microsoft.com/office/powerpoint/2010/main">
-    <mc:Choice Requires="p14">
-      <p:transition p14:dur="0"/>
-    </mc:Choice>
-    <mc:Fallback xmlns="">
-      <p:transition/>
-    </mc:Fallback>
-  </mc:AlternateContent>
-  <p:timing>
-    <p:tnLst>
-      <p:par>
-        <p:cTn id="1" dur="indefinite" restart="never" nodeType="tmRoot">
-          <p:childTnLst>
-            <p:seq concurrent="1" nextAc="seek">
-              <p:cTn id="2" dur="indefinite" nodeType="mainSeq">
-                <p:childTnLst>
-                  <p:par>
-                    <p:cTn id="3" fill="hold">
-                      <p:stCondLst>
-                        <p:cond delay="indefinite"/>
-                      </p:stCondLst>
-                      <p:childTnLst>
-                        <p:par>
-                          <p:cTn id="4" fill="hold">
-                            <p:stCondLst>
-                              <p:cond delay="0"/>
-                            </p:stCondLst>
-                            <p:childTnLst>
-                              <p:par>
-                                <p:cTn id="5" presetID="1" presetClass="entr" presetSubtype="0" fill="hold" grpId="0" nodeType="clickEffect">
-                                  <p:stCondLst>
-                                    <p:cond delay="0"/>
-                                  </p:stCondLst>
-                                  <p:childTnLst>
-                                    <p:set>
-                                      <p:cBhvr>
-                                        <p:cTn id="6" dur="1" fill="hold">
-                                          <p:stCondLst>
-                                            <p:cond delay="0"/>
-                                          </p:stCondLst>
-                                        </p:cTn>
-                                        <p:tgtEl>
-                                          <p:spTgt spid="5"/>
-                                        </p:tgtEl>
-                                        <p:attrNameLst>
-                                          <p:attrName>style.visibility</p:attrName>
-                                        </p:attrNameLst>
-                                      </p:cBhvr>
-                                      <p:to>
-                                        <p:strVal val="visible"/>
-                                      </p:to>
-                                    </p:set>
-                                  </p:childTnLst>
-                                </p:cTn>
-                              </p:par>
-                            </p:childTnLst>
-                          </p:cTn>
-                        </p:par>
-                      </p:childTnLst>
-                    </p:cTn>
-                  </p:par>
-                  <p:par>
-                    <p:cTn id="7" fill="hold">
-                      <p:stCondLst>
-                        <p:cond delay="indefinite"/>
-                      </p:stCondLst>
-                      <p:childTnLst>
-                        <p:par>
-                          <p:cTn id="8" fill="hold">
-                            <p:stCondLst>
-                              <p:cond delay="0"/>
-                            </p:stCondLst>
-                            <p:childTnLst>
-                              <p:par>
-                                <p:cTn id="9" presetID="1" presetClass="entr" presetSubtype="0" fill="hold" grpId="0" nodeType="clickEffect">
-                                  <p:stCondLst>
-                                    <p:cond delay="0"/>
-                                  </p:stCondLst>
-                                  <p:childTnLst>
-                                    <p:set>
-                                      <p:cBhvr>
-                                        <p:cTn id="10" dur="1" fill="hold">
-                                          <p:stCondLst>
-                                            <p:cond delay="0"/>
-                                          </p:stCondLst>
-                                        </p:cTn>
-                                        <p:tgtEl>
-                                          <p:spTgt spid="7"/>
-                                        </p:tgtEl>
-                                        <p:attrNameLst>
-                                          <p:attrName>style.visibility</p:attrName>
-                                        </p:attrNameLst>
-                                      </p:cBhvr>
-                                      <p:to>
-                                        <p:strVal val="visible"/>
-                                      </p:to>
-                                    </p:set>
-                                  </p:childTnLst>
-                                </p:cTn>
-                              </p:par>
-                            </p:childTnLst>
-                          </p:cTn>
-                        </p:par>
-                      </p:childTnLst>
-                    </p:cTn>
-                  </p:par>
-                </p:childTnLst>
-              </p:cTn>
-              <p:prevCondLst>
-                <p:cond evt="onPrev" delay="0">
-                  <p:tgtEl>
-                    <p:sldTgt/>
-                  </p:tgtEl>
-                </p:cond>
-              </p:prevCondLst>
-              <p:nextCondLst>
-                <p:cond evt="onNext" delay="0">
-                  <p:tgtEl>
-                    <p:sldTgt/>
-                  </p:tgtEl>
-                </p:cond>
-              </p:nextCondLst>
-            </p:seq>
-          </p:childTnLst>
-        </p:cTn>
-      </p:par>
-    </p:tnLst>
-    <p:bldLst>
-      <p:bldP spid="5" grpId="0"/>
-      <p:bldP spid="7" grpId="0"/>
-    </p:bldLst>
-  </p:timing>
-</p:sld>
-</file>
-
-<file path=ppt/slides/slide11.xml><?xml version="1.0" encoding="utf-8"?>
-<p:sld xmlns:a="http://schemas.openxmlformats.org/drawingml/2006/main" xmlns:r="http://schemas.openxmlformats.org/officeDocument/2006/relationships" xmlns:p="http://schemas.openxmlformats.org/presentationml/2006/main">
-  <p:cSld>
-    <p:spTree>
-      <p:nvGrpSpPr>
-        <p:cNvPr id="1" name="">
-          <a:extLst>
-            <a:ext uri="{FF2B5EF4-FFF2-40B4-BE49-F238E27FC236}">
               <a16:creationId xmlns:a16="http://schemas.microsoft.com/office/drawing/2014/main" id="{6FDD13A2-283C-C569-EF1A-CBC7504FEDDE}"/>
             </a:ext>
           </a:extLst>
@@ -9203,7 +9040,7 @@
             <a:fld id="{AEE14D4A-FE32-40AF-B06D-E9622816B101}" type="slidenum">
               <a:rPr lang="en-US" smtClean="0"/>
               <a:pPr/>
-              <a:t>11</a:t>
+              <a:t>10</a:t>
             </a:fld>
             <a:endParaRPr lang="en-US"/>
           </a:p>
@@ -9325,7 +9162,7 @@
             <a:pPr lvl="1"/>
             <a:r>
               <a:rPr lang="en-US" dirty="0"/>
-              <a:t>r0 after load:</a:t>
+              <a:t>r0 after store:</a:t>
             </a:r>
           </a:p>
           <a:p>
@@ -9354,7 +9191,7 @@
             <a:pPr lvl="1"/>
             <a:r>
               <a:rPr lang="en-US" dirty="0"/>
-              <a:t>r0 after load:</a:t>
+              <a:t>r0 after store:</a:t>
             </a:r>
           </a:p>
           <a:p>
@@ -9737,7 +9574,7 @@
 </p:sld>
 </file>
 
-<file path=ppt/slides/slide12.xml><?xml version="1.0" encoding="utf-8"?>
+<file path=ppt/slides/slide11.xml><?xml version="1.0" encoding="utf-8"?>
 <p:sld xmlns:a="http://schemas.openxmlformats.org/drawingml/2006/main" xmlns:r="http://schemas.openxmlformats.org/officeDocument/2006/relationships" xmlns:p="http://schemas.openxmlformats.org/presentationml/2006/main">
   <p:cSld>
     <p:spTree>
@@ -9806,7 +9643,7 @@
             <a:fld id="{AEE14D4A-FE32-40AF-B06D-E9622816B101}" type="slidenum">
               <a:rPr lang="en-US" smtClean="0"/>
               <a:pPr/>
-              <a:t>12</a:t>
+              <a:t>11</a:t>
             </a:fld>
             <a:endParaRPr lang="en-US"/>
           </a:p>
@@ -10908,7 +10745,7 @@
 </p:sld>
 </file>
 
-<file path=ppt/slides/slide13.xml><?xml version="1.0" encoding="utf-8"?>
+<file path=ppt/slides/slide12.xml><?xml version="1.0" encoding="utf-8"?>
 <p:sld xmlns:a="http://schemas.openxmlformats.org/drawingml/2006/main" xmlns:r="http://schemas.openxmlformats.org/officeDocument/2006/relationships" xmlns:p="http://schemas.openxmlformats.org/presentationml/2006/main">
   <p:cSld>
     <p:spTree>
@@ -10983,7 +10820,7 @@
             <a:fld id="{AEE14D4A-FE32-40AF-B06D-E9622816B101}" type="slidenum">
               <a:rPr lang="en-US" smtClean="0"/>
               <a:pPr/>
-              <a:t>13</a:t>
+              <a:t>12</a:t>
             </a:fld>
             <a:endParaRPr lang="en-US"/>
           </a:p>
@@ -11035,7 +10872,7 @@
             <a:pPr lvl="1"/>
             <a:r>
               <a:rPr lang="en-US" dirty="0"/>
-              <a:t>r0 after load: 0x20008000</a:t>
+              <a:t>r0 after store: 0x20008000</a:t>
             </a:r>
           </a:p>
           <a:p>
@@ -12006,7 +11843,7 @@
 </p:sld>
 </file>
 
-<file path=ppt/slides/slide14.xml><?xml version="1.0" encoding="utf-8"?>
+<file path=ppt/slides/slide13.xml><?xml version="1.0" encoding="utf-8"?>
 <p:sld xmlns:a="http://schemas.openxmlformats.org/drawingml/2006/main" xmlns:r="http://schemas.openxmlformats.org/officeDocument/2006/relationships" xmlns:p="http://schemas.openxmlformats.org/presentationml/2006/main">
   <p:cSld>
     <p:spTree>
@@ -12081,7 +11918,7 @@
             <a:fld id="{AEE14D4A-FE32-40AF-B06D-E9622816B101}" type="slidenum">
               <a:rPr lang="en-US" smtClean="0"/>
               <a:pPr/>
-              <a:t>14</a:t>
+              <a:t>13</a:t>
             </a:fld>
             <a:endParaRPr lang="en-US"/>
           </a:p>
@@ -12141,7 +11978,7 @@
             <a:pPr lvl="1"/>
             <a:r>
               <a:rPr lang="en-US" dirty="0"/>
-              <a:t>r0 after load: 0x20008004</a:t>
+              <a:t>r0 after store: 0x20008004</a:t>
             </a:r>
           </a:p>
           <a:p>
@@ -13085,7 +12922,7 @@
 </p:sld>
 </file>
 
-<file path=ppt/slides/slide15.xml><?xml version="1.0" encoding="utf-8"?>
+<file path=ppt/slides/slide14.xml><?xml version="1.0" encoding="utf-8"?>
 <p:sld xmlns:a="http://schemas.openxmlformats.org/drawingml/2006/main" xmlns:r="http://schemas.openxmlformats.org/officeDocument/2006/relationships" xmlns:p="http://schemas.openxmlformats.org/presentationml/2006/main">
   <p:cSld>
     <p:spTree>
@@ -13142,7 +12979,7 @@
             <a:fld id="{3CC63E4C-4642-794D-A2FD-70F6B81535F5}" type="slidenum">
               <a:rPr lang="en-US" smtClean="0"/>
               <a:pPr/>
-              <a:t>15</a:t>
+              <a:t>14</a:t>
             </a:fld>
             <a:endParaRPr lang="en-US" dirty="0"/>
           </a:p>
@@ -13788,7 +13625,7 @@
 </p:sld>
 </file>
 
-<file path=ppt/slides/slide16.xml><?xml version="1.0" encoding="utf-8"?>
+<file path=ppt/slides/slide15.xml><?xml version="1.0" encoding="utf-8"?>
 <p:sld xmlns:a="http://schemas.openxmlformats.org/drawingml/2006/main" xmlns:r="http://schemas.openxmlformats.org/officeDocument/2006/relationships" xmlns:p="http://schemas.openxmlformats.org/presentationml/2006/main">
   <p:cSld>
     <p:spTree>
@@ -13822,7 +13659,7 @@
           <a:p>
             <a:r>
               <a:rPr lang="en-US" dirty="0"/>
-              <a:t>Question: Data Alignment</a:t>
+              <a:t>Data Alignment</a:t>
             </a:r>
           </a:p>
         </p:txBody>
@@ -13845,7 +13682,7 @@
             <a:fld id="{3CC63E4C-4642-794D-A2FD-70F6B81535F5}" type="slidenum">
               <a:rPr lang="en-US" smtClean="0"/>
               <a:pPr/>
-              <a:t>16</a:t>
+              <a:t>15</a:t>
             </a:fld>
             <a:endParaRPr lang="en-US" dirty="0"/>
           </a:p>
@@ -14102,7 +13939,7 @@
 </p:sld>
 </file>
 
-<file path=ppt/slides/slide17.xml><?xml version="1.0" encoding="utf-8"?>
+<file path=ppt/slides/slide16.xml><?xml version="1.0" encoding="utf-8"?>
 <p:sld xmlns:a="http://schemas.openxmlformats.org/drawingml/2006/main" xmlns:r="http://schemas.openxmlformats.org/officeDocument/2006/relationships" xmlns:p="http://schemas.openxmlformats.org/presentationml/2006/main">
   <p:cSld>
     <p:spTree>
@@ -14141,8 +13978,13 @@
           <a:p>
             <a:r>
               <a:rPr lang="en-US" dirty="0"/>
-              <a:t>Answer: Data Align</a:t>
-            </a:r>
+              <a:t>Data Alignment </a:t>
+            </a:r>
+            <a:r>
+              <a:rPr lang="en-US" altLang="zh-CN" dirty="0"/>
+              <a:t>ANS</a:t>
+            </a:r>
+            <a:endParaRPr lang="en-US" dirty="0"/>
           </a:p>
         </p:txBody>
       </p:sp>
@@ -14164,7 +14006,7 @@
             <a:fld id="{3CC63E4C-4642-794D-A2FD-70F6B81535F5}" type="slidenum">
               <a:rPr lang="en-US" smtClean="0"/>
               <a:pPr/>
-              <a:t>17</a:t>
+              <a:t>16</a:t>
             </a:fld>
             <a:endParaRPr lang="en-US" dirty="0"/>
           </a:p>
@@ -14901,7 +14743,7 @@
 </p:sld>
 </file>
 
-<file path=ppt/slides/slide18.xml><?xml version="1.0" encoding="utf-8"?>
+<file path=ppt/slides/slide17.xml><?xml version="1.0" encoding="utf-8"?>
 <p:sld xmlns:a="http://schemas.openxmlformats.org/drawingml/2006/main" xmlns:r="http://schemas.openxmlformats.org/officeDocument/2006/relationships" xmlns:p="http://schemas.openxmlformats.org/presentationml/2006/main">
   <p:cSld>
     <p:spTree>
@@ -14940,7 +14782,7 @@
           <a:p>
             <a:r>
               <a:rPr lang="en-US" dirty="0"/>
-              <a:t>Question: Data Align</a:t>
+              <a:t>Data Alignment</a:t>
             </a:r>
           </a:p>
         </p:txBody>
@@ -14963,7 +14805,7 @@
             <a:fld id="{3CC63E4C-4642-794D-A2FD-70F6B81535F5}" type="slidenum">
               <a:rPr lang="en-US" smtClean="0"/>
               <a:pPr/>
-              <a:t>18</a:t>
+              <a:t>17</a:t>
             </a:fld>
             <a:endParaRPr lang="en-US" dirty="0"/>
           </a:p>
@@ -15144,7 +14986,7 @@
                   <a:prstClr val="black"/>
                 </a:solidFill>
               </a:rPr>
-              <a:t>(a) What is the address of MSB of the word at address 102, , assuming Little-Endian ordering?</a:t>
+              <a:t>(a) What is the address of MSB of the word at address 102, assuming Little-Endian ordering?</a:t>
             </a:r>
           </a:p>
           <a:p>
@@ -15155,7 +14997,7 @@
                   <a:prstClr val="black"/>
                 </a:solidFill>
               </a:rPr>
-              <a:t>(b) What is the address of LSB of the word at address 102, , assuming Little-Endian ordering?</a:t>
+              <a:t>(b) What is the address of LSB of the word at address 102, assuming Little-Endian ordering?</a:t>
             </a:r>
           </a:p>
           <a:p>
@@ -15228,7 +15070,7 @@
 </p:sld>
 </file>
 
-<file path=ppt/slides/slide19.xml><?xml version="1.0" encoding="utf-8"?>
+<file path=ppt/slides/slide18.xml><?xml version="1.0" encoding="utf-8"?>
 <p:sld xmlns:a="http://schemas.openxmlformats.org/drawingml/2006/main" xmlns:r="http://schemas.openxmlformats.org/officeDocument/2006/relationships" xmlns:p="http://schemas.openxmlformats.org/presentationml/2006/main">
   <p:cSld>
     <p:spTree>
@@ -15267,7 +15109,7 @@
           <a:p>
             <a:r>
               <a:rPr lang="en-US" dirty="0"/>
-              <a:t>Answer: Data Align</a:t>
+              <a:t>Data Alignment ANS</a:t>
             </a:r>
           </a:p>
         </p:txBody>
@@ -15290,7 +15132,7 @@
             <a:fld id="{3CC63E4C-4642-794D-A2FD-70F6B81535F5}" type="slidenum">
               <a:rPr lang="en-US" smtClean="0"/>
               <a:pPr/>
-              <a:t>19</a:t>
+              <a:t>18</a:t>
             </a:fld>
             <a:endParaRPr lang="en-US" dirty="0"/>
           </a:p>
@@ -15471,7 +15313,7 @@
                   <a:prstClr val="black"/>
                 </a:solidFill>
               </a:rPr>
-              <a:t>(a) What is the address of MSB of the word at address 102, , assuming Little-Endian ordering?</a:t>
+              <a:t>(a) What is the address of MSB of the word at address 102, assuming Little-Endian ordering?</a:t>
             </a:r>
           </a:p>
           <a:p>
@@ -15482,7 +15324,7 @@
                   <a:prstClr val="black"/>
                 </a:solidFill>
               </a:rPr>
-              <a:t>(b) What is the address of LSB of the word at address 102, , assuming Little-Endian ordering?</a:t>
+              <a:t>(b) What is the address of LSB of the word at address 102, assuming Little-Endian ordering?</a:t>
             </a:r>
           </a:p>
           <a:p>
@@ -15554,7 +15396,7 @@
                   <a:prstClr val="black"/>
                 </a:solidFill>
               </a:rPr>
-              <a:t>(c) 2 cycles. </a:t>
+              <a:t>(c) 2 cycles</a:t>
             </a:r>
           </a:p>
           <a:p>
@@ -15565,7 +15407,7 @@
                   <a:prstClr val="black"/>
                 </a:solidFill>
               </a:rPr>
-              <a:t>(d) 1cycle. </a:t>
+              <a:t>(d) 1cycle</a:t>
             </a:r>
             <a:endParaRPr lang="en-US" sz="900" dirty="0">
               <a:solidFill>
@@ -15616,6 +15458,545 @@
 </p:sld>
 </file>
 
+<file path=ppt/slides/slide19.xml><?xml version="1.0" encoding="utf-8"?>
+<p:sld xmlns:a="http://schemas.openxmlformats.org/drawingml/2006/main" xmlns:r="http://schemas.openxmlformats.org/officeDocument/2006/relationships" xmlns:p="http://schemas.openxmlformats.org/presentationml/2006/main">
+  <p:cSld>
+    <p:spTree>
+      <p:nvGrpSpPr>
+        <p:cNvPr id="1" name=""/>
+        <p:cNvGrpSpPr/>
+        <p:nvPr/>
+      </p:nvGrpSpPr>
+      <p:grpSpPr>
+        <a:xfrm>
+          <a:off x="0" y="0"/>
+          <a:ext cx="0" cy="0"/>
+          <a:chOff x="0" y="0"/>
+          <a:chExt cx="0" cy="0"/>
+        </a:xfrm>
+      </p:grpSpPr>
+      <p:sp>
+        <p:nvSpPr>
+          <p:cNvPr id="3" name="Slide Number Placeholder 2"/>
+          <p:cNvSpPr>
+            <a:spLocks noGrp="1"/>
+          </p:cNvSpPr>
+          <p:nvPr>
+            <p:ph type="sldNum" sz="quarter" idx="12"/>
+          </p:nvPr>
+        </p:nvSpPr>
+        <p:spPr/>
+        <p:txBody>
+          <a:bodyPr/>
+          <a:lstStyle/>
+          <a:p>
+            <a:fld id="{3CC63E4C-4642-794D-A2FD-70F6B81535F5}" type="slidenum">
+              <a:rPr lang="en-US" smtClean="0"/>
+              <a:pPr/>
+              <a:t>19</a:t>
+            </a:fld>
+            <a:endParaRPr lang="en-US" dirty="0"/>
+          </a:p>
+        </p:txBody>
+      </p:sp>
+      <p:sp>
+        <p:nvSpPr>
+          <p:cNvPr id="4" name="Rectangle 3"/>
+          <p:cNvSpPr txBox="1">
+            <a:spLocks noChangeArrowheads="1"/>
+          </p:cNvSpPr>
+          <p:nvPr/>
+        </p:nvSpPr>
+        <p:spPr>
+          <a:xfrm>
+            <a:off x="267393" y="1447800"/>
+            <a:ext cx="8182841" cy="3581400"/>
+          </a:xfrm>
+          <a:prstGeom prst="rect">
+            <a:avLst/>
+          </a:prstGeom>
+        </p:spPr>
+        <p:txBody>
+          <a:bodyPr/>
+          <a:lstStyle>
+            <a:lvl1pPr marL="342900" indent="-342900" algn="l" defTabSz="457200" rtl="0" eaLnBrk="1" latinLnBrk="0" hangingPunct="1">
+              <a:spcBef>
+                <a:spcPct val="20000"/>
+              </a:spcBef>
+              <a:buFont typeface="Arial"/>
+              <a:buChar char="•"/>
+              <a:defRPr sz="3200" kern="1200">
+                <a:solidFill>
+                  <a:schemeClr val="tx1"/>
+                </a:solidFill>
+                <a:latin typeface="+mn-lt"/>
+                <a:ea typeface="+mn-ea"/>
+                <a:cs typeface="+mn-cs"/>
+              </a:defRPr>
+            </a:lvl1pPr>
+            <a:lvl2pPr marL="742950" indent="-285750" algn="l" defTabSz="457200" rtl="0" eaLnBrk="1" latinLnBrk="0" hangingPunct="1">
+              <a:spcBef>
+                <a:spcPct val="20000"/>
+              </a:spcBef>
+              <a:buFont typeface="Arial"/>
+              <a:buChar char="–"/>
+              <a:defRPr sz="2800" kern="1200">
+                <a:solidFill>
+                  <a:schemeClr val="tx1"/>
+                </a:solidFill>
+                <a:latin typeface="+mn-lt"/>
+                <a:ea typeface="+mn-ea"/>
+                <a:cs typeface="+mn-cs"/>
+              </a:defRPr>
+            </a:lvl2pPr>
+            <a:lvl3pPr marL="1143000" indent="-228600" algn="l" defTabSz="457200" rtl="0" eaLnBrk="1" latinLnBrk="0" hangingPunct="1">
+              <a:spcBef>
+                <a:spcPct val="20000"/>
+              </a:spcBef>
+              <a:buFont typeface="Arial"/>
+              <a:buChar char="•"/>
+              <a:defRPr sz="2400" kern="1200">
+                <a:solidFill>
+                  <a:schemeClr val="tx1"/>
+                </a:solidFill>
+                <a:latin typeface="+mn-lt"/>
+                <a:ea typeface="+mn-ea"/>
+                <a:cs typeface="+mn-cs"/>
+              </a:defRPr>
+            </a:lvl3pPr>
+            <a:lvl4pPr marL="1600200" indent="-228600" algn="l" defTabSz="457200" rtl="0" eaLnBrk="1" latinLnBrk="0" hangingPunct="1">
+              <a:spcBef>
+                <a:spcPct val="20000"/>
+              </a:spcBef>
+              <a:buFont typeface="Arial"/>
+              <a:buChar char="–"/>
+              <a:defRPr sz="2000" kern="1200">
+                <a:solidFill>
+                  <a:schemeClr val="tx1"/>
+                </a:solidFill>
+                <a:latin typeface="+mn-lt"/>
+                <a:ea typeface="+mn-ea"/>
+                <a:cs typeface="+mn-cs"/>
+              </a:defRPr>
+            </a:lvl4pPr>
+            <a:lvl5pPr marL="2057400" indent="-228600" algn="l" defTabSz="457200" rtl="0" eaLnBrk="1" latinLnBrk="0" hangingPunct="1">
+              <a:spcBef>
+                <a:spcPct val="20000"/>
+              </a:spcBef>
+              <a:buFont typeface="Arial"/>
+              <a:buChar char="»"/>
+              <a:defRPr sz="2000" kern="1200">
+                <a:solidFill>
+                  <a:schemeClr val="tx1"/>
+                </a:solidFill>
+                <a:latin typeface="+mn-lt"/>
+                <a:ea typeface="+mn-ea"/>
+                <a:cs typeface="+mn-cs"/>
+              </a:defRPr>
+            </a:lvl5pPr>
+            <a:lvl6pPr marL="2514600" indent="-228600" algn="l" defTabSz="457200" rtl="0" eaLnBrk="1" latinLnBrk="0" hangingPunct="1">
+              <a:spcBef>
+                <a:spcPct val="20000"/>
+              </a:spcBef>
+              <a:buFont typeface="Arial"/>
+              <a:buChar char="•"/>
+              <a:defRPr sz="2000" kern="1200">
+                <a:solidFill>
+                  <a:schemeClr val="tx1"/>
+                </a:solidFill>
+                <a:latin typeface="+mn-lt"/>
+                <a:ea typeface="+mn-ea"/>
+                <a:cs typeface="+mn-cs"/>
+              </a:defRPr>
+            </a:lvl6pPr>
+            <a:lvl7pPr marL="2971800" indent="-228600" algn="l" defTabSz="457200" rtl="0" eaLnBrk="1" latinLnBrk="0" hangingPunct="1">
+              <a:spcBef>
+                <a:spcPct val="20000"/>
+              </a:spcBef>
+              <a:buFont typeface="Arial"/>
+              <a:buChar char="•"/>
+              <a:defRPr sz="2000" kern="1200">
+                <a:solidFill>
+                  <a:schemeClr val="tx1"/>
+                </a:solidFill>
+                <a:latin typeface="+mn-lt"/>
+                <a:ea typeface="+mn-ea"/>
+                <a:cs typeface="+mn-cs"/>
+              </a:defRPr>
+            </a:lvl7pPr>
+            <a:lvl8pPr marL="3429000" indent="-228600" algn="l" defTabSz="457200" rtl="0" eaLnBrk="1" latinLnBrk="0" hangingPunct="1">
+              <a:spcBef>
+                <a:spcPct val="20000"/>
+              </a:spcBef>
+              <a:buFont typeface="Arial"/>
+              <a:buChar char="•"/>
+              <a:defRPr sz="2000" kern="1200">
+                <a:solidFill>
+                  <a:schemeClr val="tx1"/>
+                </a:solidFill>
+                <a:latin typeface="+mn-lt"/>
+                <a:ea typeface="+mn-ea"/>
+                <a:cs typeface="+mn-cs"/>
+              </a:defRPr>
+            </a:lvl8pPr>
+            <a:lvl9pPr marL="3886200" indent="-228600" algn="l" defTabSz="457200" rtl="0" eaLnBrk="1" latinLnBrk="0" hangingPunct="1">
+              <a:spcBef>
+                <a:spcPct val="20000"/>
+              </a:spcBef>
+              <a:buFont typeface="Arial"/>
+              <a:buChar char="•"/>
+              <a:defRPr sz="2000" kern="1200">
+                <a:solidFill>
+                  <a:schemeClr val="tx1"/>
+                </a:solidFill>
+                <a:latin typeface="+mn-lt"/>
+                <a:ea typeface="+mn-ea"/>
+                <a:cs typeface="+mn-cs"/>
+              </a:defRPr>
+            </a:lvl9pPr>
+          </a:lstStyle>
+          <a:p>
+            <a:pPr marL="257175" indent="-257175" defTabSz="342900"/>
+            <a:r>
+              <a:rPr lang="en-US" sz="2400" b="0" dirty="0">
+                <a:solidFill>
+                  <a:prstClr val="black"/>
+                </a:solidFill>
+              </a:rPr>
+              <a:t>Q:  Assume a byte-addressable memory with a data bus that is 32 bits (4 bytes) wide. </a:t>
+            </a:r>
+          </a:p>
+          <a:p>
+            <a:pPr marL="657225" lvl="1" indent="-257175" defTabSz="342900"/>
+            <a:r>
+              <a:rPr lang="en-US" altLang="zh-CN" sz="2000" b="0" dirty="0">
+                <a:solidFill>
+                  <a:prstClr val="black"/>
+                </a:solidFill>
+              </a:rPr>
+              <a:t>It takes ____ memory cycle(s) to read a Byte from memory</a:t>
+            </a:r>
+          </a:p>
+          <a:p>
+            <a:pPr marL="657225" lvl="1" indent="-257175" defTabSz="342900"/>
+            <a:r>
+              <a:rPr lang="en-US" altLang="zh-CN" sz="2000" b="0" dirty="0">
+                <a:solidFill>
+                  <a:prstClr val="black"/>
+                </a:solidFill>
+              </a:rPr>
+              <a:t>It takes ____ memory cycle(s) to read a half-word from memory</a:t>
+            </a:r>
+          </a:p>
+          <a:p>
+            <a:pPr marL="657225" lvl="1" indent="-257175" defTabSz="342900"/>
+            <a:r>
+              <a:rPr lang="en-US" altLang="zh-CN" sz="2000" b="0" dirty="0">
+                <a:solidFill>
+                  <a:prstClr val="black"/>
+                </a:solidFill>
+              </a:rPr>
+              <a:t>It takes ____ memory cycle(s) to read a word from memory</a:t>
+            </a:r>
+          </a:p>
+          <a:p>
+            <a:pPr marL="657225" lvl="1" indent="-257175" defTabSz="342900"/>
+            <a:r>
+              <a:rPr lang="en-US" altLang="zh-CN" sz="2000" b="0" dirty="0">
+                <a:solidFill>
+                  <a:prstClr val="black"/>
+                </a:solidFill>
+              </a:rPr>
+              <a:t>It takes ____ memory cycle(s) to read a double word from memory</a:t>
+            </a:r>
+            <a:endParaRPr lang="en-US" sz="2400" b="0" dirty="0">
+              <a:solidFill>
+                <a:prstClr val="black"/>
+              </a:solidFill>
+              <a:latin typeface="Calibri"/>
+            </a:endParaRPr>
+          </a:p>
+        </p:txBody>
+      </p:sp>
+      <p:pic>
+        <p:nvPicPr>
+          <p:cNvPr id="5" name="Picture 4"/>
+          <p:cNvPicPr>
+            <a:picLocks noChangeAspect="1"/>
+          </p:cNvPicPr>
+          <p:nvPr/>
+        </p:nvPicPr>
+        <p:blipFill>
+          <a:blip r:embed="rId2"/>
+          <a:stretch>
+            <a:fillRect/>
+          </a:stretch>
+        </p:blipFill>
+        <p:spPr>
+          <a:xfrm>
+            <a:off x="5029200" y="-6804"/>
+            <a:ext cx="4067187" cy="1560642"/>
+          </a:xfrm>
+          <a:prstGeom prst="rect">
+            <a:avLst/>
+          </a:prstGeom>
+        </p:spPr>
+      </p:pic>
+      <p:sp>
+        <p:nvSpPr>
+          <p:cNvPr id="9" name="Title 1">
+            <a:extLst>
+              <a:ext uri="{FF2B5EF4-FFF2-40B4-BE49-F238E27FC236}">
+                <a16:creationId xmlns:a16="http://schemas.microsoft.com/office/drawing/2014/main" id="{78DA596E-85CA-C0C6-85A8-74A98C3DFFDB}"/>
+              </a:ext>
+            </a:extLst>
+          </p:cNvPr>
+          <p:cNvSpPr>
+            <a:spLocks noGrp="1"/>
+          </p:cNvSpPr>
+          <p:nvPr>
+            <p:ph type="title"/>
+          </p:nvPr>
+        </p:nvSpPr>
+        <p:spPr>
+          <a:xfrm>
+            <a:off x="0" y="22225"/>
+            <a:ext cx="8229600" cy="1143000"/>
+          </a:xfrm>
+        </p:spPr>
+        <p:txBody>
+          <a:bodyPr/>
+          <a:lstStyle/>
+          <a:p>
+            <a:r>
+              <a:rPr lang="en-US" dirty="0"/>
+              <a:t>Memory Cycles</a:t>
+            </a:r>
+          </a:p>
+        </p:txBody>
+      </p:sp>
+    </p:spTree>
+    <p:extLst>
+      <p:ext uri="{BB962C8B-B14F-4D97-AF65-F5344CB8AC3E}">
+        <p14:creationId xmlns:p14="http://schemas.microsoft.com/office/powerpoint/2010/main" val="1910717593"/>
+      </p:ext>
+    </p:extLst>
+  </p:cSld>
+  <p:clrMapOvr>
+    <a:masterClrMapping/>
+  </p:clrMapOvr>
+  <p:transition>
+    <p:pull dir="ru"/>
+  </p:transition>
+  <p:timing>
+    <p:tnLst>
+      <p:par>
+        <p:cTn id="1" dur="indefinite" restart="never" nodeType="tmRoot">
+          <p:childTnLst>
+            <p:seq concurrent="1" nextAc="seek">
+              <p:cTn id="2" dur="indefinite" nodeType="mainSeq">
+                <p:childTnLst>
+                  <p:par>
+                    <p:cTn id="3" fill="hold">
+                      <p:stCondLst>
+                        <p:cond delay="indefinite"/>
+                      </p:stCondLst>
+                      <p:childTnLst>
+                        <p:par>
+                          <p:cTn id="4" fill="hold">
+                            <p:stCondLst>
+                              <p:cond delay="0"/>
+                            </p:stCondLst>
+                            <p:childTnLst>
+                              <p:par>
+                                <p:cTn id="5" presetID="1" presetClass="entr" presetSubtype="0" fill="hold" grpId="0" nodeType="clickEffect">
+                                  <p:stCondLst>
+                                    <p:cond delay="0"/>
+                                  </p:stCondLst>
+                                  <p:childTnLst>
+                                    <p:set>
+                                      <p:cBhvr>
+                                        <p:cTn id="6" dur="1" fill="hold">
+                                          <p:stCondLst>
+                                            <p:cond delay="0"/>
+                                          </p:stCondLst>
+                                        </p:cTn>
+                                        <p:tgtEl>
+                                          <p:spTgt spid="4">
+                                            <p:txEl>
+                                              <p:pRg st="0" end="0"/>
+                                            </p:txEl>
+                                          </p:spTgt>
+                                        </p:tgtEl>
+                                        <p:attrNameLst>
+                                          <p:attrName>style.visibility</p:attrName>
+                                        </p:attrNameLst>
+                                      </p:cBhvr>
+                                      <p:to>
+                                        <p:strVal val="visible"/>
+                                      </p:to>
+                                    </p:set>
+                                  </p:childTnLst>
+                                </p:cTn>
+                              </p:par>
+                              <p:par>
+                                <p:cTn id="7" presetID="1" presetClass="entr" presetSubtype="0" fill="hold" grpId="0" nodeType="withEffect">
+                                  <p:stCondLst>
+                                    <p:cond delay="0"/>
+                                  </p:stCondLst>
+                                  <p:childTnLst>
+                                    <p:set>
+                                      <p:cBhvr>
+                                        <p:cTn id="8" dur="1" fill="hold">
+                                          <p:stCondLst>
+                                            <p:cond delay="0"/>
+                                          </p:stCondLst>
+                                        </p:cTn>
+                                        <p:tgtEl>
+                                          <p:spTgt spid="4">
+                                            <p:txEl>
+                                              <p:pRg st="1" end="1"/>
+                                            </p:txEl>
+                                          </p:spTgt>
+                                        </p:tgtEl>
+                                        <p:attrNameLst>
+                                          <p:attrName>style.visibility</p:attrName>
+                                        </p:attrNameLst>
+                                      </p:cBhvr>
+                                      <p:to>
+                                        <p:strVal val="visible"/>
+                                      </p:to>
+                                    </p:set>
+                                  </p:childTnLst>
+                                </p:cTn>
+                              </p:par>
+                              <p:par>
+                                <p:cTn id="9" presetID="1" presetClass="entr" presetSubtype="0" fill="hold" grpId="0" nodeType="withEffect">
+                                  <p:stCondLst>
+                                    <p:cond delay="0"/>
+                                  </p:stCondLst>
+                                  <p:childTnLst>
+                                    <p:set>
+                                      <p:cBhvr>
+                                        <p:cTn id="10" dur="1" fill="hold">
+                                          <p:stCondLst>
+                                            <p:cond delay="0"/>
+                                          </p:stCondLst>
+                                        </p:cTn>
+                                        <p:tgtEl>
+                                          <p:spTgt spid="4">
+                                            <p:txEl>
+                                              <p:pRg st="2" end="2"/>
+                                            </p:txEl>
+                                          </p:spTgt>
+                                        </p:tgtEl>
+                                        <p:attrNameLst>
+                                          <p:attrName>style.visibility</p:attrName>
+                                        </p:attrNameLst>
+                                      </p:cBhvr>
+                                      <p:to>
+                                        <p:strVal val="visible"/>
+                                      </p:to>
+                                    </p:set>
+                                  </p:childTnLst>
+                                </p:cTn>
+                              </p:par>
+                              <p:par>
+                                <p:cTn id="11" presetID="1" presetClass="entr" presetSubtype="0" fill="hold" grpId="0" nodeType="withEffect">
+                                  <p:stCondLst>
+                                    <p:cond delay="0"/>
+                                  </p:stCondLst>
+                                  <p:childTnLst>
+                                    <p:set>
+                                      <p:cBhvr>
+                                        <p:cTn id="12" dur="1" fill="hold">
+                                          <p:stCondLst>
+                                            <p:cond delay="0"/>
+                                          </p:stCondLst>
+                                        </p:cTn>
+                                        <p:tgtEl>
+                                          <p:spTgt spid="4">
+                                            <p:txEl>
+                                              <p:pRg st="3" end="3"/>
+                                            </p:txEl>
+                                          </p:spTgt>
+                                        </p:tgtEl>
+                                        <p:attrNameLst>
+                                          <p:attrName>style.visibility</p:attrName>
+                                        </p:attrNameLst>
+                                      </p:cBhvr>
+                                      <p:to>
+                                        <p:strVal val="visible"/>
+                                      </p:to>
+                                    </p:set>
+                                  </p:childTnLst>
+                                </p:cTn>
+                              </p:par>
+                              <p:par>
+                                <p:cTn id="13" presetID="1" presetClass="entr" presetSubtype="0" fill="hold" grpId="0" nodeType="withEffect">
+                                  <p:stCondLst>
+                                    <p:cond delay="0"/>
+                                  </p:stCondLst>
+                                  <p:childTnLst>
+                                    <p:set>
+                                      <p:cBhvr>
+                                        <p:cTn id="14" dur="1" fill="hold">
+                                          <p:stCondLst>
+                                            <p:cond delay="0"/>
+                                          </p:stCondLst>
+                                        </p:cTn>
+                                        <p:tgtEl>
+                                          <p:spTgt spid="4">
+                                            <p:txEl>
+                                              <p:pRg st="4" end="4"/>
+                                            </p:txEl>
+                                          </p:spTgt>
+                                        </p:tgtEl>
+                                        <p:attrNameLst>
+                                          <p:attrName>style.visibility</p:attrName>
+                                        </p:attrNameLst>
+                                      </p:cBhvr>
+                                      <p:to>
+                                        <p:strVal val="visible"/>
+                                      </p:to>
+                                    </p:set>
+                                  </p:childTnLst>
+                                </p:cTn>
+                              </p:par>
+                            </p:childTnLst>
+                          </p:cTn>
+                        </p:par>
+                      </p:childTnLst>
+                    </p:cTn>
+                  </p:par>
+                </p:childTnLst>
+              </p:cTn>
+              <p:prevCondLst>
+                <p:cond evt="onPrev" delay="0">
+                  <p:tgtEl>
+                    <p:sldTgt/>
+                  </p:tgtEl>
+                </p:cond>
+              </p:prevCondLst>
+              <p:nextCondLst>
+                <p:cond evt="onNext" delay="0">
+                  <p:tgtEl>
+                    <p:sldTgt/>
+                  </p:tgtEl>
+                </p:cond>
+              </p:nextCondLst>
+            </p:seq>
+          </p:childTnLst>
+        </p:cTn>
+      </p:par>
+    </p:tnLst>
+    <p:bldLst>
+      <p:bldP spid="4" grpId="0" build="p"/>
+    </p:bldLst>
+  </p:timing>
+</p:sld>
+</file>
+
 <file path=ppt/slides/slide2.xml><?xml version="1.0" encoding="utf-8"?>
 <p:sld xmlns:a="http://schemas.openxmlformats.org/drawingml/2006/main" xmlns:r="http://schemas.openxmlformats.org/officeDocument/2006/relationships" xmlns:p="http://schemas.openxmlformats.org/presentationml/2006/main">
   <p:cSld>
@@ -15651,7 +16032,7 @@
             <a:pPr marL="119063" indent="-119063"/>
             <a:r>
               <a:rPr lang="en-US" altLang="zh-CN" dirty="0"/>
-              <a:t>Question: Endianness</a:t>
+              <a:t>Endianness</a:t>
             </a:r>
             <a:endParaRPr lang="en-US" dirty="0"/>
           </a:p>
@@ -19874,545 +20255,6 @@
       </p:grpSpPr>
       <p:sp>
         <p:nvSpPr>
-          <p:cNvPr id="3" name="Slide Number Placeholder 2"/>
-          <p:cNvSpPr>
-            <a:spLocks noGrp="1"/>
-          </p:cNvSpPr>
-          <p:nvPr>
-            <p:ph type="sldNum" sz="quarter" idx="12"/>
-          </p:nvPr>
-        </p:nvSpPr>
-        <p:spPr/>
-        <p:txBody>
-          <a:bodyPr/>
-          <a:lstStyle/>
-          <a:p>
-            <a:fld id="{3CC63E4C-4642-794D-A2FD-70F6B81535F5}" type="slidenum">
-              <a:rPr lang="en-US" smtClean="0"/>
-              <a:pPr/>
-              <a:t>20</a:t>
-            </a:fld>
-            <a:endParaRPr lang="en-US" dirty="0"/>
-          </a:p>
-        </p:txBody>
-      </p:sp>
-      <p:sp>
-        <p:nvSpPr>
-          <p:cNvPr id="4" name="Rectangle 3"/>
-          <p:cNvSpPr txBox="1">
-            <a:spLocks noChangeArrowheads="1"/>
-          </p:cNvSpPr>
-          <p:nvPr/>
-        </p:nvSpPr>
-        <p:spPr>
-          <a:xfrm>
-            <a:off x="267393" y="1447800"/>
-            <a:ext cx="8182841" cy="3581400"/>
-          </a:xfrm>
-          <a:prstGeom prst="rect">
-            <a:avLst/>
-          </a:prstGeom>
-        </p:spPr>
-        <p:txBody>
-          <a:bodyPr/>
-          <a:lstStyle>
-            <a:lvl1pPr marL="342900" indent="-342900" algn="l" defTabSz="457200" rtl="0" eaLnBrk="1" latinLnBrk="0" hangingPunct="1">
-              <a:spcBef>
-                <a:spcPct val="20000"/>
-              </a:spcBef>
-              <a:buFont typeface="Arial"/>
-              <a:buChar char="•"/>
-              <a:defRPr sz="3200" kern="1200">
-                <a:solidFill>
-                  <a:schemeClr val="tx1"/>
-                </a:solidFill>
-                <a:latin typeface="+mn-lt"/>
-                <a:ea typeface="+mn-ea"/>
-                <a:cs typeface="+mn-cs"/>
-              </a:defRPr>
-            </a:lvl1pPr>
-            <a:lvl2pPr marL="742950" indent="-285750" algn="l" defTabSz="457200" rtl="0" eaLnBrk="1" latinLnBrk="0" hangingPunct="1">
-              <a:spcBef>
-                <a:spcPct val="20000"/>
-              </a:spcBef>
-              <a:buFont typeface="Arial"/>
-              <a:buChar char="–"/>
-              <a:defRPr sz="2800" kern="1200">
-                <a:solidFill>
-                  <a:schemeClr val="tx1"/>
-                </a:solidFill>
-                <a:latin typeface="+mn-lt"/>
-                <a:ea typeface="+mn-ea"/>
-                <a:cs typeface="+mn-cs"/>
-              </a:defRPr>
-            </a:lvl2pPr>
-            <a:lvl3pPr marL="1143000" indent="-228600" algn="l" defTabSz="457200" rtl="0" eaLnBrk="1" latinLnBrk="0" hangingPunct="1">
-              <a:spcBef>
-                <a:spcPct val="20000"/>
-              </a:spcBef>
-              <a:buFont typeface="Arial"/>
-              <a:buChar char="•"/>
-              <a:defRPr sz="2400" kern="1200">
-                <a:solidFill>
-                  <a:schemeClr val="tx1"/>
-                </a:solidFill>
-                <a:latin typeface="+mn-lt"/>
-                <a:ea typeface="+mn-ea"/>
-                <a:cs typeface="+mn-cs"/>
-              </a:defRPr>
-            </a:lvl3pPr>
-            <a:lvl4pPr marL="1600200" indent="-228600" algn="l" defTabSz="457200" rtl="0" eaLnBrk="1" latinLnBrk="0" hangingPunct="1">
-              <a:spcBef>
-                <a:spcPct val="20000"/>
-              </a:spcBef>
-              <a:buFont typeface="Arial"/>
-              <a:buChar char="–"/>
-              <a:defRPr sz="2000" kern="1200">
-                <a:solidFill>
-                  <a:schemeClr val="tx1"/>
-                </a:solidFill>
-                <a:latin typeface="+mn-lt"/>
-                <a:ea typeface="+mn-ea"/>
-                <a:cs typeface="+mn-cs"/>
-              </a:defRPr>
-            </a:lvl4pPr>
-            <a:lvl5pPr marL="2057400" indent="-228600" algn="l" defTabSz="457200" rtl="0" eaLnBrk="1" latinLnBrk="0" hangingPunct="1">
-              <a:spcBef>
-                <a:spcPct val="20000"/>
-              </a:spcBef>
-              <a:buFont typeface="Arial"/>
-              <a:buChar char="»"/>
-              <a:defRPr sz="2000" kern="1200">
-                <a:solidFill>
-                  <a:schemeClr val="tx1"/>
-                </a:solidFill>
-                <a:latin typeface="+mn-lt"/>
-                <a:ea typeface="+mn-ea"/>
-                <a:cs typeface="+mn-cs"/>
-              </a:defRPr>
-            </a:lvl5pPr>
-            <a:lvl6pPr marL="2514600" indent="-228600" algn="l" defTabSz="457200" rtl="0" eaLnBrk="1" latinLnBrk="0" hangingPunct="1">
-              <a:spcBef>
-                <a:spcPct val="20000"/>
-              </a:spcBef>
-              <a:buFont typeface="Arial"/>
-              <a:buChar char="•"/>
-              <a:defRPr sz="2000" kern="1200">
-                <a:solidFill>
-                  <a:schemeClr val="tx1"/>
-                </a:solidFill>
-                <a:latin typeface="+mn-lt"/>
-                <a:ea typeface="+mn-ea"/>
-                <a:cs typeface="+mn-cs"/>
-              </a:defRPr>
-            </a:lvl6pPr>
-            <a:lvl7pPr marL="2971800" indent="-228600" algn="l" defTabSz="457200" rtl="0" eaLnBrk="1" latinLnBrk="0" hangingPunct="1">
-              <a:spcBef>
-                <a:spcPct val="20000"/>
-              </a:spcBef>
-              <a:buFont typeface="Arial"/>
-              <a:buChar char="•"/>
-              <a:defRPr sz="2000" kern="1200">
-                <a:solidFill>
-                  <a:schemeClr val="tx1"/>
-                </a:solidFill>
-                <a:latin typeface="+mn-lt"/>
-                <a:ea typeface="+mn-ea"/>
-                <a:cs typeface="+mn-cs"/>
-              </a:defRPr>
-            </a:lvl7pPr>
-            <a:lvl8pPr marL="3429000" indent="-228600" algn="l" defTabSz="457200" rtl="0" eaLnBrk="1" latinLnBrk="0" hangingPunct="1">
-              <a:spcBef>
-                <a:spcPct val="20000"/>
-              </a:spcBef>
-              <a:buFont typeface="Arial"/>
-              <a:buChar char="•"/>
-              <a:defRPr sz="2000" kern="1200">
-                <a:solidFill>
-                  <a:schemeClr val="tx1"/>
-                </a:solidFill>
-                <a:latin typeface="+mn-lt"/>
-                <a:ea typeface="+mn-ea"/>
-                <a:cs typeface="+mn-cs"/>
-              </a:defRPr>
-            </a:lvl8pPr>
-            <a:lvl9pPr marL="3886200" indent="-228600" algn="l" defTabSz="457200" rtl="0" eaLnBrk="1" latinLnBrk="0" hangingPunct="1">
-              <a:spcBef>
-                <a:spcPct val="20000"/>
-              </a:spcBef>
-              <a:buFont typeface="Arial"/>
-              <a:buChar char="•"/>
-              <a:defRPr sz="2000" kern="1200">
-                <a:solidFill>
-                  <a:schemeClr val="tx1"/>
-                </a:solidFill>
-                <a:latin typeface="+mn-lt"/>
-                <a:ea typeface="+mn-ea"/>
-                <a:cs typeface="+mn-cs"/>
-              </a:defRPr>
-            </a:lvl9pPr>
-          </a:lstStyle>
-          <a:p>
-            <a:pPr marL="257175" indent="-257175" defTabSz="342900"/>
-            <a:r>
-              <a:rPr lang="en-US" sz="2400" b="0" dirty="0">
-                <a:solidFill>
-                  <a:prstClr val="black"/>
-                </a:solidFill>
-              </a:rPr>
-              <a:t>Q:  Assume a byte-addressable memory with a data bus that is 32 bits (4 bytes) wide. </a:t>
-            </a:r>
-          </a:p>
-          <a:p>
-            <a:pPr marL="657225" lvl="1" indent="-257175" defTabSz="342900"/>
-            <a:r>
-              <a:rPr lang="en-US" altLang="zh-CN" sz="2000" b="0" dirty="0">
-                <a:solidFill>
-                  <a:prstClr val="black"/>
-                </a:solidFill>
-              </a:rPr>
-              <a:t>It takes ____ memory cycle(s) to read a Byte from memory</a:t>
-            </a:r>
-          </a:p>
-          <a:p>
-            <a:pPr marL="657225" lvl="1" indent="-257175" defTabSz="342900"/>
-            <a:r>
-              <a:rPr lang="en-US" altLang="zh-CN" sz="2000" b="0" dirty="0">
-                <a:solidFill>
-                  <a:prstClr val="black"/>
-                </a:solidFill>
-              </a:rPr>
-              <a:t>It takes ____ memory cycle(s) to read a half-word from memory</a:t>
-            </a:r>
-          </a:p>
-          <a:p>
-            <a:pPr marL="657225" lvl="1" indent="-257175" defTabSz="342900"/>
-            <a:r>
-              <a:rPr lang="en-US" altLang="zh-CN" sz="2000" b="0" dirty="0">
-                <a:solidFill>
-                  <a:prstClr val="black"/>
-                </a:solidFill>
-              </a:rPr>
-              <a:t>It takes ____ memory cycle(s) to read a word from memory</a:t>
-            </a:r>
-          </a:p>
-          <a:p>
-            <a:pPr marL="657225" lvl="1" indent="-257175" defTabSz="342900"/>
-            <a:r>
-              <a:rPr lang="en-US" altLang="zh-CN" sz="2000" b="0" dirty="0">
-                <a:solidFill>
-                  <a:prstClr val="black"/>
-                </a:solidFill>
-              </a:rPr>
-              <a:t>It takes ____ memory cycle(s) to read a double word from memory</a:t>
-            </a:r>
-            <a:endParaRPr lang="en-US" sz="2400" b="0" dirty="0">
-              <a:solidFill>
-                <a:prstClr val="black"/>
-              </a:solidFill>
-              <a:latin typeface="Calibri"/>
-            </a:endParaRPr>
-          </a:p>
-        </p:txBody>
-      </p:sp>
-      <p:pic>
-        <p:nvPicPr>
-          <p:cNvPr id="5" name="Picture 4"/>
-          <p:cNvPicPr>
-            <a:picLocks noChangeAspect="1"/>
-          </p:cNvPicPr>
-          <p:nvPr/>
-        </p:nvPicPr>
-        <p:blipFill>
-          <a:blip r:embed="rId2"/>
-          <a:stretch>
-            <a:fillRect/>
-          </a:stretch>
-        </p:blipFill>
-        <p:spPr>
-          <a:xfrm>
-            <a:off x="5029200" y="-6804"/>
-            <a:ext cx="4067187" cy="1560642"/>
-          </a:xfrm>
-          <a:prstGeom prst="rect">
-            <a:avLst/>
-          </a:prstGeom>
-        </p:spPr>
-      </p:pic>
-      <p:sp>
-        <p:nvSpPr>
-          <p:cNvPr id="9" name="Title 1">
-            <a:extLst>
-              <a:ext uri="{FF2B5EF4-FFF2-40B4-BE49-F238E27FC236}">
-                <a16:creationId xmlns:a16="http://schemas.microsoft.com/office/drawing/2014/main" id="{78DA596E-85CA-C0C6-85A8-74A98C3DFFDB}"/>
-              </a:ext>
-            </a:extLst>
-          </p:cNvPr>
-          <p:cNvSpPr>
-            <a:spLocks noGrp="1"/>
-          </p:cNvSpPr>
-          <p:nvPr>
-            <p:ph type="title"/>
-          </p:nvPr>
-        </p:nvSpPr>
-        <p:spPr>
-          <a:xfrm>
-            <a:off x="0" y="22225"/>
-            <a:ext cx="8229600" cy="1143000"/>
-          </a:xfrm>
-        </p:spPr>
-        <p:txBody>
-          <a:bodyPr/>
-          <a:lstStyle/>
-          <a:p>
-            <a:r>
-              <a:rPr lang="en-US" dirty="0"/>
-              <a:t>Answer: Memory Cycles</a:t>
-            </a:r>
-          </a:p>
-        </p:txBody>
-      </p:sp>
-    </p:spTree>
-    <p:extLst>
-      <p:ext uri="{BB962C8B-B14F-4D97-AF65-F5344CB8AC3E}">
-        <p14:creationId xmlns:p14="http://schemas.microsoft.com/office/powerpoint/2010/main" val="1910717593"/>
-      </p:ext>
-    </p:extLst>
-  </p:cSld>
-  <p:clrMapOvr>
-    <a:masterClrMapping/>
-  </p:clrMapOvr>
-  <p:transition>
-    <p:pull dir="ru"/>
-  </p:transition>
-  <p:timing>
-    <p:tnLst>
-      <p:par>
-        <p:cTn id="1" dur="indefinite" restart="never" nodeType="tmRoot">
-          <p:childTnLst>
-            <p:seq concurrent="1" nextAc="seek">
-              <p:cTn id="2" dur="indefinite" nodeType="mainSeq">
-                <p:childTnLst>
-                  <p:par>
-                    <p:cTn id="3" fill="hold">
-                      <p:stCondLst>
-                        <p:cond delay="indefinite"/>
-                      </p:stCondLst>
-                      <p:childTnLst>
-                        <p:par>
-                          <p:cTn id="4" fill="hold">
-                            <p:stCondLst>
-                              <p:cond delay="0"/>
-                            </p:stCondLst>
-                            <p:childTnLst>
-                              <p:par>
-                                <p:cTn id="5" presetID="1" presetClass="entr" presetSubtype="0" fill="hold" grpId="0" nodeType="clickEffect">
-                                  <p:stCondLst>
-                                    <p:cond delay="0"/>
-                                  </p:stCondLst>
-                                  <p:childTnLst>
-                                    <p:set>
-                                      <p:cBhvr>
-                                        <p:cTn id="6" dur="1" fill="hold">
-                                          <p:stCondLst>
-                                            <p:cond delay="0"/>
-                                          </p:stCondLst>
-                                        </p:cTn>
-                                        <p:tgtEl>
-                                          <p:spTgt spid="4">
-                                            <p:txEl>
-                                              <p:pRg st="0" end="0"/>
-                                            </p:txEl>
-                                          </p:spTgt>
-                                        </p:tgtEl>
-                                        <p:attrNameLst>
-                                          <p:attrName>style.visibility</p:attrName>
-                                        </p:attrNameLst>
-                                      </p:cBhvr>
-                                      <p:to>
-                                        <p:strVal val="visible"/>
-                                      </p:to>
-                                    </p:set>
-                                  </p:childTnLst>
-                                </p:cTn>
-                              </p:par>
-                              <p:par>
-                                <p:cTn id="7" presetID="1" presetClass="entr" presetSubtype="0" fill="hold" grpId="0" nodeType="withEffect">
-                                  <p:stCondLst>
-                                    <p:cond delay="0"/>
-                                  </p:stCondLst>
-                                  <p:childTnLst>
-                                    <p:set>
-                                      <p:cBhvr>
-                                        <p:cTn id="8" dur="1" fill="hold">
-                                          <p:stCondLst>
-                                            <p:cond delay="0"/>
-                                          </p:stCondLst>
-                                        </p:cTn>
-                                        <p:tgtEl>
-                                          <p:spTgt spid="4">
-                                            <p:txEl>
-                                              <p:pRg st="1" end="1"/>
-                                            </p:txEl>
-                                          </p:spTgt>
-                                        </p:tgtEl>
-                                        <p:attrNameLst>
-                                          <p:attrName>style.visibility</p:attrName>
-                                        </p:attrNameLst>
-                                      </p:cBhvr>
-                                      <p:to>
-                                        <p:strVal val="visible"/>
-                                      </p:to>
-                                    </p:set>
-                                  </p:childTnLst>
-                                </p:cTn>
-                              </p:par>
-                              <p:par>
-                                <p:cTn id="9" presetID="1" presetClass="entr" presetSubtype="0" fill="hold" grpId="0" nodeType="withEffect">
-                                  <p:stCondLst>
-                                    <p:cond delay="0"/>
-                                  </p:stCondLst>
-                                  <p:childTnLst>
-                                    <p:set>
-                                      <p:cBhvr>
-                                        <p:cTn id="10" dur="1" fill="hold">
-                                          <p:stCondLst>
-                                            <p:cond delay="0"/>
-                                          </p:stCondLst>
-                                        </p:cTn>
-                                        <p:tgtEl>
-                                          <p:spTgt spid="4">
-                                            <p:txEl>
-                                              <p:pRg st="2" end="2"/>
-                                            </p:txEl>
-                                          </p:spTgt>
-                                        </p:tgtEl>
-                                        <p:attrNameLst>
-                                          <p:attrName>style.visibility</p:attrName>
-                                        </p:attrNameLst>
-                                      </p:cBhvr>
-                                      <p:to>
-                                        <p:strVal val="visible"/>
-                                      </p:to>
-                                    </p:set>
-                                  </p:childTnLst>
-                                </p:cTn>
-                              </p:par>
-                              <p:par>
-                                <p:cTn id="11" presetID="1" presetClass="entr" presetSubtype="0" fill="hold" grpId="0" nodeType="withEffect">
-                                  <p:stCondLst>
-                                    <p:cond delay="0"/>
-                                  </p:stCondLst>
-                                  <p:childTnLst>
-                                    <p:set>
-                                      <p:cBhvr>
-                                        <p:cTn id="12" dur="1" fill="hold">
-                                          <p:stCondLst>
-                                            <p:cond delay="0"/>
-                                          </p:stCondLst>
-                                        </p:cTn>
-                                        <p:tgtEl>
-                                          <p:spTgt spid="4">
-                                            <p:txEl>
-                                              <p:pRg st="3" end="3"/>
-                                            </p:txEl>
-                                          </p:spTgt>
-                                        </p:tgtEl>
-                                        <p:attrNameLst>
-                                          <p:attrName>style.visibility</p:attrName>
-                                        </p:attrNameLst>
-                                      </p:cBhvr>
-                                      <p:to>
-                                        <p:strVal val="visible"/>
-                                      </p:to>
-                                    </p:set>
-                                  </p:childTnLst>
-                                </p:cTn>
-                              </p:par>
-                              <p:par>
-                                <p:cTn id="13" presetID="1" presetClass="entr" presetSubtype="0" fill="hold" grpId="0" nodeType="withEffect">
-                                  <p:stCondLst>
-                                    <p:cond delay="0"/>
-                                  </p:stCondLst>
-                                  <p:childTnLst>
-                                    <p:set>
-                                      <p:cBhvr>
-                                        <p:cTn id="14" dur="1" fill="hold">
-                                          <p:stCondLst>
-                                            <p:cond delay="0"/>
-                                          </p:stCondLst>
-                                        </p:cTn>
-                                        <p:tgtEl>
-                                          <p:spTgt spid="4">
-                                            <p:txEl>
-                                              <p:pRg st="4" end="4"/>
-                                            </p:txEl>
-                                          </p:spTgt>
-                                        </p:tgtEl>
-                                        <p:attrNameLst>
-                                          <p:attrName>style.visibility</p:attrName>
-                                        </p:attrNameLst>
-                                      </p:cBhvr>
-                                      <p:to>
-                                        <p:strVal val="visible"/>
-                                      </p:to>
-                                    </p:set>
-                                  </p:childTnLst>
-                                </p:cTn>
-                              </p:par>
-                            </p:childTnLst>
-                          </p:cTn>
-                        </p:par>
-                      </p:childTnLst>
-                    </p:cTn>
-                  </p:par>
-                </p:childTnLst>
-              </p:cTn>
-              <p:prevCondLst>
-                <p:cond evt="onPrev" delay="0">
-                  <p:tgtEl>
-                    <p:sldTgt/>
-                  </p:tgtEl>
-                </p:cond>
-              </p:prevCondLst>
-              <p:nextCondLst>
-                <p:cond evt="onNext" delay="0">
-                  <p:tgtEl>
-                    <p:sldTgt/>
-                  </p:tgtEl>
-                </p:cond>
-              </p:nextCondLst>
-            </p:seq>
-          </p:childTnLst>
-        </p:cTn>
-      </p:par>
-    </p:tnLst>
-    <p:bldLst>
-      <p:bldP spid="4" grpId="0" build="p"/>
-    </p:bldLst>
-  </p:timing>
-</p:sld>
-</file>
-
-<file path=ppt/slides/slide21.xml><?xml version="1.0" encoding="utf-8"?>
-<p:sld xmlns:a="http://schemas.openxmlformats.org/drawingml/2006/main" xmlns:r="http://schemas.openxmlformats.org/officeDocument/2006/relationships" xmlns:p="http://schemas.openxmlformats.org/presentationml/2006/main">
-  <p:cSld>
-    <p:spTree>
-      <p:nvGrpSpPr>
-        <p:cNvPr id="1" name=""/>
-        <p:cNvGrpSpPr/>
-        <p:nvPr/>
-      </p:nvGrpSpPr>
-      <p:grpSpPr>
-        <a:xfrm>
-          <a:off x="0" y="0"/>
-          <a:ext cx="0" cy="0"/>
-          <a:chOff x="0" y="0"/>
-          <a:chExt cx="0" cy="0"/>
-        </a:xfrm>
-      </p:grpSpPr>
-      <p:sp>
-        <p:nvSpPr>
           <p:cNvPr id="2" name="Title 1"/>
           <p:cNvSpPr>
             <a:spLocks noGrp="1"/>
@@ -20433,7 +20275,7 @@
           <a:p>
             <a:r>
               <a:rPr lang="en-US" dirty="0"/>
-              <a:t>Answer: Memory Cycles</a:t>
+              <a:t>Memory Cycles ANS</a:t>
             </a:r>
           </a:p>
         </p:txBody>
@@ -20456,7 +20298,7 @@
             <a:fld id="{3CC63E4C-4642-794D-A2FD-70F6B81535F5}" type="slidenum">
               <a:rPr lang="en-US" smtClean="0"/>
               <a:pPr/>
-              <a:t>21</a:t>
+              <a:t>20</a:t>
             </a:fld>
             <a:endParaRPr lang="en-US" dirty="0"/>
           </a:p>
@@ -21155,7 +20997,7 @@
 </p:sld>
 </file>
 
-<file path=ppt/slides/slide22.xml><?xml version="1.0" encoding="utf-8"?>
+<file path=ppt/slides/slide21.xml><?xml version="1.0" encoding="utf-8"?>
 <p:sld xmlns:a="http://schemas.openxmlformats.org/drawingml/2006/main" xmlns:r="http://schemas.openxmlformats.org/officeDocument/2006/relationships" xmlns:p="http://schemas.openxmlformats.org/presentationml/2006/main">
   <p:cSld>
     <p:spTree>
@@ -21189,7 +21031,7 @@
           <a:p>
             <a:r>
               <a:rPr lang="en-US" dirty="0"/>
-              <a:t>Question: Arrays</a:t>
+              <a:t>Arrays</a:t>
             </a:r>
           </a:p>
         </p:txBody>
@@ -21212,7 +21054,7 @@
             <a:fld id="{3CC63E4C-4642-794D-A2FD-70F6B81535F5}" type="slidenum">
               <a:rPr lang="en-US" smtClean="0"/>
               <a:pPr/>
-              <a:t>22</a:t>
+              <a:t>21</a:t>
             </a:fld>
             <a:endParaRPr lang="en-US" dirty="0"/>
           </a:p>
@@ -21455,7 +21297,7 @@
                   <a:prstClr val="black"/>
                 </a:solidFill>
               </a:rPr>
-              <a:t>(c) longs</a:t>
+              <a:t>(d) longs</a:t>
             </a:r>
             <a:endParaRPr lang="en-US" sz="1800" b="0" dirty="0">
               <a:solidFill>
@@ -21688,7 +21530,7 @@
 </p:sld>
 </file>
 
-<file path=ppt/slides/slide23.xml><?xml version="1.0" encoding="utf-8"?>
+<file path=ppt/slides/slide22.xml><?xml version="1.0" encoding="utf-8"?>
 <p:sld xmlns:a="http://schemas.openxmlformats.org/drawingml/2006/main" xmlns:r="http://schemas.openxmlformats.org/officeDocument/2006/relationships" xmlns:p="http://schemas.openxmlformats.org/presentationml/2006/main">
   <p:cSld>
     <p:spTree>
@@ -21722,7 +21564,7 @@
           <a:p>
             <a:r>
               <a:rPr lang="en-US" dirty="0"/>
-              <a:t>Answer: Arrays</a:t>
+              <a:t>Arrays ANS</a:t>
             </a:r>
           </a:p>
         </p:txBody>
@@ -21745,7 +21587,7 @@
             <a:fld id="{3CC63E4C-4642-794D-A2FD-70F6B81535F5}" type="slidenum">
               <a:rPr lang="en-US" smtClean="0"/>
               <a:pPr/>
-              <a:t>23</a:t>
+              <a:t>22</a:t>
             </a:fld>
             <a:endParaRPr lang="en-US" dirty="0"/>
           </a:p>
@@ -21988,7 +21830,7 @@
                   <a:prstClr val="black"/>
                 </a:solidFill>
               </a:rPr>
-              <a:t>(c) longs</a:t>
+              <a:t>(d) longs</a:t>
             </a:r>
             <a:endParaRPr lang="en-US" sz="1800" b="0" dirty="0">
               <a:solidFill>
@@ -22076,7 +21918,7 @@
                   <a:prstClr val="black"/>
                 </a:solidFill>
               </a:rPr>
-              <a:t>12345678+2= 0</a:t>
+              <a:t>12345678+2 = 0</a:t>
             </a:r>
             <a:r>
               <a:rPr lang="en-US" altLang="zh-CN" sz="1800" b="0" dirty="0">
@@ -22143,7 +21985,7 @@
                   <a:prstClr val="black"/>
                 </a:solidFill>
               </a:rPr>
-              <a:t>12345678+4= 0</a:t>
+              <a:t>12345678+4 = 0</a:t>
             </a:r>
             <a:r>
               <a:rPr lang="en-US" altLang="zh-CN" sz="1800" b="0" dirty="0">
@@ -22170,7 +22012,7 @@
                   <a:prstClr val="black"/>
                 </a:solidFill>
               </a:rPr>
-              <a:t>(c) longs: 0</a:t>
+              <a:t>(d) longs: 0</a:t>
             </a:r>
             <a:r>
               <a:rPr lang="en-US" altLang="zh-CN" sz="1800" b="0" dirty="0">
@@ -22186,7 +22028,7 @@
                   <a:prstClr val="black"/>
                 </a:solidFill>
               </a:rPr>
-              <a:t>12345678+8= 0</a:t>
+              <a:t>12345678+8 = 0</a:t>
             </a:r>
             <a:r>
               <a:rPr lang="en-US" altLang="zh-CN" sz="1800" b="0" dirty="0">
@@ -22608,7 +22450,7 @@
 </p:sld>
 </file>
 
-<file path=ppt/slides/slide24.xml><?xml version="1.0" encoding="utf-8"?>
+<file path=ppt/slides/slide23.xml><?xml version="1.0" encoding="utf-8"?>
 <p:sld xmlns:a="http://schemas.openxmlformats.org/drawingml/2006/main" xmlns:r="http://schemas.openxmlformats.org/officeDocument/2006/relationships" xmlns:p="http://schemas.openxmlformats.org/presentationml/2006/main">
   <p:cSld>
     <p:spTree>
@@ -22665,7 +22507,7 @@
             <a:fld id="{AEE14D4A-FE32-40AF-B06D-E9622816B101}" type="slidenum">
               <a:rPr lang="en-US" smtClean="0"/>
               <a:pPr/>
-              <a:t>24</a:t>
+              <a:t>23</a:t>
             </a:fld>
             <a:endParaRPr lang="en-US"/>
           </a:p>
@@ -22695,6 +22537,107 @@
           </a:prstGeom>
         </p:spPr>
       </p:pic>
+      <p:sp>
+        <p:nvSpPr>
+          <p:cNvPr id="4" name="Horizontal Scroll 14">
+            <a:extLst>
+              <a:ext uri="{FF2B5EF4-FFF2-40B4-BE49-F238E27FC236}">
+                <a16:creationId xmlns:a16="http://schemas.microsoft.com/office/drawing/2014/main" id="{FA6A14B0-92BB-D509-5DE4-9E034654971E}"/>
+              </a:ext>
+            </a:extLst>
+          </p:cNvPr>
+          <p:cNvSpPr/>
+          <p:nvPr/>
+        </p:nvSpPr>
+        <p:spPr>
+          <a:xfrm>
+            <a:off x="186104" y="-39260"/>
+            <a:ext cx="1265712" cy="762000"/>
+          </a:xfrm>
+          <a:prstGeom prst="horizontalScroll">
+            <a:avLst/>
+          </a:prstGeom>
+          <a:gradFill rotWithShape="1">
+            <a:gsLst>
+              <a:gs pos="0">
+                <a:srgbClr val="4F81BD">
+                  <a:tint val="50000"/>
+                  <a:satMod val="300000"/>
+                </a:srgbClr>
+              </a:gs>
+              <a:gs pos="35000">
+                <a:srgbClr val="4F81BD">
+                  <a:tint val="37000"/>
+                  <a:satMod val="300000"/>
+                </a:srgbClr>
+              </a:gs>
+              <a:gs pos="100000">
+                <a:srgbClr val="4F81BD">
+                  <a:tint val="15000"/>
+                  <a:satMod val="350000"/>
+                </a:srgbClr>
+              </a:gs>
+            </a:gsLst>
+            <a:lin ang="16200000" scaled="1"/>
+          </a:gradFill>
+          <a:ln w="9525" cap="flat" cmpd="sng" algn="ctr">
+            <a:solidFill>
+              <a:srgbClr val="4F81BD">
+                <a:shade val="95000"/>
+                <a:satMod val="105000"/>
+              </a:srgbClr>
+            </a:solidFill>
+            <a:prstDash val="solid"/>
+          </a:ln>
+          <a:effectLst>
+            <a:outerShdw blurRad="40000" dist="20000" dir="5400000" rotWithShape="0">
+              <a:srgbClr val="000000">
+                <a:alpha val="38000"/>
+              </a:srgbClr>
+            </a:outerShdw>
+          </a:effectLst>
+        </p:spPr>
+        <p:txBody>
+          <a:bodyPr rtlCol="0" anchor="ctr"/>
+          <a:lstStyle/>
+          <a:p>
+            <a:pPr marL="0" marR="0" lvl="0" indent="0" algn="ctr" defTabSz="457200" eaLnBrk="1" fontAlgn="auto" latinLnBrk="0" hangingPunct="1">
+              <a:lnSpc>
+                <a:spcPct val="100000"/>
+              </a:lnSpc>
+              <a:spcBef>
+                <a:spcPts val="0"/>
+              </a:spcBef>
+              <a:spcAft>
+                <a:spcPts val="0"/>
+              </a:spcAft>
+              <a:buClrTx/>
+              <a:buSzTx/>
+              <a:buFontTx/>
+              <a:buNone/>
+              <a:tabLst/>
+              <a:defRPr/>
+            </a:pPr>
+            <a:r>
+              <a:rPr kumimoji="0" lang="en-US" sz="2400" b="0" i="0" u="none" strike="noStrike" kern="0" cap="none" spc="0" normalizeH="0" baseline="0" noProof="0" dirty="0">
+                <a:ln>
+                  <a:noFill/>
+                </a:ln>
+                <a:solidFill>
+                  <a:prstClr val="black"/>
+                </a:solidFill>
+                <a:effectLst/>
+                <a:uLnTx/>
+                <a:uFillTx/>
+                <a:latin typeface="Calibri"/>
+                <a:ea typeface="+mn-ea"/>
+                <a:cs typeface="+mn-cs"/>
+              </a:rPr>
+              <a:t>Review</a:t>
+            </a:r>
+          </a:p>
+        </p:txBody>
+      </p:sp>
     </p:spTree>
     <p:extLst>
       <p:ext uri="{BB962C8B-B14F-4D97-AF65-F5344CB8AC3E}">
@@ -22716,7 +22659,7 @@
 </p:sld>
 </file>
 
-<file path=ppt/slides/slide25.xml><?xml version="1.0" encoding="utf-8"?>
+<file path=ppt/slides/slide24.xml><?xml version="1.0" encoding="utf-8"?>
 <p:sld xmlns:a="http://schemas.openxmlformats.org/drawingml/2006/main" xmlns:r="http://schemas.openxmlformats.org/officeDocument/2006/relationships" xmlns:p="http://schemas.openxmlformats.org/presentationml/2006/main">
   <p:cSld>
     <p:spTree>
@@ -22791,7 +22734,7 @@
             <a:fld id="{AEE14D4A-FE32-40AF-B06D-E9622816B101}" type="slidenum">
               <a:rPr lang="en-US" smtClean="0"/>
               <a:pPr/>
-              <a:t>25</a:t>
+              <a:t>24</a:t>
             </a:fld>
             <a:endParaRPr lang="en-US"/>
           </a:p>
@@ -23555,7 +23498,7 @@
 </p:sld>
 </file>
 
-<file path=ppt/slides/slide26.xml><?xml version="1.0" encoding="utf-8"?>
+<file path=ppt/slides/slide25.xml><?xml version="1.0" encoding="utf-8"?>
 <p:sld xmlns:a="http://schemas.openxmlformats.org/drawingml/2006/main" xmlns:r="http://schemas.openxmlformats.org/officeDocument/2006/relationships" xmlns:p="http://schemas.openxmlformats.org/presentationml/2006/main">
   <p:cSld>
     <p:spTree>
@@ -23624,7 +23567,7 @@
             <a:fld id="{AEE14D4A-FE32-40AF-B06D-E9622816B101}" type="slidenum">
               <a:rPr lang="en-US" smtClean="0"/>
               <a:pPr/>
-              <a:t>26</a:t>
+              <a:t>25</a:t>
             </a:fld>
             <a:endParaRPr lang="en-US"/>
           </a:p>
@@ -24612,7 +24555,7 @@
 </p:sld>
 </file>
 
-<file path=ppt/slides/slide27.xml><?xml version="1.0" encoding="utf-8"?>
+<file path=ppt/slides/slide26.xml><?xml version="1.0" encoding="utf-8"?>
 <p:sld xmlns:a="http://schemas.openxmlformats.org/drawingml/2006/main" xmlns:r="http://schemas.openxmlformats.org/officeDocument/2006/relationships" xmlns:p="http://schemas.openxmlformats.org/presentationml/2006/main">
   <p:cSld>
     <p:spTree>
@@ -24687,7 +24630,7 @@
             <a:fld id="{AEE14D4A-FE32-40AF-B06D-E9622816B101}" type="slidenum">
               <a:rPr lang="en-US" smtClean="0"/>
               <a:pPr/>
-              <a:t>27</a:t>
+              <a:t>26</a:t>
             </a:fld>
             <a:endParaRPr lang="en-US"/>
           </a:p>
@@ -24723,7 +24666,7 @@
           <a:p>
             <a:r>
               <a:rPr lang="en-US" dirty="0"/>
-              <a:t>Suppose R2 and R5 hold the values 8 and 0x23456789 After following code runs on a Big-Endian system, what value is in R7? How about in a little-endian system?</a:t>
+              <a:t>Suppose R2 and R5 hold the values 8 and 0x23456789 After following code runs with big-endian ordering, what value is in R7? How about with little-endian ordering?</a:t>
             </a:r>
           </a:p>
           <a:p>
@@ -24772,7 +24715,7 @@
 </p:sld>
 </file>
 
-<file path=ppt/slides/slide28.xml><?xml version="1.0" encoding="utf-8"?>
+<file path=ppt/slides/slide27.xml><?xml version="1.0" encoding="utf-8"?>
 <p:sld xmlns:a="http://schemas.openxmlformats.org/drawingml/2006/main" xmlns:r="http://schemas.openxmlformats.org/officeDocument/2006/relationships" xmlns:p="http://schemas.openxmlformats.org/presentationml/2006/main">
   <p:cSld>
     <p:spTree>
@@ -25772,7 +25715,7 @@
 </p:sld>
 </file>
 
-<file path=ppt/slides/slide29.xml><?xml version="1.0" encoding="utf-8"?>
+<file path=ppt/slides/slide28.xml><?xml version="1.0" encoding="utf-8"?>
 <p:sld xmlns:a="http://schemas.openxmlformats.org/drawingml/2006/main" xmlns:r="http://schemas.openxmlformats.org/officeDocument/2006/relationships" xmlns:p="http://schemas.openxmlformats.org/presentationml/2006/main">
   <p:cSld>
     <p:spTree>
@@ -26764,6 +26707,1002 @@
 </p:sld>
 </file>
 
+<file path=ppt/slides/slide29.xml><?xml version="1.0" encoding="utf-8"?>
+<p:sld xmlns:a="http://schemas.openxmlformats.org/drawingml/2006/main" xmlns:r="http://schemas.openxmlformats.org/officeDocument/2006/relationships" xmlns:p="http://schemas.openxmlformats.org/presentationml/2006/main">
+  <p:cSld>
+    <p:spTree>
+      <p:nvGrpSpPr>
+        <p:cNvPr id="1" name="">
+          <a:extLst>
+            <a:ext uri="{FF2B5EF4-FFF2-40B4-BE49-F238E27FC236}">
+              <a16:creationId xmlns:a16="http://schemas.microsoft.com/office/drawing/2014/main" id="{C725164D-65DE-1197-3213-5D4C9C12C3DF}"/>
+            </a:ext>
+          </a:extLst>
+        </p:cNvPr>
+        <p:cNvGrpSpPr/>
+        <p:nvPr/>
+      </p:nvGrpSpPr>
+      <p:grpSpPr>
+        <a:xfrm>
+          <a:off x="0" y="0"/>
+          <a:ext cx="0" cy="0"/>
+          <a:chOff x="0" y="0"/>
+          <a:chExt cx="0" cy="0"/>
+        </a:xfrm>
+      </p:grpSpPr>
+      <p:sp>
+        <p:nvSpPr>
+          <p:cNvPr id="2" name="Title 1">
+            <a:extLst>
+              <a:ext uri="{FF2B5EF4-FFF2-40B4-BE49-F238E27FC236}">
+                <a16:creationId xmlns:a16="http://schemas.microsoft.com/office/drawing/2014/main" id="{14E1FC6F-F86B-D4FA-4FF9-D7B46DE6EB88}"/>
+              </a:ext>
+            </a:extLst>
+          </p:cNvPr>
+          <p:cNvSpPr>
+            <a:spLocks noGrp="1"/>
+          </p:cNvSpPr>
+          <p:nvPr>
+            <p:ph type="title"/>
+          </p:nvPr>
+        </p:nvSpPr>
+        <p:spPr/>
+        <p:txBody>
+          <a:bodyPr>
+            <a:normAutofit/>
+          </a:bodyPr>
+          <a:lstStyle/>
+          <a:p>
+            <a:r>
+              <a:rPr lang="en-US" dirty="0"/>
+              <a:t>LDRSH R7, [R2, #2] ANS</a:t>
+            </a:r>
+          </a:p>
+        </p:txBody>
+      </p:sp>
+      <p:sp>
+        <p:nvSpPr>
+          <p:cNvPr id="4" name="Content Placeholder 3">
+            <a:extLst>
+              <a:ext uri="{FF2B5EF4-FFF2-40B4-BE49-F238E27FC236}">
+                <a16:creationId xmlns:a16="http://schemas.microsoft.com/office/drawing/2014/main" id="{F5BD1FD1-2387-26FB-4BF0-E2B12311B2D2}"/>
+              </a:ext>
+            </a:extLst>
+          </p:cNvPr>
+          <p:cNvSpPr>
+            <a:spLocks noGrp="1"/>
+          </p:cNvSpPr>
+          <p:nvPr>
+            <p:ph sz="quarter" idx="1"/>
+          </p:nvPr>
+        </p:nvSpPr>
+        <p:spPr>
+          <a:xfrm>
+            <a:off x="457200" y="1143000"/>
+            <a:ext cx="8229600" cy="3558746"/>
+          </a:xfrm>
+        </p:spPr>
+        <p:txBody>
+          <a:bodyPr>
+            <a:normAutofit/>
+          </a:bodyPr>
+          <a:lstStyle/>
+          <a:p>
+            <a:r>
+              <a:rPr lang="en-US" dirty="0"/>
+              <a:t>ANS after LDRSH R7, [R2, #2]:</a:t>
+            </a:r>
+          </a:p>
+          <a:p>
+            <a:pPr lvl="1"/>
+            <a:r>
+              <a:rPr lang="en-US" dirty="0"/>
+              <a:t>Big-endian: the word 0x23456789 is laid out in memory as bytes 23 45 67 89 at addresses A, A+1, A+2, A+3 respectively, so LDRSH R7, [R2, #2] reads 0x6789 and sign-extends it to R7 = 0x00006789. </a:t>
+            </a:r>
+          </a:p>
+          <a:p>
+            <a:pPr lvl="1"/>
+            <a:r>
+              <a:rPr lang="en-US" dirty="0"/>
+              <a:t>Little-endian: the same word is laid out as 89 67 45 23 at addresses A, A+1, A+2, A+3 respectively, so LDRSH R7, [R2, #2] reads 0x2345 and sign-extends it to R7 = 0x00002345. </a:t>
+            </a:r>
+          </a:p>
+          <a:p>
+            <a:pPr lvl="1"/>
+            <a:endParaRPr lang="en-US" dirty="0"/>
+          </a:p>
+        </p:txBody>
+      </p:sp>
+      <p:graphicFrame>
+        <p:nvGraphicFramePr>
+          <p:cNvPr id="8" name="Table 7">
+            <a:extLst>
+              <a:ext uri="{FF2B5EF4-FFF2-40B4-BE49-F238E27FC236}">
+                <a16:creationId xmlns:a16="http://schemas.microsoft.com/office/drawing/2014/main" id="{A9B3120B-E6CB-D08B-C83A-65EA4EBFEEBA}"/>
+              </a:ext>
+            </a:extLst>
+          </p:cNvPr>
+          <p:cNvGraphicFramePr>
+            <a:graphicFrameLocks noGrp="1"/>
+          </p:cNvGraphicFramePr>
+          <p:nvPr>
+            <p:extLst>
+              <p:ext uri="{D42A27DB-BD31-4B8C-83A1-F6EECF244321}">
+                <p14:modId xmlns:p14="http://schemas.microsoft.com/office/powerpoint/2010/main" val="2373286293"/>
+              </p:ext>
+            </p:extLst>
+          </p:nvPr>
+        </p:nvGraphicFramePr>
+        <p:xfrm>
+          <a:off x="773827" y="4221740"/>
+          <a:ext cx="3798173" cy="2286000"/>
+        </p:xfrm>
+        <a:graphic>
+          <a:graphicData uri="http://schemas.openxmlformats.org/drawingml/2006/table">
+            <a:tbl>
+              <a:tblPr firstRow="1" bandRow="1">
+                <a:tableStyleId>{5C22544A-7EE6-4342-B048-85BDC9FD1C3A}</a:tableStyleId>
+              </a:tblPr>
+              <a:tblGrid>
+                <a:gridCol w="2214983">
+                  <a:extLst>
+                    <a:ext uri="{9D8B030D-6E8A-4147-A177-3AD203B41FA5}">
+                      <a16:colId xmlns:a16="http://schemas.microsoft.com/office/drawing/2014/main" val="20000"/>
+                    </a:ext>
+                  </a:extLst>
+                </a:gridCol>
+                <a:gridCol w="1583190">
+                  <a:extLst>
+                    <a:ext uri="{9D8B030D-6E8A-4147-A177-3AD203B41FA5}">
+                      <a16:colId xmlns:a16="http://schemas.microsoft.com/office/drawing/2014/main" val="20001"/>
+                    </a:ext>
+                  </a:extLst>
+                </a:gridCol>
+              </a:tblGrid>
+              <a:tr h="370840">
+                <a:tc>
+                  <a:txBody>
+                    <a:bodyPr/>
+                    <a:lstStyle/>
+                    <a:p>
+                      <a:pPr algn="ctr"/>
+                      <a:r>
+                        <a:rPr lang="en-US" sz="2000" dirty="0">
+                          <a:solidFill>
+                            <a:schemeClr val="tx1"/>
+                          </a:solidFill>
+                          <a:latin typeface="Consolas" panose="020B0609020204030204" pitchFamily="49" charset="0"/>
+                          <a:cs typeface="Consolas" panose="020B0609020204030204" pitchFamily="49" charset="0"/>
+                        </a:rPr>
+                        <a:t>Memory Address</a:t>
+                      </a:r>
+                    </a:p>
+                  </a:txBody>
+                  <a:tcPr>
+                    <a:noFill/>
+                  </a:tcPr>
+                </a:tc>
+                <a:tc>
+                  <a:txBody>
+                    <a:bodyPr/>
+                    <a:lstStyle/>
+                    <a:p>
+                      <a:pPr algn="ctr"/>
+                      <a:r>
+                        <a:rPr lang="en-US" sz="2000" dirty="0">
+                          <a:latin typeface="Consolas" panose="020B0609020204030204" pitchFamily="49" charset="0"/>
+                          <a:cs typeface="Consolas" panose="020B0609020204030204" pitchFamily="49" charset="0"/>
+                        </a:rPr>
+                        <a:t>Memory</a:t>
+                      </a:r>
+                      <a:r>
+                        <a:rPr lang="en-US" sz="2000" baseline="0" dirty="0">
+                          <a:latin typeface="Consolas" panose="020B0609020204030204" pitchFamily="49" charset="0"/>
+                          <a:cs typeface="Consolas" panose="020B0609020204030204" pitchFamily="49" charset="0"/>
+                        </a:rPr>
+                        <a:t> </a:t>
+                      </a:r>
+                    </a:p>
+                    <a:p>
+                      <a:pPr algn="ctr"/>
+                      <a:r>
+                        <a:rPr lang="en-US" sz="2000" baseline="0" dirty="0">
+                          <a:latin typeface="Consolas" panose="020B0609020204030204" pitchFamily="49" charset="0"/>
+                          <a:cs typeface="Consolas" panose="020B0609020204030204" pitchFamily="49" charset="0"/>
+                        </a:rPr>
+                        <a:t>Data</a:t>
+                      </a:r>
+                      <a:endParaRPr lang="en-US" sz="2000" dirty="0">
+                        <a:latin typeface="Consolas" panose="020B0609020204030204" pitchFamily="49" charset="0"/>
+                        <a:cs typeface="Consolas" panose="020B0609020204030204" pitchFamily="49" charset="0"/>
+                      </a:endParaRPr>
+                    </a:p>
+                  </a:txBody>
+                  <a:tcPr/>
+                </a:tc>
+                <a:extLst>
+                  <a:ext uri="{0D108BD9-81ED-4DB2-BD59-A6C34878D82A}">
+                    <a16:rowId xmlns:a16="http://schemas.microsoft.com/office/drawing/2014/main" val="10000"/>
+                  </a:ext>
+                </a:extLst>
+              </a:tr>
+              <a:tr h="370840">
+                <a:tc>
+                  <a:txBody>
+                    <a:bodyPr/>
+                    <a:lstStyle/>
+                    <a:p>
+                      <a:pPr algn="ctr"/>
+                      <a:r>
+                        <a:rPr lang="en-US" sz="2000" dirty="0">
+                          <a:latin typeface="Consolas" panose="020B0609020204030204" pitchFamily="49" charset="0"/>
+                          <a:cs typeface="Consolas" panose="020B0609020204030204" pitchFamily="49" charset="0"/>
+                        </a:rPr>
+                        <a:t>0x0000000B</a:t>
+                      </a:r>
+                    </a:p>
+                  </a:txBody>
+                  <a:tcPr>
+                    <a:noFill/>
+                  </a:tcPr>
+                </a:tc>
+                <a:tc>
+                  <a:txBody>
+                    <a:bodyPr/>
+                    <a:lstStyle/>
+                    <a:p>
+                      <a:pPr marL="0" marR="0" indent="0" algn="ctr" defTabSz="914400" rtl="0" eaLnBrk="1" fontAlgn="auto" latinLnBrk="0" hangingPunct="1">
+                        <a:lnSpc>
+                          <a:spcPct val="100000"/>
+                        </a:lnSpc>
+                        <a:spcBef>
+                          <a:spcPts val="0"/>
+                        </a:spcBef>
+                        <a:spcAft>
+                          <a:spcPts val="0"/>
+                        </a:spcAft>
+                        <a:buClrTx/>
+                        <a:buSzTx/>
+                        <a:buFontTx/>
+                        <a:buNone/>
+                        <a:tabLst/>
+                        <a:defRPr/>
+                      </a:pPr>
+                      <a:r>
+                        <a:rPr lang="en-US" sz="2000" dirty="0">
+                          <a:latin typeface="Consolas" panose="020B0609020204030204" pitchFamily="49" charset="0"/>
+                          <a:cs typeface="Consolas" panose="020B0609020204030204" pitchFamily="49" charset="0"/>
+                        </a:rPr>
+                        <a:t>0x89</a:t>
+                      </a:r>
+                    </a:p>
+                  </a:txBody>
+                  <a:tcPr/>
+                </a:tc>
+                <a:extLst>
+                  <a:ext uri="{0D108BD9-81ED-4DB2-BD59-A6C34878D82A}">
+                    <a16:rowId xmlns:a16="http://schemas.microsoft.com/office/drawing/2014/main" val="10001"/>
+                  </a:ext>
+                </a:extLst>
+              </a:tr>
+              <a:tr h="370840">
+                <a:tc>
+                  <a:txBody>
+                    <a:bodyPr/>
+                    <a:lstStyle/>
+                    <a:p>
+                      <a:pPr algn="ctr"/>
+                      <a:r>
+                        <a:rPr lang="en-US" sz="2000" dirty="0">
+                          <a:latin typeface="Consolas" panose="020B0609020204030204" pitchFamily="49" charset="0"/>
+                          <a:cs typeface="Consolas" panose="020B0609020204030204" pitchFamily="49" charset="0"/>
+                        </a:rPr>
+                        <a:t>0x0000000A</a:t>
+                      </a:r>
+                    </a:p>
+                  </a:txBody>
+                  <a:tcPr>
+                    <a:noFill/>
+                  </a:tcPr>
+                </a:tc>
+                <a:tc>
+                  <a:txBody>
+                    <a:bodyPr/>
+                    <a:lstStyle/>
+                    <a:p>
+                      <a:pPr marL="0" marR="0" indent="0" algn="ctr" defTabSz="914400" rtl="0" eaLnBrk="1" fontAlgn="auto" latinLnBrk="0" hangingPunct="1">
+                        <a:lnSpc>
+                          <a:spcPct val="100000"/>
+                        </a:lnSpc>
+                        <a:spcBef>
+                          <a:spcPts val="0"/>
+                        </a:spcBef>
+                        <a:spcAft>
+                          <a:spcPts val="0"/>
+                        </a:spcAft>
+                        <a:buClrTx/>
+                        <a:buSzTx/>
+                        <a:buFontTx/>
+                        <a:buNone/>
+                        <a:tabLst/>
+                        <a:defRPr/>
+                      </a:pPr>
+                      <a:r>
+                        <a:rPr lang="en-US" sz="2000" dirty="0">
+                          <a:latin typeface="Consolas" panose="020B0609020204030204" pitchFamily="49" charset="0"/>
+                          <a:cs typeface="Consolas" panose="020B0609020204030204" pitchFamily="49" charset="0"/>
+                        </a:rPr>
+                        <a:t>0x67</a:t>
+                      </a:r>
+                    </a:p>
+                  </a:txBody>
+                  <a:tcPr/>
+                </a:tc>
+                <a:extLst>
+                  <a:ext uri="{0D108BD9-81ED-4DB2-BD59-A6C34878D82A}">
+                    <a16:rowId xmlns:a16="http://schemas.microsoft.com/office/drawing/2014/main" val="10002"/>
+                  </a:ext>
+                </a:extLst>
+              </a:tr>
+              <a:tr h="370840">
+                <a:tc>
+                  <a:txBody>
+                    <a:bodyPr/>
+                    <a:lstStyle/>
+                    <a:p>
+                      <a:pPr algn="ctr"/>
+                      <a:r>
+                        <a:rPr lang="en-US" sz="2000" dirty="0">
+                          <a:latin typeface="Consolas" panose="020B0609020204030204" pitchFamily="49" charset="0"/>
+                          <a:cs typeface="Consolas" panose="020B0609020204030204" pitchFamily="49" charset="0"/>
+                        </a:rPr>
+                        <a:t>0x00000009</a:t>
+                      </a:r>
+                    </a:p>
+                  </a:txBody>
+                  <a:tcPr>
+                    <a:noFill/>
+                  </a:tcPr>
+                </a:tc>
+                <a:tc>
+                  <a:txBody>
+                    <a:bodyPr/>
+                    <a:lstStyle/>
+                    <a:p>
+                      <a:pPr marL="0" marR="0" indent="0" algn="ctr" defTabSz="914400" rtl="0" eaLnBrk="1" fontAlgn="auto" latinLnBrk="0" hangingPunct="1">
+                        <a:lnSpc>
+                          <a:spcPct val="100000"/>
+                        </a:lnSpc>
+                        <a:spcBef>
+                          <a:spcPts val="0"/>
+                        </a:spcBef>
+                        <a:spcAft>
+                          <a:spcPts val="0"/>
+                        </a:spcAft>
+                        <a:buClrTx/>
+                        <a:buSzTx/>
+                        <a:buFontTx/>
+                        <a:buNone/>
+                        <a:tabLst/>
+                        <a:defRPr/>
+                      </a:pPr>
+                      <a:r>
+                        <a:rPr lang="en-US" sz="2000" dirty="0">
+                          <a:latin typeface="Consolas" panose="020B0609020204030204" pitchFamily="49" charset="0"/>
+                          <a:cs typeface="Consolas" panose="020B0609020204030204" pitchFamily="49" charset="0"/>
+                        </a:rPr>
+                        <a:t>0x45</a:t>
+                      </a:r>
+                    </a:p>
+                  </a:txBody>
+                  <a:tcPr/>
+                </a:tc>
+                <a:extLst>
+                  <a:ext uri="{0D108BD9-81ED-4DB2-BD59-A6C34878D82A}">
+                    <a16:rowId xmlns:a16="http://schemas.microsoft.com/office/drawing/2014/main" val="10003"/>
+                  </a:ext>
+                </a:extLst>
+              </a:tr>
+              <a:tr h="370840">
+                <a:tc>
+                  <a:txBody>
+                    <a:bodyPr/>
+                    <a:lstStyle/>
+                    <a:p>
+                      <a:pPr algn="ctr"/>
+                      <a:r>
+                        <a:rPr lang="en-US" sz="2000" dirty="0">
+                          <a:latin typeface="Consolas" panose="020B0609020204030204" pitchFamily="49" charset="0"/>
+                          <a:cs typeface="Consolas" panose="020B0609020204030204" pitchFamily="49" charset="0"/>
+                        </a:rPr>
+                        <a:t>0x00000008</a:t>
+                      </a:r>
+                    </a:p>
+                  </a:txBody>
+                  <a:tcPr>
+                    <a:noFill/>
+                  </a:tcPr>
+                </a:tc>
+                <a:tc>
+                  <a:txBody>
+                    <a:bodyPr/>
+                    <a:lstStyle/>
+                    <a:p>
+                      <a:pPr marL="0" marR="0" indent="0" algn="ctr" defTabSz="914400" rtl="0" eaLnBrk="1" fontAlgn="auto" latinLnBrk="0" hangingPunct="1">
+                        <a:lnSpc>
+                          <a:spcPct val="100000"/>
+                        </a:lnSpc>
+                        <a:spcBef>
+                          <a:spcPts val="0"/>
+                        </a:spcBef>
+                        <a:spcAft>
+                          <a:spcPts val="0"/>
+                        </a:spcAft>
+                        <a:buClrTx/>
+                        <a:buSzTx/>
+                        <a:buFontTx/>
+                        <a:buNone/>
+                        <a:tabLst/>
+                        <a:defRPr/>
+                      </a:pPr>
+                      <a:r>
+                        <a:rPr lang="en-US" sz="2000" dirty="0">
+                          <a:latin typeface="Consolas" panose="020B0609020204030204" pitchFamily="49" charset="0"/>
+                          <a:cs typeface="Consolas" panose="020B0609020204030204" pitchFamily="49" charset="0"/>
+                        </a:rPr>
+                        <a:t>0x23</a:t>
+                      </a:r>
+                    </a:p>
+                  </a:txBody>
+                  <a:tcPr/>
+                </a:tc>
+                <a:extLst>
+                  <a:ext uri="{0D108BD9-81ED-4DB2-BD59-A6C34878D82A}">
+                    <a16:rowId xmlns:a16="http://schemas.microsoft.com/office/drawing/2014/main" val="10004"/>
+                  </a:ext>
+                </a:extLst>
+              </a:tr>
+            </a:tbl>
+          </a:graphicData>
+        </a:graphic>
+      </p:graphicFrame>
+      <p:graphicFrame>
+        <p:nvGraphicFramePr>
+          <p:cNvPr id="9" name="Table 8">
+            <a:extLst>
+              <a:ext uri="{FF2B5EF4-FFF2-40B4-BE49-F238E27FC236}">
+                <a16:creationId xmlns:a16="http://schemas.microsoft.com/office/drawing/2014/main" id="{68A9D7B6-EE91-3397-F114-367B143D28C0}"/>
+              </a:ext>
+            </a:extLst>
+          </p:cNvPr>
+          <p:cNvGraphicFramePr>
+            <a:graphicFrameLocks noGrp="1"/>
+          </p:cNvGraphicFramePr>
+          <p:nvPr>
+            <p:extLst>
+              <p:ext uri="{D42A27DB-BD31-4B8C-83A1-F6EECF244321}">
+                <p14:modId xmlns:p14="http://schemas.microsoft.com/office/powerpoint/2010/main" val="1700288449"/>
+              </p:ext>
+            </p:extLst>
+          </p:nvPr>
+        </p:nvGraphicFramePr>
+        <p:xfrm>
+          <a:off x="5079610" y="4221740"/>
+          <a:ext cx="3798173" cy="2286000"/>
+        </p:xfrm>
+        <a:graphic>
+          <a:graphicData uri="http://schemas.openxmlformats.org/drawingml/2006/table">
+            <a:tbl>
+              <a:tblPr firstRow="1" bandRow="1">
+                <a:tableStyleId>{5C22544A-7EE6-4342-B048-85BDC9FD1C3A}</a:tableStyleId>
+              </a:tblPr>
+              <a:tblGrid>
+                <a:gridCol w="2214983">
+                  <a:extLst>
+                    <a:ext uri="{9D8B030D-6E8A-4147-A177-3AD203B41FA5}">
+                      <a16:colId xmlns:a16="http://schemas.microsoft.com/office/drawing/2014/main" val="20000"/>
+                    </a:ext>
+                  </a:extLst>
+                </a:gridCol>
+                <a:gridCol w="1583190">
+                  <a:extLst>
+                    <a:ext uri="{9D8B030D-6E8A-4147-A177-3AD203B41FA5}">
+                      <a16:colId xmlns:a16="http://schemas.microsoft.com/office/drawing/2014/main" val="20001"/>
+                    </a:ext>
+                  </a:extLst>
+                </a:gridCol>
+              </a:tblGrid>
+              <a:tr h="370840">
+                <a:tc>
+                  <a:txBody>
+                    <a:bodyPr/>
+                    <a:lstStyle/>
+                    <a:p>
+                      <a:pPr algn="ctr"/>
+                      <a:r>
+                        <a:rPr lang="en-US" sz="2000" dirty="0">
+                          <a:solidFill>
+                            <a:schemeClr val="tx1"/>
+                          </a:solidFill>
+                          <a:latin typeface="Consolas" panose="020B0609020204030204" pitchFamily="49" charset="0"/>
+                          <a:cs typeface="Consolas" panose="020B0609020204030204" pitchFamily="49" charset="0"/>
+                        </a:rPr>
+                        <a:t>Memory Address</a:t>
+                      </a:r>
+                    </a:p>
+                  </a:txBody>
+                  <a:tcPr>
+                    <a:noFill/>
+                  </a:tcPr>
+                </a:tc>
+                <a:tc>
+                  <a:txBody>
+                    <a:bodyPr/>
+                    <a:lstStyle/>
+                    <a:p>
+                      <a:pPr algn="ctr"/>
+                      <a:r>
+                        <a:rPr lang="en-US" sz="2000" dirty="0">
+                          <a:latin typeface="Consolas" panose="020B0609020204030204" pitchFamily="49" charset="0"/>
+                          <a:cs typeface="Consolas" panose="020B0609020204030204" pitchFamily="49" charset="0"/>
+                        </a:rPr>
+                        <a:t>Memory</a:t>
+                      </a:r>
+                      <a:r>
+                        <a:rPr lang="en-US" sz="2000" baseline="0" dirty="0">
+                          <a:latin typeface="Consolas" panose="020B0609020204030204" pitchFamily="49" charset="0"/>
+                          <a:cs typeface="Consolas" panose="020B0609020204030204" pitchFamily="49" charset="0"/>
+                        </a:rPr>
+                        <a:t> </a:t>
+                      </a:r>
+                    </a:p>
+                    <a:p>
+                      <a:pPr algn="ctr"/>
+                      <a:r>
+                        <a:rPr lang="en-US" sz="2000" baseline="0" dirty="0">
+                          <a:latin typeface="Consolas" panose="020B0609020204030204" pitchFamily="49" charset="0"/>
+                          <a:cs typeface="Consolas" panose="020B0609020204030204" pitchFamily="49" charset="0"/>
+                        </a:rPr>
+                        <a:t>Data</a:t>
+                      </a:r>
+                      <a:endParaRPr lang="en-US" sz="2000" dirty="0">
+                        <a:latin typeface="Consolas" panose="020B0609020204030204" pitchFamily="49" charset="0"/>
+                        <a:cs typeface="Consolas" panose="020B0609020204030204" pitchFamily="49" charset="0"/>
+                      </a:endParaRPr>
+                    </a:p>
+                  </a:txBody>
+                  <a:tcPr/>
+                </a:tc>
+                <a:extLst>
+                  <a:ext uri="{0D108BD9-81ED-4DB2-BD59-A6C34878D82A}">
+                    <a16:rowId xmlns:a16="http://schemas.microsoft.com/office/drawing/2014/main" val="10000"/>
+                  </a:ext>
+                </a:extLst>
+              </a:tr>
+              <a:tr h="370840">
+                <a:tc>
+                  <a:txBody>
+                    <a:bodyPr/>
+                    <a:lstStyle/>
+                    <a:p>
+                      <a:pPr algn="ctr"/>
+                      <a:r>
+                        <a:rPr lang="en-US" sz="2000" dirty="0">
+                          <a:latin typeface="Consolas" panose="020B0609020204030204" pitchFamily="49" charset="0"/>
+                          <a:cs typeface="Consolas" panose="020B0609020204030204" pitchFamily="49" charset="0"/>
+                        </a:rPr>
+                        <a:t>0x0000000B</a:t>
+                      </a:r>
+                    </a:p>
+                  </a:txBody>
+                  <a:tcPr>
+                    <a:noFill/>
+                  </a:tcPr>
+                </a:tc>
+                <a:tc>
+                  <a:txBody>
+                    <a:bodyPr/>
+                    <a:lstStyle/>
+                    <a:p>
+                      <a:pPr marL="0" marR="0" indent="0" algn="ctr" defTabSz="914400" rtl="0" eaLnBrk="1" fontAlgn="auto" latinLnBrk="0" hangingPunct="1">
+                        <a:lnSpc>
+                          <a:spcPct val="100000"/>
+                        </a:lnSpc>
+                        <a:spcBef>
+                          <a:spcPts val="0"/>
+                        </a:spcBef>
+                        <a:spcAft>
+                          <a:spcPts val="0"/>
+                        </a:spcAft>
+                        <a:buClrTx/>
+                        <a:buSzTx/>
+                        <a:buFontTx/>
+                        <a:buNone/>
+                        <a:tabLst/>
+                        <a:defRPr/>
+                      </a:pPr>
+                      <a:r>
+                        <a:rPr lang="en-US" sz="2000" dirty="0">
+                          <a:latin typeface="Consolas" panose="020B0609020204030204" pitchFamily="49" charset="0"/>
+                          <a:cs typeface="Consolas" panose="020B0609020204030204" pitchFamily="49" charset="0"/>
+                        </a:rPr>
+                        <a:t>0x23</a:t>
+                      </a:r>
+                    </a:p>
+                  </a:txBody>
+                  <a:tcPr/>
+                </a:tc>
+                <a:extLst>
+                  <a:ext uri="{0D108BD9-81ED-4DB2-BD59-A6C34878D82A}">
+                    <a16:rowId xmlns:a16="http://schemas.microsoft.com/office/drawing/2014/main" val="10001"/>
+                  </a:ext>
+                </a:extLst>
+              </a:tr>
+              <a:tr h="370840">
+                <a:tc>
+                  <a:txBody>
+                    <a:bodyPr/>
+                    <a:lstStyle/>
+                    <a:p>
+                      <a:pPr algn="ctr"/>
+                      <a:r>
+                        <a:rPr lang="en-US" sz="2000" dirty="0">
+                          <a:latin typeface="Consolas" panose="020B0609020204030204" pitchFamily="49" charset="0"/>
+                          <a:cs typeface="Consolas" panose="020B0609020204030204" pitchFamily="49" charset="0"/>
+                        </a:rPr>
+                        <a:t>0x0000000A</a:t>
+                      </a:r>
+                    </a:p>
+                  </a:txBody>
+                  <a:tcPr>
+                    <a:noFill/>
+                  </a:tcPr>
+                </a:tc>
+                <a:tc>
+                  <a:txBody>
+                    <a:bodyPr/>
+                    <a:lstStyle/>
+                    <a:p>
+                      <a:pPr marL="0" marR="0" indent="0" algn="ctr" defTabSz="914400" rtl="0" eaLnBrk="1" fontAlgn="auto" latinLnBrk="0" hangingPunct="1">
+                        <a:lnSpc>
+                          <a:spcPct val="100000"/>
+                        </a:lnSpc>
+                        <a:spcBef>
+                          <a:spcPts val="0"/>
+                        </a:spcBef>
+                        <a:spcAft>
+                          <a:spcPts val="0"/>
+                        </a:spcAft>
+                        <a:buClrTx/>
+                        <a:buSzTx/>
+                        <a:buFontTx/>
+                        <a:buNone/>
+                        <a:tabLst/>
+                        <a:defRPr/>
+                      </a:pPr>
+                      <a:r>
+                        <a:rPr lang="en-US" sz="2000" dirty="0">
+                          <a:latin typeface="Consolas" panose="020B0609020204030204" pitchFamily="49" charset="0"/>
+                          <a:cs typeface="Consolas" panose="020B0609020204030204" pitchFamily="49" charset="0"/>
+                        </a:rPr>
+                        <a:t>0x45</a:t>
+                      </a:r>
+                    </a:p>
+                  </a:txBody>
+                  <a:tcPr/>
+                </a:tc>
+                <a:extLst>
+                  <a:ext uri="{0D108BD9-81ED-4DB2-BD59-A6C34878D82A}">
+                    <a16:rowId xmlns:a16="http://schemas.microsoft.com/office/drawing/2014/main" val="10002"/>
+                  </a:ext>
+                </a:extLst>
+              </a:tr>
+              <a:tr h="370840">
+                <a:tc>
+                  <a:txBody>
+                    <a:bodyPr/>
+                    <a:lstStyle/>
+                    <a:p>
+                      <a:pPr algn="ctr"/>
+                      <a:r>
+                        <a:rPr lang="en-US" sz="2000" dirty="0">
+                          <a:latin typeface="Consolas" panose="020B0609020204030204" pitchFamily="49" charset="0"/>
+                          <a:cs typeface="Consolas" panose="020B0609020204030204" pitchFamily="49" charset="0"/>
+                        </a:rPr>
+                        <a:t>0x00000009</a:t>
+                      </a:r>
+                    </a:p>
+                  </a:txBody>
+                  <a:tcPr>
+                    <a:noFill/>
+                  </a:tcPr>
+                </a:tc>
+                <a:tc>
+                  <a:txBody>
+                    <a:bodyPr/>
+                    <a:lstStyle/>
+                    <a:p>
+                      <a:pPr marL="0" marR="0" indent="0" algn="ctr" defTabSz="914400" rtl="0" eaLnBrk="1" fontAlgn="auto" latinLnBrk="0" hangingPunct="1">
+                        <a:lnSpc>
+                          <a:spcPct val="100000"/>
+                        </a:lnSpc>
+                        <a:spcBef>
+                          <a:spcPts val="0"/>
+                        </a:spcBef>
+                        <a:spcAft>
+                          <a:spcPts val="0"/>
+                        </a:spcAft>
+                        <a:buClrTx/>
+                        <a:buSzTx/>
+                        <a:buFontTx/>
+                        <a:buNone/>
+                        <a:tabLst/>
+                        <a:defRPr/>
+                      </a:pPr>
+                      <a:r>
+                        <a:rPr lang="en-US" sz="2000" dirty="0">
+                          <a:latin typeface="Consolas" panose="020B0609020204030204" pitchFamily="49" charset="0"/>
+                          <a:cs typeface="Consolas" panose="020B0609020204030204" pitchFamily="49" charset="0"/>
+                        </a:rPr>
+                        <a:t>0x67</a:t>
+                      </a:r>
+                    </a:p>
+                  </a:txBody>
+                  <a:tcPr/>
+                </a:tc>
+                <a:extLst>
+                  <a:ext uri="{0D108BD9-81ED-4DB2-BD59-A6C34878D82A}">
+                    <a16:rowId xmlns:a16="http://schemas.microsoft.com/office/drawing/2014/main" val="10003"/>
+                  </a:ext>
+                </a:extLst>
+              </a:tr>
+              <a:tr h="370840">
+                <a:tc>
+                  <a:txBody>
+                    <a:bodyPr/>
+                    <a:lstStyle/>
+                    <a:p>
+                      <a:pPr algn="ctr"/>
+                      <a:r>
+                        <a:rPr lang="en-US" sz="2000" dirty="0">
+                          <a:latin typeface="Consolas" panose="020B0609020204030204" pitchFamily="49" charset="0"/>
+                          <a:cs typeface="Consolas" panose="020B0609020204030204" pitchFamily="49" charset="0"/>
+                        </a:rPr>
+                        <a:t>0x00000008</a:t>
+                      </a:r>
+                    </a:p>
+                  </a:txBody>
+                  <a:tcPr>
+                    <a:noFill/>
+                  </a:tcPr>
+                </a:tc>
+                <a:tc>
+                  <a:txBody>
+                    <a:bodyPr/>
+                    <a:lstStyle/>
+                    <a:p>
+                      <a:pPr marL="0" marR="0" indent="0" algn="ctr" defTabSz="914400" rtl="0" eaLnBrk="1" fontAlgn="auto" latinLnBrk="0" hangingPunct="1">
+                        <a:lnSpc>
+                          <a:spcPct val="100000"/>
+                        </a:lnSpc>
+                        <a:spcBef>
+                          <a:spcPts val="0"/>
+                        </a:spcBef>
+                        <a:spcAft>
+                          <a:spcPts val="0"/>
+                        </a:spcAft>
+                        <a:buClrTx/>
+                        <a:buSzTx/>
+                        <a:buFontTx/>
+                        <a:buNone/>
+                        <a:tabLst/>
+                        <a:defRPr/>
+                      </a:pPr>
+                      <a:r>
+                        <a:rPr lang="en-US" sz="2000" dirty="0">
+                          <a:latin typeface="Consolas" panose="020B0609020204030204" pitchFamily="49" charset="0"/>
+                          <a:cs typeface="Consolas" panose="020B0609020204030204" pitchFamily="49" charset="0"/>
+                        </a:rPr>
+                        <a:t>0x89</a:t>
+                      </a:r>
+                    </a:p>
+                  </a:txBody>
+                  <a:tcPr/>
+                </a:tc>
+                <a:extLst>
+                  <a:ext uri="{0D108BD9-81ED-4DB2-BD59-A6C34878D82A}">
+                    <a16:rowId xmlns:a16="http://schemas.microsoft.com/office/drawing/2014/main" val="10004"/>
+                  </a:ext>
+                </a:extLst>
+              </a:tr>
+            </a:tbl>
+          </a:graphicData>
+        </a:graphic>
+      </p:graphicFrame>
+      <p:sp>
+        <p:nvSpPr>
+          <p:cNvPr id="10" name="TextBox 9">
+            <a:extLst>
+              <a:ext uri="{FF2B5EF4-FFF2-40B4-BE49-F238E27FC236}">
+                <a16:creationId xmlns:a16="http://schemas.microsoft.com/office/drawing/2014/main" id="{CD328998-F5A5-38ED-01EA-1EC3EF7E338A}"/>
+              </a:ext>
+            </a:extLst>
+          </p:cNvPr>
+          <p:cNvSpPr txBox="1"/>
+          <p:nvPr/>
+        </p:nvSpPr>
+        <p:spPr>
+          <a:xfrm>
+            <a:off x="316538" y="6094027"/>
+            <a:ext cx="541606" cy="461665"/>
+          </a:xfrm>
+          <a:prstGeom prst="rect">
+            <a:avLst/>
+          </a:prstGeom>
+          <a:noFill/>
+        </p:spPr>
+        <p:txBody>
+          <a:bodyPr wrap="square" rtlCol="0">
+            <a:spAutoFit/>
+          </a:bodyPr>
+          <a:lstStyle/>
+          <a:p>
+            <a:r>
+              <a:rPr lang="en-US" sz="2400" b="0" dirty="0">
+                <a:latin typeface="Consolas" panose="020B0609020204030204" pitchFamily="49" charset="0"/>
+                <a:cs typeface="Consolas" panose="020B0609020204030204" pitchFamily="49" charset="0"/>
+              </a:rPr>
+              <a:t>R2 </a:t>
+            </a:r>
+          </a:p>
+        </p:txBody>
+      </p:sp>
+      <p:sp>
+        <p:nvSpPr>
+          <p:cNvPr id="11" name="Arrow: Right 10">
+            <a:extLst>
+              <a:ext uri="{FF2B5EF4-FFF2-40B4-BE49-F238E27FC236}">
+                <a16:creationId xmlns:a16="http://schemas.microsoft.com/office/drawing/2014/main" id="{87B6A0A7-7A1C-7320-C242-11989D0D0ED0}"/>
+              </a:ext>
+            </a:extLst>
+          </p:cNvPr>
+          <p:cNvSpPr/>
+          <p:nvPr/>
+        </p:nvSpPr>
+        <p:spPr>
+          <a:xfrm>
+            <a:off x="809113" y="6218188"/>
+            <a:ext cx="298611" cy="240892"/>
+          </a:xfrm>
+          <a:prstGeom prst="rightArrow">
+            <a:avLst/>
+          </a:prstGeom>
+        </p:spPr>
+        <p:style>
+          <a:lnRef idx="2">
+            <a:schemeClr val="accent1">
+              <a:shade val="15000"/>
+            </a:schemeClr>
+          </a:lnRef>
+          <a:fillRef idx="1">
+            <a:schemeClr val="accent1"/>
+          </a:fillRef>
+          <a:effectRef idx="0">
+            <a:schemeClr val="accent1"/>
+          </a:effectRef>
+          <a:fontRef idx="minor">
+            <a:schemeClr val="lt1"/>
+          </a:fontRef>
+        </p:style>
+        <p:txBody>
+          <a:bodyPr rtlCol="0" anchor="ctr"/>
+          <a:lstStyle/>
+          <a:p>
+            <a:pPr algn="ctr"/>
+            <a:endParaRPr lang="en-US"/>
+          </a:p>
+        </p:txBody>
+      </p:sp>
+      <p:sp>
+        <p:nvSpPr>
+          <p:cNvPr id="12" name="TextBox 11">
+            <a:extLst>
+              <a:ext uri="{FF2B5EF4-FFF2-40B4-BE49-F238E27FC236}">
+                <a16:creationId xmlns:a16="http://schemas.microsoft.com/office/drawing/2014/main" id="{564CC732-54C8-85E9-07B7-FAF0798F74AA}"/>
+              </a:ext>
+            </a:extLst>
+          </p:cNvPr>
+          <p:cNvSpPr txBox="1"/>
+          <p:nvPr/>
+        </p:nvSpPr>
+        <p:spPr>
+          <a:xfrm>
+            <a:off x="4653359" y="6094027"/>
+            <a:ext cx="541606" cy="461665"/>
+          </a:xfrm>
+          <a:prstGeom prst="rect">
+            <a:avLst/>
+          </a:prstGeom>
+          <a:noFill/>
+        </p:spPr>
+        <p:txBody>
+          <a:bodyPr wrap="square" rtlCol="0">
+            <a:spAutoFit/>
+          </a:bodyPr>
+          <a:lstStyle/>
+          <a:p>
+            <a:r>
+              <a:rPr lang="en-US" sz="2400" b="0" dirty="0">
+                <a:latin typeface="Consolas" panose="020B0609020204030204" pitchFamily="49" charset="0"/>
+                <a:cs typeface="Consolas" panose="020B0609020204030204" pitchFamily="49" charset="0"/>
+              </a:rPr>
+              <a:t>R2 </a:t>
+            </a:r>
+          </a:p>
+        </p:txBody>
+      </p:sp>
+      <p:sp>
+        <p:nvSpPr>
+          <p:cNvPr id="13" name="Arrow: Right 12">
+            <a:extLst>
+              <a:ext uri="{FF2B5EF4-FFF2-40B4-BE49-F238E27FC236}">
+                <a16:creationId xmlns:a16="http://schemas.microsoft.com/office/drawing/2014/main" id="{2C9720F2-1965-B15A-E7DD-DB560229807A}"/>
+              </a:ext>
+            </a:extLst>
+          </p:cNvPr>
+          <p:cNvSpPr/>
+          <p:nvPr/>
+        </p:nvSpPr>
+        <p:spPr>
+          <a:xfrm>
+            <a:off x="5145934" y="6218188"/>
+            <a:ext cx="298611" cy="240892"/>
+          </a:xfrm>
+          <a:prstGeom prst="rightArrow">
+            <a:avLst/>
+          </a:prstGeom>
+        </p:spPr>
+        <p:style>
+          <a:lnRef idx="2">
+            <a:schemeClr val="accent1">
+              <a:shade val="15000"/>
+            </a:schemeClr>
+          </a:lnRef>
+          <a:fillRef idx="1">
+            <a:schemeClr val="accent1"/>
+          </a:fillRef>
+          <a:effectRef idx="0">
+            <a:schemeClr val="accent1"/>
+          </a:effectRef>
+          <a:fontRef idx="minor">
+            <a:schemeClr val="lt1"/>
+          </a:fontRef>
+        </p:style>
+        <p:txBody>
+          <a:bodyPr rtlCol="0" anchor="ctr"/>
+          <a:lstStyle/>
+          <a:p>
+            <a:pPr algn="ctr"/>
+            <a:endParaRPr lang="en-US"/>
+          </a:p>
+        </p:txBody>
+      </p:sp>
+    </p:spTree>
+    <p:extLst>
+      <p:ext uri="{BB962C8B-B14F-4D97-AF65-F5344CB8AC3E}">
+        <p14:creationId xmlns:p14="http://schemas.microsoft.com/office/powerpoint/2010/main" val="1204830540"/>
+      </p:ext>
+    </p:extLst>
+  </p:cSld>
+  <p:clrMapOvr>
+    <a:masterClrMapping/>
+  </p:clrMapOvr>
+  <p:transition>
+    <p:pull dir="ru"/>
+  </p:transition>
+</p:sld>
+</file>
+
 <file path=ppt/slides/slide3.xml><?xml version="1.0" encoding="utf-8"?>
 <p:sld xmlns:a="http://schemas.openxmlformats.org/drawingml/2006/main" xmlns:r="http://schemas.openxmlformats.org/officeDocument/2006/relationships" xmlns:p="http://schemas.openxmlformats.org/presentationml/2006/main">
   <p:cSld>
@@ -26798,12 +27737,8 @@
           <a:p>
             <a:pPr marL="119063" indent="-119063"/>
             <a:r>
-              <a:rPr lang="en-US" dirty="0"/>
-              <a:t>Answer</a:t>
-            </a:r>
-            <a:r>
               <a:rPr lang="en-US" altLang="zh-CN" dirty="0"/>
-              <a:t>: Endianness</a:t>
+              <a:t>Endianness ANS</a:t>
             </a:r>
             <a:endParaRPr lang="en-US" dirty="0"/>
           </a:p>
@@ -31237,1002 +32172,6 @@
   <p:cSld>
     <p:spTree>
       <p:nvGrpSpPr>
-        <p:cNvPr id="1" name="">
-          <a:extLst>
-            <a:ext uri="{FF2B5EF4-FFF2-40B4-BE49-F238E27FC236}">
-              <a16:creationId xmlns:a16="http://schemas.microsoft.com/office/drawing/2014/main" id="{C725164D-65DE-1197-3213-5D4C9C12C3DF}"/>
-            </a:ext>
-          </a:extLst>
-        </p:cNvPr>
-        <p:cNvGrpSpPr/>
-        <p:nvPr/>
-      </p:nvGrpSpPr>
-      <p:grpSpPr>
-        <a:xfrm>
-          <a:off x="0" y="0"/>
-          <a:ext cx="0" cy="0"/>
-          <a:chOff x="0" y="0"/>
-          <a:chExt cx="0" cy="0"/>
-        </a:xfrm>
-      </p:grpSpPr>
-      <p:sp>
-        <p:nvSpPr>
-          <p:cNvPr id="2" name="Title 1">
-            <a:extLst>
-              <a:ext uri="{FF2B5EF4-FFF2-40B4-BE49-F238E27FC236}">
-                <a16:creationId xmlns:a16="http://schemas.microsoft.com/office/drawing/2014/main" id="{14E1FC6F-F86B-D4FA-4FF9-D7B46DE6EB88}"/>
-              </a:ext>
-            </a:extLst>
-          </p:cNvPr>
-          <p:cNvSpPr>
-            <a:spLocks noGrp="1"/>
-          </p:cNvSpPr>
-          <p:nvPr>
-            <p:ph type="title"/>
-          </p:nvPr>
-        </p:nvSpPr>
-        <p:spPr/>
-        <p:txBody>
-          <a:bodyPr>
-            <a:normAutofit/>
-          </a:bodyPr>
-          <a:lstStyle/>
-          <a:p>
-            <a:r>
-              <a:rPr lang="en-US" dirty="0"/>
-              <a:t>LDRSH R7, [R2, #2] ANS</a:t>
-            </a:r>
-          </a:p>
-        </p:txBody>
-      </p:sp>
-      <p:sp>
-        <p:nvSpPr>
-          <p:cNvPr id="4" name="Content Placeholder 3">
-            <a:extLst>
-              <a:ext uri="{FF2B5EF4-FFF2-40B4-BE49-F238E27FC236}">
-                <a16:creationId xmlns:a16="http://schemas.microsoft.com/office/drawing/2014/main" id="{F5BD1FD1-2387-26FB-4BF0-E2B12311B2D2}"/>
-              </a:ext>
-            </a:extLst>
-          </p:cNvPr>
-          <p:cNvSpPr>
-            <a:spLocks noGrp="1"/>
-          </p:cNvSpPr>
-          <p:nvPr>
-            <p:ph sz="quarter" idx="1"/>
-          </p:nvPr>
-        </p:nvSpPr>
-        <p:spPr>
-          <a:xfrm>
-            <a:off x="457200" y="1143000"/>
-            <a:ext cx="8229600" cy="3558746"/>
-          </a:xfrm>
-        </p:spPr>
-        <p:txBody>
-          <a:bodyPr>
-            <a:normAutofit/>
-          </a:bodyPr>
-          <a:lstStyle/>
-          <a:p>
-            <a:r>
-              <a:rPr lang="en-US" dirty="0"/>
-              <a:t>ANS after LDRSH R7, [R2, #2]:</a:t>
-            </a:r>
-          </a:p>
-          <a:p>
-            <a:pPr lvl="1"/>
-            <a:r>
-              <a:rPr lang="en-US" dirty="0"/>
-              <a:t>Big-endian: the word 0x23456789 is laid out in memory as bytes 23 45 67 89 at addresses A, A+1, A+2, A+3 respectively, so LDRSH R7, [R2, #2] reads 0x6789 and sign-extends it to R7 = 0x00006789. </a:t>
-            </a:r>
-          </a:p>
-          <a:p>
-            <a:pPr lvl="1"/>
-            <a:r>
-              <a:rPr lang="en-US" dirty="0"/>
-              <a:t>Little-endian: the same word is laid out as 89 67 45 23 at addresses A, A+1, A+2, A+3 respectively, so LDRSH R7, [R2, #2] reads 0x2345 and sign-extends it to R7 = 0x00002345. </a:t>
-            </a:r>
-          </a:p>
-          <a:p>
-            <a:pPr lvl="1"/>
-            <a:endParaRPr lang="en-US" dirty="0"/>
-          </a:p>
-        </p:txBody>
-      </p:sp>
-      <p:graphicFrame>
-        <p:nvGraphicFramePr>
-          <p:cNvPr id="8" name="Table 7">
-            <a:extLst>
-              <a:ext uri="{FF2B5EF4-FFF2-40B4-BE49-F238E27FC236}">
-                <a16:creationId xmlns:a16="http://schemas.microsoft.com/office/drawing/2014/main" id="{A9B3120B-E6CB-D08B-C83A-65EA4EBFEEBA}"/>
-              </a:ext>
-            </a:extLst>
-          </p:cNvPr>
-          <p:cNvGraphicFramePr>
-            <a:graphicFrameLocks noGrp="1"/>
-          </p:cNvGraphicFramePr>
-          <p:nvPr>
-            <p:extLst>
-              <p:ext uri="{D42A27DB-BD31-4B8C-83A1-F6EECF244321}">
-                <p14:modId xmlns:p14="http://schemas.microsoft.com/office/powerpoint/2010/main" val="2373286293"/>
-              </p:ext>
-            </p:extLst>
-          </p:nvPr>
-        </p:nvGraphicFramePr>
-        <p:xfrm>
-          <a:off x="773827" y="4221740"/>
-          <a:ext cx="3798173" cy="2286000"/>
-        </p:xfrm>
-        <a:graphic>
-          <a:graphicData uri="http://schemas.openxmlformats.org/drawingml/2006/table">
-            <a:tbl>
-              <a:tblPr firstRow="1" bandRow="1">
-                <a:tableStyleId>{5C22544A-7EE6-4342-B048-85BDC9FD1C3A}</a:tableStyleId>
-              </a:tblPr>
-              <a:tblGrid>
-                <a:gridCol w="2214983">
-                  <a:extLst>
-                    <a:ext uri="{9D8B030D-6E8A-4147-A177-3AD203B41FA5}">
-                      <a16:colId xmlns:a16="http://schemas.microsoft.com/office/drawing/2014/main" val="20000"/>
-                    </a:ext>
-                  </a:extLst>
-                </a:gridCol>
-                <a:gridCol w="1583190">
-                  <a:extLst>
-                    <a:ext uri="{9D8B030D-6E8A-4147-A177-3AD203B41FA5}">
-                      <a16:colId xmlns:a16="http://schemas.microsoft.com/office/drawing/2014/main" val="20001"/>
-                    </a:ext>
-                  </a:extLst>
-                </a:gridCol>
-              </a:tblGrid>
-              <a:tr h="370840">
-                <a:tc>
-                  <a:txBody>
-                    <a:bodyPr/>
-                    <a:lstStyle/>
-                    <a:p>
-                      <a:pPr algn="ctr"/>
-                      <a:r>
-                        <a:rPr lang="en-US" sz="2000" dirty="0">
-                          <a:solidFill>
-                            <a:schemeClr val="tx1"/>
-                          </a:solidFill>
-                          <a:latin typeface="Consolas" panose="020B0609020204030204" pitchFamily="49" charset="0"/>
-                          <a:cs typeface="Consolas" panose="020B0609020204030204" pitchFamily="49" charset="0"/>
-                        </a:rPr>
-                        <a:t>Memory Address</a:t>
-                      </a:r>
-                    </a:p>
-                  </a:txBody>
-                  <a:tcPr>
-                    <a:noFill/>
-                  </a:tcPr>
-                </a:tc>
-                <a:tc>
-                  <a:txBody>
-                    <a:bodyPr/>
-                    <a:lstStyle/>
-                    <a:p>
-                      <a:pPr algn="ctr"/>
-                      <a:r>
-                        <a:rPr lang="en-US" sz="2000" dirty="0">
-                          <a:latin typeface="Consolas" panose="020B0609020204030204" pitchFamily="49" charset="0"/>
-                          <a:cs typeface="Consolas" panose="020B0609020204030204" pitchFamily="49" charset="0"/>
-                        </a:rPr>
-                        <a:t>Memory</a:t>
-                      </a:r>
-                      <a:r>
-                        <a:rPr lang="en-US" sz="2000" baseline="0" dirty="0">
-                          <a:latin typeface="Consolas" panose="020B0609020204030204" pitchFamily="49" charset="0"/>
-                          <a:cs typeface="Consolas" panose="020B0609020204030204" pitchFamily="49" charset="0"/>
-                        </a:rPr>
-                        <a:t> </a:t>
-                      </a:r>
-                    </a:p>
-                    <a:p>
-                      <a:pPr algn="ctr"/>
-                      <a:r>
-                        <a:rPr lang="en-US" sz="2000" baseline="0" dirty="0">
-                          <a:latin typeface="Consolas" panose="020B0609020204030204" pitchFamily="49" charset="0"/>
-                          <a:cs typeface="Consolas" panose="020B0609020204030204" pitchFamily="49" charset="0"/>
-                        </a:rPr>
-                        <a:t>Data</a:t>
-                      </a:r>
-                      <a:endParaRPr lang="en-US" sz="2000" dirty="0">
-                        <a:latin typeface="Consolas" panose="020B0609020204030204" pitchFamily="49" charset="0"/>
-                        <a:cs typeface="Consolas" panose="020B0609020204030204" pitchFamily="49" charset="0"/>
-                      </a:endParaRPr>
-                    </a:p>
-                  </a:txBody>
-                  <a:tcPr/>
-                </a:tc>
-                <a:extLst>
-                  <a:ext uri="{0D108BD9-81ED-4DB2-BD59-A6C34878D82A}">
-                    <a16:rowId xmlns:a16="http://schemas.microsoft.com/office/drawing/2014/main" val="10000"/>
-                  </a:ext>
-                </a:extLst>
-              </a:tr>
-              <a:tr h="370840">
-                <a:tc>
-                  <a:txBody>
-                    <a:bodyPr/>
-                    <a:lstStyle/>
-                    <a:p>
-                      <a:pPr algn="ctr"/>
-                      <a:r>
-                        <a:rPr lang="en-US" sz="2000" dirty="0">
-                          <a:latin typeface="Consolas" panose="020B0609020204030204" pitchFamily="49" charset="0"/>
-                          <a:cs typeface="Consolas" panose="020B0609020204030204" pitchFamily="49" charset="0"/>
-                        </a:rPr>
-                        <a:t>0x0000000B</a:t>
-                      </a:r>
-                    </a:p>
-                  </a:txBody>
-                  <a:tcPr>
-                    <a:noFill/>
-                  </a:tcPr>
-                </a:tc>
-                <a:tc>
-                  <a:txBody>
-                    <a:bodyPr/>
-                    <a:lstStyle/>
-                    <a:p>
-                      <a:pPr marL="0" marR="0" indent="0" algn="ctr" defTabSz="914400" rtl="0" eaLnBrk="1" fontAlgn="auto" latinLnBrk="0" hangingPunct="1">
-                        <a:lnSpc>
-                          <a:spcPct val="100000"/>
-                        </a:lnSpc>
-                        <a:spcBef>
-                          <a:spcPts val="0"/>
-                        </a:spcBef>
-                        <a:spcAft>
-                          <a:spcPts val="0"/>
-                        </a:spcAft>
-                        <a:buClrTx/>
-                        <a:buSzTx/>
-                        <a:buFontTx/>
-                        <a:buNone/>
-                        <a:tabLst/>
-                        <a:defRPr/>
-                      </a:pPr>
-                      <a:r>
-                        <a:rPr lang="en-US" sz="2000" dirty="0">
-                          <a:latin typeface="Consolas" panose="020B0609020204030204" pitchFamily="49" charset="0"/>
-                          <a:cs typeface="Consolas" panose="020B0609020204030204" pitchFamily="49" charset="0"/>
-                        </a:rPr>
-                        <a:t>0x89</a:t>
-                      </a:r>
-                    </a:p>
-                  </a:txBody>
-                  <a:tcPr/>
-                </a:tc>
-                <a:extLst>
-                  <a:ext uri="{0D108BD9-81ED-4DB2-BD59-A6C34878D82A}">
-                    <a16:rowId xmlns:a16="http://schemas.microsoft.com/office/drawing/2014/main" val="10001"/>
-                  </a:ext>
-                </a:extLst>
-              </a:tr>
-              <a:tr h="370840">
-                <a:tc>
-                  <a:txBody>
-                    <a:bodyPr/>
-                    <a:lstStyle/>
-                    <a:p>
-                      <a:pPr algn="ctr"/>
-                      <a:r>
-                        <a:rPr lang="en-US" sz="2000" dirty="0">
-                          <a:latin typeface="Consolas" panose="020B0609020204030204" pitchFamily="49" charset="0"/>
-                          <a:cs typeface="Consolas" panose="020B0609020204030204" pitchFamily="49" charset="0"/>
-                        </a:rPr>
-                        <a:t>0x0000000A</a:t>
-                      </a:r>
-                    </a:p>
-                  </a:txBody>
-                  <a:tcPr>
-                    <a:noFill/>
-                  </a:tcPr>
-                </a:tc>
-                <a:tc>
-                  <a:txBody>
-                    <a:bodyPr/>
-                    <a:lstStyle/>
-                    <a:p>
-                      <a:pPr marL="0" marR="0" indent="0" algn="ctr" defTabSz="914400" rtl="0" eaLnBrk="1" fontAlgn="auto" latinLnBrk="0" hangingPunct="1">
-                        <a:lnSpc>
-                          <a:spcPct val="100000"/>
-                        </a:lnSpc>
-                        <a:spcBef>
-                          <a:spcPts val="0"/>
-                        </a:spcBef>
-                        <a:spcAft>
-                          <a:spcPts val="0"/>
-                        </a:spcAft>
-                        <a:buClrTx/>
-                        <a:buSzTx/>
-                        <a:buFontTx/>
-                        <a:buNone/>
-                        <a:tabLst/>
-                        <a:defRPr/>
-                      </a:pPr>
-                      <a:r>
-                        <a:rPr lang="en-US" sz="2000" dirty="0">
-                          <a:latin typeface="Consolas" panose="020B0609020204030204" pitchFamily="49" charset="0"/>
-                          <a:cs typeface="Consolas" panose="020B0609020204030204" pitchFamily="49" charset="0"/>
-                        </a:rPr>
-                        <a:t>0x67</a:t>
-                      </a:r>
-                    </a:p>
-                  </a:txBody>
-                  <a:tcPr/>
-                </a:tc>
-                <a:extLst>
-                  <a:ext uri="{0D108BD9-81ED-4DB2-BD59-A6C34878D82A}">
-                    <a16:rowId xmlns:a16="http://schemas.microsoft.com/office/drawing/2014/main" val="10002"/>
-                  </a:ext>
-                </a:extLst>
-              </a:tr>
-              <a:tr h="370840">
-                <a:tc>
-                  <a:txBody>
-                    <a:bodyPr/>
-                    <a:lstStyle/>
-                    <a:p>
-                      <a:pPr algn="ctr"/>
-                      <a:r>
-                        <a:rPr lang="en-US" sz="2000" dirty="0">
-                          <a:latin typeface="Consolas" panose="020B0609020204030204" pitchFamily="49" charset="0"/>
-                          <a:cs typeface="Consolas" panose="020B0609020204030204" pitchFamily="49" charset="0"/>
-                        </a:rPr>
-                        <a:t>0x00000009</a:t>
-                      </a:r>
-                    </a:p>
-                  </a:txBody>
-                  <a:tcPr>
-                    <a:noFill/>
-                  </a:tcPr>
-                </a:tc>
-                <a:tc>
-                  <a:txBody>
-                    <a:bodyPr/>
-                    <a:lstStyle/>
-                    <a:p>
-                      <a:pPr marL="0" marR="0" indent="0" algn="ctr" defTabSz="914400" rtl="0" eaLnBrk="1" fontAlgn="auto" latinLnBrk="0" hangingPunct="1">
-                        <a:lnSpc>
-                          <a:spcPct val="100000"/>
-                        </a:lnSpc>
-                        <a:spcBef>
-                          <a:spcPts val="0"/>
-                        </a:spcBef>
-                        <a:spcAft>
-                          <a:spcPts val="0"/>
-                        </a:spcAft>
-                        <a:buClrTx/>
-                        <a:buSzTx/>
-                        <a:buFontTx/>
-                        <a:buNone/>
-                        <a:tabLst/>
-                        <a:defRPr/>
-                      </a:pPr>
-                      <a:r>
-                        <a:rPr lang="en-US" sz="2000" dirty="0">
-                          <a:latin typeface="Consolas" panose="020B0609020204030204" pitchFamily="49" charset="0"/>
-                          <a:cs typeface="Consolas" panose="020B0609020204030204" pitchFamily="49" charset="0"/>
-                        </a:rPr>
-                        <a:t>0x45</a:t>
-                      </a:r>
-                    </a:p>
-                  </a:txBody>
-                  <a:tcPr/>
-                </a:tc>
-                <a:extLst>
-                  <a:ext uri="{0D108BD9-81ED-4DB2-BD59-A6C34878D82A}">
-                    <a16:rowId xmlns:a16="http://schemas.microsoft.com/office/drawing/2014/main" val="10003"/>
-                  </a:ext>
-                </a:extLst>
-              </a:tr>
-              <a:tr h="370840">
-                <a:tc>
-                  <a:txBody>
-                    <a:bodyPr/>
-                    <a:lstStyle/>
-                    <a:p>
-                      <a:pPr algn="ctr"/>
-                      <a:r>
-                        <a:rPr lang="en-US" sz="2000" dirty="0">
-                          <a:latin typeface="Consolas" panose="020B0609020204030204" pitchFamily="49" charset="0"/>
-                          <a:cs typeface="Consolas" panose="020B0609020204030204" pitchFamily="49" charset="0"/>
-                        </a:rPr>
-                        <a:t>0x00000008</a:t>
-                      </a:r>
-                    </a:p>
-                  </a:txBody>
-                  <a:tcPr>
-                    <a:noFill/>
-                  </a:tcPr>
-                </a:tc>
-                <a:tc>
-                  <a:txBody>
-                    <a:bodyPr/>
-                    <a:lstStyle/>
-                    <a:p>
-                      <a:pPr marL="0" marR="0" indent="0" algn="ctr" defTabSz="914400" rtl="0" eaLnBrk="1" fontAlgn="auto" latinLnBrk="0" hangingPunct="1">
-                        <a:lnSpc>
-                          <a:spcPct val="100000"/>
-                        </a:lnSpc>
-                        <a:spcBef>
-                          <a:spcPts val="0"/>
-                        </a:spcBef>
-                        <a:spcAft>
-                          <a:spcPts val="0"/>
-                        </a:spcAft>
-                        <a:buClrTx/>
-                        <a:buSzTx/>
-                        <a:buFontTx/>
-                        <a:buNone/>
-                        <a:tabLst/>
-                        <a:defRPr/>
-                      </a:pPr>
-                      <a:r>
-                        <a:rPr lang="en-US" sz="2000" dirty="0">
-                          <a:latin typeface="Consolas" panose="020B0609020204030204" pitchFamily="49" charset="0"/>
-                          <a:cs typeface="Consolas" panose="020B0609020204030204" pitchFamily="49" charset="0"/>
-                        </a:rPr>
-                        <a:t>0x23</a:t>
-                      </a:r>
-                    </a:p>
-                  </a:txBody>
-                  <a:tcPr/>
-                </a:tc>
-                <a:extLst>
-                  <a:ext uri="{0D108BD9-81ED-4DB2-BD59-A6C34878D82A}">
-                    <a16:rowId xmlns:a16="http://schemas.microsoft.com/office/drawing/2014/main" val="10004"/>
-                  </a:ext>
-                </a:extLst>
-              </a:tr>
-            </a:tbl>
-          </a:graphicData>
-        </a:graphic>
-      </p:graphicFrame>
-      <p:graphicFrame>
-        <p:nvGraphicFramePr>
-          <p:cNvPr id="9" name="Table 8">
-            <a:extLst>
-              <a:ext uri="{FF2B5EF4-FFF2-40B4-BE49-F238E27FC236}">
-                <a16:creationId xmlns:a16="http://schemas.microsoft.com/office/drawing/2014/main" id="{68A9D7B6-EE91-3397-F114-367B143D28C0}"/>
-              </a:ext>
-            </a:extLst>
-          </p:cNvPr>
-          <p:cNvGraphicFramePr>
-            <a:graphicFrameLocks noGrp="1"/>
-          </p:cNvGraphicFramePr>
-          <p:nvPr>
-            <p:extLst>
-              <p:ext uri="{D42A27DB-BD31-4B8C-83A1-F6EECF244321}">
-                <p14:modId xmlns:p14="http://schemas.microsoft.com/office/powerpoint/2010/main" val="1700288449"/>
-              </p:ext>
-            </p:extLst>
-          </p:nvPr>
-        </p:nvGraphicFramePr>
-        <p:xfrm>
-          <a:off x="5079610" y="4221740"/>
-          <a:ext cx="3798173" cy="2286000"/>
-        </p:xfrm>
-        <a:graphic>
-          <a:graphicData uri="http://schemas.openxmlformats.org/drawingml/2006/table">
-            <a:tbl>
-              <a:tblPr firstRow="1" bandRow="1">
-                <a:tableStyleId>{5C22544A-7EE6-4342-B048-85BDC9FD1C3A}</a:tableStyleId>
-              </a:tblPr>
-              <a:tblGrid>
-                <a:gridCol w="2214983">
-                  <a:extLst>
-                    <a:ext uri="{9D8B030D-6E8A-4147-A177-3AD203B41FA5}">
-                      <a16:colId xmlns:a16="http://schemas.microsoft.com/office/drawing/2014/main" val="20000"/>
-                    </a:ext>
-                  </a:extLst>
-                </a:gridCol>
-                <a:gridCol w="1583190">
-                  <a:extLst>
-                    <a:ext uri="{9D8B030D-6E8A-4147-A177-3AD203B41FA5}">
-                      <a16:colId xmlns:a16="http://schemas.microsoft.com/office/drawing/2014/main" val="20001"/>
-                    </a:ext>
-                  </a:extLst>
-                </a:gridCol>
-              </a:tblGrid>
-              <a:tr h="370840">
-                <a:tc>
-                  <a:txBody>
-                    <a:bodyPr/>
-                    <a:lstStyle/>
-                    <a:p>
-                      <a:pPr algn="ctr"/>
-                      <a:r>
-                        <a:rPr lang="en-US" sz="2000" dirty="0">
-                          <a:solidFill>
-                            <a:schemeClr val="tx1"/>
-                          </a:solidFill>
-                          <a:latin typeface="Consolas" panose="020B0609020204030204" pitchFamily="49" charset="0"/>
-                          <a:cs typeface="Consolas" panose="020B0609020204030204" pitchFamily="49" charset="0"/>
-                        </a:rPr>
-                        <a:t>Memory Address</a:t>
-                      </a:r>
-                    </a:p>
-                  </a:txBody>
-                  <a:tcPr>
-                    <a:noFill/>
-                  </a:tcPr>
-                </a:tc>
-                <a:tc>
-                  <a:txBody>
-                    <a:bodyPr/>
-                    <a:lstStyle/>
-                    <a:p>
-                      <a:pPr algn="ctr"/>
-                      <a:r>
-                        <a:rPr lang="en-US" sz="2000" dirty="0">
-                          <a:latin typeface="Consolas" panose="020B0609020204030204" pitchFamily="49" charset="0"/>
-                          <a:cs typeface="Consolas" panose="020B0609020204030204" pitchFamily="49" charset="0"/>
-                        </a:rPr>
-                        <a:t>Memory</a:t>
-                      </a:r>
-                      <a:r>
-                        <a:rPr lang="en-US" sz="2000" baseline="0" dirty="0">
-                          <a:latin typeface="Consolas" panose="020B0609020204030204" pitchFamily="49" charset="0"/>
-                          <a:cs typeface="Consolas" panose="020B0609020204030204" pitchFamily="49" charset="0"/>
-                        </a:rPr>
-                        <a:t> </a:t>
-                      </a:r>
-                    </a:p>
-                    <a:p>
-                      <a:pPr algn="ctr"/>
-                      <a:r>
-                        <a:rPr lang="en-US" sz="2000" baseline="0" dirty="0">
-                          <a:latin typeface="Consolas" panose="020B0609020204030204" pitchFamily="49" charset="0"/>
-                          <a:cs typeface="Consolas" panose="020B0609020204030204" pitchFamily="49" charset="0"/>
-                        </a:rPr>
-                        <a:t>Data</a:t>
-                      </a:r>
-                      <a:endParaRPr lang="en-US" sz="2000" dirty="0">
-                        <a:latin typeface="Consolas" panose="020B0609020204030204" pitchFamily="49" charset="0"/>
-                        <a:cs typeface="Consolas" panose="020B0609020204030204" pitchFamily="49" charset="0"/>
-                      </a:endParaRPr>
-                    </a:p>
-                  </a:txBody>
-                  <a:tcPr/>
-                </a:tc>
-                <a:extLst>
-                  <a:ext uri="{0D108BD9-81ED-4DB2-BD59-A6C34878D82A}">
-                    <a16:rowId xmlns:a16="http://schemas.microsoft.com/office/drawing/2014/main" val="10000"/>
-                  </a:ext>
-                </a:extLst>
-              </a:tr>
-              <a:tr h="370840">
-                <a:tc>
-                  <a:txBody>
-                    <a:bodyPr/>
-                    <a:lstStyle/>
-                    <a:p>
-                      <a:pPr algn="ctr"/>
-                      <a:r>
-                        <a:rPr lang="en-US" sz="2000" dirty="0">
-                          <a:latin typeface="Consolas" panose="020B0609020204030204" pitchFamily="49" charset="0"/>
-                          <a:cs typeface="Consolas" panose="020B0609020204030204" pitchFamily="49" charset="0"/>
-                        </a:rPr>
-                        <a:t>0x0000000B</a:t>
-                      </a:r>
-                    </a:p>
-                  </a:txBody>
-                  <a:tcPr>
-                    <a:noFill/>
-                  </a:tcPr>
-                </a:tc>
-                <a:tc>
-                  <a:txBody>
-                    <a:bodyPr/>
-                    <a:lstStyle/>
-                    <a:p>
-                      <a:pPr marL="0" marR="0" indent="0" algn="ctr" defTabSz="914400" rtl="0" eaLnBrk="1" fontAlgn="auto" latinLnBrk="0" hangingPunct="1">
-                        <a:lnSpc>
-                          <a:spcPct val="100000"/>
-                        </a:lnSpc>
-                        <a:spcBef>
-                          <a:spcPts val="0"/>
-                        </a:spcBef>
-                        <a:spcAft>
-                          <a:spcPts val="0"/>
-                        </a:spcAft>
-                        <a:buClrTx/>
-                        <a:buSzTx/>
-                        <a:buFontTx/>
-                        <a:buNone/>
-                        <a:tabLst/>
-                        <a:defRPr/>
-                      </a:pPr>
-                      <a:r>
-                        <a:rPr lang="en-US" sz="2000" dirty="0">
-                          <a:latin typeface="Consolas" panose="020B0609020204030204" pitchFamily="49" charset="0"/>
-                          <a:cs typeface="Consolas" panose="020B0609020204030204" pitchFamily="49" charset="0"/>
-                        </a:rPr>
-                        <a:t>0x23</a:t>
-                      </a:r>
-                    </a:p>
-                  </a:txBody>
-                  <a:tcPr/>
-                </a:tc>
-                <a:extLst>
-                  <a:ext uri="{0D108BD9-81ED-4DB2-BD59-A6C34878D82A}">
-                    <a16:rowId xmlns:a16="http://schemas.microsoft.com/office/drawing/2014/main" val="10001"/>
-                  </a:ext>
-                </a:extLst>
-              </a:tr>
-              <a:tr h="370840">
-                <a:tc>
-                  <a:txBody>
-                    <a:bodyPr/>
-                    <a:lstStyle/>
-                    <a:p>
-                      <a:pPr algn="ctr"/>
-                      <a:r>
-                        <a:rPr lang="en-US" sz="2000" dirty="0">
-                          <a:latin typeface="Consolas" panose="020B0609020204030204" pitchFamily="49" charset="0"/>
-                          <a:cs typeface="Consolas" panose="020B0609020204030204" pitchFamily="49" charset="0"/>
-                        </a:rPr>
-                        <a:t>0x0000000A</a:t>
-                      </a:r>
-                    </a:p>
-                  </a:txBody>
-                  <a:tcPr>
-                    <a:noFill/>
-                  </a:tcPr>
-                </a:tc>
-                <a:tc>
-                  <a:txBody>
-                    <a:bodyPr/>
-                    <a:lstStyle/>
-                    <a:p>
-                      <a:pPr marL="0" marR="0" indent="0" algn="ctr" defTabSz="914400" rtl="0" eaLnBrk="1" fontAlgn="auto" latinLnBrk="0" hangingPunct="1">
-                        <a:lnSpc>
-                          <a:spcPct val="100000"/>
-                        </a:lnSpc>
-                        <a:spcBef>
-                          <a:spcPts val="0"/>
-                        </a:spcBef>
-                        <a:spcAft>
-                          <a:spcPts val="0"/>
-                        </a:spcAft>
-                        <a:buClrTx/>
-                        <a:buSzTx/>
-                        <a:buFontTx/>
-                        <a:buNone/>
-                        <a:tabLst/>
-                        <a:defRPr/>
-                      </a:pPr>
-                      <a:r>
-                        <a:rPr lang="en-US" sz="2000" dirty="0">
-                          <a:latin typeface="Consolas" panose="020B0609020204030204" pitchFamily="49" charset="0"/>
-                          <a:cs typeface="Consolas" panose="020B0609020204030204" pitchFamily="49" charset="0"/>
-                        </a:rPr>
-                        <a:t>0x45</a:t>
-                      </a:r>
-                    </a:p>
-                  </a:txBody>
-                  <a:tcPr/>
-                </a:tc>
-                <a:extLst>
-                  <a:ext uri="{0D108BD9-81ED-4DB2-BD59-A6C34878D82A}">
-                    <a16:rowId xmlns:a16="http://schemas.microsoft.com/office/drawing/2014/main" val="10002"/>
-                  </a:ext>
-                </a:extLst>
-              </a:tr>
-              <a:tr h="370840">
-                <a:tc>
-                  <a:txBody>
-                    <a:bodyPr/>
-                    <a:lstStyle/>
-                    <a:p>
-                      <a:pPr algn="ctr"/>
-                      <a:r>
-                        <a:rPr lang="en-US" sz="2000" dirty="0">
-                          <a:latin typeface="Consolas" panose="020B0609020204030204" pitchFamily="49" charset="0"/>
-                          <a:cs typeface="Consolas" panose="020B0609020204030204" pitchFamily="49" charset="0"/>
-                        </a:rPr>
-                        <a:t>0x00000009</a:t>
-                      </a:r>
-                    </a:p>
-                  </a:txBody>
-                  <a:tcPr>
-                    <a:noFill/>
-                  </a:tcPr>
-                </a:tc>
-                <a:tc>
-                  <a:txBody>
-                    <a:bodyPr/>
-                    <a:lstStyle/>
-                    <a:p>
-                      <a:pPr marL="0" marR="0" indent="0" algn="ctr" defTabSz="914400" rtl="0" eaLnBrk="1" fontAlgn="auto" latinLnBrk="0" hangingPunct="1">
-                        <a:lnSpc>
-                          <a:spcPct val="100000"/>
-                        </a:lnSpc>
-                        <a:spcBef>
-                          <a:spcPts val="0"/>
-                        </a:spcBef>
-                        <a:spcAft>
-                          <a:spcPts val="0"/>
-                        </a:spcAft>
-                        <a:buClrTx/>
-                        <a:buSzTx/>
-                        <a:buFontTx/>
-                        <a:buNone/>
-                        <a:tabLst/>
-                        <a:defRPr/>
-                      </a:pPr>
-                      <a:r>
-                        <a:rPr lang="en-US" sz="2000" dirty="0">
-                          <a:latin typeface="Consolas" panose="020B0609020204030204" pitchFamily="49" charset="0"/>
-                          <a:cs typeface="Consolas" panose="020B0609020204030204" pitchFamily="49" charset="0"/>
-                        </a:rPr>
-                        <a:t>0x67</a:t>
-                      </a:r>
-                    </a:p>
-                  </a:txBody>
-                  <a:tcPr/>
-                </a:tc>
-                <a:extLst>
-                  <a:ext uri="{0D108BD9-81ED-4DB2-BD59-A6C34878D82A}">
-                    <a16:rowId xmlns:a16="http://schemas.microsoft.com/office/drawing/2014/main" val="10003"/>
-                  </a:ext>
-                </a:extLst>
-              </a:tr>
-              <a:tr h="370840">
-                <a:tc>
-                  <a:txBody>
-                    <a:bodyPr/>
-                    <a:lstStyle/>
-                    <a:p>
-                      <a:pPr algn="ctr"/>
-                      <a:r>
-                        <a:rPr lang="en-US" sz="2000" dirty="0">
-                          <a:latin typeface="Consolas" panose="020B0609020204030204" pitchFamily="49" charset="0"/>
-                          <a:cs typeface="Consolas" panose="020B0609020204030204" pitchFamily="49" charset="0"/>
-                        </a:rPr>
-                        <a:t>0x00000008</a:t>
-                      </a:r>
-                    </a:p>
-                  </a:txBody>
-                  <a:tcPr>
-                    <a:noFill/>
-                  </a:tcPr>
-                </a:tc>
-                <a:tc>
-                  <a:txBody>
-                    <a:bodyPr/>
-                    <a:lstStyle/>
-                    <a:p>
-                      <a:pPr marL="0" marR="0" indent="0" algn="ctr" defTabSz="914400" rtl="0" eaLnBrk="1" fontAlgn="auto" latinLnBrk="0" hangingPunct="1">
-                        <a:lnSpc>
-                          <a:spcPct val="100000"/>
-                        </a:lnSpc>
-                        <a:spcBef>
-                          <a:spcPts val="0"/>
-                        </a:spcBef>
-                        <a:spcAft>
-                          <a:spcPts val="0"/>
-                        </a:spcAft>
-                        <a:buClrTx/>
-                        <a:buSzTx/>
-                        <a:buFontTx/>
-                        <a:buNone/>
-                        <a:tabLst/>
-                        <a:defRPr/>
-                      </a:pPr>
-                      <a:r>
-                        <a:rPr lang="en-US" sz="2000" dirty="0">
-                          <a:latin typeface="Consolas" panose="020B0609020204030204" pitchFamily="49" charset="0"/>
-                          <a:cs typeface="Consolas" panose="020B0609020204030204" pitchFamily="49" charset="0"/>
-                        </a:rPr>
-                        <a:t>0x89</a:t>
-                      </a:r>
-                    </a:p>
-                  </a:txBody>
-                  <a:tcPr/>
-                </a:tc>
-                <a:extLst>
-                  <a:ext uri="{0D108BD9-81ED-4DB2-BD59-A6C34878D82A}">
-                    <a16:rowId xmlns:a16="http://schemas.microsoft.com/office/drawing/2014/main" val="10004"/>
-                  </a:ext>
-                </a:extLst>
-              </a:tr>
-            </a:tbl>
-          </a:graphicData>
-        </a:graphic>
-      </p:graphicFrame>
-      <p:sp>
-        <p:nvSpPr>
-          <p:cNvPr id="10" name="TextBox 9">
-            <a:extLst>
-              <a:ext uri="{FF2B5EF4-FFF2-40B4-BE49-F238E27FC236}">
-                <a16:creationId xmlns:a16="http://schemas.microsoft.com/office/drawing/2014/main" id="{CD328998-F5A5-38ED-01EA-1EC3EF7E338A}"/>
-              </a:ext>
-            </a:extLst>
-          </p:cNvPr>
-          <p:cNvSpPr txBox="1"/>
-          <p:nvPr/>
-        </p:nvSpPr>
-        <p:spPr>
-          <a:xfrm>
-            <a:off x="316538" y="6094027"/>
-            <a:ext cx="541606" cy="461665"/>
-          </a:xfrm>
-          <a:prstGeom prst="rect">
-            <a:avLst/>
-          </a:prstGeom>
-          <a:noFill/>
-        </p:spPr>
-        <p:txBody>
-          <a:bodyPr wrap="square" rtlCol="0">
-            <a:spAutoFit/>
-          </a:bodyPr>
-          <a:lstStyle/>
-          <a:p>
-            <a:r>
-              <a:rPr lang="en-US" sz="2400" b="0" dirty="0">
-                <a:latin typeface="Consolas" panose="020B0609020204030204" pitchFamily="49" charset="0"/>
-                <a:cs typeface="Consolas" panose="020B0609020204030204" pitchFamily="49" charset="0"/>
-              </a:rPr>
-              <a:t>R2 </a:t>
-            </a:r>
-          </a:p>
-        </p:txBody>
-      </p:sp>
-      <p:sp>
-        <p:nvSpPr>
-          <p:cNvPr id="11" name="Arrow: Right 10">
-            <a:extLst>
-              <a:ext uri="{FF2B5EF4-FFF2-40B4-BE49-F238E27FC236}">
-                <a16:creationId xmlns:a16="http://schemas.microsoft.com/office/drawing/2014/main" id="{87B6A0A7-7A1C-7320-C242-11989D0D0ED0}"/>
-              </a:ext>
-            </a:extLst>
-          </p:cNvPr>
-          <p:cNvSpPr/>
-          <p:nvPr/>
-        </p:nvSpPr>
-        <p:spPr>
-          <a:xfrm>
-            <a:off x="809113" y="6218188"/>
-            <a:ext cx="298611" cy="240892"/>
-          </a:xfrm>
-          <a:prstGeom prst="rightArrow">
-            <a:avLst/>
-          </a:prstGeom>
-        </p:spPr>
-        <p:style>
-          <a:lnRef idx="2">
-            <a:schemeClr val="accent1">
-              <a:shade val="15000"/>
-            </a:schemeClr>
-          </a:lnRef>
-          <a:fillRef idx="1">
-            <a:schemeClr val="accent1"/>
-          </a:fillRef>
-          <a:effectRef idx="0">
-            <a:schemeClr val="accent1"/>
-          </a:effectRef>
-          <a:fontRef idx="minor">
-            <a:schemeClr val="lt1"/>
-          </a:fontRef>
-        </p:style>
-        <p:txBody>
-          <a:bodyPr rtlCol="0" anchor="ctr"/>
-          <a:lstStyle/>
-          <a:p>
-            <a:pPr algn="ctr"/>
-            <a:endParaRPr lang="en-US"/>
-          </a:p>
-        </p:txBody>
-      </p:sp>
-      <p:sp>
-        <p:nvSpPr>
-          <p:cNvPr id="12" name="TextBox 11">
-            <a:extLst>
-              <a:ext uri="{FF2B5EF4-FFF2-40B4-BE49-F238E27FC236}">
-                <a16:creationId xmlns:a16="http://schemas.microsoft.com/office/drawing/2014/main" id="{564CC732-54C8-85E9-07B7-FAF0798F74AA}"/>
-              </a:ext>
-            </a:extLst>
-          </p:cNvPr>
-          <p:cNvSpPr txBox="1"/>
-          <p:nvPr/>
-        </p:nvSpPr>
-        <p:spPr>
-          <a:xfrm>
-            <a:off x="4653359" y="6094027"/>
-            <a:ext cx="541606" cy="461665"/>
-          </a:xfrm>
-          <a:prstGeom prst="rect">
-            <a:avLst/>
-          </a:prstGeom>
-          <a:noFill/>
-        </p:spPr>
-        <p:txBody>
-          <a:bodyPr wrap="square" rtlCol="0">
-            <a:spAutoFit/>
-          </a:bodyPr>
-          <a:lstStyle/>
-          <a:p>
-            <a:r>
-              <a:rPr lang="en-US" sz="2400" b="0" dirty="0">
-                <a:latin typeface="Consolas" panose="020B0609020204030204" pitchFamily="49" charset="0"/>
-                <a:cs typeface="Consolas" panose="020B0609020204030204" pitchFamily="49" charset="0"/>
-              </a:rPr>
-              <a:t>R2 </a:t>
-            </a:r>
-          </a:p>
-        </p:txBody>
-      </p:sp>
-      <p:sp>
-        <p:nvSpPr>
-          <p:cNvPr id="13" name="Arrow: Right 12">
-            <a:extLst>
-              <a:ext uri="{FF2B5EF4-FFF2-40B4-BE49-F238E27FC236}">
-                <a16:creationId xmlns:a16="http://schemas.microsoft.com/office/drawing/2014/main" id="{2C9720F2-1965-B15A-E7DD-DB560229807A}"/>
-              </a:ext>
-            </a:extLst>
-          </p:cNvPr>
-          <p:cNvSpPr/>
-          <p:nvPr/>
-        </p:nvSpPr>
-        <p:spPr>
-          <a:xfrm>
-            <a:off x="5145934" y="6218188"/>
-            <a:ext cx="298611" cy="240892"/>
-          </a:xfrm>
-          <a:prstGeom prst="rightArrow">
-            <a:avLst/>
-          </a:prstGeom>
-        </p:spPr>
-        <p:style>
-          <a:lnRef idx="2">
-            <a:schemeClr val="accent1">
-              <a:shade val="15000"/>
-            </a:schemeClr>
-          </a:lnRef>
-          <a:fillRef idx="1">
-            <a:schemeClr val="accent1"/>
-          </a:fillRef>
-          <a:effectRef idx="0">
-            <a:schemeClr val="accent1"/>
-          </a:effectRef>
-          <a:fontRef idx="minor">
-            <a:schemeClr val="lt1"/>
-          </a:fontRef>
-        </p:style>
-        <p:txBody>
-          <a:bodyPr rtlCol="0" anchor="ctr"/>
-          <a:lstStyle/>
-          <a:p>
-            <a:pPr algn="ctr"/>
-            <a:endParaRPr lang="en-US"/>
-          </a:p>
-        </p:txBody>
-      </p:sp>
-    </p:spTree>
-    <p:extLst>
-      <p:ext uri="{BB962C8B-B14F-4D97-AF65-F5344CB8AC3E}">
-        <p14:creationId xmlns:p14="http://schemas.microsoft.com/office/powerpoint/2010/main" val="1204830540"/>
-      </p:ext>
-    </p:extLst>
-  </p:cSld>
-  <p:clrMapOvr>
-    <a:masterClrMapping/>
-  </p:clrMapOvr>
-  <p:transition>
-    <p:pull dir="ru"/>
-  </p:transition>
-</p:sld>
-</file>
-
-<file path=ppt/slides/slide31.xml><?xml version="1.0" encoding="utf-8"?>
-<p:sld xmlns:a="http://schemas.openxmlformats.org/drawingml/2006/main" xmlns:r="http://schemas.openxmlformats.org/officeDocument/2006/relationships" xmlns:p="http://schemas.openxmlformats.org/presentationml/2006/main">
-  <p:cSld>
-    <p:spTree>
-      <p:nvGrpSpPr>
         <p:cNvPr id="1" name=""/>
         <p:cNvGrpSpPr/>
         <p:nvPr/>
@@ -32268,7 +32207,7 @@
           <a:p>
             <a:r>
               <a:rPr lang="en-US" dirty="0"/>
-              <a:t>Program Understanding</a:t>
+              <a:t>Program Understanding 1</a:t>
             </a:r>
           </a:p>
         </p:txBody>
@@ -32297,7 +32236,7 @@
             <a:fld id="{AEE14D4A-FE32-40AF-B06D-E9622816B101}" type="slidenum">
               <a:rPr lang="en-US" smtClean="0"/>
               <a:pPr/>
-              <a:t>31</a:t>
+              <a:t>30</a:t>
             </a:fld>
             <a:endParaRPr lang="en-US"/>
           </a:p>
@@ -34284,8 +34223,59 @@
                 <a:ea typeface="+mn-ea"/>
                 <a:cs typeface="Consolas" panose="020B0609020204030204" pitchFamily="49" charset="0"/>
               </a:rPr>
-              <a:t>LDRSH R4, (R1, #0xC)</a:t>
-            </a:r>
+              <a:t>LDRSH R4, </a:t>
+            </a:r>
+            <a:r>
+              <a:rPr lang="pt-BR" sz="2000" b="0" kern="0" dirty="0">
+                <a:solidFill>
+                  <a:prstClr val="black"/>
+                </a:solidFill>
+                <a:latin typeface="Consolas" panose="020B0609020204030204" pitchFamily="49" charset="0"/>
+                <a:cs typeface="Consolas" panose="020B0609020204030204" pitchFamily="49" charset="0"/>
+              </a:rPr>
+              <a:t>[</a:t>
+            </a:r>
+            <a:r>
+              <a:rPr kumimoji="0" lang="pt-BR" sz="2000" b="0" i="0" u="none" strike="noStrike" kern="0" cap="none" spc="0" normalizeH="0" baseline="0" noProof="0" dirty="0">
+                <a:ln>
+                  <a:noFill/>
+                </a:ln>
+                <a:solidFill>
+                  <a:prstClr val="black"/>
+                </a:solidFill>
+                <a:effectLst/>
+                <a:uLnTx/>
+                <a:uFillTx/>
+                <a:latin typeface="Consolas" panose="020B0609020204030204" pitchFamily="49" charset="0"/>
+                <a:ea typeface="+mn-ea"/>
+                <a:cs typeface="Consolas" panose="020B0609020204030204" pitchFamily="49" charset="0"/>
+              </a:rPr>
+              <a:t>R1, #0xC</a:t>
+            </a:r>
+            <a:r>
+              <a:rPr lang="pt-BR" sz="2000" b="0" kern="0" dirty="0">
+                <a:solidFill>
+                  <a:prstClr val="black"/>
+                </a:solidFill>
+                <a:latin typeface="Consolas" panose="020B0609020204030204" pitchFamily="49" charset="0"/>
+                <a:cs typeface="Consolas" panose="020B0609020204030204" pitchFamily="49" charset="0"/>
+              </a:rPr>
+              <a:t>]</a:t>
+            </a:r>
+            <a:endParaRPr kumimoji="0" lang="pt-BR" sz="2000" b="0" i="0" u="none" strike="noStrike" kern="0" cap="none" spc="0" normalizeH="0" baseline="0" noProof="0" dirty="0">
+              <a:ln>
+                <a:noFill/>
+              </a:ln>
+              <a:solidFill>
+                <a:prstClr val="black"/>
+              </a:solidFill>
+              <a:effectLst/>
+              <a:uLnTx/>
+              <a:uFillTx/>
+              <a:latin typeface="Consolas" panose="020B0609020204030204" pitchFamily="49" charset="0"/>
+              <a:ea typeface="+mn-ea"/>
+              <a:cs typeface="Consolas" panose="020B0609020204030204" pitchFamily="49" charset="0"/>
+            </a:endParaRPr>
           </a:p>
         </p:txBody>
       </p:sp>
@@ -34305,8 +34295,8 @@
         </p:nvSpPr>
         <p:spPr>
           <a:xfrm>
-            <a:off x="457200" y="1219200"/>
-            <a:ext cx="8229600" cy="4937760"/>
+            <a:off x="216677" y="1116957"/>
+            <a:ext cx="8913875" cy="828683"/>
           </a:xfrm>
           <a:prstGeom prst="rect">
             <a:avLst/>
@@ -34314,7 +34304,7 @@
         </p:spPr>
         <p:txBody>
           <a:bodyPr vert="horz">
-            <a:normAutofit/>
+            <a:normAutofit fontScale="92500" lnSpcReduction="20000"/>
           </a:bodyPr>
           <a:lstStyle>
             <a:lvl1pPr marL="274320" indent="-274320" algn="l" rtl="0" eaLnBrk="1" latinLnBrk="0" hangingPunct="1">
@@ -34507,7 +34497,7 @@
             </a:pPr>
             <a:r>
               <a:rPr lang="en-US" sz="2000" b="0" dirty="0"/>
-              <a:t>Compute register and memory values at each step of this program, given initial register values and memory contents</a:t>
+              <a:t>Compute register and memory values at each step of this program, given initial register values and memory contents, assuming little-endian ordering. (Memory addresses increase from top to bottom, and from left to right in the table.)</a:t>
             </a:r>
           </a:p>
         </p:txBody>
@@ -34602,7 +34592,7 @@
 </p:sld>
 </file>
 
-<file path=ppt/slides/slide32.xml><?xml version="1.0" encoding="utf-8"?>
+<file path=ppt/slides/slide31.xml><?xml version="1.0" encoding="utf-8"?>
 <p:sld xmlns:a="http://schemas.openxmlformats.org/drawingml/2006/main" xmlns:r="http://schemas.openxmlformats.org/officeDocument/2006/relationships" xmlns:p="http://schemas.openxmlformats.org/presentationml/2006/main">
   <p:cSld>
     <p:spTree>
@@ -34650,7 +34640,7 @@
           <a:p>
             <a:r>
               <a:rPr lang="en-US" sz="2800" dirty="0"/>
-              <a:t>Program Understanding ANS</a:t>
+              <a:t>Program Understanding 1 ANS</a:t>
             </a:r>
           </a:p>
         </p:txBody>
@@ -34679,7 +34669,7 @@
             <a:fld id="{AEE14D4A-FE32-40AF-B06D-E9622816B101}" type="slidenum">
               <a:rPr lang="en-US" smtClean="0"/>
               <a:pPr/>
-              <a:t>32</a:t>
+              <a:t>31</a:t>
             </a:fld>
             <a:endParaRPr lang="en-US"/>
           </a:p>
@@ -36476,7 +36466,7 @@
         </p:spPr>
         <p:txBody>
           <a:bodyPr vert="horz">
-            <a:normAutofit lnSpcReduction="10000"/>
+            <a:normAutofit fontScale="92500"/>
           </a:bodyPr>
           <a:lstStyle>
             <a:lvl1pPr marL="274320" indent="-274320" algn="l" rtl="0" eaLnBrk="1" latinLnBrk="0" hangingPunct="1">
@@ -36672,7 +36662,7 @@
               <a:t>After </a:t>
             </a:r>
             <a:r>
-              <a:rPr lang="pt-BR" sz="1700" b="0" dirty="0"/>
+              <a:rPr lang="pt-BR" sz="2000" b="0" dirty="0"/>
               <a:t>MOVW R0, #0xAFE1, MOVT R0, #0xBADC</a:t>
             </a:r>
           </a:p>
@@ -36695,7 +36685,7 @@
             </a:pPr>
             <a:r>
               <a:rPr lang="en-US" sz="2000" b="0" dirty="0"/>
-              <a:t>After R2, #0xABCD</a:t>
+              <a:t>After MOVT R2, #0xABCD</a:t>
             </a:r>
           </a:p>
           <a:p>
@@ -37063,7 +37053,7 @@
 </p:sld>
 </file>
 
-<file path=ppt/slides/slide33.xml><?xml version="1.0" encoding="utf-8"?>
+<file path=ppt/slides/slide32.xml><?xml version="1.0" encoding="utf-8"?>
 <p:sld xmlns:a="http://schemas.openxmlformats.org/drawingml/2006/main" xmlns:r="http://schemas.openxmlformats.org/officeDocument/2006/relationships" xmlns:p="http://schemas.openxmlformats.org/presentationml/2006/main">
   <p:cSld>
     <p:spTree>
@@ -37105,7 +37095,7 @@
           <a:p>
             <a:r>
               <a:rPr lang="en-US" sz="2400" dirty="0"/>
-              <a:t>Program Understanding</a:t>
+              <a:t>Program Understanding 2</a:t>
             </a:r>
           </a:p>
         </p:txBody>
@@ -37134,7 +37124,7 @@
             <a:fld id="{AEE14D4A-FE32-40AF-B06D-E9622816B101}" type="slidenum">
               <a:rPr lang="en-US" smtClean="0"/>
               <a:pPr/>
-              <a:t>33</a:t>
+              <a:t>32</a:t>
             </a:fld>
             <a:endParaRPr lang="en-US"/>
           </a:p>
@@ -37159,16 +37149,39 @@
         <p:spPr>
           <a:xfrm>
             <a:off x="137322" y="1219200"/>
-            <a:ext cx="4821952" cy="4937760"/>
+            <a:ext cx="5305560" cy="3262877"/>
           </a:xfrm>
         </p:spPr>
         <p:txBody>
-          <a:bodyPr/>
+          <a:bodyPr>
+            <a:normAutofit fontScale="92500"/>
+          </a:bodyPr>
           <a:lstStyle/>
           <a:p>
+            <a:pPr fontAlgn="auto">
+              <a:spcAft>
+                <a:spcPts val="0"/>
+              </a:spcAft>
+            </a:pPr>
             <a:r>
               <a:rPr lang="en-US" dirty="0"/>
-              <a:t> Show all updates to registers as the assembly code shown below runs. Show the NZCV flags next to the instruction if they change. Do not update PC each time. You can assume that each instruction is 32 bits.</a:t>
+              <a:t>Show all updates to registers as the assembly code shown below runs, </a:t>
+            </a:r>
+            <a:r>
+              <a:rPr lang="en-US" sz="2800" dirty="0"/>
+              <a:t>assuming little-endian ordering.</a:t>
+            </a:r>
+            <a:r>
+              <a:rPr lang="en-US" dirty="0"/>
+              <a:t> </a:t>
+            </a:r>
+            <a:r>
+              <a:rPr lang="en-US" sz="2800" dirty="0"/>
+              <a:t>(Memory addresses increase from top to bottom, and from left to right in the table.) </a:t>
+            </a:r>
+            <a:r>
+              <a:rPr lang="en-US" dirty="0"/>
+              <a:t>Show the NZCV flags next to the instruction if they change. Each instruction is 32 bits.</a:t>
             </a:r>
           </a:p>
         </p:txBody>
@@ -37188,7 +37201,7 @@
         <p:spPr>
           <a:xfrm>
             <a:off x="5442882" y="463094"/>
-            <a:ext cx="3563796" cy="5693866"/>
+            <a:ext cx="2967479" cy="5693866"/>
           </a:xfrm>
           <a:prstGeom prst="rect">
             <a:avLst/>
@@ -37396,7 +37409,7 @@
                 <a:ea typeface="+mn-ea"/>
                 <a:cs typeface="Consolas" panose="020B0609020204030204" pitchFamily="49" charset="0"/>
               </a:rPr>
-              <a:t>    SUBS R4, R2, R0  @NZCV = 0110</a:t>
+              <a:t>    SUBS R4, R2, R0  @NZCV =</a:t>
             </a:r>
           </a:p>
           <a:p>
@@ -37504,7 +37517,7 @@
                 <a:ea typeface="+mn-ea"/>
                 <a:cs typeface="Consolas" panose="020B0609020204030204" pitchFamily="49" charset="0"/>
               </a:rPr>
-              <a:t>    BIC R7, R2, R4</a:t>
+              <a:t>    BIC R7, R2, R6</a:t>
             </a:r>
           </a:p>
           <a:p>
@@ -37567,7 +37580,7 @@
                 <a:ea typeface="+mn-ea"/>
                 <a:cs typeface="Consolas" panose="020B0609020204030204" pitchFamily="49" charset="0"/>
               </a:rPr>
-              <a:t>= 0110</a:t>
+              <a:t>=</a:t>
             </a:r>
           </a:p>
           <a:p>
@@ -37738,7 +37751,7 @@
                 <a:ea typeface="+mn-ea"/>
                 <a:cs typeface="Consolas" panose="020B0609020204030204" pitchFamily="49" charset="0"/>
               </a:rPr>
-              <a:t>= 1000</a:t>
+              <a:t>=</a:t>
             </a:r>
           </a:p>
           <a:p>
@@ -38011,7 +38024,7 @@
                 <a:ea typeface="+mn-ea"/>
                 <a:cs typeface="Consolas" panose="020B0609020204030204" pitchFamily="49" charset="0"/>
               </a:rPr>
-              <a:t>= 0010</a:t>
+              <a:t>=</a:t>
             </a:r>
           </a:p>
           <a:p>
@@ -38735,7 +38748,7 @@
           <p:nvPr>
             <p:extLst>
               <p:ext uri="{D42A27DB-BD31-4B8C-83A1-F6EECF244321}">
-                <p14:modId xmlns:p14="http://schemas.microsoft.com/office/powerpoint/2010/main" val="439016815"/>
+                <p14:modId xmlns:p14="http://schemas.microsoft.com/office/powerpoint/2010/main" val="1596401708"/>
               </p:ext>
             </p:extLst>
           </p:nvPr>
@@ -39098,7 +39111,7 @@
                           <a:ea typeface="+mn-ea"/>
                           <a:cs typeface="+mn-cs"/>
                         </a:rPr>
-                        <a:t>D0</a:t>
+                        <a:t>00</a:t>
                       </a:r>
                     </a:p>
                   </a:txBody>
@@ -39123,7 +39136,7 @@
                           <a:ea typeface="+mn-ea"/>
                           <a:cs typeface="+mn-cs"/>
                         </a:rPr>
-                        <a:t>BC</a:t>
+                        <a:t>00</a:t>
                       </a:r>
                     </a:p>
                   </a:txBody>
@@ -39148,7 +39161,7 @@
                           <a:ea typeface="+mn-ea"/>
                           <a:cs typeface="+mn-cs"/>
                         </a:rPr>
-                        <a:t>D8</a:t>
+                        <a:t>00</a:t>
                       </a:r>
                     </a:p>
                   </a:txBody>
@@ -39173,7 +39186,7 @@
                           <a:ea typeface="+mn-ea"/>
                           <a:cs typeface="+mn-cs"/>
                         </a:rPr>
-                        <a:t>A8</a:t>
+                        <a:t>00</a:t>
                       </a:r>
                     </a:p>
                   </a:txBody>
@@ -39209,7 +39222,7 @@
 </p:sld>
 </file>
 
-<file path=ppt/slides/slide34.xml><?xml version="1.0" encoding="utf-8"?>
+<file path=ppt/slides/slide33.xml><?xml version="1.0" encoding="utf-8"?>
 <p:sld xmlns:a="http://schemas.openxmlformats.org/drawingml/2006/main" xmlns:r="http://schemas.openxmlformats.org/officeDocument/2006/relationships" xmlns:p="http://schemas.openxmlformats.org/presentationml/2006/main">
   <p:cSld>
     <p:spTree>
@@ -39234,10 +39247,10 @@
       </p:grpSpPr>
       <p:sp>
         <p:nvSpPr>
-          <p:cNvPr id="5" name="TextBox 4">
+          <p:cNvPr id="13" name="TextBox 12">
             <a:extLst>
               <a:ext uri="{FF2B5EF4-FFF2-40B4-BE49-F238E27FC236}">
-                <a16:creationId xmlns:a16="http://schemas.microsoft.com/office/drawing/2014/main" id="{0C104577-4185-350D-E7F1-6C339C3527F4}"/>
+                <a16:creationId xmlns:a16="http://schemas.microsoft.com/office/drawing/2014/main" id="{03AB1D5E-EA8C-DC0E-3504-787C31C3FF4B}"/>
               </a:ext>
             </a:extLst>
           </p:cNvPr>
@@ -39246,8 +39259,8 @@
         </p:nvSpPr>
         <p:spPr>
           <a:xfrm>
-            <a:off x="5442882" y="48225"/>
-            <a:ext cx="3563796" cy="5693866"/>
+            <a:off x="5601810" y="58282"/>
+            <a:ext cx="3464410" cy="5909310"/>
           </a:xfrm>
           <a:prstGeom prst="rect">
             <a:avLst/>
@@ -39563,25 +39576,17 @@
                 <a:ea typeface="+mn-ea"/>
                 <a:cs typeface="Consolas" panose="020B0609020204030204" pitchFamily="49" charset="0"/>
               </a:rPr>
-              <a:t>    BIC R7, R2, R4</a:t>
-            </a:r>
-          </a:p>
-          <a:p>
-            <a:pPr marL="0" marR="0" lvl="0" indent="0" defTabSz="914400" eaLnBrk="1" fontAlgn="auto" latinLnBrk="0" hangingPunct="1">
-              <a:lnSpc>
-                <a:spcPct val="100000"/>
-              </a:lnSpc>
+              <a:t>    BIC R7, R2, R6</a:t>
+            </a:r>
+          </a:p>
+          <a:p>
+            <a:pPr eaLnBrk="1" fontAlgn="auto" hangingPunct="1">
               <a:spcBef>
                 <a:spcPts val="0"/>
               </a:spcBef>
               <a:spcAft>
                 <a:spcPts val="0"/>
               </a:spcAft>
-              <a:buClrTx/>
-              <a:buSzTx/>
-              <a:buFontTx/>
-              <a:buNone/>
-              <a:tabLst/>
               <a:defRPr/>
             </a:pPr>
             <a:r>
@@ -39609,24 +39614,7 @@
                 <a:latin typeface="Consolas" panose="020B0609020204030204" pitchFamily="49" charset="0"/>
                 <a:cs typeface="Consolas" panose="020B0609020204030204" pitchFamily="49" charset="0"/>
               </a:rPr>
-              <a:t>R6  @NZCV </a:t>
-            </a:r>
-            <a:r>
-              <a:rPr kumimoji="0" lang="pt-BR" b="0" i="0" u="none" strike="noStrike" kern="0" cap="none" spc="0" normalizeH="0" baseline="0" noProof="0" dirty="0">
-                <a:ln>
-                  <a:noFill/>
-                </a:ln>
-                <a:solidFill>
-                  <a:prstClr val="black"/>
-                </a:solidFill>
-                <a:effectLst/>
-                <a:uLnTx/>
-                <a:uFillTx/>
-                <a:latin typeface="Consolas" panose="020B0609020204030204" pitchFamily="49" charset="0"/>
-                <a:ea typeface="+mn-ea"/>
-                <a:cs typeface="Consolas" panose="020B0609020204030204" pitchFamily="49" charset="0"/>
-              </a:rPr>
-              <a:t>= 0110</a:t>
+              <a:t>R6  @NZCV = 0110</a:t>
             </a:r>
           </a:p>
           <a:p>
@@ -40316,7 +40304,7 @@
           <a:p>
             <a:r>
               <a:rPr lang="en-US" sz="2400" dirty="0"/>
-              <a:t>Program Understanding ANS</a:t>
+              <a:t>Program Understanding 2 ANS</a:t>
             </a:r>
           </a:p>
         </p:txBody>
@@ -40345,7 +40333,7 @@
             <a:fld id="{AEE14D4A-FE32-40AF-B06D-E9622816B101}" type="slidenum">
               <a:rPr lang="en-US" smtClean="0"/>
               <a:pPr/>
-              <a:t>34</a:t>
+              <a:t>33</a:t>
             </a:fld>
             <a:endParaRPr lang="en-US"/>
           </a:p>
@@ -40370,16 +40358,21 @@
         <p:spPr>
           <a:xfrm>
             <a:off x="137322" y="1219200"/>
-            <a:ext cx="5650020" cy="4937760"/>
+            <a:ext cx="5395377" cy="4937760"/>
           </a:xfrm>
         </p:spPr>
         <p:txBody>
           <a:bodyPr/>
           <a:lstStyle/>
           <a:p>
+            <a:pPr fontAlgn="auto">
+              <a:spcAft>
+                <a:spcPts val="0"/>
+              </a:spcAft>
+            </a:pPr>
             <a:r>
               <a:rPr lang="en-US" dirty="0"/>
-              <a:t> Show all updates to registers as the assembly code shown below runs. Show the NZCV flags next to the instruction if they change. Do not update PC each time. You can assume that each instruction is 32 bits.</a:t>
+              <a:t>Step-by-step execution shown in next slide.</a:t>
             </a:r>
           </a:p>
         </p:txBody>
@@ -40399,14 +40392,14 @@
           <p:nvPr>
             <p:extLst>
               <p:ext uri="{D42A27DB-BD31-4B8C-83A1-F6EECF244321}">
-                <p14:modId xmlns:p14="http://schemas.microsoft.com/office/powerpoint/2010/main" val="3351817991"/>
+                <p14:modId xmlns:p14="http://schemas.microsoft.com/office/powerpoint/2010/main" val="1314667293"/>
               </p:ext>
             </p:extLst>
           </p:nvPr>
         </p:nvGraphicFramePr>
         <p:xfrm>
-          <a:off x="137320" y="4817338"/>
-          <a:ext cx="8869358" cy="1483360"/>
+          <a:off x="33150" y="4882874"/>
+          <a:ext cx="9087700" cy="1483360"/>
         </p:xfrm>
         <a:graphic>
           <a:graphicData uri="http://schemas.openxmlformats.org/drawingml/2006/table">
@@ -40415,56 +40408,56 @@
                 <a:tableStyleId>{5940675A-B579-460E-94D1-54222C63F5DA}</a:tableStyleId>
               </a:tblPr>
               <a:tblGrid>
-                <a:gridCol w="548480">
+                <a:gridCol w="561982">
                   <a:extLst>
                     <a:ext uri="{9D8B030D-6E8A-4147-A177-3AD203B41FA5}">
                       <a16:colId xmlns:a16="http://schemas.microsoft.com/office/drawing/2014/main" val="2337985746"/>
                     </a:ext>
                   </a:extLst>
                 </a:gridCol>
-                <a:gridCol w="1657350">
+                <a:gridCol w="1698150">
                   <a:extLst>
                     <a:ext uri="{9D8B030D-6E8A-4147-A177-3AD203B41FA5}">
                       <a16:colId xmlns:a16="http://schemas.microsoft.com/office/drawing/2014/main" val="1802740170"/>
                     </a:ext>
                   </a:extLst>
                 </a:gridCol>
-                <a:gridCol w="500063">
+                <a:gridCol w="512373">
                   <a:extLst>
                     <a:ext uri="{9D8B030D-6E8A-4147-A177-3AD203B41FA5}">
                       <a16:colId xmlns:a16="http://schemas.microsoft.com/office/drawing/2014/main" val="2590131525"/>
                     </a:ext>
                   </a:extLst>
                 </a:gridCol>
-                <a:gridCol w="1528762">
+                <a:gridCol w="1566396">
                   <a:extLst>
                     <a:ext uri="{9D8B030D-6E8A-4147-A177-3AD203B41FA5}">
                       <a16:colId xmlns:a16="http://schemas.microsoft.com/office/drawing/2014/main" val="947827850"/>
                     </a:ext>
                   </a:extLst>
                 </a:gridCol>
-                <a:gridCol w="685800">
+                <a:gridCol w="702683">
                   <a:extLst>
                     <a:ext uri="{9D8B030D-6E8A-4147-A177-3AD203B41FA5}">
                       <a16:colId xmlns:a16="http://schemas.microsoft.com/office/drawing/2014/main" val="2189951492"/>
                     </a:ext>
                   </a:extLst>
                 </a:gridCol>
-                <a:gridCol w="1685925">
+                <a:gridCol w="1727428">
                   <a:extLst>
                     <a:ext uri="{9D8B030D-6E8A-4147-A177-3AD203B41FA5}">
                       <a16:colId xmlns:a16="http://schemas.microsoft.com/office/drawing/2014/main" val="2319925471"/>
                     </a:ext>
                   </a:extLst>
                 </a:gridCol>
-                <a:gridCol w="614363">
+                <a:gridCol w="570913">
                   <a:extLst>
                     <a:ext uri="{9D8B030D-6E8A-4147-A177-3AD203B41FA5}">
                       <a16:colId xmlns:a16="http://schemas.microsoft.com/office/drawing/2014/main" val="3873491110"/>
                     </a:ext>
                   </a:extLst>
                 </a:gridCol>
-                <a:gridCol w="1648615">
+                <a:gridCol w="1747775">
                   <a:extLst>
                     <a:ext uri="{9D8B030D-6E8A-4147-A177-3AD203B41FA5}">
                       <a16:colId xmlns:a16="http://schemas.microsoft.com/office/drawing/2014/main" val="2341457647"/>
@@ -40496,8 +40489,12 @@
                     <a:lstStyle/>
                     <a:p>
                       <a:r>
+                        <a:rPr lang="pt-BR" dirty="0"/>
+                        <a:t>0xABCDEFFF</a:t>
+                      </a:r>
+                      <a:r>
                         <a:rPr lang="en-US" dirty="0"/>
-                        <a:t>0xABCDFF00 </a:t>
+                        <a:t> </a:t>
                       </a:r>
                     </a:p>
                   </a:txBody>
@@ -40598,9 +40595,18 @@
                     <a:lstStyle/>
                     <a:p>
                       <a:r>
-                        <a:rPr lang="en-US" dirty="0"/>
+                        <a:rPr kumimoji="0" lang="en-US" b="0" i="0" kern="1200" dirty="0">
+                          <a:solidFill>
+                            <a:schemeClr val="tx1"/>
+                          </a:solidFill>
+                          <a:effectLst/>
+                          <a:latin typeface="+mn-lt"/>
+                          <a:ea typeface="+mn-ea"/>
+                          <a:cs typeface="+mn-cs"/>
+                        </a:rPr>
                         <a:t>0xABD7BCD0</a:t>
                       </a:r>
+                      <a:endParaRPr lang="en-US" dirty="0"/>
                     </a:p>
                   </a:txBody>
                   <a:tcPr>
@@ -40707,9 +40713,18 @@
                     <a:lstStyle/>
                     <a:p>
                       <a:r>
-                        <a:rPr lang="en-US" dirty="0"/>
-                        <a:t>0x00000000</a:t>
+                        <a:rPr kumimoji="0" lang="en-US" b="0" i="0" kern="1200" dirty="0">
+                          <a:solidFill>
+                            <a:schemeClr val="tx1"/>
+                          </a:solidFill>
+                          <a:effectLst/>
+                          <a:latin typeface="+mn-lt"/>
+                          <a:ea typeface="+mn-ea"/>
+                          <a:cs typeface="+mn-cs"/>
+                        </a:rPr>
+                        <a:t>0x000ABCD0</a:t>
                       </a:r>
+                      <a:endParaRPr lang="en-US" dirty="0"/>
                     </a:p>
                   </a:txBody>
                   <a:tcPr>
@@ -40741,9 +40756,10 @@
                     <a:lstStyle/>
                     <a:p>
                       <a:r>
-                        <a:rPr lang="en-US" dirty="0"/>
+                        <a:rPr lang="pt-BR" dirty="0"/>
                         <a:t>0x10000200</a:t>
                       </a:r>
+                      <a:endParaRPr lang="en-US" dirty="0"/>
                     </a:p>
                   </a:txBody>
                   <a:tcPr>
@@ -40782,9 +40798,10 @@
                     <a:lstStyle/>
                     <a:p>
                       <a:r>
-                        <a:rPr lang="en-US" dirty="0"/>
-                        <a:t>0xABCDFF00</a:t>
+                        <a:rPr lang="pt-BR" dirty="0"/>
+                        <a:t>0xABCDEFFF</a:t>
                       </a:r>
+                      <a:endParaRPr lang="en-US" dirty="0"/>
                     </a:p>
                   </a:txBody>
                   <a:tcPr>
@@ -40850,9 +40867,18 @@
                     <a:lstStyle/>
                     <a:p>
                       <a:r>
-                        <a:rPr lang="en-US" dirty="0"/>
-                        <a:t>0xBCD0AB00</a:t>
+                        <a:rPr kumimoji="0" lang="en-US" b="0" i="0" kern="1200" dirty="0">
+                          <a:solidFill>
+                            <a:schemeClr val="tx1"/>
+                          </a:solidFill>
+                          <a:effectLst/>
+                          <a:latin typeface="+mn-lt"/>
+                          <a:ea typeface="+mn-ea"/>
+                          <a:cs typeface="+mn-cs"/>
+                        </a:rPr>
+                        <a:t>0xD0BC0A00</a:t>
                       </a:r>
+                      <a:endParaRPr lang="en-US" dirty="0"/>
                     </a:p>
                   </a:txBody>
                   <a:tcPr>
@@ -40884,9 +40910,10 @@
                     <a:lstStyle/>
                     <a:p>
                       <a:r>
-                        <a:rPr lang="en-US" dirty="0"/>
-                        <a:t>0x00000000</a:t>
+                        <a:rPr lang="pt-BR" dirty="0"/>
+                        <a:t>0x00000260</a:t>
                       </a:r>
+                      <a:endParaRPr lang="en-US" dirty="0"/>
                     </a:p>
                   </a:txBody>
                   <a:tcPr>
@@ -40925,9 +40952,10 @@
                     <a:lstStyle/>
                     <a:p>
                       <a:r>
-                        <a:rPr lang="en-US" dirty="0"/>
-                        <a:t>0xABD7BCD0</a:t>
+                        <a:rPr lang="pt-BR" dirty="0"/>
+                        <a:t>0xABCD0000</a:t>
                       </a:r>
+                      <a:endParaRPr lang="en-US" dirty="0"/>
                     </a:p>
                   </a:txBody>
                   <a:tcPr>
@@ -40959,9 +40987,18 @@
                     <a:lstStyle/>
                     <a:p>
                       <a:r>
-                        <a:rPr lang="en-US" dirty="0"/>
-                        <a:t>0xABCDEFFF</a:t>
+                        <a:rPr kumimoji="0" lang="en-US" b="0" i="0" kern="1200" dirty="0">
+                          <a:solidFill>
+                            <a:schemeClr val="tx1"/>
+                          </a:solidFill>
+                          <a:effectLst/>
+                          <a:latin typeface="+mn-lt"/>
+                          <a:ea typeface="+mn-ea"/>
+                          <a:cs typeface="+mn-cs"/>
+                        </a:rPr>
+                        <a:t>0xABCDEFEF</a:t>
                       </a:r>
+                      <a:endParaRPr lang="en-US" dirty="0"/>
                     </a:p>
                   </a:txBody>
                   <a:tcPr>
@@ -40993,9 +41030,10 @@
                     <a:lstStyle/>
                     <a:p>
                       <a:r>
-                        <a:rPr lang="en-US" dirty="0"/>
-                        <a:t>0x0530D0B0</a:t>
+                        <a:rPr lang="pt-BR" dirty="0"/>
+                        <a:t>0x00503D0B</a:t>
                       </a:r>
+                      <a:endParaRPr lang="en-US" dirty="0"/>
                     </a:p>
                   </a:txBody>
                   <a:tcPr>
@@ -41027,9 +41065,10 @@
                     <a:lstStyle/>
                     <a:p>
                       <a:r>
-                        <a:rPr lang="en-US" dirty="0"/>
+                        <a:rPr lang="pt-BR" dirty="0"/>
                         <a:t>0x00000250</a:t>
                       </a:r>
+                      <a:endParaRPr lang="en-US" dirty="0"/>
                     </a:p>
                   </a:txBody>
                   <a:tcPr>
@@ -41063,14 +41102,14 @@
           <p:nvPr>
             <p:extLst>
               <p:ext uri="{D42A27DB-BD31-4B8C-83A1-F6EECF244321}">
-                <p14:modId xmlns:p14="http://schemas.microsoft.com/office/powerpoint/2010/main" val="1554147959"/>
+                <p14:modId xmlns:p14="http://schemas.microsoft.com/office/powerpoint/2010/main" val="1454189981"/>
               </p:ext>
             </p:extLst>
           </p:nvPr>
         </p:nvGraphicFramePr>
         <p:xfrm>
-          <a:off x="457200" y="6367157"/>
-          <a:ext cx="8423243" cy="370840"/>
+          <a:off x="457200" y="6413457"/>
+          <a:ext cx="8405417" cy="370840"/>
         </p:xfrm>
         <a:graphic>
           <a:graphicData uri="http://schemas.openxmlformats.org/drawingml/2006/table">
@@ -41156,7 +41195,7 @@
                     </a:ext>
                   </a:extLst>
                 </a:gridCol>
-                <a:gridCol w="549956">
+                <a:gridCol w="532130">
                   <a:extLst>
                     <a:ext uri="{9D8B030D-6E8A-4147-A177-3AD203B41FA5}">
                       <a16:colId xmlns:a16="http://schemas.microsoft.com/office/drawing/2014/main" val="1178522413"/>
@@ -41420,7 +41459,7 @@
                       <a:r>
                         <a:rPr kumimoji="0" lang="en-US" kern="1200" dirty="0">
                           <a:solidFill>
-                            <a:schemeClr val="tx1"/>
+                            <a:srgbClr val="FF0000"/>
                           </a:solidFill>
                           <a:latin typeface="+mn-lt"/>
                           <a:ea typeface="+mn-ea"/>
@@ -41445,7 +41484,7 @@
                       <a:r>
                         <a:rPr kumimoji="0" lang="en-US" kern="1200" dirty="0">
                           <a:solidFill>
-                            <a:schemeClr val="tx1"/>
+                            <a:srgbClr val="FF0000"/>
                           </a:solidFill>
                           <a:latin typeface="+mn-lt"/>
                           <a:ea typeface="+mn-ea"/>
@@ -41470,13 +41509,13 @@
                       <a:r>
                         <a:rPr kumimoji="0" lang="en-US" kern="1200" dirty="0">
                           <a:solidFill>
-                            <a:schemeClr val="tx1"/>
+                            <a:srgbClr val="FF0000"/>
                           </a:solidFill>
                           <a:latin typeface="+mn-lt"/>
                           <a:ea typeface="+mn-ea"/>
                           <a:cs typeface="+mn-cs"/>
                         </a:rPr>
-                        <a:t>D8</a:t>
+                        <a:t>D7</a:t>
                       </a:r>
                     </a:p>
                   </a:txBody>
@@ -41495,13 +41534,13 @@
                       <a:r>
                         <a:rPr kumimoji="0" lang="en-US" kern="1200" dirty="0">
                           <a:solidFill>
-                            <a:schemeClr val="tx1"/>
+                            <a:srgbClr val="FF0000"/>
                           </a:solidFill>
                           <a:latin typeface="+mn-lt"/>
                           <a:ea typeface="+mn-ea"/>
                           <a:cs typeface="+mn-cs"/>
                         </a:rPr>
-                        <a:t>A8</a:t>
+                        <a:t>AB</a:t>
                       </a:r>
                     </a:p>
                   </a:txBody>
@@ -41537,7 +41576,2856 @@
 </p:sld>
 </file>
 
+<file path=ppt/slides/slide34.xml><?xml version="1.0" encoding="utf-8"?>
+<p:sld xmlns:a="http://schemas.openxmlformats.org/drawingml/2006/main" xmlns:r="http://schemas.openxmlformats.org/officeDocument/2006/relationships" xmlns:p="http://schemas.openxmlformats.org/presentationml/2006/main">
+  <p:cSld>
+    <p:spTree>
+      <p:nvGrpSpPr>
+        <p:cNvPr id="1" name=""/>
+        <p:cNvGrpSpPr/>
+        <p:nvPr/>
+      </p:nvGrpSpPr>
+      <p:grpSpPr>
+        <a:xfrm>
+          <a:off x="0" y="0"/>
+          <a:ext cx="0" cy="0"/>
+          <a:chOff x="0" y="0"/>
+          <a:chExt cx="0" cy="0"/>
+        </a:xfrm>
+      </p:grpSpPr>
+      <p:sp>
+        <p:nvSpPr>
+          <p:cNvPr id="3" name="Slide Number Placeholder 2">
+            <a:extLst>
+              <a:ext uri="{FF2B5EF4-FFF2-40B4-BE49-F238E27FC236}">
+                <a16:creationId xmlns:a16="http://schemas.microsoft.com/office/drawing/2014/main" id="{6D297AFE-3356-FACD-BA7D-CCBAAB591F62}"/>
+              </a:ext>
+            </a:extLst>
+          </p:cNvPr>
+          <p:cNvSpPr>
+            <a:spLocks noGrp="1"/>
+          </p:cNvSpPr>
+          <p:nvPr>
+            <p:ph type="sldNum" sz="quarter" idx="12"/>
+          </p:nvPr>
+        </p:nvSpPr>
+        <p:spPr/>
+        <p:txBody>
+          <a:bodyPr/>
+          <a:lstStyle/>
+          <a:p>
+            <a:fld id="{AEE14D4A-FE32-40AF-B06D-E9622816B101}" type="slidenum">
+              <a:rPr lang="en-US" smtClean="0"/>
+              <a:pPr/>
+              <a:t>34</a:t>
+            </a:fld>
+            <a:endParaRPr lang="en-US"/>
+          </a:p>
+        </p:txBody>
+      </p:sp>
+      <p:sp>
+        <p:nvSpPr>
+          <p:cNvPr id="4" name="Content Placeholder 3">
+            <a:extLst>
+              <a:ext uri="{FF2B5EF4-FFF2-40B4-BE49-F238E27FC236}">
+                <a16:creationId xmlns:a16="http://schemas.microsoft.com/office/drawing/2014/main" id="{53110734-57D2-2BF2-C541-48EEFD793D20}"/>
+              </a:ext>
+            </a:extLst>
+          </p:cNvPr>
+          <p:cNvSpPr>
+            <a:spLocks noGrp="1"/>
+          </p:cNvSpPr>
+          <p:nvPr>
+            <p:ph sz="quarter" idx="1"/>
+          </p:nvPr>
+        </p:nvSpPr>
+        <p:spPr>
+          <a:xfrm>
+            <a:off x="122921" y="135890"/>
+            <a:ext cx="8739696" cy="4937760"/>
+          </a:xfrm>
+          <a:solidFill>
+            <a:schemeClr val="bg1"/>
+          </a:solidFill>
+        </p:spPr>
+        <p:txBody>
+          <a:bodyPr>
+            <a:normAutofit fontScale="92500" lnSpcReduction="20000"/>
+          </a:bodyPr>
+          <a:lstStyle/>
+          <a:p>
+            <a:r>
+              <a:rPr lang="en-US" sz="1600" dirty="0"/>
+              <a:t>LDR R1, =0x10000010 → R1 = 0x10000010 (literal load of the base address).</a:t>
+            </a:r>
+          </a:p>
+          <a:p>
+            <a:r>
+              <a:rPr lang="en-US" sz="1600" dirty="0"/>
+              <a:t>LDR R2, [R1] → reads bytes FF EF CD AB at 0x10000010..13 and forms R2 = 0xABCDEFFF (little‑endian).</a:t>
+            </a:r>
+          </a:p>
+          <a:p>
+            <a:r>
+              <a:rPr lang="en-US" sz="1600" dirty="0"/>
+              <a:t>LDR R3, [R1,#4] → reads bytes 00 00 CD AB at 0x10000014..17 and forms R3 = 0xABCD0000 (little‑endian).</a:t>
+            </a:r>
+          </a:p>
+          <a:p>
+            <a:r>
+              <a:rPr lang="en-US" sz="1600" dirty="0"/>
+              <a:t>BL max → in max: CMP R2, R3 sets NZCV = 0010 since R2 &gt; R3 (N=0, Z=0, C=1, V=0), path takes first: MOV R0, R2, then BX LR returns with R0 = 0xABCDEFFF.</a:t>
+            </a:r>
+          </a:p>
+          <a:p>
+            <a:r>
+              <a:rPr lang="en-US" sz="1600" dirty="0"/>
+              <a:t>SUBS R4, R2, R0 → R4 = R2 − R0 = 0, NZCV = 0110 (N=0, Z=1, C=1, V=0) because subtracting equal values yields zero with carry set.</a:t>
+            </a:r>
+          </a:p>
+          <a:p>
+            <a:r>
+              <a:rPr lang="en-US" sz="1600" dirty="0"/>
+              <a:t>MOVW R5, #1 → R5 = 0x00000001 (loads 16‑bit immediate into low halfword).</a:t>
+            </a:r>
+          </a:p>
+          <a:p>
+            <a:r>
+              <a:rPr lang="en-US" sz="1600" dirty="0"/>
+              <a:t>LSL R6, R5, #4 → R6 = 0x00000010 (1 shifted left by 4).</a:t>
+            </a:r>
+          </a:p>
+          <a:p>
+            <a:r>
+              <a:rPr lang="en-US" sz="1600" dirty="0"/>
+              <a:t>BIC R7, R2, R6 → R7 = R2 &amp; ~R6 = 0xABCDEFFF &amp; 0xFFFFFFEF = 0xABCDEFEF (clears bit 4).</a:t>
+            </a:r>
+          </a:p>
+          <a:p>
+            <a:r>
+              <a:rPr lang="en-US" sz="1600" dirty="0"/>
+              <a:t>ANDS R8, R7, R6 → R8 = 0xABCDEFEF &amp; 0x10 = 0x00000000 with NZCV = 0110 (zero result with carry preserved).</a:t>
+            </a:r>
+          </a:p>
+          <a:p>
+            <a:r>
+              <a:rPr lang="en-US" sz="1600" dirty="0"/>
+              <a:t>ROR R9, R3, #12 → rotates 0xABCD0000 right by 12 bits to R9 = 0x000ABCD0.</a:t>
+            </a:r>
+          </a:p>
+          <a:p>
+            <a:r>
+              <a:rPr lang="en-US" sz="1600" dirty="0"/>
+              <a:t>REV R10, R9 → byte‑reverse 00 0A BC D0 into D0 BC 0A 00, giving R10 = 0xD0BC0A00.</a:t>
+            </a:r>
+          </a:p>
+          <a:p>
+            <a:r>
+              <a:rPr lang="en-US" sz="1600" dirty="0"/>
+              <a:t>RBIT R11, R10 → bit‑reverse all 32 bits of 0xD0BC0A00, yielding R11 = 0x00503D0B (per architectural bit‑reverse).</a:t>
+            </a:r>
+          </a:p>
+          <a:p>
+            <a:r>
+              <a:rPr lang="en-US" sz="1600" dirty="0"/>
+              <a:t>ADDS R12, R3, R9 → R12 = 0xABCD0000 + 0x000ABCD0 = 0xABD7BCD0 with NZCV = 1000 (negative due to high bit, non‑zero, no carry, no overflow).</a:t>
+            </a:r>
+          </a:p>
+          <a:p>
+            <a:r>
+              <a:rPr lang="en-US" sz="1600" dirty="0"/>
+              <a:t>STR R12, [R1,#8] → stores 0xABD7BCD0 at 0x10000018 as bytes D0 BC D7 AB in little‑endian.</a:t>
+            </a:r>
+          </a:p>
+        </p:txBody>
+      </p:sp>
+      <p:graphicFrame>
+        <p:nvGraphicFramePr>
+          <p:cNvPr id="5" name="Table 4">
+            <a:extLst>
+              <a:ext uri="{FF2B5EF4-FFF2-40B4-BE49-F238E27FC236}">
+                <a16:creationId xmlns:a16="http://schemas.microsoft.com/office/drawing/2014/main" id="{AC30E1FB-AD9F-F830-145F-E37C379A0532}"/>
+              </a:ext>
+            </a:extLst>
+          </p:cNvPr>
+          <p:cNvGraphicFramePr>
+            <a:graphicFrameLocks noGrp="1"/>
+          </p:cNvGraphicFramePr>
+          <p:nvPr>
+            <p:extLst>
+              <p:ext uri="{D42A27DB-BD31-4B8C-83A1-F6EECF244321}">
+                <p14:modId xmlns:p14="http://schemas.microsoft.com/office/powerpoint/2010/main" val="4107462272"/>
+              </p:ext>
+            </p:extLst>
+          </p:nvPr>
+        </p:nvGraphicFramePr>
+        <p:xfrm>
+          <a:off x="56300" y="4930097"/>
+          <a:ext cx="9087700" cy="1483360"/>
+        </p:xfrm>
+        <a:graphic>
+          <a:graphicData uri="http://schemas.openxmlformats.org/drawingml/2006/table">
+            <a:tbl>
+              <a:tblPr firstRow="1" bandRow="1">
+                <a:tableStyleId>{5940675A-B579-460E-94D1-54222C63F5DA}</a:tableStyleId>
+              </a:tblPr>
+              <a:tblGrid>
+                <a:gridCol w="561982">
+                  <a:extLst>
+                    <a:ext uri="{9D8B030D-6E8A-4147-A177-3AD203B41FA5}">
+                      <a16:colId xmlns:a16="http://schemas.microsoft.com/office/drawing/2014/main" val="2337985746"/>
+                    </a:ext>
+                  </a:extLst>
+                </a:gridCol>
+                <a:gridCol w="1698150">
+                  <a:extLst>
+                    <a:ext uri="{9D8B030D-6E8A-4147-A177-3AD203B41FA5}">
+                      <a16:colId xmlns:a16="http://schemas.microsoft.com/office/drawing/2014/main" val="1802740170"/>
+                    </a:ext>
+                  </a:extLst>
+                </a:gridCol>
+                <a:gridCol w="512373">
+                  <a:extLst>
+                    <a:ext uri="{9D8B030D-6E8A-4147-A177-3AD203B41FA5}">
+                      <a16:colId xmlns:a16="http://schemas.microsoft.com/office/drawing/2014/main" val="2590131525"/>
+                    </a:ext>
+                  </a:extLst>
+                </a:gridCol>
+                <a:gridCol w="1566396">
+                  <a:extLst>
+                    <a:ext uri="{9D8B030D-6E8A-4147-A177-3AD203B41FA5}">
+                      <a16:colId xmlns:a16="http://schemas.microsoft.com/office/drawing/2014/main" val="947827850"/>
+                    </a:ext>
+                  </a:extLst>
+                </a:gridCol>
+                <a:gridCol w="702683">
+                  <a:extLst>
+                    <a:ext uri="{9D8B030D-6E8A-4147-A177-3AD203B41FA5}">
+                      <a16:colId xmlns:a16="http://schemas.microsoft.com/office/drawing/2014/main" val="2189951492"/>
+                    </a:ext>
+                  </a:extLst>
+                </a:gridCol>
+                <a:gridCol w="1727428">
+                  <a:extLst>
+                    <a:ext uri="{9D8B030D-6E8A-4147-A177-3AD203B41FA5}">
+                      <a16:colId xmlns:a16="http://schemas.microsoft.com/office/drawing/2014/main" val="2319925471"/>
+                    </a:ext>
+                  </a:extLst>
+                </a:gridCol>
+                <a:gridCol w="570913">
+                  <a:extLst>
+                    <a:ext uri="{9D8B030D-6E8A-4147-A177-3AD203B41FA5}">
+                      <a16:colId xmlns:a16="http://schemas.microsoft.com/office/drawing/2014/main" val="3873491110"/>
+                    </a:ext>
+                  </a:extLst>
+                </a:gridCol>
+                <a:gridCol w="1747775">
+                  <a:extLst>
+                    <a:ext uri="{9D8B030D-6E8A-4147-A177-3AD203B41FA5}">
+                      <a16:colId xmlns:a16="http://schemas.microsoft.com/office/drawing/2014/main" val="2341457647"/>
+                    </a:ext>
+                  </a:extLst>
+                </a:gridCol>
+              </a:tblGrid>
+              <a:tr h="370840">
+                <a:tc>
+                  <a:txBody>
+                    <a:bodyPr/>
+                    <a:lstStyle/>
+                    <a:p>
+                      <a:r>
+                        <a:rPr lang="en-US" dirty="0"/>
+                        <a:t>R0</a:t>
+                      </a:r>
+                    </a:p>
+                  </a:txBody>
+                  <a:tcPr>
+                    <a:solidFill>
+                      <a:schemeClr val="bg1"/>
+                    </a:solidFill>
+                  </a:tcPr>
+                </a:tc>
+                <a:tc>
+                  <a:txBody>
+                    <a:bodyPr/>
+                    <a:lstStyle/>
+                    <a:p>
+                      <a:r>
+                        <a:rPr lang="pt-BR" dirty="0"/>
+                        <a:t>0xABCDEFFF</a:t>
+                      </a:r>
+                      <a:r>
+                        <a:rPr lang="en-US" dirty="0"/>
+                        <a:t> </a:t>
+                      </a:r>
+                    </a:p>
+                  </a:txBody>
+                  <a:tcPr>
+                    <a:solidFill>
+                      <a:schemeClr val="bg1"/>
+                    </a:solidFill>
+                  </a:tcPr>
+                </a:tc>
+                <a:tc>
+                  <a:txBody>
+                    <a:bodyPr/>
+                    <a:lstStyle/>
+                    <a:p>
+                      <a:r>
+                        <a:rPr lang="en-US" dirty="0"/>
+                        <a:t>R4</a:t>
+                      </a:r>
+                    </a:p>
+                  </a:txBody>
+                  <a:tcPr>
+                    <a:solidFill>
+                      <a:schemeClr val="bg1"/>
+                    </a:solidFill>
+                  </a:tcPr>
+                </a:tc>
+                <a:tc>
+                  <a:txBody>
+                    <a:bodyPr/>
+                    <a:lstStyle/>
+                    <a:p>
+                      <a:r>
+                        <a:rPr lang="en-US" dirty="0"/>
+                        <a:t>0x00000000 </a:t>
+                      </a:r>
+                    </a:p>
+                  </a:txBody>
+                  <a:tcPr>
+                    <a:solidFill>
+                      <a:schemeClr val="bg1"/>
+                    </a:solidFill>
+                  </a:tcPr>
+                </a:tc>
+                <a:tc>
+                  <a:txBody>
+                    <a:bodyPr/>
+                    <a:lstStyle/>
+                    <a:p>
+                      <a:r>
+                        <a:rPr lang="en-US" dirty="0"/>
+                        <a:t>R8</a:t>
+                      </a:r>
+                    </a:p>
+                  </a:txBody>
+                  <a:tcPr>
+                    <a:solidFill>
+                      <a:schemeClr val="bg1"/>
+                    </a:solidFill>
+                  </a:tcPr>
+                </a:tc>
+                <a:tc>
+                  <a:txBody>
+                    <a:bodyPr/>
+                    <a:lstStyle/>
+                    <a:p>
+                      <a:r>
+                        <a:rPr lang="en-US" dirty="0"/>
+                        <a:t>0x00000000 </a:t>
+                      </a:r>
+                    </a:p>
+                  </a:txBody>
+                  <a:tcPr>
+                    <a:solidFill>
+                      <a:schemeClr val="bg1"/>
+                    </a:solidFill>
+                  </a:tcPr>
+                </a:tc>
+                <a:tc>
+                  <a:txBody>
+                    <a:bodyPr/>
+                    <a:lstStyle/>
+                    <a:p>
+                      <a:r>
+                        <a:rPr lang="en-US" dirty="0"/>
+                        <a:t>R12</a:t>
+                      </a:r>
+                    </a:p>
+                  </a:txBody>
+                  <a:tcPr>
+                    <a:solidFill>
+                      <a:schemeClr val="bg1"/>
+                    </a:solidFill>
+                  </a:tcPr>
+                </a:tc>
+                <a:tc>
+                  <a:txBody>
+                    <a:bodyPr/>
+                    <a:lstStyle/>
+                    <a:p>
+                      <a:r>
+                        <a:rPr kumimoji="0" lang="en-US" b="0" i="0" kern="1200" dirty="0">
+                          <a:solidFill>
+                            <a:schemeClr val="tx1"/>
+                          </a:solidFill>
+                          <a:effectLst/>
+                          <a:latin typeface="+mn-lt"/>
+                          <a:ea typeface="+mn-ea"/>
+                          <a:cs typeface="+mn-cs"/>
+                        </a:rPr>
+                        <a:t>0xABD7BCD0</a:t>
+                      </a:r>
+                      <a:endParaRPr lang="en-US" dirty="0"/>
+                    </a:p>
+                  </a:txBody>
+                  <a:tcPr>
+                    <a:solidFill>
+                      <a:schemeClr val="bg1"/>
+                    </a:solidFill>
+                  </a:tcPr>
+                </a:tc>
+                <a:extLst>
+                  <a:ext uri="{0D108BD9-81ED-4DB2-BD59-A6C34878D82A}">
+                    <a16:rowId xmlns:a16="http://schemas.microsoft.com/office/drawing/2014/main" val="100651221"/>
+                  </a:ext>
+                </a:extLst>
+              </a:tr>
+              <a:tr h="370840">
+                <a:tc>
+                  <a:txBody>
+                    <a:bodyPr/>
+                    <a:lstStyle/>
+                    <a:p>
+                      <a:r>
+                        <a:rPr lang="en-US" dirty="0"/>
+                        <a:t>R1</a:t>
+                      </a:r>
+                    </a:p>
+                  </a:txBody>
+                  <a:tcPr>
+                    <a:solidFill>
+                      <a:schemeClr val="bg1"/>
+                    </a:solidFill>
+                  </a:tcPr>
+                </a:tc>
+                <a:tc>
+                  <a:txBody>
+                    <a:bodyPr/>
+                    <a:lstStyle/>
+                    <a:p>
+                      <a:r>
+                        <a:rPr lang="en-US" dirty="0"/>
+                        <a:t>0x10000010</a:t>
+                      </a:r>
+                    </a:p>
+                  </a:txBody>
+                  <a:tcPr>
+                    <a:solidFill>
+                      <a:schemeClr val="bg1"/>
+                    </a:solidFill>
+                  </a:tcPr>
+                </a:tc>
+                <a:tc>
+                  <a:txBody>
+                    <a:bodyPr/>
+                    <a:lstStyle/>
+                    <a:p>
+                      <a:r>
+                        <a:rPr lang="en-US" dirty="0"/>
+                        <a:t>R5</a:t>
+                      </a:r>
+                    </a:p>
+                  </a:txBody>
+                  <a:tcPr>
+                    <a:solidFill>
+                      <a:schemeClr val="bg1"/>
+                    </a:solidFill>
+                  </a:tcPr>
+                </a:tc>
+                <a:tc>
+                  <a:txBody>
+                    <a:bodyPr/>
+                    <a:lstStyle/>
+                    <a:p>
+                      <a:r>
+                        <a:rPr lang="en-US" dirty="0"/>
+                        <a:t>0x00000001</a:t>
+                      </a:r>
+                    </a:p>
+                  </a:txBody>
+                  <a:tcPr>
+                    <a:solidFill>
+                      <a:schemeClr val="bg1"/>
+                    </a:solidFill>
+                  </a:tcPr>
+                </a:tc>
+                <a:tc>
+                  <a:txBody>
+                    <a:bodyPr/>
+                    <a:lstStyle/>
+                    <a:p>
+                      <a:r>
+                        <a:rPr lang="en-US" dirty="0"/>
+                        <a:t>R9</a:t>
+                      </a:r>
+                    </a:p>
+                  </a:txBody>
+                  <a:tcPr>
+                    <a:solidFill>
+                      <a:schemeClr val="bg1"/>
+                    </a:solidFill>
+                  </a:tcPr>
+                </a:tc>
+                <a:tc>
+                  <a:txBody>
+                    <a:bodyPr/>
+                    <a:lstStyle/>
+                    <a:p>
+                      <a:r>
+                        <a:rPr kumimoji="0" lang="en-US" b="0" i="0" kern="1200" dirty="0">
+                          <a:solidFill>
+                            <a:schemeClr val="tx1"/>
+                          </a:solidFill>
+                          <a:effectLst/>
+                          <a:latin typeface="+mn-lt"/>
+                          <a:ea typeface="+mn-ea"/>
+                          <a:cs typeface="+mn-cs"/>
+                        </a:rPr>
+                        <a:t>0x000ABCD0</a:t>
+                      </a:r>
+                      <a:endParaRPr lang="en-US" dirty="0"/>
+                    </a:p>
+                  </a:txBody>
+                  <a:tcPr>
+                    <a:solidFill>
+                      <a:schemeClr val="bg1"/>
+                    </a:solidFill>
+                  </a:tcPr>
+                </a:tc>
+                <a:tc>
+                  <a:txBody>
+                    <a:bodyPr/>
+                    <a:lstStyle/>
+                    <a:p>
+                      <a:r>
+                        <a:rPr lang="en-US" dirty="0"/>
+                        <a:t>R13</a:t>
+                      </a:r>
+                    </a:p>
+                  </a:txBody>
+                  <a:tcPr>
+                    <a:solidFill>
+                      <a:schemeClr val="bg1"/>
+                    </a:solidFill>
+                  </a:tcPr>
+                </a:tc>
+                <a:tc>
+                  <a:txBody>
+                    <a:bodyPr/>
+                    <a:lstStyle/>
+                    <a:p>
+                      <a:r>
+                        <a:rPr lang="pt-BR" dirty="0"/>
+                        <a:t>0x10000200</a:t>
+                      </a:r>
+                      <a:endParaRPr lang="en-US" dirty="0"/>
+                    </a:p>
+                  </a:txBody>
+                  <a:tcPr>
+                    <a:solidFill>
+                      <a:schemeClr val="bg1"/>
+                    </a:solidFill>
+                  </a:tcPr>
+                </a:tc>
+                <a:extLst>
+                  <a:ext uri="{0D108BD9-81ED-4DB2-BD59-A6C34878D82A}">
+                    <a16:rowId xmlns:a16="http://schemas.microsoft.com/office/drawing/2014/main" val="146351233"/>
+                  </a:ext>
+                </a:extLst>
+              </a:tr>
+              <a:tr h="370840">
+                <a:tc>
+                  <a:txBody>
+                    <a:bodyPr/>
+                    <a:lstStyle/>
+                    <a:p>
+                      <a:r>
+                        <a:rPr lang="en-US" dirty="0"/>
+                        <a:t>R2</a:t>
+                      </a:r>
+                    </a:p>
+                  </a:txBody>
+                  <a:tcPr>
+                    <a:solidFill>
+                      <a:schemeClr val="bg1"/>
+                    </a:solidFill>
+                  </a:tcPr>
+                </a:tc>
+                <a:tc>
+                  <a:txBody>
+                    <a:bodyPr/>
+                    <a:lstStyle/>
+                    <a:p>
+                      <a:r>
+                        <a:rPr lang="pt-BR"/>
+                        <a:t>0xABCDEFFF</a:t>
+                      </a:r>
+                      <a:endParaRPr lang="en-US" dirty="0"/>
+                    </a:p>
+                  </a:txBody>
+                  <a:tcPr>
+                    <a:solidFill>
+                      <a:schemeClr val="bg1"/>
+                    </a:solidFill>
+                  </a:tcPr>
+                </a:tc>
+                <a:tc>
+                  <a:txBody>
+                    <a:bodyPr/>
+                    <a:lstStyle/>
+                    <a:p>
+                      <a:r>
+                        <a:rPr lang="en-US" dirty="0"/>
+                        <a:t>R6</a:t>
+                      </a:r>
+                    </a:p>
+                  </a:txBody>
+                  <a:tcPr>
+                    <a:solidFill>
+                      <a:schemeClr val="bg1"/>
+                    </a:solidFill>
+                  </a:tcPr>
+                </a:tc>
+                <a:tc>
+                  <a:txBody>
+                    <a:bodyPr/>
+                    <a:lstStyle/>
+                    <a:p>
+                      <a:r>
+                        <a:rPr lang="en-US" dirty="0"/>
+                        <a:t>0x00000010</a:t>
+                      </a:r>
+                    </a:p>
+                  </a:txBody>
+                  <a:tcPr>
+                    <a:solidFill>
+                      <a:schemeClr val="bg1"/>
+                    </a:solidFill>
+                  </a:tcPr>
+                </a:tc>
+                <a:tc>
+                  <a:txBody>
+                    <a:bodyPr/>
+                    <a:lstStyle/>
+                    <a:p>
+                      <a:r>
+                        <a:rPr lang="en-US" dirty="0"/>
+                        <a:t>R10</a:t>
+                      </a:r>
+                    </a:p>
+                  </a:txBody>
+                  <a:tcPr>
+                    <a:solidFill>
+                      <a:schemeClr val="bg1"/>
+                    </a:solidFill>
+                  </a:tcPr>
+                </a:tc>
+                <a:tc>
+                  <a:txBody>
+                    <a:bodyPr/>
+                    <a:lstStyle/>
+                    <a:p>
+                      <a:r>
+                        <a:rPr kumimoji="0" lang="en-US" b="0" i="0" kern="1200" dirty="0">
+                          <a:solidFill>
+                            <a:schemeClr val="tx1"/>
+                          </a:solidFill>
+                          <a:effectLst/>
+                          <a:latin typeface="+mn-lt"/>
+                          <a:ea typeface="+mn-ea"/>
+                          <a:cs typeface="+mn-cs"/>
+                        </a:rPr>
+                        <a:t>0xD0BC0A00</a:t>
+                      </a:r>
+                      <a:endParaRPr lang="en-US" dirty="0"/>
+                    </a:p>
+                  </a:txBody>
+                  <a:tcPr>
+                    <a:solidFill>
+                      <a:schemeClr val="bg1"/>
+                    </a:solidFill>
+                  </a:tcPr>
+                </a:tc>
+                <a:tc>
+                  <a:txBody>
+                    <a:bodyPr/>
+                    <a:lstStyle/>
+                    <a:p>
+                      <a:r>
+                        <a:rPr lang="en-US" dirty="0"/>
+                        <a:t>R14</a:t>
+                      </a:r>
+                    </a:p>
+                  </a:txBody>
+                  <a:tcPr>
+                    <a:solidFill>
+                      <a:schemeClr val="bg1"/>
+                    </a:solidFill>
+                  </a:tcPr>
+                </a:tc>
+                <a:tc>
+                  <a:txBody>
+                    <a:bodyPr/>
+                    <a:lstStyle/>
+                    <a:p>
+                      <a:r>
+                        <a:rPr lang="pt-BR" dirty="0"/>
+                        <a:t>0x00000260</a:t>
+                      </a:r>
+                      <a:endParaRPr lang="en-US" dirty="0"/>
+                    </a:p>
+                  </a:txBody>
+                  <a:tcPr>
+                    <a:solidFill>
+                      <a:schemeClr val="bg1"/>
+                    </a:solidFill>
+                  </a:tcPr>
+                </a:tc>
+                <a:extLst>
+                  <a:ext uri="{0D108BD9-81ED-4DB2-BD59-A6C34878D82A}">
+                    <a16:rowId xmlns:a16="http://schemas.microsoft.com/office/drawing/2014/main" val="1775583618"/>
+                  </a:ext>
+                </a:extLst>
+              </a:tr>
+              <a:tr h="370840">
+                <a:tc>
+                  <a:txBody>
+                    <a:bodyPr/>
+                    <a:lstStyle/>
+                    <a:p>
+                      <a:r>
+                        <a:rPr lang="en-US" dirty="0"/>
+                        <a:t>R3</a:t>
+                      </a:r>
+                    </a:p>
+                  </a:txBody>
+                  <a:tcPr>
+                    <a:solidFill>
+                      <a:schemeClr val="bg1"/>
+                    </a:solidFill>
+                  </a:tcPr>
+                </a:tc>
+                <a:tc>
+                  <a:txBody>
+                    <a:bodyPr/>
+                    <a:lstStyle/>
+                    <a:p>
+                      <a:r>
+                        <a:rPr lang="pt-BR" dirty="0"/>
+                        <a:t>0xABCD0000</a:t>
+                      </a:r>
+                      <a:endParaRPr lang="en-US" dirty="0"/>
+                    </a:p>
+                  </a:txBody>
+                  <a:tcPr>
+                    <a:solidFill>
+                      <a:schemeClr val="bg1"/>
+                    </a:solidFill>
+                  </a:tcPr>
+                </a:tc>
+                <a:tc>
+                  <a:txBody>
+                    <a:bodyPr/>
+                    <a:lstStyle/>
+                    <a:p>
+                      <a:r>
+                        <a:rPr lang="en-US" dirty="0"/>
+                        <a:t>R7</a:t>
+                      </a:r>
+                    </a:p>
+                  </a:txBody>
+                  <a:tcPr>
+                    <a:solidFill>
+                      <a:schemeClr val="bg1"/>
+                    </a:solidFill>
+                  </a:tcPr>
+                </a:tc>
+                <a:tc>
+                  <a:txBody>
+                    <a:bodyPr/>
+                    <a:lstStyle/>
+                    <a:p>
+                      <a:r>
+                        <a:rPr kumimoji="0" lang="en-US" b="0" i="0" kern="1200" dirty="0">
+                          <a:solidFill>
+                            <a:schemeClr val="tx1"/>
+                          </a:solidFill>
+                          <a:effectLst/>
+                          <a:latin typeface="+mn-lt"/>
+                          <a:ea typeface="+mn-ea"/>
+                          <a:cs typeface="+mn-cs"/>
+                        </a:rPr>
+                        <a:t>0xABCDEFEF</a:t>
+                      </a:r>
+                      <a:endParaRPr lang="en-US" dirty="0"/>
+                    </a:p>
+                  </a:txBody>
+                  <a:tcPr>
+                    <a:solidFill>
+                      <a:schemeClr val="bg1"/>
+                    </a:solidFill>
+                  </a:tcPr>
+                </a:tc>
+                <a:tc>
+                  <a:txBody>
+                    <a:bodyPr/>
+                    <a:lstStyle/>
+                    <a:p>
+                      <a:r>
+                        <a:rPr lang="en-US" dirty="0"/>
+                        <a:t>R11</a:t>
+                      </a:r>
+                    </a:p>
+                  </a:txBody>
+                  <a:tcPr>
+                    <a:solidFill>
+                      <a:schemeClr val="bg1"/>
+                    </a:solidFill>
+                  </a:tcPr>
+                </a:tc>
+                <a:tc>
+                  <a:txBody>
+                    <a:bodyPr/>
+                    <a:lstStyle/>
+                    <a:p>
+                      <a:r>
+                        <a:rPr lang="pt-BR" dirty="0"/>
+                        <a:t>0x00503D0B</a:t>
+                      </a:r>
+                      <a:endParaRPr lang="en-US" dirty="0"/>
+                    </a:p>
+                  </a:txBody>
+                  <a:tcPr>
+                    <a:solidFill>
+                      <a:schemeClr val="bg1"/>
+                    </a:solidFill>
+                  </a:tcPr>
+                </a:tc>
+                <a:tc>
+                  <a:txBody>
+                    <a:bodyPr/>
+                    <a:lstStyle/>
+                    <a:p>
+                      <a:r>
+                        <a:rPr lang="en-US" dirty="0"/>
+                        <a:t>R15</a:t>
+                      </a:r>
+                    </a:p>
+                  </a:txBody>
+                  <a:tcPr>
+                    <a:solidFill>
+                      <a:schemeClr val="bg1"/>
+                    </a:solidFill>
+                  </a:tcPr>
+                </a:tc>
+                <a:tc>
+                  <a:txBody>
+                    <a:bodyPr/>
+                    <a:lstStyle/>
+                    <a:p>
+                      <a:r>
+                        <a:rPr lang="pt-BR" dirty="0"/>
+                        <a:t>0x00000250</a:t>
+                      </a:r>
+                      <a:endParaRPr lang="en-US" dirty="0"/>
+                    </a:p>
+                  </a:txBody>
+                  <a:tcPr>
+                    <a:solidFill>
+                      <a:schemeClr val="bg1"/>
+                    </a:solidFill>
+                  </a:tcPr>
+                </a:tc>
+                <a:extLst>
+                  <a:ext uri="{0D108BD9-81ED-4DB2-BD59-A6C34878D82A}">
+                    <a16:rowId xmlns:a16="http://schemas.microsoft.com/office/drawing/2014/main" val="3562356508"/>
+                  </a:ext>
+                </a:extLst>
+              </a:tr>
+            </a:tbl>
+          </a:graphicData>
+        </a:graphic>
+      </p:graphicFrame>
+      <p:graphicFrame>
+        <p:nvGraphicFramePr>
+          <p:cNvPr id="6" name="Content Placeholder 6">
+            <a:extLst>
+              <a:ext uri="{FF2B5EF4-FFF2-40B4-BE49-F238E27FC236}">
+                <a16:creationId xmlns:a16="http://schemas.microsoft.com/office/drawing/2014/main" id="{D224D27B-3F94-7C6B-E7AD-4D1E028E1241}"/>
+              </a:ext>
+            </a:extLst>
+          </p:cNvPr>
+          <p:cNvGraphicFramePr>
+            <a:graphicFrameLocks/>
+          </p:cNvGraphicFramePr>
+          <p:nvPr>
+            <p:extLst>
+              <p:ext uri="{D42A27DB-BD31-4B8C-83A1-F6EECF244321}">
+                <p14:modId xmlns:p14="http://schemas.microsoft.com/office/powerpoint/2010/main" val="695616032"/>
+              </p:ext>
+            </p:extLst>
+          </p:nvPr>
+        </p:nvGraphicFramePr>
+        <p:xfrm>
+          <a:off x="457200" y="6448182"/>
+          <a:ext cx="8405417" cy="370840"/>
+        </p:xfrm>
+        <a:graphic>
+          <a:graphicData uri="http://schemas.openxmlformats.org/drawingml/2006/table">
+            <a:tbl>
+              <a:tblPr firstRow="1" bandRow="1">
+                <a:tableStyleId>{5940675A-B579-460E-94D1-54222C63F5DA}</a:tableStyleId>
+              </a:tblPr>
+              <a:tblGrid>
+                <a:gridCol w="1820338">
+                  <a:extLst>
+                    <a:ext uri="{9D8B030D-6E8A-4147-A177-3AD203B41FA5}">
+                      <a16:colId xmlns:a16="http://schemas.microsoft.com/office/drawing/2014/main" val="4041087470"/>
+                    </a:ext>
+                  </a:extLst>
+                </a:gridCol>
+                <a:gridCol w="549956">
+                  <a:extLst>
+                    <a:ext uri="{9D8B030D-6E8A-4147-A177-3AD203B41FA5}">
+                      <a16:colId xmlns:a16="http://schemas.microsoft.com/office/drawing/2014/main" val="475833553"/>
+                    </a:ext>
+                  </a:extLst>
+                </a:gridCol>
+                <a:gridCol w="549956">
+                  <a:extLst>
+                    <a:ext uri="{9D8B030D-6E8A-4147-A177-3AD203B41FA5}">
+                      <a16:colId xmlns:a16="http://schemas.microsoft.com/office/drawing/2014/main" val="3440583969"/>
+                    </a:ext>
+                  </a:extLst>
+                </a:gridCol>
+                <a:gridCol w="549956">
+                  <a:extLst>
+                    <a:ext uri="{9D8B030D-6E8A-4147-A177-3AD203B41FA5}">
+                      <a16:colId xmlns:a16="http://schemas.microsoft.com/office/drawing/2014/main" val="3973726920"/>
+                    </a:ext>
+                  </a:extLst>
+                </a:gridCol>
+                <a:gridCol w="549956">
+                  <a:extLst>
+                    <a:ext uri="{9D8B030D-6E8A-4147-A177-3AD203B41FA5}">
+                      <a16:colId xmlns:a16="http://schemas.microsoft.com/office/drawing/2014/main" val="1099364392"/>
+                    </a:ext>
+                  </a:extLst>
+                </a:gridCol>
+                <a:gridCol w="549956">
+                  <a:extLst>
+                    <a:ext uri="{9D8B030D-6E8A-4147-A177-3AD203B41FA5}">
+                      <a16:colId xmlns:a16="http://schemas.microsoft.com/office/drawing/2014/main" val="598594491"/>
+                    </a:ext>
+                  </a:extLst>
+                </a:gridCol>
+                <a:gridCol w="549956">
+                  <a:extLst>
+                    <a:ext uri="{9D8B030D-6E8A-4147-A177-3AD203B41FA5}">
+                      <a16:colId xmlns:a16="http://schemas.microsoft.com/office/drawing/2014/main" val="3299168853"/>
+                    </a:ext>
+                  </a:extLst>
+                </a:gridCol>
+                <a:gridCol w="549956">
+                  <a:extLst>
+                    <a:ext uri="{9D8B030D-6E8A-4147-A177-3AD203B41FA5}">
+                      <a16:colId xmlns:a16="http://schemas.microsoft.com/office/drawing/2014/main" val="3639377261"/>
+                    </a:ext>
+                  </a:extLst>
+                </a:gridCol>
+                <a:gridCol w="549956">
+                  <a:extLst>
+                    <a:ext uri="{9D8B030D-6E8A-4147-A177-3AD203B41FA5}">
+                      <a16:colId xmlns:a16="http://schemas.microsoft.com/office/drawing/2014/main" val="2095656865"/>
+                    </a:ext>
+                  </a:extLst>
+                </a:gridCol>
+                <a:gridCol w="553389">
+                  <a:extLst>
+                    <a:ext uri="{9D8B030D-6E8A-4147-A177-3AD203B41FA5}">
+                      <a16:colId xmlns:a16="http://schemas.microsoft.com/office/drawing/2014/main" val="2172498307"/>
+                    </a:ext>
+                  </a:extLst>
+                </a:gridCol>
+                <a:gridCol w="549956">
+                  <a:extLst>
+                    <a:ext uri="{9D8B030D-6E8A-4147-A177-3AD203B41FA5}">
+                      <a16:colId xmlns:a16="http://schemas.microsoft.com/office/drawing/2014/main" val="3928751653"/>
+                    </a:ext>
+                  </a:extLst>
+                </a:gridCol>
+                <a:gridCol w="532130">
+                  <a:extLst>
+                    <a:ext uri="{9D8B030D-6E8A-4147-A177-3AD203B41FA5}">
+                      <a16:colId xmlns:a16="http://schemas.microsoft.com/office/drawing/2014/main" val="1178522413"/>
+                    </a:ext>
+                  </a:extLst>
+                </a:gridCol>
+                <a:gridCol w="549956">
+                  <a:extLst>
+                    <a:ext uri="{9D8B030D-6E8A-4147-A177-3AD203B41FA5}">
+                      <a16:colId xmlns:a16="http://schemas.microsoft.com/office/drawing/2014/main" val="4096721898"/>
+                    </a:ext>
+                  </a:extLst>
+                </a:gridCol>
+              </a:tblGrid>
+              <a:tr h="370840">
+                <a:tc>
+                  <a:txBody>
+                    <a:bodyPr/>
+                    <a:lstStyle/>
+                    <a:p>
+                      <a:pPr marL="0" marR="0" lvl="0" indent="0" algn="ctr" defTabSz="914400" rtl="0" eaLnBrk="1" fontAlgn="auto" latinLnBrk="0" hangingPunct="1">
+                        <a:lnSpc>
+                          <a:spcPct val="100000"/>
+                        </a:lnSpc>
+                        <a:spcBef>
+                          <a:spcPts val="0"/>
+                        </a:spcBef>
+                        <a:spcAft>
+                          <a:spcPts val="0"/>
+                        </a:spcAft>
+                        <a:buClrTx/>
+                        <a:buSzTx/>
+                        <a:buFontTx/>
+                        <a:buNone/>
+                        <a:tabLst/>
+                        <a:defRPr/>
+                      </a:pPr>
+                      <a:r>
+                        <a:rPr lang="de-DE" sz="1800" b="0" i="0" kern="1200" dirty="0">
+                          <a:solidFill>
+                            <a:schemeClr val="tx1"/>
+                          </a:solidFill>
+                          <a:effectLst/>
+                          <a:latin typeface="Times New Roman" pitchFamily="18" charset="0"/>
+                          <a:ea typeface="+mn-ea"/>
+                          <a:cs typeface="+mn-cs"/>
+                        </a:rPr>
+                        <a:t>0x10000010</a:t>
+                      </a:r>
+                      <a:endParaRPr lang="en-US" sz="1800" b="0" dirty="0">
+                        <a:latin typeface="Consolas" panose="020B0609020204030204" pitchFamily="49" charset="0"/>
+                        <a:cs typeface="Consolas" panose="020B0609020204030204" pitchFamily="49" charset="0"/>
+                      </a:endParaRPr>
+                    </a:p>
+                  </a:txBody>
+                  <a:tcPr>
+                    <a:solidFill>
+                      <a:schemeClr val="bg1"/>
+                    </a:solidFill>
+                  </a:tcPr>
+                </a:tc>
+                <a:tc>
+                  <a:txBody>
+                    <a:bodyPr/>
+                    <a:lstStyle/>
+                    <a:p>
+                      <a:pPr algn="ctr"/>
+                      <a:r>
+                        <a:rPr lang="en-US" dirty="0"/>
+                        <a:t>FF</a:t>
+                      </a:r>
+                    </a:p>
+                  </a:txBody>
+                  <a:tcPr>
+                    <a:solidFill>
+                      <a:schemeClr val="bg1"/>
+                    </a:solidFill>
+                  </a:tcPr>
+                </a:tc>
+                <a:tc>
+                  <a:txBody>
+                    <a:bodyPr/>
+                    <a:lstStyle/>
+                    <a:p>
+                      <a:pPr marL="0" algn="ctr" rtl="0" eaLnBrk="1" latinLnBrk="0" hangingPunct="1"/>
+                      <a:r>
+                        <a:rPr kumimoji="0" lang="en-US" kern="1200" dirty="0">
+                          <a:solidFill>
+                            <a:schemeClr val="tx1"/>
+                          </a:solidFill>
+                          <a:latin typeface="+mn-lt"/>
+                          <a:ea typeface="+mn-ea"/>
+                          <a:cs typeface="+mn-cs"/>
+                        </a:rPr>
+                        <a:t>EF</a:t>
+                      </a:r>
+                    </a:p>
+                  </a:txBody>
+                  <a:tcPr>
+                    <a:solidFill>
+                      <a:schemeClr val="bg1"/>
+                    </a:solidFill>
+                  </a:tcPr>
+                </a:tc>
+                <a:tc>
+                  <a:txBody>
+                    <a:bodyPr/>
+                    <a:lstStyle/>
+                    <a:p>
+                      <a:pPr marL="0" algn="ctr" rtl="0" eaLnBrk="1" latinLnBrk="0" hangingPunct="1"/>
+                      <a:r>
+                        <a:rPr kumimoji="0" lang="en-US" kern="1200" dirty="0">
+                          <a:solidFill>
+                            <a:schemeClr val="tx1"/>
+                          </a:solidFill>
+                          <a:latin typeface="+mn-lt"/>
+                          <a:ea typeface="+mn-ea"/>
+                          <a:cs typeface="+mn-cs"/>
+                        </a:rPr>
+                        <a:t>CD</a:t>
+                      </a:r>
+                    </a:p>
+                  </a:txBody>
+                  <a:tcPr>
+                    <a:solidFill>
+                      <a:schemeClr val="bg1"/>
+                    </a:solidFill>
+                  </a:tcPr>
+                </a:tc>
+                <a:tc>
+                  <a:txBody>
+                    <a:bodyPr/>
+                    <a:lstStyle/>
+                    <a:p>
+                      <a:pPr marL="0" algn="ctr" rtl="0" eaLnBrk="1" latinLnBrk="0" hangingPunct="1"/>
+                      <a:r>
+                        <a:rPr kumimoji="0" lang="en-US" kern="1200" dirty="0">
+                          <a:solidFill>
+                            <a:schemeClr val="tx1"/>
+                          </a:solidFill>
+                          <a:latin typeface="+mn-lt"/>
+                          <a:ea typeface="+mn-ea"/>
+                          <a:cs typeface="+mn-cs"/>
+                        </a:rPr>
+                        <a:t>AB</a:t>
+                      </a:r>
+                    </a:p>
+                  </a:txBody>
+                  <a:tcPr>
+                    <a:solidFill>
+                      <a:schemeClr val="bg1"/>
+                    </a:solidFill>
+                  </a:tcPr>
+                </a:tc>
+                <a:tc>
+                  <a:txBody>
+                    <a:bodyPr/>
+                    <a:lstStyle/>
+                    <a:p>
+                      <a:pPr marL="0" algn="ctr" rtl="0" eaLnBrk="1" latinLnBrk="0" hangingPunct="1"/>
+                      <a:r>
+                        <a:rPr kumimoji="0" lang="en-US" kern="1200" dirty="0">
+                          <a:solidFill>
+                            <a:schemeClr val="tx1"/>
+                          </a:solidFill>
+                          <a:latin typeface="+mn-lt"/>
+                          <a:ea typeface="+mn-ea"/>
+                          <a:cs typeface="+mn-cs"/>
+                        </a:rPr>
+                        <a:t>00</a:t>
+                      </a:r>
+                    </a:p>
+                  </a:txBody>
+                  <a:tcPr>
+                    <a:solidFill>
+                      <a:schemeClr val="bg1"/>
+                    </a:solidFill>
+                  </a:tcPr>
+                </a:tc>
+                <a:tc>
+                  <a:txBody>
+                    <a:bodyPr/>
+                    <a:lstStyle/>
+                    <a:p>
+                      <a:pPr marL="0" algn="ctr" rtl="0" eaLnBrk="1" latinLnBrk="0" hangingPunct="1"/>
+                      <a:r>
+                        <a:rPr kumimoji="0" lang="en-US" kern="1200" dirty="0">
+                          <a:solidFill>
+                            <a:schemeClr val="tx1"/>
+                          </a:solidFill>
+                          <a:latin typeface="+mn-lt"/>
+                          <a:ea typeface="+mn-ea"/>
+                          <a:cs typeface="+mn-cs"/>
+                        </a:rPr>
+                        <a:t>00</a:t>
+                      </a:r>
+                    </a:p>
+                  </a:txBody>
+                  <a:tcPr>
+                    <a:solidFill>
+                      <a:schemeClr val="bg1"/>
+                    </a:solidFill>
+                  </a:tcPr>
+                </a:tc>
+                <a:tc>
+                  <a:txBody>
+                    <a:bodyPr/>
+                    <a:lstStyle/>
+                    <a:p>
+                      <a:pPr marL="0" algn="ctr" rtl="0" eaLnBrk="1" latinLnBrk="0" hangingPunct="1"/>
+                      <a:r>
+                        <a:rPr kumimoji="0" lang="en-US" kern="1200" dirty="0">
+                          <a:solidFill>
+                            <a:schemeClr val="tx1"/>
+                          </a:solidFill>
+                          <a:latin typeface="+mn-lt"/>
+                          <a:ea typeface="+mn-ea"/>
+                          <a:cs typeface="+mn-cs"/>
+                        </a:rPr>
+                        <a:t>CD</a:t>
+                      </a:r>
+                    </a:p>
+                  </a:txBody>
+                  <a:tcPr>
+                    <a:solidFill>
+                      <a:schemeClr val="bg1"/>
+                    </a:solidFill>
+                  </a:tcPr>
+                </a:tc>
+                <a:tc>
+                  <a:txBody>
+                    <a:bodyPr/>
+                    <a:lstStyle/>
+                    <a:p>
+                      <a:pPr marL="0" algn="ctr" rtl="0" eaLnBrk="1" latinLnBrk="0" hangingPunct="1"/>
+                      <a:r>
+                        <a:rPr kumimoji="0" lang="en-US" kern="1200" dirty="0">
+                          <a:solidFill>
+                            <a:schemeClr val="tx1"/>
+                          </a:solidFill>
+                          <a:latin typeface="+mn-lt"/>
+                          <a:ea typeface="+mn-ea"/>
+                          <a:cs typeface="+mn-cs"/>
+                        </a:rPr>
+                        <a:t>AB</a:t>
+                      </a:r>
+                    </a:p>
+                  </a:txBody>
+                  <a:tcPr>
+                    <a:solidFill>
+                      <a:schemeClr val="bg1"/>
+                    </a:solidFill>
+                  </a:tcPr>
+                </a:tc>
+                <a:tc>
+                  <a:txBody>
+                    <a:bodyPr/>
+                    <a:lstStyle/>
+                    <a:p>
+                      <a:pPr marL="0" algn="ctr" rtl="0" eaLnBrk="1" latinLnBrk="0" hangingPunct="1"/>
+                      <a:r>
+                        <a:rPr kumimoji="0" lang="en-US" kern="1200" dirty="0">
+                          <a:solidFill>
+                            <a:srgbClr val="FF0000"/>
+                          </a:solidFill>
+                          <a:latin typeface="+mn-lt"/>
+                          <a:ea typeface="+mn-ea"/>
+                          <a:cs typeface="+mn-cs"/>
+                        </a:rPr>
+                        <a:t>D0</a:t>
+                      </a:r>
+                    </a:p>
+                  </a:txBody>
+                  <a:tcPr>
+                    <a:solidFill>
+                      <a:schemeClr val="bg1"/>
+                    </a:solidFill>
+                  </a:tcPr>
+                </a:tc>
+                <a:tc>
+                  <a:txBody>
+                    <a:bodyPr/>
+                    <a:lstStyle/>
+                    <a:p>
+                      <a:pPr marL="0" algn="ctr" rtl="0" eaLnBrk="1" latinLnBrk="0" hangingPunct="1"/>
+                      <a:r>
+                        <a:rPr kumimoji="0" lang="en-US" kern="1200" dirty="0">
+                          <a:solidFill>
+                            <a:srgbClr val="FF0000"/>
+                          </a:solidFill>
+                          <a:latin typeface="+mn-lt"/>
+                          <a:ea typeface="+mn-ea"/>
+                          <a:cs typeface="+mn-cs"/>
+                        </a:rPr>
+                        <a:t>BC</a:t>
+                      </a:r>
+                    </a:p>
+                  </a:txBody>
+                  <a:tcPr>
+                    <a:solidFill>
+                      <a:schemeClr val="bg1"/>
+                    </a:solidFill>
+                  </a:tcPr>
+                </a:tc>
+                <a:tc>
+                  <a:txBody>
+                    <a:bodyPr/>
+                    <a:lstStyle/>
+                    <a:p>
+                      <a:pPr marL="0" algn="ctr" rtl="0" eaLnBrk="1" latinLnBrk="0" hangingPunct="1"/>
+                      <a:r>
+                        <a:rPr kumimoji="0" lang="en-US" kern="1200" dirty="0">
+                          <a:solidFill>
+                            <a:srgbClr val="FF0000"/>
+                          </a:solidFill>
+                          <a:latin typeface="+mn-lt"/>
+                          <a:ea typeface="+mn-ea"/>
+                          <a:cs typeface="+mn-cs"/>
+                        </a:rPr>
+                        <a:t>D7</a:t>
+                      </a:r>
+                    </a:p>
+                  </a:txBody>
+                  <a:tcPr>
+                    <a:solidFill>
+                      <a:schemeClr val="bg1"/>
+                    </a:solidFill>
+                  </a:tcPr>
+                </a:tc>
+                <a:tc>
+                  <a:txBody>
+                    <a:bodyPr/>
+                    <a:lstStyle/>
+                    <a:p>
+                      <a:pPr marL="0" algn="ctr" rtl="0" eaLnBrk="1" latinLnBrk="0" hangingPunct="1"/>
+                      <a:r>
+                        <a:rPr kumimoji="0" lang="en-US" kern="1200" dirty="0">
+                          <a:solidFill>
+                            <a:srgbClr val="FF0000"/>
+                          </a:solidFill>
+                          <a:latin typeface="+mn-lt"/>
+                          <a:ea typeface="+mn-ea"/>
+                          <a:cs typeface="+mn-cs"/>
+                        </a:rPr>
+                        <a:t>AB</a:t>
+                      </a:r>
+                    </a:p>
+                  </a:txBody>
+                  <a:tcPr>
+                    <a:solidFill>
+                      <a:schemeClr val="bg1"/>
+                    </a:solidFill>
+                  </a:tcPr>
+                </a:tc>
+                <a:extLst>
+                  <a:ext uri="{0D108BD9-81ED-4DB2-BD59-A6C34878D82A}">
+                    <a16:rowId xmlns:a16="http://schemas.microsoft.com/office/drawing/2014/main" val="3396541759"/>
+                  </a:ext>
+                </a:extLst>
+              </a:tr>
+            </a:tbl>
+          </a:graphicData>
+        </a:graphic>
+      </p:graphicFrame>
+    </p:spTree>
+    <p:extLst>
+      <p:ext uri="{BB962C8B-B14F-4D97-AF65-F5344CB8AC3E}">
+        <p14:creationId xmlns:p14="http://schemas.microsoft.com/office/powerpoint/2010/main" val="2270848448"/>
+      </p:ext>
+    </p:extLst>
+  </p:cSld>
+  <p:clrMapOvr>
+    <a:masterClrMapping/>
+  </p:clrMapOvr>
+  <p:transition>
+    <p:pull dir="ru"/>
+  </p:transition>
+</p:sld>
+</file>
+
 <file path=ppt/slides/slide35.xml><?xml version="1.0" encoding="utf-8"?>
+<p:sld xmlns:a="http://schemas.openxmlformats.org/drawingml/2006/main" xmlns:r="http://schemas.openxmlformats.org/officeDocument/2006/relationships" xmlns:p="http://schemas.openxmlformats.org/presentationml/2006/main">
+  <p:cSld>
+    <p:spTree>
+      <p:nvGrpSpPr>
+        <p:cNvPr id="1" name=""/>
+        <p:cNvGrpSpPr/>
+        <p:nvPr/>
+      </p:nvGrpSpPr>
+      <p:grpSpPr>
+        <a:xfrm>
+          <a:off x="0" y="0"/>
+          <a:ext cx="0" cy="0"/>
+          <a:chOff x="0" y="0"/>
+          <a:chExt cx="0" cy="0"/>
+        </a:xfrm>
+      </p:grpSpPr>
+      <p:sp>
+        <p:nvSpPr>
+          <p:cNvPr id="2" name="Title 1">
+            <a:extLst>
+              <a:ext uri="{FF2B5EF4-FFF2-40B4-BE49-F238E27FC236}">
+                <a16:creationId xmlns:a16="http://schemas.microsoft.com/office/drawing/2014/main" id="{B6A01A4E-B48D-1DBD-A8D9-2E7B56DAED3E}"/>
+              </a:ext>
+            </a:extLst>
+          </p:cNvPr>
+          <p:cNvSpPr>
+            <a:spLocks noGrp="1"/>
+          </p:cNvSpPr>
+          <p:nvPr>
+            <p:ph type="title"/>
+          </p:nvPr>
+        </p:nvSpPr>
+        <p:spPr/>
+        <p:txBody>
+          <a:bodyPr/>
+          <a:lstStyle/>
+          <a:p>
+            <a:r>
+              <a:rPr lang="en-US" dirty="0"/>
+              <a:t>Notes on Flags</a:t>
+            </a:r>
+          </a:p>
+        </p:txBody>
+      </p:sp>
+      <p:sp>
+        <p:nvSpPr>
+          <p:cNvPr id="3" name="Slide Number Placeholder 2">
+            <a:extLst>
+              <a:ext uri="{FF2B5EF4-FFF2-40B4-BE49-F238E27FC236}">
+                <a16:creationId xmlns:a16="http://schemas.microsoft.com/office/drawing/2014/main" id="{438B5934-5852-80F9-BC73-C9CB87277DC2}"/>
+              </a:ext>
+            </a:extLst>
+          </p:cNvPr>
+          <p:cNvSpPr>
+            <a:spLocks noGrp="1"/>
+          </p:cNvSpPr>
+          <p:nvPr>
+            <p:ph type="sldNum" sz="quarter" idx="12"/>
+          </p:nvPr>
+        </p:nvSpPr>
+        <p:spPr/>
+        <p:txBody>
+          <a:bodyPr/>
+          <a:lstStyle/>
+          <a:p>
+            <a:fld id="{AEE14D4A-FE32-40AF-B06D-E9622816B101}" type="slidenum">
+              <a:rPr lang="en-US" smtClean="0"/>
+              <a:pPr/>
+              <a:t>35</a:t>
+            </a:fld>
+            <a:endParaRPr lang="en-US"/>
+          </a:p>
+        </p:txBody>
+      </p:sp>
+      <p:sp>
+        <p:nvSpPr>
+          <p:cNvPr id="4" name="Content Placeholder 3">
+            <a:extLst>
+              <a:ext uri="{FF2B5EF4-FFF2-40B4-BE49-F238E27FC236}">
+                <a16:creationId xmlns:a16="http://schemas.microsoft.com/office/drawing/2014/main" id="{92D7924B-1264-801F-B527-B071DE30B0D5}"/>
+              </a:ext>
+            </a:extLst>
+          </p:cNvPr>
+          <p:cNvSpPr>
+            <a:spLocks noGrp="1"/>
+          </p:cNvSpPr>
+          <p:nvPr>
+            <p:ph sz="quarter" idx="1"/>
+          </p:nvPr>
+        </p:nvSpPr>
+        <p:spPr>
+          <a:xfrm>
+            <a:off x="457200" y="1219199"/>
+            <a:ext cx="8229600" cy="3613985"/>
+          </a:xfrm>
+        </p:spPr>
+        <p:txBody>
+          <a:bodyPr>
+            <a:normAutofit fontScale="85000" lnSpcReduction="20000"/>
+          </a:bodyPr>
+          <a:lstStyle/>
+          <a:p>
+            <a:r>
+              <a:rPr lang="en-US" dirty="0"/>
+              <a:t>CMP R2,R3 → NZCV = 0010 because R2 &gt; R3 in unsigned comparison semantics used by CMP on 32‑bit registers without carry‑in.​</a:t>
+            </a:r>
+          </a:p>
+          <a:p>
+            <a:r>
+              <a:rPr lang="en-US" dirty="0"/>
+              <a:t>SUBS R4,R2,R0 → NZCV = 0110 because the result is zero and subtraction of equal values sets carry and clears negative and overflow.​</a:t>
+            </a:r>
+          </a:p>
+          <a:p>
+            <a:r>
+              <a:rPr lang="en-US" dirty="0"/>
+              <a:t>ANDS R8,R7,R6 → NZCV = 0110 because the logical AND produced zero, and the carry is preserved from SUBS.​</a:t>
+            </a:r>
+          </a:p>
+          <a:p>
+            <a:r>
+              <a:rPr lang="en-US" dirty="0"/>
+              <a:t>ADDS R12,R3,R9 → NZCV = 1000 because the sum has the top bit set (negative in signed sense), is non‑zero, and does not generate carry or overflow for these operands.</a:t>
+            </a:r>
+          </a:p>
+        </p:txBody>
+      </p:sp>
+      <p:sp>
+        <p:nvSpPr>
+          <p:cNvPr id="5" name="Slide Number Placeholder 2">
+            <a:extLst>
+              <a:ext uri="{FF2B5EF4-FFF2-40B4-BE49-F238E27FC236}">
+                <a16:creationId xmlns:a16="http://schemas.microsoft.com/office/drawing/2014/main" id="{7271186D-05AA-4376-BD30-2CA45FBDA190}"/>
+              </a:ext>
+            </a:extLst>
+          </p:cNvPr>
+          <p:cNvSpPr txBox="1">
+            <a:spLocks/>
+          </p:cNvSpPr>
+          <p:nvPr/>
+        </p:nvSpPr>
+        <p:spPr>
+          <a:xfrm>
+            <a:off x="612648" y="6356350"/>
+            <a:ext cx="1981200" cy="365760"/>
+          </a:xfrm>
+          <a:prstGeom prst="rect">
+            <a:avLst/>
+          </a:prstGeom>
+        </p:spPr>
+        <p:txBody>
+          <a:bodyPr vert="horz"/>
+          <a:lstStyle>
+            <a:defPPr>
+              <a:defRPr lang="en-US"/>
+            </a:defPPr>
+            <a:lvl1pPr algn="l" rtl="0" eaLnBrk="1" fontAlgn="base" latinLnBrk="0" hangingPunct="1">
+              <a:spcBef>
+                <a:spcPct val="0"/>
+              </a:spcBef>
+              <a:spcAft>
+                <a:spcPct val="0"/>
+              </a:spcAft>
+              <a:defRPr kumimoji="0" sz="1800" b="1" kern="1200">
+                <a:solidFill>
+                  <a:schemeClr val="tx2"/>
+                </a:solidFill>
+                <a:latin typeface="Courier New" pitchFamily="49" charset="0"/>
+                <a:ea typeface="+mn-ea"/>
+                <a:cs typeface="+mn-cs"/>
+              </a:defRPr>
+            </a:lvl1pPr>
+            <a:lvl2pPr marL="457200" algn="l" rtl="0" eaLnBrk="0" fontAlgn="base" hangingPunct="0">
+              <a:spcBef>
+                <a:spcPct val="0"/>
+              </a:spcBef>
+              <a:spcAft>
+                <a:spcPct val="0"/>
+              </a:spcAft>
+              <a:defRPr sz="1400" b="1" kern="1200">
+                <a:solidFill>
+                  <a:schemeClr val="tx1"/>
+                </a:solidFill>
+                <a:latin typeface="Courier New" pitchFamily="49" charset="0"/>
+                <a:ea typeface="+mn-ea"/>
+                <a:cs typeface="+mn-cs"/>
+              </a:defRPr>
+            </a:lvl2pPr>
+            <a:lvl3pPr marL="914400" algn="l" rtl="0" eaLnBrk="0" fontAlgn="base" hangingPunct="0">
+              <a:spcBef>
+                <a:spcPct val="0"/>
+              </a:spcBef>
+              <a:spcAft>
+                <a:spcPct val="0"/>
+              </a:spcAft>
+              <a:defRPr sz="1400" b="1" kern="1200">
+                <a:solidFill>
+                  <a:schemeClr val="tx1"/>
+                </a:solidFill>
+                <a:latin typeface="Courier New" pitchFamily="49" charset="0"/>
+                <a:ea typeface="+mn-ea"/>
+                <a:cs typeface="+mn-cs"/>
+              </a:defRPr>
+            </a:lvl3pPr>
+            <a:lvl4pPr marL="1371600" algn="l" rtl="0" eaLnBrk="0" fontAlgn="base" hangingPunct="0">
+              <a:spcBef>
+                <a:spcPct val="0"/>
+              </a:spcBef>
+              <a:spcAft>
+                <a:spcPct val="0"/>
+              </a:spcAft>
+              <a:defRPr sz="1400" b="1" kern="1200">
+                <a:solidFill>
+                  <a:schemeClr val="tx1"/>
+                </a:solidFill>
+                <a:latin typeface="Courier New" pitchFamily="49" charset="0"/>
+                <a:ea typeface="+mn-ea"/>
+                <a:cs typeface="+mn-cs"/>
+              </a:defRPr>
+            </a:lvl4pPr>
+            <a:lvl5pPr marL="1828800" algn="l" rtl="0" eaLnBrk="0" fontAlgn="base" hangingPunct="0">
+              <a:spcBef>
+                <a:spcPct val="0"/>
+              </a:spcBef>
+              <a:spcAft>
+                <a:spcPct val="0"/>
+              </a:spcAft>
+              <a:defRPr sz="1400" b="1" kern="1200">
+                <a:solidFill>
+                  <a:schemeClr val="tx1"/>
+                </a:solidFill>
+                <a:latin typeface="Courier New" pitchFamily="49" charset="0"/>
+                <a:ea typeface="+mn-ea"/>
+                <a:cs typeface="+mn-cs"/>
+              </a:defRPr>
+            </a:lvl5pPr>
+            <a:lvl6pPr marL="2286000" algn="l" defTabSz="914400" rtl="0" eaLnBrk="1" latinLnBrk="0" hangingPunct="1">
+              <a:defRPr sz="1400" b="1" kern="1200">
+                <a:solidFill>
+                  <a:schemeClr val="tx1"/>
+                </a:solidFill>
+                <a:latin typeface="Courier New" pitchFamily="49" charset="0"/>
+                <a:ea typeface="+mn-ea"/>
+                <a:cs typeface="+mn-cs"/>
+              </a:defRPr>
+            </a:lvl6pPr>
+            <a:lvl7pPr marL="2743200" algn="l" defTabSz="914400" rtl="0" eaLnBrk="1" latinLnBrk="0" hangingPunct="1">
+              <a:defRPr sz="1400" b="1" kern="1200">
+                <a:solidFill>
+                  <a:schemeClr val="tx1"/>
+                </a:solidFill>
+                <a:latin typeface="Courier New" pitchFamily="49" charset="0"/>
+                <a:ea typeface="+mn-ea"/>
+                <a:cs typeface="+mn-cs"/>
+              </a:defRPr>
+            </a:lvl7pPr>
+            <a:lvl8pPr marL="3200400" algn="l" defTabSz="914400" rtl="0" eaLnBrk="1" latinLnBrk="0" hangingPunct="1">
+              <a:defRPr sz="1400" b="1" kern="1200">
+                <a:solidFill>
+                  <a:schemeClr val="tx1"/>
+                </a:solidFill>
+                <a:latin typeface="Courier New" pitchFamily="49" charset="0"/>
+                <a:ea typeface="+mn-ea"/>
+                <a:cs typeface="+mn-cs"/>
+              </a:defRPr>
+            </a:lvl8pPr>
+            <a:lvl9pPr marL="3657600" algn="l" defTabSz="914400" rtl="0" eaLnBrk="1" latinLnBrk="0" hangingPunct="1">
+              <a:defRPr sz="1400" b="1" kern="1200">
+                <a:solidFill>
+                  <a:schemeClr val="tx1"/>
+                </a:solidFill>
+                <a:latin typeface="Courier New" pitchFamily="49" charset="0"/>
+                <a:ea typeface="+mn-ea"/>
+                <a:cs typeface="+mn-cs"/>
+              </a:defRPr>
+            </a:lvl9pPr>
+          </a:lstStyle>
+          <a:p>
+            <a:fld id="{AEE14D4A-FE32-40AF-B06D-E9622816B101}" type="slidenum">
+              <a:rPr lang="en-US" smtClean="0"/>
+              <a:pPr/>
+              <a:t>35</a:t>
+            </a:fld>
+            <a:endParaRPr lang="en-US"/>
+          </a:p>
+        </p:txBody>
+      </p:sp>
+      <p:graphicFrame>
+        <p:nvGraphicFramePr>
+          <p:cNvPr id="6" name="Table 5">
+            <a:extLst>
+              <a:ext uri="{FF2B5EF4-FFF2-40B4-BE49-F238E27FC236}">
+                <a16:creationId xmlns:a16="http://schemas.microsoft.com/office/drawing/2014/main" id="{7E4F03E2-3309-3F5B-7C2A-81D445DA8BA6}"/>
+              </a:ext>
+            </a:extLst>
+          </p:cNvPr>
+          <p:cNvGraphicFramePr>
+            <a:graphicFrameLocks noGrp="1"/>
+          </p:cNvGraphicFramePr>
+          <p:nvPr>
+            <p:extLst>
+              <p:ext uri="{D42A27DB-BD31-4B8C-83A1-F6EECF244321}">
+                <p14:modId xmlns:p14="http://schemas.microsoft.com/office/powerpoint/2010/main" val="2634234559"/>
+              </p:ext>
+            </p:extLst>
+          </p:nvPr>
+        </p:nvGraphicFramePr>
+        <p:xfrm>
+          <a:off x="56300" y="4930097"/>
+          <a:ext cx="9087700" cy="1483360"/>
+        </p:xfrm>
+        <a:graphic>
+          <a:graphicData uri="http://schemas.openxmlformats.org/drawingml/2006/table">
+            <a:tbl>
+              <a:tblPr firstRow="1" bandRow="1">
+                <a:tableStyleId>{5940675A-B579-460E-94D1-54222C63F5DA}</a:tableStyleId>
+              </a:tblPr>
+              <a:tblGrid>
+                <a:gridCol w="561982">
+                  <a:extLst>
+                    <a:ext uri="{9D8B030D-6E8A-4147-A177-3AD203B41FA5}">
+                      <a16:colId xmlns:a16="http://schemas.microsoft.com/office/drawing/2014/main" val="2337985746"/>
+                    </a:ext>
+                  </a:extLst>
+                </a:gridCol>
+                <a:gridCol w="1698150">
+                  <a:extLst>
+                    <a:ext uri="{9D8B030D-6E8A-4147-A177-3AD203B41FA5}">
+                      <a16:colId xmlns:a16="http://schemas.microsoft.com/office/drawing/2014/main" val="1802740170"/>
+                    </a:ext>
+                  </a:extLst>
+                </a:gridCol>
+                <a:gridCol w="512373">
+                  <a:extLst>
+                    <a:ext uri="{9D8B030D-6E8A-4147-A177-3AD203B41FA5}">
+                      <a16:colId xmlns:a16="http://schemas.microsoft.com/office/drawing/2014/main" val="2590131525"/>
+                    </a:ext>
+                  </a:extLst>
+                </a:gridCol>
+                <a:gridCol w="1566396">
+                  <a:extLst>
+                    <a:ext uri="{9D8B030D-6E8A-4147-A177-3AD203B41FA5}">
+                      <a16:colId xmlns:a16="http://schemas.microsoft.com/office/drawing/2014/main" val="947827850"/>
+                    </a:ext>
+                  </a:extLst>
+                </a:gridCol>
+                <a:gridCol w="702683">
+                  <a:extLst>
+                    <a:ext uri="{9D8B030D-6E8A-4147-A177-3AD203B41FA5}">
+                      <a16:colId xmlns:a16="http://schemas.microsoft.com/office/drawing/2014/main" val="2189951492"/>
+                    </a:ext>
+                  </a:extLst>
+                </a:gridCol>
+                <a:gridCol w="1727428">
+                  <a:extLst>
+                    <a:ext uri="{9D8B030D-6E8A-4147-A177-3AD203B41FA5}">
+                      <a16:colId xmlns:a16="http://schemas.microsoft.com/office/drawing/2014/main" val="2319925471"/>
+                    </a:ext>
+                  </a:extLst>
+                </a:gridCol>
+                <a:gridCol w="570913">
+                  <a:extLst>
+                    <a:ext uri="{9D8B030D-6E8A-4147-A177-3AD203B41FA5}">
+                      <a16:colId xmlns:a16="http://schemas.microsoft.com/office/drawing/2014/main" val="3873491110"/>
+                    </a:ext>
+                  </a:extLst>
+                </a:gridCol>
+                <a:gridCol w="1747775">
+                  <a:extLst>
+                    <a:ext uri="{9D8B030D-6E8A-4147-A177-3AD203B41FA5}">
+                      <a16:colId xmlns:a16="http://schemas.microsoft.com/office/drawing/2014/main" val="2341457647"/>
+                    </a:ext>
+                  </a:extLst>
+                </a:gridCol>
+              </a:tblGrid>
+              <a:tr h="370840">
+                <a:tc>
+                  <a:txBody>
+                    <a:bodyPr/>
+                    <a:lstStyle/>
+                    <a:p>
+                      <a:r>
+                        <a:rPr lang="en-US" dirty="0"/>
+                        <a:t>R0</a:t>
+                      </a:r>
+                    </a:p>
+                  </a:txBody>
+                  <a:tcPr>
+                    <a:solidFill>
+                      <a:schemeClr val="bg1"/>
+                    </a:solidFill>
+                  </a:tcPr>
+                </a:tc>
+                <a:tc>
+                  <a:txBody>
+                    <a:bodyPr/>
+                    <a:lstStyle/>
+                    <a:p>
+                      <a:r>
+                        <a:rPr lang="pt-BR" dirty="0"/>
+                        <a:t>0xABCDEFFF</a:t>
+                      </a:r>
+                      <a:r>
+                        <a:rPr lang="en-US" dirty="0"/>
+                        <a:t> </a:t>
+                      </a:r>
+                    </a:p>
+                  </a:txBody>
+                  <a:tcPr>
+                    <a:solidFill>
+                      <a:schemeClr val="bg1"/>
+                    </a:solidFill>
+                  </a:tcPr>
+                </a:tc>
+                <a:tc>
+                  <a:txBody>
+                    <a:bodyPr/>
+                    <a:lstStyle/>
+                    <a:p>
+                      <a:r>
+                        <a:rPr lang="en-US" dirty="0"/>
+                        <a:t>R4</a:t>
+                      </a:r>
+                    </a:p>
+                  </a:txBody>
+                  <a:tcPr>
+                    <a:solidFill>
+                      <a:schemeClr val="bg1"/>
+                    </a:solidFill>
+                  </a:tcPr>
+                </a:tc>
+                <a:tc>
+                  <a:txBody>
+                    <a:bodyPr/>
+                    <a:lstStyle/>
+                    <a:p>
+                      <a:r>
+                        <a:rPr lang="en-US" dirty="0"/>
+                        <a:t>0x00000000 </a:t>
+                      </a:r>
+                    </a:p>
+                  </a:txBody>
+                  <a:tcPr>
+                    <a:solidFill>
+                      <a:schemeClr val="bg1"/>
+                    </a:solidFill>
+                  </a:tcPr>
+                </a:tc>
+                <a:tc>
+                  <a:txBody>
+                    <a:bodyPr/>
+                    <a:lstStyle/>
+                    <a:p>
+                      <a:r>
+                        <a:rPr lang="en-US" dirty="0"/>
+                        <a:t>R8</a:t>
+                      </a:r>
+                    </a:p>
+                  </a:txBody>
+                  <a:tcPr>
+                    <a:solidFill>
+                      <a:schemeClr val="bg1"/>
+                    </a:solidFill>
+                  </a:tcPr>
+                </a:tc>
+                <a:tc>
+                  <a:txBody>
+                    <a:bodyPr/>
+                    <a:lstStyle/>
+                    <a:p>
+                      <a:r>
+                        <a:rPr lang="en-US" dirty="0"/>
+                        <a:t>0x00000000 </a:t>
+                      </a:r>
+                    </a:p>
+                  </a:txBody>
+                  <a:tcPr>
+                    <a:solidFill>
+                      <a:schemeClr val="bg1"/>
+                    </a:solidFill>
+                  </a:tcPr>
+                </a:tc>
+                <a:tc>
+                  <a:txBody>
+                    <a:bodyPr/>
+                    <a:lstStyle/>
+                    <a:p>
+                      <a:r>
+                        <a:rPr lang="en-US" dirty="0"/>
+                        <a:t>R12</a:t>
+                      </a:r>
+                    </a:p>
+                  </a:txBody>
+                  <a:tcPr>
+                    <a:solidFill>
+                      <a:schemeClr val="bg1"/>
+                    </a:solidFill>
+                  </a:tcPr>
+                </a:tc>
+                <a:tc>
+                  <a:txBody>
+                    <a:bodyPr/>
+                    <a:lstStyle/>
+                    <a:p>
+                      <a:r>
+                        <a:rPr kumimoji="0" lang="en-US" b="0" i="0" kern="1200" dirty="0">
+                          <a:solidFill>
+                            <a:schemeClr val="tx1"/>
+                          </a:solidFill>
+                          <a:effectLst/>
+                          <a:latin typeface="+mn-lt"/>
+                          <a:ea typeface="+mn-ea"/>
+                          <a:cs typeface="+mn-cs"/>
+                        </a:rPr>
+                        <a:t>0xABD7BCD0</a:t>
+                      </a:r>
+                      <a:endParaRPr lang="en-US" dirty="0"/>
+                    </a:p>
+                  </a:txBody>
+                  <a:tcPr>
+                    <a:solidFill>
+                      <a:schemeClr val="bg1"/>
+                    </a:solidFill>
+                  </a:tcPr>
+                </a:tc>
+                <a:extLst>
+                  <a:ext uri="{0D108BD9-81ED-4DB2-BD59-A6C34878D82A}">
+                    <a16:rowId xmlns:a16="http://schemas.microsoft.com/office/drawing/2014/main" val="100651221"/>
+                  </a:ext>
+                </a:extLst>
+              </a:tr>
+              <a:tr h="370840">
+                <a:tc>
+                  <a:txBody>
+                    <a:bodyPr/>
+                    <a:lstStyle/>
+                    <a:p>
+                      <a:r>
+                        <a:rPr lang="en-US" dirty="0"/>
+                        <a:t>R1</a:t>
+                      </a:r>
+                    </a:p>
+                  </a:txBody>
+                  <a:tcPr>
+                    <a:solidFill>
+                      <a:schemeClr val="bg1"/>
+                    </a:solidFill>
+                  </a:tcPr>
+                </a:tc>
+                <a:tc>
+                  <a:txBody>
+                    <a:bodyPr/>
+                    <a:lstStyle/>
+                    <a:p>
+                      <a:r>
+                        <a:rPr lang="en-US" dirty="0"/>
+                        <a:t>0x10000010</a:t>
+                      </a:r>
+                    </a:p>
+                  </a:txBody>
+                  <a:tcPr>
+                    <a:solidFill>
+                      <a:schemeClr val="bg1"/>
+                    </a:solidFill>
+                  </a:tcPr>
+                </a:tc>
+                <a:tc>
+                  <a:txBody>
+                    <a:bodyPr/>
+                    <a:lstStyle/>
+                    <a:p>
+                      <a:r>
+                        <a:rPr lang="en-US" dirty="0"/>
+                        <a:t>R5</a:t>
+                      </a:r>
+                    </a:p>
+                  </a:txBody>
+                  <a:tcPr>
+                    <a:solidFill>
+                      <a:schemeClr val="bg1"/>
+                    </a:solidFill>
+                  </a:tcPr>
+                </a:tc>
+                <a:tc>
+                  <a:txBody>
+                    <a:bodyPr/>
+                    <a:lstStyle/>
+                    <a:p>
+                      <a:r>
+                        <a:rPr lang="en-US" dirty="0"/>
+                        <a:t>0x00000001</a:t>
+                      </a:r>
+                    </a:p>
+                  </a:txBody>
+                  <a:tcPr>
+                    <a:solidFill>
+                      <a:schemeClr val="bg1"/>
+                    </a:solidFill>
+                  </a:tcPr>
+                </a:tc>
+                <a:tc>
+                  <a:txBody>
+                    <a:bodyPr/>
+                    <a:lstStyle/>
+                    <a:p>
+                      <a:r>
+                        <a:rPr lang="en-US" dirty="0"/>
+                        <a:t>R9</a:t>
+                      </a:r>
+                    </a:p>
+                  </a:txBody>
+                  <a:tcPr>
+                    <a:solidFill>
+                      <a:schemeClr val="bg1"/>
+                    </a:solidFill>
+                  </a:tcPr>
+                </a:tc>
+                <a:tc>
+                  <a:txBody>
+                    <a:bodyPr/>
+                    <a:lstStyle/>
+                    <a:p>
+                      <a:r>
+                        <a:rPr kumimoji="0" lang="en-US" b="0" i="0" kern="1200" dirty="0">
+                          <a:solidFill>
+                            <a:schemeClr val="tx1"/>
+                          </a:solidFill>
+                          <a:effectLst/>
+                          <a:latin typeface="+mn-lt"/>
+                          <a:ea typeface="+mn-ea"/>
+                          <a:cs typeface="+mn-cs"/>
+                        </a:rPr>
+                        <a:t>0x000ABCD0</a:t>
+                      </a:r>
+                      <a:endParaRPr lang="en-US" dirty="0"/>
+                    </a:p>
+                  </a:txBody>
+                  <a:tcPr>
+                    <a:solidFill>
+                      <a:schemeClr val="bg1"/>
+                    </a:solidFill>
+                  </a:tcPr>
+                </a:tc>
+                <a:tc>
+                  <a:txBody>
+                    <a:bodyPr/>
+                    <a:lstStyle/>
+                    <a:p>
+                      <a:r>
+                        <a:rPr lang="en-US" dirty="0"/>
+                        <a:t>R13</a:t>
+                      </a:r>
+                    </a:p>
+                  </a:txBody>
+                  <a:tcPr>
+                    <a:solidFill>
+                      <a:schemeClr val="bg1"/>
+                    </a:solidFill>
+                  </a:tcPr>
+                </a:tc>
+                <a:tc>
+                  <a:txBody>
+                    <a:bodyPr/>
+                    <a:lstStyle/>
+                    <a:p>
+                      <a:r>
+                        <a:rPr lang="pt-BR" dirty="0"/>
+                        <a:t>0x10000200</a:t>
+                      </a:r>
+                      <a:endParaRPr lang="en-US" dirty="0"/>
+                    </a:p>
+                  </a:txBody>
+                  <a:tcPr>
+                    <a:solidFill>
+                      <a:schemeClr val="bg1"/>
+                    </a:solidFill>
+                  </a:tcPr>
+                </a:tc>
+                <a:extLst>
+                  <a:ext uri="{0D108BD9-81ED-4DB2-BD59-A6C34878D82A}">
+                    <a16:rowId xmlns:a16="http://schemas.microsoft.com/office/drawing/2014/main" val="146351233"/>
+                  </a:ext>
+                </a:extLst>
+              </a:tr>
+              <a:tr h="370840">
+                <a:tc>
+                  <a:txBody>
+                    <a:bodyPr/>
+                    <a:lstStyle/>
+                    <a:p>
+                      <a:r>
+                        <a:rPr lang="en-US" dirty="0"/>
+                        <a:t>R2</a:t>
+                      </a:r>
+                    </a:p>
+                  </a:txBody>
+                  <a:tcPr>
+                    <a:solidFill>
+                      <a:schemeClr val="bg1"/>
+                    </a:solidFill>
+                  </a:tcPr>
+                </a:tc>
+                <a:tc>
+                  <a:txBody>
+                    <a:bodyPr/>
+                    <a:lstStyle/>
+                    <a:p>
+                      <a:r>
+                        <a:rPr lang="pt-BR" dirty="0"/>
+                        <a:t>0xABCDEFFF</a:t>
+                      </a:r>
+                      <a:endParaRPr lang="en-US" dirty="0"/>
+                    </a:p>
+                  </a:txBody>
+                  <a:tcPr>
+                    <a:solidFill>
+                      <a:schemeClr val="bg1"/>
+                    </a:solidFill>
+                  </a:tcPr>
+                </a:tc>
+                <a:tc>
+                  <a:txBody>
+                    <a:bodyPr/>
+                    <a:lstStyle/>
+                    <a:p>
+                      <a:r>
+                        <a:rPr lang="en-US" dirty="0"/>
+                        <a:t>R6</a:t>
+                      </a:r>
+                    </a:p>
+                  </a:txBody>
+                  <a:tcPr>
+                    <a:solidFill>
+                      <a:schemeClr val="bg1"/>
+                    </a:solidFill>
+                  </a:tcPr>
+                </a:tc>
+                <a:tc>
+                  <a:txBody>
+                    <a:bodyPr/>
+                    <a:lstStyle/>
+                    <a:p>
+                      <a:r>
+                        <a:rPr lang="en-US" dirty="0"/>
+                        <a:t>0x00000010</a:t>
+                      </a:r>
+                    </a:p>
+                  </a:txBody>
+                  <a:tcPr>
+                    <a:solidFill>
+                      <a:schemeClr val="bg1"/>
+                    </a:solidFill>
+                  </a:tcPr>
+                </a:tc>
+                <a:tc>
+                  <a:txBody>
+                    <a:bodyPr/>
+                    <a:lstStyle/>
+                    <a:p>
+                      <a:r>
+                        <a:rPr lang="en-US" dirty="0"/>
+                        <a:t>R10</a:t>
+                      </a:r>
+                    </a:p>
+                  </a:txBody>
+                  <a:tcPr>
+                    <a:solidFill>
+                      <a:schemeClr val="bg1"/>
+                    </a:solidFill>
+                  </a:tcPr>
+                </a:tc>
+                <a:tc>
+                  <a:txBody>
+                    <a:bodyPr/>
+                    <a:lstStyle/>
+                    <a:p>
+                      <a:r>
+                        <a:rPr kumimoji="0" lang="en-US" b="0" i="0" kern="1200" dirty="0">
+                          <a:solidFill>
+                            <a:schemeClr val="tx1"/>
+                          </a:solidFill>
+                          <a:effectLst/>
+                          <a:latin typeface="+mn-lt"/>
+                          <a:ea typeface="+mn-ea"/>
+                          <a:cs typeface="+mn-cs"/>
+                        </a:rPr>
+                        <a:t>0xD0BC0A00</a:t>
+                      </a:r>
+                      <a:endParaRPr lang="en-US" dirty="0"/>
+                    </a:p>
+                  </a:txBody>
+                  <a:tcPr>
+                    <a:solidFill>
+                      <a:schemeClr val="bg1"/>
+                    </a:solidFill>
+                  </a:tcPr>
+                </a:tc>
+                <a:tc>
+                  <a:txBody>
+                    <a:bodyPr/>
+                    <a:lstStyle/>
+                    <a:p>
+                      <a:r>
+                        <a:rPr lang="en-US" dirty="0"/>
+                        <a:t>R14</a:t>
+                      </a:r>
+                    </a:p>
+                  </a:txBody>
+                  <a:tcPr>
+                    <a:solidFill>
+                      <a:schemeClr val="bg1"/>
+                    </a:solidFill>
+                  </a:tcPr>
+                </a:tc>
+                <a:tc>
+                  <a:txBody>
+                    <a:bodyPr/>
+                    <a:lstStyle/>
+                    <a:p>
+                      <a:r>
+                        <a:rPr lang="pt-BR" dirty="0"/>
+                        <a:t>0x00000260</a:t>
+                      </a:r>
+                      <a:endParaRPr lang="en-US" dirty="0"/>
+                    </a:p>
+                  </a:txBody>
+                  <a:tcPr>
+                    <a:solidFill>
+                      <a:schemeClr val="bg1"/>
+                    </a:solidFill>
+                  </a:tcPr>
+                </a:tc>
+                <a:extLst>
+                  <a:ext uri="{0D108BD9-81ED-4DB2-BD59-A6C34878D82A}">
+                    <a16:rowId xmlns:a16="http://schemas.microsoft.com/office/drawing/2014/main" val="1775583618"/>
+                  </a:ext>
+                </a:extLst>
+              </a:tr>
+              <a:tr h="370840">
+                <a:tc>
+                  <a:txBody>
+                    <a:bodyPr/>
+                    <a:lstStyle/>
+                    <a:p>
+                      <a:r>
+                        <a:rPr lang="en-US" dirty="0"/>
+                        <a:t>R3</a:t>
+                      </a:r>
+                    </a:p>
+                  </a:txBody>
+                  <a:tcPr>
+                    <a:solidFill>
+                      <a:schemeClr val="bg1"/>
+                    </a:solidFill>
+                  </a:tcPr>
+                </a:tc>
+                <a:tc>
+                  <a:txBody>
+                    <a:bodyPr/>
+                    <a:lstStyle/>
+                    <a:p>
+                      <a:r>
+                        <a:rPr lang="pt-BR" dirty="0"/>
+                        <a:t>0xABCD0000</a:t>
+                      </a:r>
+                      <a:endParaRPr lang="en-US" dirty="0"/>
+                    </a:p>
+                  </a:txBody>
+                  <a:tcPr>
+                    <a:solidFill>
+                      <a:schemeClr val="bg1"/>
+                    </a:solidFill>
+                  </a:tcPr>
+                </a:tc>
+                <a:tc>
+                  <a:txBody>
+                    <a:bodyPr/>
+                    <a:lstStyle/>
+                    <a:p>
+                      <a:r>
+                        <a:rPr lang="en-US" dirty="0"/>
+                        <a:t>R7</a:t>
+                      </a:r>
+                    </a:p>
+                  </a:txBody>
+                  <a:tcPr>
+                    <a:solidFill>
+                      <a:schemeClr val="bg1"/>
+                    </a:solidFill>
+                  </a:tcPr>
+                </a:tc>
+                <a:tc>
+                  <a:txBody>
+                    <a:bodyPr/>
+                    <a:lstStyle/>
+                    <a:p>
+                      <a:r>
+                        <a:rPr kumimoji="0" lang="en-US" b="0" i="0" kern="1200" dirty="0">
+                          <a:solidFill>
+                            <a:schemeClr val="tx1"/>
+                          </a:solidFill>
+                          <a:effectLst/>
+                          <a:latin typeface="+mn-lt"/>
+                          <a:ea typeface="+mn-ea"/>
+                          <a:cs typeface="+mn-cs"/>
+                        </a:rPr>
+                        <a:t>0xABCDEFEF</a:t>
+                      </a:r>
+                      <a:endParaRPr lang="en-US" dirty="0"/>
+                    </a:p>
+                  </a:txBody>
+                  <a:tcPr>
+                    <a:solidFill>
+                      <a:schemeClr val="bg1"/>
+                    </a:solidFill>
+                  </a:tcPr>
+                </a:tc>
+                <a:tc>
+                  <a:txBody>
+                    <a:bodyPr/>
+                    <a:lstStyle/>
+                    <a:p>
+                      <a:r>
+                        <a:rPr lang="en-US" dirty="0"/>
+                        <a:t>R11</a:t>
+                      </a:r>
+                    </a:p>
+                  </a:txBody>
+                  <a:tcPr>
+                    <a:solidFill>
+                      <a:schemeClr val="bg1"/>
+                    </a:solidFill>
+                  </a:tcPr>
+                </a:tc>
+                <a:tc>
+                  <a:txBody>
+                    <a:bodyPr/>
+                    <a:lstStyle/>
+                    <a:p>
+                      <a:r>
+                        <a:rPr lang="pt-BR" dirty="0"/>
+                        <a:t>0x00503D0B</a:t>
+                      </a:r>
+                      <a:endParaRPr lang="en-US" dirty="0"/>
+                    </a:p>
+                  </a:txBody>
+                  <a:tcPr>
+                    <a:solidFill>
+                      <a:schemeClr val="bg1"/>
+                    </a:solidFill>
+                  </a:tcPr>
+                </a:tc>
+                <a:tc>
+                  <a:txBody>
+                    <a:bodyPr/>
+                    <a:lstStyle/>
+                    <a:p>
+                      <a:r>
+                        <a:rPr lang="en-US" dirty="0"/>
+                        <a:t>R15</a:t>
+                      </a:r>
+                    </a:p>
+                  </a:txBody>
+                  <a:tcPr>
+                    <a:solidFill>
+                      <a:schemeClr val="bg1"/>
+                    </a:solidFill>
+                  </a:tcPr>
+                </a:tc>
+                <a:tc>
+                  <a:txBody>
+                    <a:bodyPr/>
+                    <a:lstStyle/>
+                    <a:p>
+                      <a:r>
+                        <a:rPr lang="pt-BR" dirty="0"/>
+                        <a:t>0x00000250</a:t>
+                      </a:r>
+                      <a:endParaRPr lang="en-US" dirty="0"/>
+                    </a:p>
+                  </a:txBody>
+                  <a:tcPr>
+                    <a:solidFill>
+                      <a:schemeClr val="bg1"/>
+                    </a:solidFill>
+                  </a:tcPr>
+                </a:tc>
+                <a:extLst>
+                  <a:ext uri="{0D108BD9-81ED-4DB2-BD59-A6C34878D82A}">
+                    <a16:rowId xmlns:a16="http://schemas.microsoft.com/office/drawing/2014/main" val="3562356508"/>
+                  </a:ext>
+                </a:extLst>
+              </a:tr>
+            </a:tbl>
+          </a:graphicData>
+        </a:graphic>
+      </p:graphicFrame>
+      <p:graphicFrame>
+        <p:nvGraphicFramePr>
+          <p:cNvPr id="7" name="Content Placeholder 6">
+            <a:extLst>
+              <a:ext uri="{FF2B5EF4-FFF2-40B4-BE49-F238E27FC236}">
+                <a16:creationId xmlns:a16="http://schemas.microsoft.com/office/drawing/2014/main" id="{F05BFDFB-FCA9-9356-1E8B-8D31B2E6CEF7}"/>
+              </a:ext>
+            </a:extLst>
+          </p:cNvPr>
+          <p:cNvGraphicFramePr>
+            <a:graphicFrameLocks/>
+          </p:cNvGraphicFramePr>
+          <p:nvPr>
+            <p:extLst>
+              <p:ext uri="{D42A27DB-BD31-4B8C-83A1-F6EECF244321}">
+                <p14:modId xmlns:p14="http://schemas.microsoft.com/office/powerpoint/2010/main" val="2149899251"/>
+              </p:ext>
+            </p:extLst>
+          </p:nvPr>
+        </p:nvGraphicFramePr>
+        <p:xfrm>
+          <a:off x="457200" y="6448182"/>
+          <a:ext cx="8405417" cy="370840"/>
+        </p:xfrm>
+        <a:graphic>
+          <a:graphicData uri="http://schemas.openxmlformats.org/drawingml/2006/table">
+            <a:tbl>
+              <a:tblPr firstRow="1" bandRow="1">
+                <a:tableStyleId>{5940675A-B579-460E-94D1-54222C63F5DA}</a:tableStyleId>
+              </a:tblPr>
+              <a:tblGrid>
+                <a:gridCol w="1820338">
+                  <a:extLst>
+                    <a:ext uri="{9D8B030D-6E8A-4147-A177-3AD203B41FA5}">
+                      <a16:colId xmlns:a16="http://schemas.microsoft.com/office/drawing/2014/main" val="4041087470"/>
+                    </a:ext>
+                  </a:extLst>
+                </a:gridCol>
+                <a:gridCol w="549956">
+                  <a:extLst>
+                    <a:ext uri="{9D8B030D-6E8A-4147-A177-3AD203B41FA5}">
+                      <a16:colId xmlns:a16="http://schemas.microsoft.com/office/drawing/2014/main" val="475833553"/>
+                    </a:ext>
+                  </a:extLst>
+                </a:gridCol>
+                <a:gridCol w="549956">
+                  <a:extLst>
+                    <a:ext uri="{9D8B030D-6E8A-4147-A177-3AD203B41FA5}">
+                      <a16:colId xmlns:a16="http://schemas.microsoft.com/office/drawing/2014/main" val="3440583969"/>
+                    </a:ext>
+                  </a:extLst>
+                </a:gridCol>
+                <a:gridCol w="549956">
+                  <a:extLst>
+                    <a:ext uri="{9D8B030D-6E8A-4147-A177-3AD203B41FA5}">
+                      <a16:colId xmlns:a16="http://schemas.microsoft.com/office/drawing/2014/main" val="3973726920"/>
+                    </a:ext>
+                  </a:extLst>
+                </a:gridCol>
+                <a:gridCol w="549956">
+                  <a:extLst>
+                    <a:ext uri="{9D8B030D-6E8A-4147-A177-3AD203B41FA5}">
+                      <a16:colId xmlns:a16="http://schemas.microsoft.com/office/drawing/2014/main" val="1099364392"/>
+                    </a:ext>
+                  </a:extLst>
+                </a:gridCol>
+                <a:gridCol w="549956">
+                  <a:extLst>
+                    <a:ext uri="{9D8B030D-6E8A-4147-A177-3AD203B41FA5}">
+                      <a16:colId xmlns:a16="http://schemas.microsoft.com/office/drawing/2014/main" val="598594491"/>
+                    </a:ext>
+                  </a:extLst>
+                </a:gridCol>
+                <a:gridCol w="549956">
+                  <a:extLst>
+                    <a:ext uri="{9D8B030D-6E8A-4147-A177-3AD203B41FA5}">
+                      <a16:colId xmlns:a16="http://schemas.microsoft.com/office/drawing/2014/main" val="3299168853"/>
+                    </a:ext>
+                  </a:extLst>
+                </a:gridCol>
+                <a:gridCol w="549956">
+                  <a:extLst>
+                    <a:ext uri="{9D8B030D-6E8A-4147-A177-3AD203B41FA5}">
+                      <a16:colId xmlns:a16="http://schemas.microsoft.com/office/drawing/2014/main" val="3639377261"/>
+                    </a:ext>
+                  </a:extLst>
+                </a:gridCol>
+                <a:gridCol w="549956">
+                  <a:extLst>
+                    <a:ext uri="{9D8B030D-6E8A-4147-A177-3AD203B41FA5}">
+                      <a16:colId xmlns:a16="http://schemas.microsoft.com/office/drawing/2014/main" val="2095656865"/>
+                    </a:ext>
+                  </a:extLst>
+                </a:gridCol>
+                <a:gridCol w="553389">
+                  <a:extLst>
+                    <a:ext uri="{9D8B030D-6E8A-4147-A177-3AD203B41FA5}">
+                      <a16:colId xmlns:a16="http://schemas.microsoft.com/office/drawing/2014/main" val="2172498307"/>
+                    </a:ext>
+                  </a:extLst>
+                </a:gridCol>
+                <a:gridCol w="549956">
+                  <a:extLst>
+                    <a:ext uri="{9D8B030D-6E8A-4147-A177-3AD203B41FA5}">
+                      <a16:colId xmlns:a16="http://schemas.microsoft.com/office/drawing/2014/main" val="3928751653"/>
+                    </a:ext>
+                  </a:extLst>
+                </a:gridCol>
+                <a:gridCol w="532130">
+                  <a:extLst>
+                    <a:ext uri="{9D8B030D-6E8A-4147-A177-3AD203B41FA5}">
+                      <a16:colId xmlns:a16="http://schemas.microsoft.com/office/drawing/2014/main" val="1178522413"/>
+                    </a:ext>
+                  </a:extLst>
+                </a:gridCol>
+                <a:gridCol w="549956">
+                  <a:extLst>
+                    <a:ext uri="{9D8B030D-6E8A-4147-A177-3AD203B41FA5}">
+                      <a16:colId xmlns:a16="http://schemas.microsoft.com/office/drawing/2014/main" val="4096721898"/>
+                    </a:ext>
+                  </a:extLst>
+                </a:gridCol>
+              </a:tblGrid>
+              <a:tr h="370840">
+                <a:tc>
+                  <a:txBody>
+                    <a:bodyPr/>
+                    <a:lstStyle/>
+                    <a:p>
+                      <a:pPr marL="0" marR="0" lvl="0" indent="0" algn="ctr" defTabSz="914400" rtl="0" eaLnBrk="1" fontAlgn="auto" latinLnBrk="0" hangingPunct="1">
+                        <a:lnSpc>
+                          <a:spcPct val="100000"/>
+                        </a:lnSpc>
+                        <a:spcBef>
+                          <a:spcPts val="0"/>
+                        </a:spcBef>
+                        <a:spcAft>
+                          <a:spcPts val="0"/>
+                        </a:spcAft>
+                        <a:buClrTx/>
+                        <a:buSzTx/>
+                        <a:buFontTx/>
+                        <a:buNone/>
+                        <a:tabLst/>
+                        <a:defRPr/>
+                      </a:pPr>
+                      <a:r>
+                        <a:rPr lang="de-DE" sz="1800" b="0" i="0" kern="1200" dirty="0">
+                          <a:solidFill>
+                            <a:schemeClr val="tx1"/>
+                          </a:solidFill>
+                          <a:effectLst/>
+                          <a:latin typeface="Times New Roman" pitchFamily="18" charset="0"/>
+                          <a:ea typeface="+mn-ea"/>
+                          <a:cs typeface="+mn-cs"/>
+                        </a:rPr>
+                        <a:t>0x10000010</a:t>
+                      </a:r>
+                      <a:endParaRPr lang="en-US" sz="1800" b="0" dirty="0">
+                        <a:latin typeface="Consolas" panose="020B0609020204030204" pitchFamily="49" charset="0"/>
+                        <a:cs typeface="Consolas" panose="020B0609020204030204" pitchFamily="49" charset="0"/>
+                      </a:endParaRPr>
+                    </a:p>
+                  </a:txBody>
+                  <a:tcPr>
+                    <a:solidFill>
+                      <a:schemeClr val="bg1"/>
+                    </a:solidFill>
+                  </a:tcPr>
+                </a:tc>
+                <a:tc>
+                  <a:txBody>
+                    <a:bodyPr/>
+                    <a:lstStyle/>
+                    <a:p>
+                      <a:pPr algn="ctr"/>
+                      <a:r>
+                        <a:rPr lang="en-US" dirty="0"/>
+                        <a:t>FF</a:t>
+                      </a:r>
+                    </a:p>
+                  </a:txBody>
+                  <a:tcPr>
+                    <a:solidFill>
+                      <a:schemeClr val="bg1"/>
+                    </a:solidFill>
+                  </a:tcPr>
+                </a:tc>
+                <a:tc>
+                  <a:txBody>
+                    <a:bodyPr/>
+                    <a:lstStyle/>
+                    <a:p>
+                      <a:pPr marL="0" algn="ctr" rtl="0" eaLnBrk="1" latinLnBrk="0" hangingPunct="1"/>
+                      <a:r>
+                        <a:rPr kumimoji="0" lang="en-US" kern="1200" dirty="0">
+                          <a:solidFill>
+                            <a:schemeClr val="tx1"/>
+                          </a:solidFill>
+                          <a:latin typeface="+mn-lt"/>
+                          <a:ea typeface="+mn-ea"/>
+                          <a:cs typeface="+mn-cs"/>
+                        </a:rPr>
+                        <a:t>EF</a:t>
+                      </a:r>
+                    </a:p>
+                  </a:txBody>
+                  <a:tcPr>
+                    <a:solidFill>
+                      <a:schemeClr val="bg1"/>
+                    </a:solidFill>
+                  </a:tcPr>
+                </a:tc>
+                <a:tc>
+                  <a:txBody>
+                    <a:bodyPr/>
+                    <a:lstStyle/>
+                    <a:p>
+                      <a:pPr marL="0" algn="ctr" rtl="0" eaLnBrk="1" latinLnBrk="0" hangingPunct="1"/>
+                      <a:r>
+                        <a:rPr kumimoji="0" lang="en-US" kern="1200" dirty="0">
+                          <a:solidFill>
+                            <a:schemeClr val="tx1"/>
+                          </a:solidFill>
+                          <a:latin typeface="+mn-lt"/>
+                          <a:ea typeface="+mn-ea"/>
+                          <a:cs typeface="+mn-cs"/>
+                        </a:rPr>
+                        <a:t>CD</a:t>
+                      </a:r>
+                    </a:p>
+                  </a:txBody>
+                  <a:tcPr>
+                    <a:solidFill>
+                      <a:schemeClr val="bg1"/>
+                    </a:solidFill>
+                  </a:tcPr>
+                </a:tc>
+                <a:tc>
+                  <a:txBody>
+                    <a:bodyPr/>
+                    <a:lstStyle/>
+                    <a:p>
+                      <a:pPr marL="0" algn="ctr" rtl="0" eaLnBrk="1" latinLnBrk="0" hangingPunct="1"/>
+                      <a:r>
+                        <a:rPr kumimoji="0" lang="en-US" kern="1200" dirty="0">
+                          <a:solidFill>
+                            <a:schemeClr val="tx1"/>
+                          </a:solidFill>
+                          <a:latin typeface="+mn-lt"/>
+                          <a:ea typeface="+mn-ea"/>
+                          <a:cs typeface="+mn-cs"/>
+                        </a:rPr>
+                        <a:t>AB</a:t>
+                      </a:r>
+                    </a:p>
+                  </a:txBody>
+                  <a:tcPr>
+                    <a:solidFill>
+                      <a:schemeClr val="bg1"/>
+                    </a:solidFill>
+                  </a:tcPr>
+                </a:tc>
+                <a:tc>
+                  <a:txBody>
+                    <a:bodyPr/>
+                    <a:lstStyle/>
+                    <a:p>
+                      <a:pPr marL="0" algn="ctr" rtl="0" eaLnBrk="1" latinLnBrk="0" hangingPunct="1"/>
+                      <a:r>
+                        <a:rPr kumimoji="0" lang="en-US" kern="1200" dirty="0">
+                          <a:solidFill>
+                            <a:schemeClr val="tx1"/>
+                          </a:solidFill>
+                          <a:latin typeface="+mn-lt"/>
+                          <a:ea typeface="+mn-ea"/>
+                          <a:cs typeface="+mn-cs"/>
+                        </a:rPr>
+                        <a:t>00</a:t>
+                      </a:r>
+                    </a:p>
+                  </a:txBody>
+                  <a:tcPr>
+                    <a:solidFill>
+                      <a:schemeClr val="bg1"/>
+                    </a:solidFill>
+                  </a:tcPr>
+                </a:tc>
+                <a:tc>
+                  <a:txBody>
+                    <a:bodyPr/>
+                    <a:lstStyle/>
+                    <a:p>
+                      <a:pPr marL="0" algn="ctr" rtl="0" eaLnBrk="1" latinLnBrk="0" hangingPunct="1"/>
+                      <a:r>
+                        <a:rPr kumimoji="0" lang="en-US" kern="1200" dirty="0">
+                          <a:solidFill>
+                            <a:schemeClr val="tx1"/>
+                          </a:solidFill>
+                          <a:latin typeface="+mn-lt"/>
+                          <a:ea typeface="+mn-ea"/>
+                          <a:cs typeface="+mn-cs"/>
+                        </a:rPr>
+                        <a:t>00</a:t>
+                      </a:r>
+                    </a:p>
+                  </a:txBody>
+                  <a:tcPr>
+                    <a:solidFill>
+                      <a:schemeClr val="bg1"/>
+                    </a:solidFill>
+                  </a:tcPr>
+                </a:tc>
+                <a:tc>
+                  <a:txBody>
+                    <a:bodyPr/>
+                    <a:lstStyle/>
+                    <a:p>
+                      <a:pPr marL="0" algn="ctr" rtl="0" eaLnBrk="1" latinLnBrk="0" hangingPunct="1"/>
+                      <a:r>
+                        <a:rPr kumimoji="0" lang="en-US" kern="1200" dirty="0">
+                          <a:solidFill>
+                            <a:schemeClr val="tx1"/>
+                          </a:solidFill>
+                          <a:latin typeface="+mn-lt"/>
+                          <a:ea typeface="+mn-ea"/>
+                          <a:cs typeface="+mn-cs"/>
+                        </a:rPr>
+                        <a:t>CD</a:t>
+                      </a:r>
+                    </a:p>
+                  </a:txBody>
+                  <a:tcPr>
+                    <a:solidFill>
+                      <a:schemeClr val="bg1"/>
+                    </a:solidFill>
+                  </a:tcPr>
+                </a:tc>
+                <a:tc>
+                  <a:txBody>
+                    <a:bodyPr/>
+                    <a:lstStyle/>
+                    <a:p>
+                      <a:pPr marL="0" algn="ctr" rtl="0" eaLnBrk="1" latinLnBrk="0" hangingPunct="1"/>
+                      <a:r>
+                        <a:rPr kumimoji="0" lang="en-US" kern="1200" dirty="0">
+                          <a:solidFill>
+                            <a:schemeClr val="tx1"/>
+                          </a:solidFill>
+                          <a:latin typeface="+mn-lt"/>
+                          <a:ea typeface="+mn-ea"/>
+                          <a:cs typeface="+mn-cs"/>
+                        </a:rPr>
+                        <a:t>AB</a:t>
+                      </a:r>
+                    </a:p>
+                  </a:txBody>
+                  <a:tcPr>
+                    <a:solidFill>
+                      <a:schemeClr val="bg1"/>
+                    </a:solidFill>
+                  </a:tcPr>
+                </a:tc>
+                <a:tc>
+                  <a:txBody>
+                    <a:bodyPr/>
+                    <a:lstStyle/>
+                    <a:p>
+                      <a:pPr marL="0" algn="ctr" rtl="0" eaLnBrk="1" latinLnBrk="0" hangingPunct="1"/>
+                      <a:r>
+                        <a:rPr kumimoji="0" lang="en-US" kern="1200" dirty="0">
+                          <a:solidFill>
+                            <a:srgbClr val="FF0000"/>
+                          </a:solidFill>
+                          <a:latin typeface="+mn-lt"/>
+                          <a:ea typeface="+mn-ea"/>
+                          <a:cs typeface="+mn-cs"/>
+                        </a:rPr>
+                        <a:t>D0</a:t>
+                      </a:r>
+                    </a:p>
+                  </a:txBody>
+                  <a:tcPr>
+                    <a:solidFill>
+                      <a:schemeClr val="bg1"/>
+                    </a:solidFill>
+                  </a:tcPr>
+                </a:tc>
+                <a:tc>
+                  <a:txBody>
+                    <a:bodyPr/>
+                    <a:lstStyle/>
+                    <a:p>
+                      <a:pPr marL="0" algn="ctr" rtl="0" eaLnBrk="1" latinLnBrk="0" hangingPunct="1"/>
+                      <a:r>
+                        <a:rPr kumimoji="0" lang="en-US" kern="1200" dirty="0">
+                          <a:solidFill>
+                            <a:srgbClr val="FF0000"/>
+                          </a:solidFill>
+                          <a:latin typeface="+mn-lt"/>
+                          <a:ea typeface="+mn-ea"/>
+                          <a:cs typeface="+mn-cs"/>
+                        </a:rPr>
+                        <a:t>BC</a:t>
+                      </a:r>
+                    </a:p>
+                  </a:txBody>
+                  <a:tcPr>
+                    <a:solidFill>
+                      <a:schemeClr val="bg1"/>
+                    </a:solidFill>
+                  </a:tcPr>
+                </a:tc>
+                <a:tc>
+                  <a:txBody>
+                    <a:bodyPr/>
+                    <a:lstStyle/>
+                    <a:p>
+                      <a:pPr marL="0" algn="ctr" rtl="0" eaLnBrk="1" latinLnBrk="0" hangingPunct="1"/>
+                      <a:r>
+                        <a:rPr kumimoji="0" lang="en-US" kern="1200" dirty="0">
+                          <a:solidFill>
+                            <a:srgbClr val="FF0000"/>
+                          </a:solidFill>
+                          <a:latin typeface="+mn-lt"/>
+                          <a:ea typeface="+mn-ea"/>
+                          <a:cs typeface="+mn-cs"/>
+                        </a:rPr>
+                        <a:t>D7</a:t>
+                      </a:r>
+                    </a:p>
+                  </a:txBody>
+                  <a:tcPr>
+                    <a:solidFill>
+                      <a:schemeClr val="bg1"/>
+                    </a:solidFill>
+                  </a:tcPr>
+                </a:tc>
+                <a:tc>
+                  <a:txBody>
+                    <a:bodyPr/>
+                    <a:lstStyle/>
+                    <a:p>
+                      <a:pPr marL="0" algn="ctr" rtl="0" eaLnBrk="1" latinLnBrk="0" hangingPunct="1"/>
+                      <a:r>
+                        <a:rPr kumimoji="0" lang="en-US" kern="1200" dirty="0">
+                          <a:solidFill>
+                            <a:srgbClr val="FF0000"/>
+                          </a:solidFill>
+                          <a:latin typeface="+mn-lt"/>
+                          <a:ea typeface="+mn-ea"/>
+                          <a:cs typeface="+mn-cs"/>
+                        </a:rPr>
+                        <a:t>AB</a:t>
+                      </a:r>
+                    </a:p>
+                  </a:txBody>
+                  <a:tcPr>
+                    <a:solidFill>
+                      <a:schemeClr val="bg1"/>
+                    </a:solidFill>
+                  </a:tcPr>
+                </a:tc>
+                <a:extLst>
+                  <a:ext uri="{0D108BD9-81ED-4DB2-BD59-A6C34878D82A}">
+                    <a16:rowId xmlns:a16="http://schemas.microsoft.com/office/drawing/2014/main" val="3396541759"/>
+                  </a:ext>
+                </a:extLst>
+              </a:tr>
+            </a:tbl>
+          </a:graphicData>
+        </a:graphic>
+      </p:graphicFrame>
+    </p:spTree>
+    <p:extLst>
+      <p:ext uri="{BB962C8B-B14F-4D97-AF65-F5344CB8AC3E}">
+        <p14:creationId xmlns:p14="http://schemas.microsoft.com/office/powerpoint/2010/main" val="357148919"/>
+      </p:ext>
+    </p:extLst>
+  </p:cSld>
+  <p:clrMapOvr>
+    <a:masterClrMapping/>
+  </p:clrMapOvr>
+  <p:transition>
+    <p:pull dir="ru"/>
+  </p:transition>
+</p:sld>
+</file>
+
+<file path=ppt/slides/slide36.xml><?xml version="1.0" encoding="utf-8"?>
 <p:sld xmlns:a="http://schemas.openxmlformats.org/drawingml/2006/main" xmlns:r="http://schemas.openxmlformats.org/officeDocument/2006/relationships" xmlns:p="http://schemas.openxmlformats.org/presentationml/2006/main">
   <p:cSld>
     <p:spTree>
@@ -41603,7 +44491,7 @@
             <a:fld id="{AEE14D4A-FE32-40AF-B06D-E9622816B101}" type="slidenum">
               <a:rPr lang="en-US" smtClean="0"/>
               <a:pPr/>
-              <a:t>35</a:t>
+              <a:t>36</a:t>
             </a:fld>
             <a:endParaRPr lang="en-US"/>
           </a:p>
@@ -41742,6 +44630,184 @@
 </p:sld>
 </file>
 
+<file path=ppt/slides/slide37.xml><?xml version="1.0" encoding="utf-8"?>
+<p:sld xmlns:a="http://schemas.openxmlformats.org/drawingml/2006/main" xmlns:r="http://schemas.openxmlformats.org/officeDocument/2006/relationships" xmlns:p="http://schemas.openxmlformats.org/presentationml/2006/main">
+  <p:cSld>
+    <p:spTree>
+      <p:nvGrpSpPr>
+        <p:cNvPr id="1" name=""/>
+        <p:cNvGrpSpPr/>
+        <p:nvPr/>
+      </p:nvGrpSpPr>
+      <p:grpSpPr>
+        <a:xfrm>
+          <a:off x="0" y="0"/>
+          <a:ext cx="0" cy="0"/>
+          <a:chOff x="0" y="0"/>
+          <a:chExt cx="0" cy="0"/>
+        </a:xfrm>
+      </p:grpSpPr>
+      <p:sp>
+        <p:nvSpPr>
+          <p:cNvPr id="2" name="Title 1">
+            <a:extLst>
+              <a:ext uri="{FF2B5EF4-FFF2-40B4-BE49-F238E27FC236}">
+                <a16:creationId xmlns:a16="http://schemas.microsoft.com/office/drawing/2014/main" id="{FBAE4A07-1EB6-4415-BD27-88FF7AD410F4}"/>
+              </a:ext>
+            </a:extLst>
+          </p:cNvPr>
+          <p:cNvSpPr>
+            <a:spLocks noGrp="1"/>
+          </p:cNvSpPr>
+          <p:nvPr>
+            <p:ph type="title"/>
+          </p:nvPr>
+        </p:nvSpPr>
+        <p:spPr/>
+        <p:txBody>
+          <a:bodyPr/>
+          <a:lstStyle/>
+          <a:p>
+            <a:endParaRPr lang="en-US"/>
+          </a:p>
+        </p:txBody>
+      </p:sp>
+      <p:sp>
+        <p:nvSpPr>
+          <p:cNvPr id="3" name="Slide Number Placeholder 2">
+            <a:extLst>
+              <a:ext uri="{FF2B5EF4-FFF2-40B4-BE49-F238E27FC236}">
+                <a16:creationId xmlns:a16="http://schemas.microsoft.com/office/drawing/2014/main" id="{EB000210-1D57-186B-C183-8C38A3D41243}"/>
+              </a:ext>
+            </a:extLst>
+          </p:cNvPr>
+          <p:cNvSpPr>
+            <a:spLocks noGrp="1"/>
+          </p:cNvSpPr>
+          <p:nvPr>
+            <p:ph type="sldNum" sz="quarter" idx="12"/>
+          </p:nvPr>
+        </p:nvSpPr>
+        <p:spPr/>
+        <p:txBody>
+          <a:bodyPr/>
+          <a:lstStyle/>
+          <a:p>
+            <a:fld id="{AEE14D4A-FE32-40AF-B06D-E9622816B101}" type="slidenum">
+              <a:rPr lang="en-US" smtClean="0"/>
+              <a:pPr/>
+              <a:t>37</a:t>
+            </a:fld>
+            <a:endParaRPr lang="en-US"/>
+          </a:p>
+        </p:txBody>
+      </p:sp>
+      <p:sp>
+        <p:nvSpPr>
+          <p:cNvPr id="4" name="Content Placeholder 3">
+            <a:extLst>
+              <a:ext uri="{FF2B5EF4-FFF2-40B4-BE49-F238E27FC236}">
+                <a16:creationId xmlns:a16="http://schemas.microsoft.com/office/drawing/2014/main" id="{49B47C35-C1C8-8BDF-B4B8-1A999EEC4CDA}"/>
+              </a:ext>
+            </a:extLst>
+          </p:cNvPr>
+          <p:cNvSpPr>
+            <a:spLocks noGrp="1"/>
+          </p:cNvSpPr>
+          <p:nvPr>
+            <p:ph sz="quarter" idx="1"/>
+          </p:nvPr>
+        </p:nvSpPr>
+        <p:spPr/>
+        <p:txBody>
+          <a:bodyPr>
+            <a:normAutofit fontScale="55000" lnSpcReduction="20000"/>
+          </a:bodyPr>
+          <a:lstStyle/>
+          <a:p>
+            <a:endParaRPr lang="en-US" dirty="0"/>
+          </a:p>
+          <a:p>
+            <a:r>
+              <a:rPr lang="en-US" dirty="0"/>
+              <a:t>### Final state</a:t>
+            </a:r>
+          </a:p>
+          <a:p>
+            <a:r>
+              <a:rPr lang="en-US" dirty="0"/>
+              <a:t>- Registers: R0=0xABCDEFFF, R1=0x10000010, R2=0xABCDEFFF, R3=0xABCD0000, R4=0x00000000, R5=0x00000001, R6=0x00000010, R7=0xABCDEFEF, R8=0x00000000, R9=0x000ABCD0, R10=0xD0BC0A00, R11=0x00503D0B, R12=0xABD7BCD0 (SP/LR/PC values as shown on slide).[1]</a:t>
+            </a:r>
+          </a:p>
+          <a:p>
+            <a:r>
+              <a:rPr lang="en-US" dirty="0"/>
+              <a:t>- Memory at 0x10000018..1B holds D0 BC D7 AB after the final STR, replacing the prior contents at that location.[1]</a:t>
+            </a:r>
+          </a:p>
+          <a:p>
+            <a:endParaRPr lang="en-US" dirty="0"/>
+          </a:p>
+          <a:p>
+            <a:r>
+              <a:rPr lang="en-US" dirty="0"/>
+              <a:t>### Notes on flags</a:t>
+            </a:r>
+          </a:p>
+          <a:p>
+            <a:r>
+              <a:rPr lang="en-US" dirty="0"/>
+              <a:t>- CMP R2,R3 → NZCV = 0010 because R2 &gt; R3 in unsigned comparison semantics used by CMP on 32‑bit registers without carry‑in.[1]</a:t>
+            </a:r>
+          </a:p>
+          <a:p>
+            <a:r>
+              <a:rPr lang="en-US" dirty="0"/>
+              <a:t>- SUBS R4,R2,R0 → NZCV = 0110 because the result is zero and subtraction of equal values sets carry and clears negative and overflow.[1]</a:t>
+            </a:r>
+          </a:p>
+          <a:p>
+            <a:r>
+              <a:rPr lang="en-US" dirty="0"/>
+              <a:t>- ANDS R8,R7,R6 → NZCV = 0110 because the logical AND produced zero, and the carry reflects the shifter carry (preserved as 1 here).[1]</a:t>
+            </a:r>
+          </a:p>
+          <a:p>
+            <a:r>
+              <a:rPr lang="en-US" dirty="0"/>
+              <a:t>- ADDS R12,R3,R9 → NZCV = 1000 because the sum has the top bit set (negative in signed sense), is non‑zero, and does not generate carry or overflow for these operands.[1]</a:t>
+            </a:r>
+          </a:p>
+          <a:p>
+            <a:endParaRPr lang="en-US" dirty="0"/>
+          </a:p>
+          <a:p>
+            <a:r>
+              <a:rPr lang="en-US" dirty="0"/>
+              <a:t>[1](https://ppl-ai-file-upload.s3.amazonaws.com/web/direct-files/attachments/92151853/9bb8709e-91bd-4f63-b04b-355b383085cb/Ch5_ARM_Load_Store_Exercises_ANS.pdf)</a:t>
+            </a:r>
+          </a:p>
+          <a:p>
+            <a:endParaRPr lang="en-US" dirty="0"/>
+          </a:p>
+        </p:txBody>
+      </p:sp>
+    </p:spTree>
+    <p:extLst>
+      <p:ext uri="{BB962C8B-B14F-4D97-AF65-F5344CB8AC3E}">
+        <p14:creationId xmlns:p14="http://schemas.microsoft.com/office/powerpoint/2010/main" val="619272312"/>
+      </p:ext>
+    </p:extLst>
+  </p:cSld>
+  <p:clrMapOvr>
+    <a:masterClrMapping/>
+  </p:clrMapOvr>
+  <p:transition>
+    <p:pull dir="ru"/>
+  </p:transition>
+</p:sld>
+</file>
+
 <file path=ppt/slides/slide4.xml><?xml version="1.0" encoding="utf-8"?>
 <p:sld xmlns:a="http://schemas.openxmlformats.org/drawingml/2006/main" xmlns:r="http://schemas.openxmlformats.org/officeDocument/2006/relationships" xmlns:p="http://schemas.openxmlformats.org/presentationml/2006/main">
   <p:cSld>
@@ -41774,10 +44840,6 @@
           <a:bodyPr/>
           <a:lstStyle/>
           <a:p>
-            <a:r>
-              <a:rPr lang="en-US" dirty="0"/>
-              <a:t>Question: </a:t>
-            </a:r>
             <a:r>
               <a:rPr lang="en-US" altLang="zh-CN" dirty="0"/>
               <a:t>Endianness</a:t>
@@ -43451,12 +46513,8 @@
           <a:lstStyle/>
           <a:p>
             <a:r>
-              <a:rPr lang="en-US" dirty="0"/>
-              <a:t>Answer: </a:t>
-            </a:r>
-            <a:r>
               <a:rPr lang="en-US" altLang="zh-CN" dirty="0"/>
-              <a:t>Endianness</a:t>
+              <a:t>Endianness ANS</a:t>
             </a:r>
             <a:endParaRPr lang="en-US" dirty="0"/>
           </a:p>
@@ -45562,7 +48620,7 @@
             <a:pPr defTabSz="938213"/>
             <a:r>
               <a:rPr lang="en-US" altLang="zh-CN" dirty="0"/>
-              <a:t>Question: Endianness</a:t>
+              <a:t>Endianness</a:t>
             </a:r>
             <a:endParaRPr lang="en-US" dirty="0"/>
           </a:p>
@@ -46957,7 +50015,7 @@
             <a:pPr defTabSz="938213"/>
             <a:r>
               <a:rPr lang="en-US" altLang="zh-CN" dirty="0"/>
-              <a:t>Answer: Endianness</a:t>
+              <a:t>Endianness ANS</a:t>
             </a:r>
             <a:endParaRPr lang="en-US" dirty="0"/>
           </a:p>
